--- a/WebProgramming/6.Termin/state-management-react.pptx
+++ b/WebProgramming/6.Termin/state-management-react.pptx
@@ -4,6 +4,9 @@
   <p:sldMasterIdLst>
     <p:sldMasterId id="2147483648" r:id="rId1"/>
   </p:sldMasterIdLst>
+  <p:notesMasterIdLst>
+    <p:notesMasterId r:id="rId17"/>
+  </p:notesMasterIdLst>
   <p:sldIdLst>
     <p:sldId id="256" r:id="rId2"/>
     <p:sldId id="257" r:id="rId3"/>
@@ -21,10 +24,7 @@
     <p:sldId id="269" r:id="rId15"/>
     <p:sldId id="270" r:id="rId16"/>
   </p:sldIdLst>
-  <p:notesMasterIdLst>
-    <p:notesMasterId r:id="rId17"/>
-  </p:notesMasterIdLst>
-  <p:sldSz cx="9144000" cy="5143500"/>
+  <p:sldSz cx="9144000" cy="5143500" type="screen16x9"/>
   <p:notesSz cx="5143500" cy="9144000"/>
   <p:defaultTextStyle>
     <a:lvl1pPr marL="0" algn="l" defTabSz="914400" rtl="0" eaLnBrk="1" latinLnBrk="0" hangingPunct="1">
@@ -118,6 +118,11 @@
       </a:defRPr>
     </a:lvl9pPr>
   </p:defaultTextStyle>
+  <p:extLst>
+    <p:ext uri="{EFAFB233-063F-42B5-8137-9DF3F51BA10A}">
+      <p15:sldGuideLst xmlns:p15="http://schemas.microsoft.com/office/powerpoint/2012/main"/>
+    </p:ext>
+  </p:extLst>
 </p:presentation>
 </file>
 
@@ -143,234 +148,10 @@
           <a:chExt cx="0" cy="0"/>
         </a:xfrm>
       </p:grpSpPr>
-      <p:sp>
-        <p:nvSpPr>
-          <p:cNvPr id="2" name="Header Placeholder 1"/>
-          <p:cNvSpPr>
-            <a:spLocks noGrp="1"/>
-          </p:cNvSpPr>
-          <p:nvPr>
-            <p:ph type="hdr" sz="quarter"/>
-          </p:nvPr>
-        </p:nvSpPr>
-        <p:spPr>
-          <a:xfrm>
-            <a:off x="0" y="0"/>
-            <a:ext cx="2971800" cy="458788"/>
-          </a:xfrm>
-          <a:prstGeom prst="rect">
-            <a:avLst/>
-          </a:prstGeom>
-        </p:spPr>
-        <p:txBody>
-          <a:bodyPr vert="horz" lIns="91440" tIns="45720" rIns="91440" bIns="45720" rtlCol="0"/>
-          <a:lstStyle>
-            <a:lvl1pPr algn="l">
-              <a:defRPr sz="1200"/>
-            </a:lvl1pPr>
-          </a:lstStyle>
-          <a:p>
-            <a:endParaRPr lang="en-US"/>
-          </a:p>
-        </p:txBody>
-      </p:sp>
-      <p:sp>
-        <p:nvSpPr>
-          <p:cNvPr id="3" name="Date Placeholder 2"/>
-          <p:cNvSpPr>
-            <a:spLocks noGrp="1"/>
-          </p:cNvSpPr>
-          <p:nvPr>
-            <p:ph type="dt" idx="1"/>
-          </p:nvPr>
-        </p:nvSpPr>
-        <p:spPr>
-          <a:xfrm>
-            <a:off x="3884613" y="0"/>
-            <a:ext cx="2971800" cy="458788"/>
-          </a:xfrm>
-          <a:prstGeom prst="rect">
-            <a:avLst/>
-          </a:prstGeom>
-        </p:spPr>
-        <p:txBody>
-          <a:bodyPr vert="horz" lIns="91440" tIns="45720" rIns="91440" bIns="45720" rtlCol="0"/>
-          <a:lstStyle>
-            <a:lvl1pPr algn="r">
-              <a:defRPr sz="1200"/>
-            </a:lvl1pPr>
-          </a:lstStyle>
-          <a:p>
-            <a:fld id="{5282F153-3F37-0F45-9E97-73ACFA13230C}" type="datetimeFigureOut">
-              <a:rPr lang="en-US"/>
-              <a:t>7/23/19</a:t>
-            </a:fld>
-            <a:endParaRPr lang="en-US"/>
-          </a:p>
-        </p:txBody>
-      </p:sp>
-      <p:sp>
-        <p:nvSpPr>
-          <p:cNvPr id="4" name="Slide Image Placeholder 3"/>
-          <p:cNvSpPr>
-            <a:spLocks noGrp="1" noRot="1" noChangeAspect="1"/>
-          </p:cNvSpPr>
-          <p:nvPr>
-            <p:ph type="sldImg" idx="2"/>
-          </p:nvPr>
-        </p:nvSpPr>
-        <p:spPr>
-          <a:xfrm>
-            <a:off x="685800" y="1143000"/>
-            <a:ext cx="5486400" cy="3086100"/>
-          </a:xfrm>
-          <a:prstGeom prst="rect">
-            <a:avLst/>
-          </a:prstGeom>
-          <a:noFill/>
-          <a:ln w="12700">
-            <a:solidFill>
-              <a:prstClr val="black"/>
-            </a:solidFill>
-          </a:ln>
-        </p:spPr>
-        <p:txBody>
-          <a:bodyPr vert="horz" lIns="91440" tIns="45720" rIns="91440" bIns="45720" rtlCol="0" anchor="ctr"/>
-          <a:lstStyle/>
-          <a:p>
-            <a:endParaRPr lang="en-US"/>
-          </a:p>
-        </p:txBody>
-      </p:sp>
-      <p:sp>
-        <p:nvSpPr>
-          <p:cNvPr id="5" name="Notes Placeholder 4"/>
-          <p:cNvSpPr>
-            <a:spLocks noGrp="1"/>
-          </p:cNvSpPr>
-          <p:nvPr>
-            <p:ph type="body" sz="quarter" idx="3"/>
-          </p:nvPr>
-        </p:nvSpPr>
-        <p:spPr>
-          <a:xfrm>
-            <a:off x="685800" y="4400550"/>
-            <a:ext cx="5486400" cy="3600450"/>
-          </a:xfrm>
-          <a:prstGeom prst="rect">
-            <a:avLst/>
-          </a:prstGeom>
-        </p:spPr>
-        <p:txBody>
-          <a:bodyPr vert="horz" lIns="91440" tIns="45720" rIns="91440" bIns="45720" rtlCol="0"/>
-          <a:lstStyle/>
-          <a:p>
-            <a:pPr lvl="0"/>
-            <a:r>
-              <a:rPr lang="en-US"/>
-              <a:t>Click to edit Master text styles</a:t>
-            </a:r>
-          </a:p>
-          <a:p>
-            <a:pPr lvl="1"/>
-            <a:r>
-              <a:rPr lang="en-US"/>
-              <a:t>Second level</a:t>
-            </a:r>
-          </a:p>
-          <a:p>
-            <a:pPr lvl="2"/>
-            <a:r>
-              <a:rPr lang="en-US"/>
-              <a:t>Third level</a:t>
-            </a:r>
-          </a:p>
-          <a:p>
-            <a:pPr lvl="3"/>
-            <a:r>
-              <a:rPr lang="en-US"/>
-              <a:t>Fourth level</a:t>
-            </a:r>
-          </a:p>
-          <a:p>
-            <a:pPr lvl="4"/>
-            <a:r>
-              <a:rPr lang="en-US"/>
-              <a:t>Fifth level</a:t>
-            </a:r>
-          </a:p>
-        </p:txBody>
-      </p:sp>
-      <p:sp>
-        <p:nvSpPr>
-          <p:cNvPr id="6" name="Footer Placeholder 5"/>
-          <p:cNvSpPr>
-            <a:spLocks noGrp="1"/>
-          </p:cNvSpPr>
-          <p:nvPr>
-            <p:ph type="ftr" sz="quarter" idx="4"/>
-          </p:nvPr>
-        </p:nvSpPr>
-        <p:spPr>
-          <a:xfrm>
-            <a:off x="0" y="8685213"/>
-            <a:ext cx="2971800" cy="458787"/>
-          </a:xfrm>
-          <a:prstGeom prst="rect">
-            <a:avLst/>
-          </a:prstGeom>
-        </p:spPr>
-        <p:txBody>
-          <a:bodyPr vert="horz" lIns="91440" tIns="45720" rIns="91440" bIns="45720" rtlCol="0" anchor="b"/>
-          <a:lstStyle>
-            <a:lvl1pPr algn="l">
-              <a:defRPr sz="1200"/>
-            </a:lvl1pPr>
-          </a:lstStyle>
-          <a:p>
-            <a:endParaRPr lang="en-US"/>
-          </a:p>
-        </p:txBody>
-      </p:sp>
-      <p:sp>
-        <p:nvSpPr>
-          <p:cNvPr id="7" name="Slide Number Placeholder 6"/>
-          <p:cNvSpPr>
-            <a:spLocks noGrp="1"/>
-          </p:cNvSpPr>
-          <p:nvPr>
-            <p:ph type="sldNum" sz="quarter" idx="5"/>
-          </p:nvPr>
-        </p:nvSpPr>
-        <p:spPr>
-          <a:xfrm>
-            <a:off x="3884613" y="8685213"/>
-            <a:ext cx="2971800" cy="458787"/>
-          </a:xfrm>
-          <a:prstGeom prst="rect">
-            <a:avLst/>
-          </a:prstGeom>
-        </p:spPr>
-        <p:txBody>
-          <a:bodyPr vert="horz" lIns="91440" tIns="45720" rIns="91440" bIns="45720" rtlCol="0" anchor="b"/>
-          <a:lstStyle>
-            <a:lvl1pPr algn="r">
-              <a:defRPr sz="1200"/>
-            </a:lvl1pPr>
-          </a:lstStyle>
-          <a:p>
-            <a:fld id="{CE5E9CC1-C706-0F49-92D6-E571CC5EEA8F}" type="slidenum">
-              <a:rPr lang="en-US"/>
-              <a:t>‹#›</a:t>
-            </a:fld>
-            <a:endParaRPr lang="en-US"/>
-          </a:p>
-        </p:txBody>
-      </p:sp>
     </p:spTree>
     <p:extLst>
       <p:ext uri="{BB962C8B-B14F-4D97-AF65-F5344CB8AC3E}">
-        <p14:creationId xmlns:p14="http://schemas.microsoft.com/office/powerpoint/2010/main" val="1024086991"/>
+        <p14:creationId xmlns:p14="http://schemas.microsoft.com/office/powerpoint/2010/main" val="267639306"/>
       </p:ext>
     </p:extLst>
   </p:cSld>
@@ -514,10 +295,6 @@
           <a:bodyPr/>
           <a:lstStyle/>
           <a:p>
-            <a:r>
-              <a:rPr lang="en-US" dirty="0"/>
-              <a:t/>
-            </a:r>
             <a:endParaRPr lang="en-US" dirty="0"/>
           </a:p>
         </p:txBody>
@@ -606,7 +383,6 @@
               <a:rPr lang="en-US" dirty="0"/>
               <a:t>Links seht ihr Prop Drilling – der User wird durch jede Ebene gereicht. Rechts Context – der Provider wrapped alles und Avatar greift direkt zu. Layout und Sidebar müssen nichts weiterreichen.</a:t>
             </a:r>
-            <a:endParaRPr lang="en-US" dirty="0"/>
           </a:p>
         </p:txBody>
       </p:sp>
@@ -694,7 +470,6 @@
               <a:rPr lang="en-US" dirty="0"/>
               <a:t>Aber Context hat auch Grenzen. Erstens: Jede Änderung am Context-Wert rendert ALLE Consumer neu. Zweitens: Für schnelle Updates wie Slider oder Drag and Drop ist es zu langsam. Drittens: Viele Contexts führen zu Provider Hell. Trotzdem perfekt für Sachen die sich selten ändern: Theme, Auth, Sprache.</a:t>
             </a:r>
-            <a:endParaRPr lang="en-US" dirty="0"/>
           </a:p>
         </p:txBody>
       </p:sp>
@@ -782,7 +557,6 @@
               <a:rPr lang="en-US" dirty="0"/>
               <a:t>Wenn Context nicht reicht, gibt es externe Libraries. Redux ist der Klassiker – mächtig aber viel Boilerplate. Redux Toolkit macht das besser. Zustand ist der moderne Trend – minimale API, kein Provider nötig, und trotzdem volle Kontrolle. Hier seht ihr wie einfach ein Zustand-Store aussieht.</a:t>
             </a:r>
-            <a:endParaRPr lang="en-US" dirty="0"/>
           </a:p>
         </p:txBody>
       </p:sp>
@@ -870,7 +644,6 @@
               <a:rPr lang="en-US" dirty="0"/>
               <a:t>Hier nochmal im Überblick: useState für einfache lokale Werte. useReducer wenn die Logik komplex wird. Context für globalen State der sich selten ändert. Redux für große Enterprise Apps. Zustand als moderner Standard. Faustregel: Starte einfach und skaliere bei Bedarf.</a:t>
             </a:r>
-            <a:endParaRPr lang="en-US" dirty="0"/>
           </a:p>
         </p:txBody>
       </p:sp>
@@ -958,7 +731,6 @@
               <a:rPr lang="en-US" dirty="0"/>
               <a:t>Das sind die 6 Takeaways. State Management muss nicht kompliziert sein – starte mit useState, erweitere schrittweise wenn nötig, und wähle das richtige Tool für den Job.</a:t>
             </a:r>
-            <a:endParaRPr lang="en-US" dirty="0"/>
           </a:p>
         </p:txBody>
       </p:sp>
@@ -1046,7 +818,6 @@
               <a:rPr lang="en-US" dirty="0"/>
               <a:t>Danke fürs Zuhören! Gerne Fragen.</a:t>
             </a:r>
-            <a:endParaRPr lang="en-US" dirty="0"/>
           </a:p>
         </p:txBody>
       </p:sp>
@@ -1134,7 +905,6 @@
               <a:rPr lang="en-US" dirty="0"/>
               <a:t>Hier ist der Überblick – wir starten mit dem Problem, gehen durch die React-eigenen Lösungen, und schauen uns am Ende kurz externe Libs an.</a:t>
             </a:r>
-            <a:endParaRPr lang="en-US" dirty="0"/>
           </a:p>
         </p:txBody>
       </p:sp>
@@ -1222,7 +992,6 @@
               <a:rPr lang="en-US" dirty="0"/>
               <a:t>State sind die Daten die sich ändern während die App läuft. Das kann alles sein – User-Input, API-Daten, ob ein Modal offen ist. Die Frage ist: Wie verwalten wir das, besonders wenn mehrere Komponenten den gleichen State brauchen?</a:t>
             </a:r>
-            <a:endParaRPr lang="en-US" dirty="0"/>
           </a:p>
         </p:txBody>
       </p:sp>
@@ -1310,7 +1079,6 @@
               <a:rPr lang="en-US" dirty="0"/>
               <a:t>Prop Drilling heißt: Wir reichen Props durch jede Ebene der Komponentenhierarchie. Layout und Sidebar brauchen den User gar nicht – sie geben ihn nur weiter. Bei 2-3 Ebenen geht das noch, aber bei einer großen App wird das schnell zum Problem.</a:t>
             </a:r>
-            <a:endParaRPr lang="en-US" dirty="0"/>
           </a:p>
         </p:txBody>
       </p:sp>
@@ -1398,7 +1166,6 @@
               <a:rPr lang="en-US" dirty="0"/>
               <a:t>Kurzer Recap: useState kennt ihr ja schon. Einfach, intuitiv, perfekt für lokalen State. Aber es hat Grenzen – wenn mehrere States zusammengehören oder global gebraucht werden.</a:t>
             </a:r>
-            <a:endParaRPr lang="en-US" dirty="0"/>
           </a:p>
         </p:txBody>
       </p:sp>
@@ -1486,7 +1253,6 @@
               <a:rPr lang="en-US" dirty="0"/>
               <a:t>Hier seht ihr das Problem konkret: Wir haben 3 States die zusammengehören – items, loading, error. Bei jedem Fetch müssen wir alle 3 manuell setzen. Das vergisst man leicht und es wird unübersichtlich.</a:t>
             </a:r>
-            <a:endParaRPr lang="en-US" dirty="0"/>
           </a:p>
         </p:txBody>
       </p:sp>
@@ -1574,7 +1340,6 @@
               <a:rPr lang="en-US" dirty="0"/>
               <a:t>useReducer löst genau das. Es hat 3 Teile: State ist ein Objekt mit allem Zustand. Action ist ein Zettel der sagt was passieren soll. Und der Reducer ist die Funktion mit den Regeln – er nimmt den alten State plus die Action und gibt den neuen State zurück.</a:t>
             </a:r>
-            <a:endParaRPr lang="en-US" dirty="0"/>
           </a:p>
         </p:txBody>
       </p:sp>
@@ -1662,7 +1427,6 @@
               <a:rPr lang="en-US" dirty="0"/>
               <a:t>So sieht das konkret aus. Der Reducer hat einen switch-case für jeden Action-Type. fetch_start setzt loading auf true und error auf null – in einem Schritt, keine Chance was zu vergessen. fetch_success setzt die Items und loading false. Alles konsistent.</a:t>
             </a:r>
-            <a:endParaRPr lang="en-US" dirty="0"/>
           </a:p>
         </p:txBody>
       </p:sp>
@@ -1750,7 +1514,6 @@
               <a:rPr lang="en-US" dirty="0"/>
               <a:t>Context API löst das Prop Drilling Problem. In 3 Schritten: Erst einen Context erstellen, dann den Provider um die App wrappen mit dem Wert, und dann kann jede Komponente egal wie tief verschachtelt mit useContext direkt auf den Wert zugreifen.</a:t>
             </a:r>
-            <a:endParaRPr lang="en-US" dirty="0"/>
           </a:p>
         </p:txBody>
       </p:sp>
@@ -1823,6 +1586,11 @@
 <file path=ppt/slideMasters/slideMaster1.xml><?xml version="1.0" encoding="utf-8"?>
 <p:sldMaster xmlns:a="http://schemas.openxmlformats.org/drawingml/2006/main" xmlns:r="http://schemas.openxmlformats.org/officeDocument/2006/relationships" xmlns:p="http://schemas.openxmlformats.org/presentationml/2006/main">
   <p:cSld>
+    <p:bg>
+      <p:bgRef idx="1001">
+        <a:schemeClr val="bg1"/>
+      </p:bgRef>
+    </p:bg>
     <p:spTree>
       <p:nvGrpSpPr>
         <p:cNvPr id="1" name=""/>
@@ -2105,6 +1873,7 @@
         <a:solidFill>
           <a:srgbClr val="0F1729"/>
         </a:solidFill>
+        <a:effectLst/>
       </p:bgPr>
     </p:bg>
     <p:spTree>
@@ -2142,6 +1911,13 @@
           </a:solidFill>
           <a:ln/>
         </p:spPr>
+        <p:txBody>
+          <a:bodyPr/>
+          <a:lstStyle/>
+          <a:p>
+            <a:endParaRPr lang="en-US"/>
+          </a:p>
+        </p:txBody>
       </p:sp>
       <p:sp>
         <p:nvSpPr>
@@ -2164,6 +1940,13 @@
           </a:solidFill>
           <a:ln/>
         </p:spPr>
+        <p:txBody>
+          <a:bodyPr/>
+          <a:lstStyle/>
+          <a:p>
+            <a:endParaRPr lang="en-US"/>
+          </a:p>
+        </p:txBody>
       </p:sp>
       <p:sp>
         <p:nvSpPr>
@@ -2186,7 +1969,7 @@
           <a:bodyPr wrap="square" lIns="0" tIns="0" rIns="0" bIns="0" rtlCol="0" anchor="ctr"/>
           <a:lstStyle/>
           <a:p>
-            <a:pPr indent="0" marL="0">
+            <a:pPr marL="0" indent="0">
               <a:buNone/>
             </a:pPr>
             <a:r>
@@ -2225,7 +2008,7 @@
           <a:bodyPr wrap="square" lIns="0" tIns="0" rIns="0" bIns="0" rtlCol="0" anchor="ctr"/>
           <a:lstStyle/>
           <a:p>
-            <a:pPr indent="0" marL="0">
+            <a:pPr marL="0" indent="0">
               <a:buNone/>
             </a:pPr>
             <a:r>
@@ -2262,6 +2045,13 @@
           </a:solidFill>
           <a:ln/>
         </p:spPr>
+        <p:txBody>
+          <a:bodyPr/>
+          <a:lstStyle/>
+          <a:p>
+            <a:endParaRPr lang="en-US"/>
+          </a:p>
+        </p:txBody>
       </p:sp>
       <p:sp>
         <p:nvSpPr>
@@ -2284,7 +2074,7 @@
           <a:bodyPr wrap="square" lIns="0" tIns="0" rIns="0" bIns="0" rtlCol="0" anchor="ctr"/>
           <a:lstStyle/>
           <a:p>
-            <a:pPr indent="0" marL="0">
+            <a:pPr marL="0" indent="0">
               <a:buNone/>
             </a:pPr>
             <a:r>
@@ -2304,14 +2094,14 @@
       </p:sp>
       <p:pic>
         <p:nvPicPr>
-          <p:cNvPr id="8" name="Image 0" descr="preencoded.png">    </p:cNvPr>
+          <p:cNvPr id="8" name="Image 0" descr="preencoded.png"/>
           <p:cNvPicPr>
             <a:picLocks noChangeAspect="1"/>
           </p:cNvPicPr>
           <p:nvPr/>
         </p:nvPicPr>
         <p:blipFill>
-          <a:blip r:embed="rId1"/>
+          <a:blip r:embed="rId3"/>
           <a:stretch>
             <a:fillRect/>
           </a:stretch>
@@ -2342,6 +2132,7 @@
         <a:solidFill>
           <a:srgbClr val="0F1729"/>
         </a:solidFill>
+        <a:effectLst/>
       </p:bgPr>
     </p:bg>
     <p:spTree>
@@ -2379,7 +2170,7 @@
           <a:bodyPr wrap="square" lIns="0" tIns="0" rIns="0" bIns="0" rtlCol="0" anchor="ctr"/>
           <a:lstStyle/>
           <a:p>
-            <a:pPr indent="0" marL="0">
+            <a:pPr marL="0" indent="0">
               <a:buNone/>
             </a:pPr>
             <a:r>
@@ -2416,6 +2207,13 @@
           </a:solidFill>
           <a:ln/>
         </p:spPr>
+        <p:txBody>
+          <a:bodyPr/>
+          <a:lstStyle/>
+          <a:p>
+            <a:endParaRPr lang="en-US"/>
+          </a:p>
+        </p:txBody>
       </p:sp>
       <p:sp>
         <p:nvSpPr>
@@ -2438,7 +2236,7 @@
           <a:bodyPr wrap="square" lIns="0" tIns="0" rIns="0" bIns="0" rtlCol="0" anchor="ctr"/>
           <a:lstStyle/>
           <a:p>
-            <a:pPr algn="ctr" indent="0" marL="0">
+            <a:pPr marL="0" indent="0" algn="ctr">
               <a:buNone/>
             </a:pPr>
             <a:r>
@@ -2477,6 +2275,13 @@
           </a:solidFill>
           <a:ln/>
         </p:spPr>
+        <p:txBody>
+          <a:bodyPr/>
+          <a:lstStyle/>
+          <a:p>
+            <a:endParaRPr lang="en-US"/>
+          </a:p>
+        </p:txBody>
       </p:sp>
       <p:sp>
         <p:nvSpPr>
@@ -2499,7 +2304,7 @@
           <a:bodyPr wrap="square" lIns="0" tIns="0" rIns="0" bIns="0" rtlCol="0" anchor="ctr"/>
           <a:lstStyle/>
           <a:p>
-            <a:pPr algn="ctr" indent="0" marL="0">
+            <a:pPr marL="0" indent="0" algn="ctr">
               <a:buNone/>
             </a:pPr>
             <a:r>
@@ -2539,6 +2344,13 @@
             <a:prstDash val="solid"/>
           </a:ln>
         </p:spPr>
+        <p:txBody>
+          <a:bodyPr/>
+          <a:lstStyle/>
+          <a:p>
+            <a:endParaRPr lang="en-US"/>
+          </a:p>
+        </p:txBody>
       </p:sp>
       <p:sp>
         <p:nvSpPr>
@@ -2561,6 +2373,13 @@
           </a:solidFill>
           <a:ln/>
         </p:spPr>
+        <p:txBody>
+          <a:bodyPr/>
+          <a:lstStyle/>
+          <a:p>
+            <a:endParaRPr lang="en-US"/>
+          </a:p>
+        </p:txBody>
       </p:sp>
       <p:sp>
         <p:nvSpPr>
@@ -2583,7 +2402,7 @@
           <a:bodyPr wrap="square" lIns="0" tIns="0" rIns="0" bIns="0" rtlCol="0" anchor="ctr"/>
           <a:lstStyle/>
           <a:p>
-            <a:pPr algn="ctr" indent="0" marL="0">
+            <a:pPr marL="0" indent="0" algn="ctr">
               <a:buNone/>
             </a:pPr>
             <a:r>
@@ -2623,6 +2442,13 @@
             <a:prstDash val="solid"/>
           </a:ln>
         </p:spPr>
+        <p:txBody>
+          <a:bodyPr/>
+          <a:lstStyle/>
+          <a:p>
+            <a:endParaRPr lang="en-US"/>
+          </a:p>
+        </p:txBody>
       </p:sp>
       <p:sp>
         <p:nvSpPr>
@@ -2645,6 +2471,13 @@
           </a:solidFill>
           <a:ln/>
         </p:spPr>
+        <p:txBody>
+          <a:bodyPr/>
+          <a:lstStyle/>
+          <a:p>
+            <a:endParaRPr lang="en-US"/>
+          </a:p>
+        </p:txBody>
       </p:sp>
       <p:sp>
         <p:nvSpPr>
@@ -2667,7 +2500,7 @@
           <a:bodyPr wrap="square" lIns="0" tIns="0" rIns="0" bIns="0" rtlCol="0" anchor="ctr"/>
           <a:lstStyle/>
           <a:p>
-            <a:pPr algn="ctr" indent="0" marL="0">
+            <a:pPr marL="0" indent="0" algn="ctr">
               <a:buNone/>
             </a:pPr>
             <a:r>
@@ -2707,6 +2540,13 @@
             <a:prstDash val="solid"/>
           </a:ln>
         </p:spPr>
+        <p:txBody>
+          <a:bodyPr/>
+          <a:lstStyle/>
+          <a:p>
+            <a:endParaRPr lang="en-US"/>
+          </a:p>
+        </p:txBody>
       </p:sp>
       <p:sp>
         <p:nvSpPr>
@@ -2729,6 +2569,13 @@
           </a:solidFill>
           <a:ln/>
         </p:spPr>
+        <p:txBody>
+          <a:bodyPr/>
+          <a:lstStyle/>
+          <a:p>
+            <a:endParaRPr lang="en-US"/>
+          </a:p>
+        </p:txBody>
       </p:sp>
       <p:sp>
         <p:nvSpPr>
@@ -2751,7 +2598,7 @@
           <a:bodyPr wrap="square" lIns="0" tIns="0" rIns="0" bIns="0" rtlCol="0" anchor="ctr"/>
           <a:lstStyle/>
           <a:p>
-            <a:pPr algn="ctr" indent="0" marL="0">
+            <a:pPr marL="0" indent="0" algn="ctr">
               <a:buNone/>
             </a:pPr>
             <a:r>
@@ -2790,7 +2637,7 @@
           <a:bodyPr wrap="square" lIns="0" tIns="0" rIns="0" bIns="0" rtlCol="0" anchor="ctr"/>
           <a:lstStyle/>
           <a:p>
-            <a:pPr algn="ctr" indent="0" marL="0">
+            <a:pPr marL="0" indent="0" algn="ctr">
               <a:buNone/>
             </a:pPr>
             <a:r>
@@ -2829,6 +2676,13 @@
           </a:solidFill>
           <a:ln/>
         </p:spPr>
+        <p:txBody>
+          <a:bodyPr/>
+          <a:lstStyle/>
+          <a:p>
+            <a:endParaRPr lang="en-US"/>
+          </a:p>
+        </p:txBody>
       </p:sp>
       <p:sp>
         <p:nvSpPr>
@@ -2851,7 +2705,7 @@
           <a:bodyPr wrap="square" lIns="0" tIns="0" rIns="0" bIns="0" rtlCol="0" anchor="ctr"/>
           <a:lstStyle/>
           <a:p>
-            <a:pPr algn="ctr" indent="0" marL="0">
+            <a:pPr marL="0" indent="0" algn="ctr">
               <a:buNone/>
             </a:pPr>
             <a:r>
@@ -2890,6 +2744,13 @@
           </a:solidFill>
           <a:ln/>
         </p:spPr>
+        <p:txBody>
+          <a:bodyPr/>
+          <a:lstStyle/>
+          <a:p>
+            <a:endParaRPr lang="en-US"/>
+          </a:p>
+        </p:txBody>
       </p:sp>
       <p:sp>
         <p:nvSpPr>
@@ -2912,7 +2773,7 @@
           <a:bodyPr wrap="square" lIns="0" tIns="0" rIns="0" bIns="0" rtlCol="0" anchor="ctr"/>
           <a:lstStyle/>
           <a:p>
-            <a:pPr algn="ctr" indent="0" marL="0">
+            <a:pPr marL="0" indent="0" algn="ctr">
               <a:buNone/>
             </a:pPr>
             <a:r>
@@ -2951,6 +2812,13 @@
           </a:solidFill>
           <a:ln/>
         </p:spPr>
+        <p:txBody>
+          <a:bodyPr/>
+          <a:lstStyle/>
+          <a:p>
+            <a:endParaRPr lang="en-US"/>
+          </a:p>
+        </p:txBody>
       </p:sp>
       <p:sp>
         <p:nvSpPr>
@@ -2973,7 +2841,7 @@
           <a:bodyPr wrap="square" lIns="0" tIns="0" rIns="0" bIns="0" rtlCol="0" anchor="ctr"/>
           <a:lstStyle/>
           <a:p>
-            <a:pPr algn="ctr" indent="0" marL="0">
+            <a:pPr marL="0" indent="0" algn="ctr">
               <a:buNone/>
             </a:pPr>
             <a:r>
@@ -3012,6 +2880,13 @@
           </a:solidFill>
           <a:ln/>
         </p:spPr>
+        <p:txBody>
+          <a:bodyPr/>
+          <a:lstStyle/>
+          <a:p>
+            <a:endParaRPr lang="en-US"/>
+          </a:p>
+        </p:txBody>
       </p:sp>
       <p:sp>
         <p:nvSpPr>
@@ -3034,7 +2909,7 @@
           <a:bodyPr wrap="square" lIns="0" tIns="0" rIns="0" bIns="0" rtlCol="0" anchor="ctr"/>
           <a:lstStyle/>
           <a:p>
-            <a:pPr algn="ctr" indent="0" marL="0">
+            <a:pPr marL="0" indent="0" algn="ctr">
               <a:buNone/>
             </a:pPr>
             <a:r>
@@ -3073,6 +2948,13 @@
           </a:solidFill>
           <a:ln/>
         </p:spPr>
+        <p:txBody>
+          <a:bodyPr/>
+          <a:lstStyle/>
+          <a:p>
+            <a:endParaRPr lang="en-US"/>
+          </a:p>
+        </p:txBody>
       </p:sp>
       <p:sp>
         <p:nvSpPr>
@@ -3095,7 +2977,7 @@
           <a:bodyPr wrap="square" lIns="0" tIns="0" rIns="0" bIns="0" rtlCol="0" anchor="ctr"/>
           <a:lstStyle/>
           <a:p>
-            <a:pPr algn="ctr" indent="0" marL="0">
+            <a:pPr marL="0" indent="0" algn="ctr">
               <a:buNone/>
             </a:pPr>
             <a:r>
@@ -3134,7 +3016,7 @@
           <a:bodyPr wrap="square" lIns="0" tIns="0" rIns="0" bIns="0" rtlCol="0" anchor="ctr"/>
           <a:lstStyle/>
           <a:p>
-            <a:pPr indent="0" marL="0">
+            <a:pPr marL="0" indent="0">
               <a:buNone/>
             </a:pPr>
             <a:r>
@@ -3168,6 +3050,7 @@
         <a:solidFill>
           <a:srgbClr val="0F1729"/>
         </a:solidFill>
+        <a:effectLst/>
       </p:bgPr>
     </p:bg>
     <p:spTree>
@@ -3205,7 +3088,7 @@
           <a:bodyPr wrap="square" lIns="0" tIns="0" rIns="0" bIns="0" rtlCol="0" anchor="ctr"/>
           <a:lstStyle/>
           <a:p>
-            <a:pPr indent="0" marL="0">
+            <a:pPr marL="0" indent="0">
               <a:buNone/>
             </a:pPr>
             <a:r>
@@ -3242,6 +3125,13 @@
           </a:solidFill>
           <a:ln/>
         </p:spPr>
+        <p:txBody>
+          <a:bodyPr/>
+          <a:lstStyle/>
+          <a:p>
+            <a:endParaRPr lang="en-US"/>
+          </a:p>
+        </p:txBody>
       </p:sp>
       <p:sp>
         <p:nvSpPr>
@@ -3264,6 +3154,13 @@
           </a:solidFill>
           <a:ln/>
         </p:spPr>
+        <p:txBody>
+          <a:bodyPr/>
+          <a:lstStyle/>
+          <a:p>
+            <a:endParaRPr lang="en-US"/>
+          </a:p>
+        </p:txBody>
       </p:sp>
       <p:sp>
         <p:nvSpPr>
@@ -3286,7 +3183,7 @@
           <a:bodyPr wrap="square" lIns="0" tIns="0" rIns="0" bIns="0" rtlCol="0" anchor="ctr"/>
           <a:lstStyle/>
           <a:p>
-            <a:pPr indent="0" marL="0">
+            <a:pPr marL="0" indent="0">
               <a:buNone/>
             </a:pPr>
             <a:r>
@@ -3325,7 +3222,7 @@
           <a:bodyPr wrap="square" lIns="0" tIns="0" rIns="0" bIns="0" rtlCol="0" anchor="ctr"/>
           <a:lstStyle/>
           <a:p>
-            <a:pPr indent="0" marL="0">
+            <a:pPr marL="0" indent="0">
               <a:buNone/>
             </a:pPr>
             <a:r>
@@ -3364,6 +3261,13 @@
           </a:solidFill>
           <a:ln/>
         </p:spPr>
+        <p:txBody>
+          <a:bodyPr/>
+          <a:lstStyle/>
+          <a:p>
+            <a:endParaRPr lang="en-US"/>
+          </a:p>
+        </p:txBody>
       </p:sp>
       <p:sp>
         <p:nvSpPr>
@@ -3386,7 +3290,7 @@
           <a:bodyPr wrap="square" lIns="0" tIns="0" rIns="0" bIns="0" rtlCol="0" anchor="ctr"/>
           <a:lstStyle/>
           <a:p>
-            <a:pPr indent="0" marL="0">
+            <a:pPr marL="0" indent="0">
               <a:buNone/>
             </a:pPr>
             <a:r>
@@ -3425,7 +3329,7 @@
           <a:bodyPr wrap="square" lIns="0" tIns="0" rIns="0" bIns="0" rtlCol="0" anchor="ctr"/>
           <a:lstStyle/>
           <a:p>
-            <a:pPr indent="0" marL="0">
+            <a:pPr marL="0" indent="0">
               <a:buNone/>
             </a:pPr>
             <a:r>
@@ -3464,6 +3368,13 @@
           </a:solidFill>
           <a:ln/>
         </p:spPr>
+        <p:txBody>
+          <a:bodyPr/>
+          <a:lstStyle/>
+          <a:p>
+            <a:endParaRPr lang="en-US"/>
+          </a:p>
+        </p:txBody>
       </p:sp>
       <p:sp>
         <p:nvSpPr>
@@ -3486,7 +3397,7 @@
           <a:bodyPr wrap="square" lIns="0" tIns="0" rIns="0" bIns="0" rtlCol="0" anchor="ctr"/>
           <a:lstStyle/>
           <a:p>
-            <a:pPr indent="0" marL="0">
+            <a:pPr marL="0" indent="0">
               <a:buNone/>
             </a:pPr>
             <a:r>
@@ -3525,7 +3436,7 @@
           <a:bodyPr wrap="square" lIns="0" tIns="0" rIns="0" bIns="0" rtlCol="0" anchor="ctr"/>
           <a:lstStyle/>
           <a:p>
-            <a:pPr indent="0" marL="0">
+            <a:pPr marL="0" indent="0">
               <a:buNone/>
             </a:pPr>
             <a:r>
@@ -3564,7 +3475,7 @@
           <a:bodyPr wrap="square" lIns="0" tIns="0" rIns="0" bIns="0" rtlCol="0" anchor="ctr"/>
           <a:lstStyle/>
           <a:p>
-            <a:pPr indent="0" marL="0">
+            <a:pPr marL="0" indent="0">
               <a:buNone/>
             </a:pPr>
             <a:r>
@@ -3598,6 +3509,7 @@
         <a:solidFill>
           <a:srgbClr val="0F1729"/>
         </a:solidFill>
+        <a:effectLst/>
       </p:bgPr>
     </p:bg>
     <p:spTree>
@@ -3635,7 +3547,7 @@
           <a:bodyPr wrap="square" lIns="0" tIns="0" rIns="0" bIns="0" rtlCol="0" anchor="ctr"/>
           <a:lstStyle/>
           <a:p>
-            <a:pPr indent="0" marL="0">
+            <a:pPr marL="0" indent="0">
               <a:buNone/>
             </a:pPr>
             <a:r>
@@ -3672,6 +3584,13 @@
           </a:solidFill>
           <a:ln/>
         </p:spPr>
+        <p:txBody>
+          <a:bodyPr/>
+          <a:lstStyle/>
+          <a:p>
+            <a:endParaRPr lang="en-US"/>
+          </a:p>
+        </p:txBody>
       </p:sp>
       <p:sp>
         <p:nvSpPr>
@@ -3694,6 +3613,13 @@
           </a:solidFill>
           <a:ln/>
         </p:spPr>
+        <p:txBody>
+          <a:bodyPr/>
+          <a:lstStyle/>
+          <a:p>
+            <a:endParaRPr lang="en-US"/>
+          </a:p>
+        </p:txBody>
       </p:sp>
       <p:sp>
         <p:nvSpPr>
@@ -3716,7 +3642,7 @@
           <a:bodyPr wrap="square" lIns="0" tIns="0" rIns="0" bIns="0" rtlCol="0" anchor="ctr"/>
           <a:lstStyle/>
           <a:p>
-            <a:pPr indent="0" marL="0">
+            <a:pPr marL="0" indent="0">
               <a:buNone/>
             </a:pPr>
             <a:r>
@@ -3861,6 +3787,13 @@
           </a:solidFill>
           <a:ln/>
         </p:spPr>
+        <p:txBody>
+          <a:bodyPr/>
+          <a:lstStyle/>
+          <a:p>
+            <a:endParaRPr lang="en-US"/>
+          </a:p>
+        </p:txBody>
       </p:sp>
       <p:sp>
         <p:nvSpPr>
@@ -3883,7 +3816,7 @@
           <a:bodyPr wrap="square" lIns="0" tIns="0" rIns="0" bIns="0" rtlCol="0" anchor="ctr"/>
           <a:lstStyle/>
           <a:p>
-            <a:pPr indent="0" marL="0">
+            <a:pPr marL="0" indent="0">
               <a:buNone/>
             </a:pPr>
             <a:r>
@@ -4028,6 +3961,13 @@
           </a:solidFill>
           <a:ln/>
         </p:spPr>
+        <p:txBody>
+          <a:bodyPr/>
+          <a:lstStyle/>
+          <a:p>
+            <a:endParaRPr lang="en-US"/>
+          </a:p>
+        </p:txBody>
       </p:sp>
       <p:sp>
         <p:nvSpPr>
@@ -4050,7 +3990,7 @@
           <a:bodyPr wrap="square" rtlCol="0" anchor="t"/>
           <a:lstStyle/>
           <a:p>
-            <a:pPr indent="0" marL="0">
+            <a:pPr marL="0" indent="0">
               <a:buNone/>
             </a:pPr>
             <a:r>
@@ -4067,7 +4007,7 @@
             <a:endParaRPr lang="en-US" sz="1200" dirty="0"/>
           </a:p>
           <a:p>
-            <a:pPr indent="0" marL="0">
+            <a:pPr marL="0" indent="0">
               <a:buNone/>
             </a:pPr>
             <a:r>
@@ -4084,7 +4024,7 @@
             <a:endParaRPr lang="en-US" sz="1200" dirty="0"/>
           </a:p>
           <a:p>
-            <a:pPr indent="0" marL="0">
+            <a:pPr marL="0" indent="0">
               <a:buNone/>
             </a:pPr>
             <a:r>
@@ -4101,7 +4041,7 @@
             <a:endParaRPr lang="en-US" sz="1200" dirty="0"/>
           </a:p>
           <a:p>
-            <a:pPr indent="0" marL="0">
+            <a:pPr marL="0" indent="0">
               <a:buNone/>
             </a:pPr>
             <a:r>
@@ -4118,7 +4058,7 @@
             <a:endParaRPr lang="en-US" sz="1200" dirty="0"/>
           </a:p>
           <a:p>
-            <a:pPr indent="0" marL="0">
+            <a:pPr marL="0" indent="0">
               <a:buNone/>
             </a:pPr>
             <a:r>
@@ -4152,6 +4092,7 @@
         <a:solidFill>
           <a:srgbClr val="0F1729"/>
         </a:solidFill>
+        <a:effectLst/>
       </p:bgPr>
     </p:bg>
     <p:spTree>
@@ -4189,7 +4130,7 @@
           <a:bodyPr wrap="square" lIns="0" tIns="0" rIns="0" bIns="0" rtlCol="0" anchor="ctr"/>
           <a:lstStyle/>
           <a:p>
-            <a:pPr indent="0" marL="0">
+            <a:pPr marL="0" indent="0">
               <a:buNone/>
             </a:pPr>
             <a:r>
@@ -4226,6 +4167,13 @@
           </a:solidFill>
           <a:ln/>
         </p:spPr>
+        <p:txBody>
+          <a:bodyPr/>
+          <a:lstStyle/>
+          <a:p>
+            <a:endParaRPr lang="en-US"/>
+          </a:p>
+        </p:txBody>
       </p:sp>
       <p:graphicFrame>
         <p:nvGraphicFramePr>
@@ -4250,10 +4198,34 @@
             <a:tbl>
               <a:tblPr/>
               <a:tblGrid>
-                <a:gridCol w="1645920"/>
-                <a:gridCol w="1645920"/>
-                <a:gridCol w="1371600"/>
-                <a:gridCol w="3017520"/>
+                <a:gridCol w="1645920">
+                  <a:extLst>
+                    <a:ext uri="{9D8B030D-6E8A-4147-A177-3AD203B41FA5}">
+                      <a16:colId xmlns:a16="http://schemas.microsoft.com/office/drawing/2014/main" val="20000"/>
+                    </a:ext>
+                  </a:extLst>
+                </a:gridCol>
+                <a:gridCol w="1645920">
+                  <a:extLst>
+                    <a:ext uri="{9D8B030D-6E8A-4147-A177-3AD203B41FA5}">
+                      <a16:colId xmlns:a16="http://schemas.microsoft.com/office/drawing/2014/main" val="20001"/>
+                    </a:ext>
+                  </a:extLst>
+                </a:gridCol>
+                <a:gridCol w="1371600">
+                  <a:extLst>
+                    <a:ext uri="{9D8B030D-6E8A-4147-A177-3AD203B41FA5}">
+                      <a16:colId xmlns:a16="http://schemas.microsoft.com/office/drawing/2014/main" val="20002"/>
+                    </a:ext>
+                  </a:extLst>
+                </a:gridCol>
+                <a:gridCol w="3017520">
+                  <a:extLst>
+                    <a:ext uri="{9D8B030D-6E8A-4147-A177-3AD203B41FA5}">
+                      <a16:colId xmlns:a16="http://schemas.microsoft.com/office/drawing/2014/main" val="20003"/>
+                    </a:ext>
+                  </a:extLst>
+                </a:gridCol>
               </a:tblGrid>
               <a:tr h="457200">
                 <a:tc>
@@ -4261,7 +4233,7 @@
                     <a:bodyPr/>
                     <a:lstStyle/>
                     <a:p>
-                      <a:pPr indent="0" marL="0">
+                      <a:pPr marL="0" indent="0">
                         <a:buNone/>
                       </a:pPr>
                       <a:endParaRPr lang="en-US" sz="1300" dirty="0">
@@ -4271,7 +4243,7 @@
                       </a:endParaRPr>
                     </a:p>
                   </a:txBody>
-                  <a:tcPr marL="91440" marR="91440" marT="45720" marB="45720">
+                  <a:tcPr>
                     <a:lnL w="6350" cap="flat" cmpd="sng" algn="ctr">
                       <a:solidFill>
                         <a:srgbClr val="475569"/>
@@ -4318,7 +4290,7 @@
                     <a:bodyPr/>
                     <a:lstStyle/>
                     <a:p>
-                      <a:pPr algn="ctr" indent="0" marL="0">
+                      <a:pPr marL="0" indent="0" algn="ctr">
                         <a:buNone/>
                       </a:pPr>
                       <a:r>
@@ -4339,7 +4311,7 @@
                       </a:endParaRPr>
                     </a:p>
                   </a:txBody>
-                  <a:tcPr marL="91440" marR="91440" marT="45720" marB="45720">
+                  <a:tcPr>
                     <a:lnL w="6350" cap="flat" cmpd="sng" algn="ctr">
                       <a:solidFill>
                         <a:srgbClr val="475569"/>
@@ -4386,7 +4358,7 @@
                     <a:bodyPr/>
                     <a:lstStyle/>
                     <a:p>
-                      <a:pPr algn="ctr" indent="0" marL="0">
+                      <a:pPr marL="0" indent="0" algn="ctr">
                         <a:buNone/>
                       </a:pPr>
                       <a:r>
@@ -4407,7 +4379,7 @@
                       </a:endParaRPr>
                     </a:p>
                   </a:txBody>
-                  <a:tcPr marL="91440" marR="91440" marT="45720" marB="45720">
+                  <a:tcPr>
                     <a:lnL w="6350" cap="flat" cmpd="sng" algn="ctr">
                       <a:solidFill>
                         <a:srgbClr val="475569"/>
@@ -4454,7 +4426,7 @@
                     <a:bodyPr/>
                     <a:lstStyle/>
                     <a:p>
-                      <a:pPr algn="ctr" indent="0" marL="0">
+                      <a:pPr marL="0" indent="0" algn="ctr">
                         <a:buNone/>
                       </a:pPr>
                       <a:r>
@@ -4475,7 +4447,7 @@
                       </a:endParaRPr>
                     </a:p>
                   </a:txBody>
-                  <a:tcPr marL="91440" marR="91440" marT="45720" marB="45720">
+                  <a:tcPr>
                     <a:lnL w="6350" cap="flat" cmpd="sng" algn="ctr">
                       <a:solidFill>
                         <a:srgbClr val="475569"/>
@@ -4517,6 +4489,11 @@
                     </a:solidFill>
                   </a:tcPr>
                 </a:tc>
+                <a:extLst>
+                  <a:ext uri="{0D108BD9-81ED-4DB2-BD59-A6C34878D82A}">
+                    <a16:rowId xmlns:a16="http://schemas.microsoft.com/office/drawing/2014/main" val="10000"/>
+                  </a:ext>
+                </a:extLst>
               </a:tr>
               <a:tr h="457200">
                 <a:tc>
@@ -4524,7 +4501,7 @@
                     <a:bodyPr/>
                     <a:lstStyle/>
                     <a:p>
-                      <a:pPr indent="0" marL="0">
+                      <a:pPr marL="0" indent="0">
                         <a:buNone/>
                       </a:pPr>
                       <a:r>
@@ -4545,7 +4522,7 @@
                       </a:endParaRPr>
                     </a:p>
                   </a:txBody>
-                  <a:tcPr marL="91440" marR="91440" marT="45720" marB="45720">
+                  <a:tcPr>
                     <a:lnL w="6350" cap="flat" cmpd="sng" algn="ctr">
                       <a:solidFill>
                         <a:srgbClr val="475569"/>
@@ -4592,7 +4569,7 @@
                     <a:bodyPr/>
                     <a:lstStyle/>
                     <a:p>
-                      <a:pPr algn="ctr" indent="0" marL="0">
+                      <a:pPr marL="0" indent="0" algn="ctr">
                         <a:buNone/>
                       </a:pPr>
                       <a:r>
@@ -4613,7 +4590,7 @@
                       </a:endParaRPr>
                     </a:p>
                   </a:txBody>
-                  <a:tcPr marL="91440" marR="91440" marT="45720" marB="45720">
+                  <a:tcPr>
                     <a:lnL w="6350" cap="flat" cmpd="sng" algn="ctr">
                       <a:solidFill>
                         <a:srgbClr val="475569"/>
@@ -4660,7 +4637,7 @@
                     <a:bodyPr/>
                     <a:lstStyle/>
                     <a:p>
-                      <a:pPr algn="ctr" indent="0" marL="0">
+                      <a:pPr marL="0" indent="0" algn="ctr">
                         <a:buNone/>
                       </a:pPr>
                       <a:r>
@@ -4681,7 +4658,7 @@
                       </a:endParaRPr>
                     </a:p>
                   </a:txBody>
-                  <a:tcPr marL="91440" marR="91440" marT="45720" marB="45720">
+                  <a:tcPr>
                     <a:lnL w="6350" cap="flat" cmpd="sng" algn="ctr">
                       <a:solidFill>
                         <a:srgbClr val="475569"/>
@@ -4728,7 +4705,7 @@
                     <a:bodyPr/>
                     <a:lstStyle/>
                     <a:p>
-                      <a:pPr algn="ctr" indent="0" marL="0">
+                      <a:pPr marL="0" indent="0" algn="ctr">
                         <a:buNone/>
                       </a:pPr>
                       <a:r>
@@ -4749,7 +4726,7 @@
                       </a:endParaRPr>
                     </a:p>
                   </a:txBody>
-                  <a:tcPr marL="91440" marR="91440" marT="45720" marB="45720">
+                  <a:tcPr>
                     <a:lnL w="6350" cap="flat" cmpd="sng" algn="ctr">
                       <a:solidFill>
                         <a:srgbClr val="475569"/>
@@ -4791,6 +4768,11 @@
                     </a:solidFill>
                   </a:tcPr>
                 </a:tc>
+                <a:extLst>
+                  <a:ext uri="{0D108BD9-81ED-4DB2-BD59-A6C34878D82A}">
+                    <a16:rowId xmlns:a16="http://schemas.microsoft.com/office/drawing/2014/main" val="10001"/>
+                  </a:ext>
+                </a:extLst>
               </a:tr>
               <a:tr h="457200">
                 <a:tc>
@@ -4798,7 +4780,7 @@
                     <a:bodyPr/>
                     <a:lstStyle/>
                     <a:p>
-                      <a:pPr indent="0" marL="0">
+                      <a:pPr marL="0" indent="0">
                         <a:buNone/>
                       </a:pPr>
                       <a:r>
@@ -4819,7 +4801,7 @@
                       </a:endParaRPr>
                     </a:p>
                   </a:txBody>
-                  <a:tcPr marL="91440" marR="91440" marT="45720" marB="45720">
+                  <a:tcPr>
                     <a:lnL w="6350" cap="flat" cmpd="sng" algn="ctr">
                       <a:solidFill>
                         <a:srgbClr val="475569"/>
@@ -4866,7 +4848,7 @@
                     <a:bodyPr/>
                     <a:lstStyle/>
                     <a:p>
-                      <a:pPr algn="ctr" indent="0" marL="0">
+                      <a:pPr marL="0" indent="0" algn="ctr">
                         <a:buNone/>
                       </a:pPr>
                       <a:r>
@@ -4887,7 +4869,7 @@
                       </a:endParaRPr>
                     </a:p>
                   </a:txBody>
-                  <a:tcPr marL="91440" marR="91440" marT="45720" marB="45720">
+                  <a:tcPr>
                     <a:lnL w="6350" cap="flat" cmpd="sng" algn="ctr">
                       <a:solidFill>
                         <a:srgbClr val="475569"/>
@@ -4934,7 +4916,7 @@
                     <a:bodyPr/>
                     <a:lstStyle/>
                     <a:p>
-                      <a:pPr algn="ctr" indent="0" marL="0">
+                      <a:pPr marL="0" indent="0" algn="ctr">
                         <a:buNone/>
                       </a:pPr>
                       <a:r>
@@ -4955,7 +4937,7 @@
                       </a:endParaRPr>
                     </a:p>
                   </a:txBody>
-                  <a:tcPr marL="91440" marR="91440" marT="45720" marB="45720">
+                  <a:tcPr>
                     <a:lnL w="6350" cap="flat" cmpd="sng" algn="ctr">
                       <a:solidFill>
                         <a:srgbClr val="475569"/>
@@ -5002,7 +4984,7 @@
                     <a:bodyPr/>
                     <a:lstStyle/>
                     <a:p>
-                      <a:pPr algn="ctr" indent="0" marL="0">
+                      <a:pPr marL="0" indent="0" algn="ctr">
                         <a:buNone/>
                       </a:pPr>
                       <a:r>
@@ -5023,7 +5005,7 @@
                       </a:endParaRPr>
                     </a:p>
                   </a:txBody>
-                  <a:tcPr marL="91440" marR="91440" marT="45720" marB="45720">
+                  <a:tcPr>
                     <a:lnL w="6350" cap="flat" cmpd="sng" algn="ctr">
                       <a:solidFill>
                         <a:srgbClr val="475569"/>
@@ -5065,6 +5047,11 @@
                     </a:solidFill>
                   </a:tcPr>
                 </a:tc>
+                <a:extLst>
+                  <a:ext uri="{0D108BD9-81ED-4DB2-BD59-A6C34878D82A}">
+                    <a16:rowId xmlns:a16="http://schemas.microsoft.com/office/drawing/2014/main" val="10002"/>
+                  </a:ext>
+                </a:extLst>
               </a:tr>
               <a:tr h="457200">
                 <a:tc>
@@ -5072,7 +5059,7 @@
                     <a:bodyPr/>
                     <a:lstStyle/>
                     <a:p>
-                      <a:pPr indent="0" marL="0">
+                      <a:pPr marL="0" indent="0">
                         <a:buNone/>
                       </a:pPr>
                       <a:r>
@@ -5093,7 +5080,7 @@
                       </a:endParaRPr>
                     </a:p>
                   </a:txBody>
-                  <a:tcPr marL="91440" marR="91440" marT="45720" marB="45720">
+                  <a:tcPr>
                     <a:lnL w="6350" cap="flat" cmpd="sng" algn="ctr">
                       <a:solidFill>
                         <a:srgbClr val="475569"/>
@@ -5140,7 +5127,7 @@
                     <a:bodyPr/>
                     <a:lstStyle/>
                     <a:p>
-                      <a:pPr algn="ctr" indent="0" marL="0">
+                      <a:pPr marL="0" indent="0" algn="ctr">
                         <a:buNone/>
                       </a:pPr>
                       <a:r>
@@ -5161,7 +5148,7 @@
                       </a:endParaRPr>
                     </a:p>
                   </a:txBody>
-                  <a:tcPr marL="91440" marR="91440" marT="45720" marB="45720">
+                  <a:tcPr>
                     <a:lnL w="6350" cap="flat" cmpd="sng" algn="ctr">
                       <a:solidFill>
                         <a:srgbClr val="475569"/>
@@ -5208,7 +5195,7 @@
                     <a:bodyPr/>
                     <a:lstStyle/>
                     <a:p>
-                      <a:pPr algn="ctr" indent="0" marL="0">
+                      <a:pPr marL="0" indent="0" algn="ctr">
                         <a:buNone/>
                       </a:pPr>
                       <a:r>
@@ -5229,7 +5216,7 @@
                       </a:endParaRPr>
                     </a:p>
                   </a:txBody>
-                  <a:tcPr marL="91440" marR="91440" marT="45720" marB="45720">
+                  <a:tcPr>
                     <a:lnL w="6350" cap="flat" cmpd="sng" algn="ctr">
                       <a:solidFill>
                         <a:srgbClr val="475569"/>
@@ -5276,7 +5263,7 @@
                     <a:bodyPr/>
                     <a:lstStyle/>
                     <a:p>
-                      <a:pPr algn="ctr" indent="0" marL="0">
+                      <a:pPr marL="0" indent="0" algn="ctr">
                         <a:buNone/>
                       </a:pPr>
                       <a:r>
@@ -5297,7 +5284,7 @@
                       </a:endParaRPr>
                     </a:p>
                   </a:txBody>
-                  <a:tcPr marL="91440" marR="91440" marT="45720" marB="45720">
+                  <a:tcPr>
                     <a:lnL w="6350" cap="flat" cmpd="sng" algn="ctr">
                       <a:solidFill>
                         <a:srgbClr val="475569"/>
@@ -5339,6 +5326,11 @@
                     </a:solidFill>
                   </a:tcPr>
                 </a:tc>
+                <a:extLst>
+                  <a:ext uri="{0D108BD9-81ED-4DB2-BD59-A6C34878D82A}">
+                    <a16:rowId xmlns:a16="http://schemas.microsoft.com/office/drawing/2014/main" val="10003"/>
+                  </a:ext>
+                </a:extLst>
               </a:tr>
               <a:tr h="457200">
                 <a:tc>
@@ -5346,7 +5338,7 @@
                     <a:bodyPr/>
                     <a:lstStyle/>
                     <a:p>
-                      <a:pPr indent="0" marL="0">
+                      <a:pPr marL="0" indent="0">
                         <a:buNone/>
                       </a:pPr>
                       <a:r>
@@ -5367,7 +5359,7 @@
                       </a:endParaRPr>
                     </a:p>
                   </a:txBody>
-                  <a:tcPr marL="91440" marR="91440" marT="45720" marB="45720">
+                  <a:tcPr>
                     <a:lnL w="6350" cap="flat" cmpd="sng" algn="ctr">
                       <a:solidFill>
                         <a:srgbClr val="475569"/>
@@ -5414,7 +5406,7 @@
                     <a:bodyPr/>
                     <a:lstStyle/>
                     <a:p>
-                      <a:pPr algn="ctr" indent="0" marL="0">
+                      <a:pPr marL="0" indent="0" algn="ctr">
                         <a:buNone/>
                       </a:pPr>
                       <a:r>
@@ -5435,7 +5427,7 @@
                       </a:endParaRPr>
                     </a:p>
                   </a:txBody>
-                  <a:tcPr marL="91440" marR="91440" marT="45720" marB="45720">
+                  <a:tcPr>
                     <a:lnL w="6350" cap="flat" cmpd="sng" algn="ctr">
                       <a:solidFill>
                         <a:srgbClr val="475569"/>
@@ -5482,7 +5474,7 @@
                     <a:bodyPr/>
                     <a:lstStyle/>
                     <a:p>
-                      <a:pPr algn="ctr" indent="0" marL="0">
+                      <a:pPr marL="0" indent="0" algn="ctr">
                         <a:buNone/>
                       </a:pPr>
                       <a:r>
@@ -5503,7 +5495,7 @@
                       </a:endParaRPr>
                     </a:p>
                   </a:txBody>
-                  <a:tcPr marL="91440" marR="91440" marT="45720" marB="45720">
+                  <a:tcPr>
                     <a:lnL w="6350" cap="flat" cmpd="sng" algn="ctr">
                       <a:solidFill>
                         <a:srgbClr val="475569"/>
@@ -5550,7 +5542,7 @@
                     <a:bodyPr/>
                     <a:lstStyle/>
                     <a:p>
-                      <a:pPr algn="ctr" indent="0" marL="0">
+                      <a:pPr marL="0" indent="0" algn="ctr">
                         <a:buNone/>
                       </a:pPr>
                       <a:r>
@@ -5571,7 +5563,7 @@
                       </a:endParaRPr>
                     </a:p>
                   </a:txBody>
-                  <a:tcPr marL="91440" marR="91440" marT="45720" marB="45720">
+                  <a:tcPr>
                     <a:lnL w="6350" cap="flat" cmpd="sng" algn="ctr">
                       <a:solidFill>
                         <a:srgbClr val="475569"/>
@@ -5613,6 +5605,11 @@
                     </a:solidFill>
                   </a:tcPr>
                 </a:tc>
+                <a:extLst>
+                  <a:ext uri="{0D108BD9-81ED-4DB2-BD59-A6C34878D82A}">
+                    <a16:rowId xmlns:a16="http://schemas.microsoft.com/office/drawing/2014/main" val="10004"/>
+                  </a:ext>
+                </a:extLst>
               </a:tr>
               <a:tr h="457200">
                 <a:tc>
@@ -5620,7 +5617,7 @@
                     <a:bodyPr/>
                     <a:lstStyle/>
                     <a:p>
-                      <a:pPr indent="0" marL="0">
+                      <a:pPr marL="0" indent="0">
                         <a:buNone/>
                       </a:pPr>
                       <a:r>
@@ -5641,7 +5638,7 @@
                       </a:endParaRPr>
                     </a:p>
                   </a:txBody>
-                  <a:tcPr marL="91440" marR="91440" marT="45720" marB="45720">
+                  <a:tcPr>
                     <a:lnL w="6350" cap="flat" cmpd="sng" algn="ctr">
                       <a:solidFill>
                         <a:srgbClr val="475569"/>
@@ -5688,7 +5685,7 @@
                     <a:bodyPr/>
                     <a:lstStyle/>
                     <a:p>
-                      <a:pPr algn="ctr" indent="0" marL="0">
+                      <a:pPr marL="0" indent="0" algn="ctr">
                         <a:buNone/>
                       </a:pPr>
                       <a:r>
@@ -5709,7 +5706,7 @@
                       </a:endParaRPr>
                     </a:p>
                   </a:txBody>
-                  <a:tcPr marL="91440" marR="91440" marT="45720" marB="45720">
+                  <a:tcPr>
                     <a:lnL w="6350" cap="flat" cmpd="sng" algn="ctr">
                       <a:solidFill>
                         <a:srgbClr val="475569"/>
@@ -5756,7 +5753,7 @@
                     <a:bodyPr/>
                     <a:lstStyle/>
                     <a:p>
-                      <a:pPr algn="ctr" indent="0" marL="0">
+                      <a:pPr marL="0" indent="0" algn="ctr">
                         <a:buNone/>
                       </a:pPr>
                       <a:r>
@@ -5777,7 +5774,7 @@
                       </a:endParaRPr>
                     </a:p>
                   </a:txBody>
-                  <a:tcPr marL="91440" marR="91440" marT="45720" marB="45720">
+                  <a:tcPr>
                     <a:lnL w="6350" cap="flat" cmpd="sng" algn="ctr">
                       <a:solidFill>
                         <a:srgbClr val="475569"/>
@@ -5824,7 +5821,7 @@
                     <a:bodyPr/>
                     <a:lstStyle/>
                     <a:p>
-                      <a:pPr algn="ctr" indent="0" marL="0">
+                      <a:pPr marL="0" indent="0" algn="ctr">
                         <a:buNone/>
                       </a:pPr>
                       <a:r>
@@ -5845,7 +5842,7 @@
                       </a:endParaRPr>
                     </a:p>
                   </a:txBody>
-                  <a:tcPr marL="91440" marR="91440" marT="45720" marB="45720">
+                  <a:tcPr>
                     <a:lnL w="6350" cap="flat" cmpd="sng" algn="ctr">
                       <a:solidFill>
                         <a:srgbClr val="475569"/>
@@ -5887,6 +5884,11 @@
                     </a:solidFill>
                   </a:tcPr>
                 </a:tc>
+                <a:extLst>
+                  <a:ext uri="{0D108BD9-81ED-4DB2-BD59-A6C34878D82A}">
+                    <a16:rowId xmlns:a16="http://schemas.microsoft.com/office/drawing/2014/main" val="10005"/>
+                  </a:ext>
+                </a:extLst>
               </a:tr>
             </a:tbl>
           </a:graphicData>
@@ -5894,14 +5896,14 @@
       </p:graphicFrame>
       <p:pic>
         <p:nvPicPr>
-          <p:cNvPr id="5" name="Image 0" descr="preencoded.png">    </p:cNvPr>
+          <p:cNvPr id="5" name="Image 0" descr="preencoded.png"/>
           <p:cNvPicPr>
             <a:picLocks noChangeAspect="1"/>
           </p:cNvPicPr>
           <p:nvPr/>
         </p:nvPicPr>
         <p:blipFill>
-          <a:blip r:embed="rId1"/>
+          <a:blip r:embed="rId3"/>
           <a:stretch>
             <a:fillRect/>
           </a:stretch>
@@ -5937,7 +5939,7 @@
           <a:bodyPr wrap="square" lIns="0" tIns="0" rIns="0" bIns="0" rtlCol="0" anchor="ctr"/>
           <a:lstStyle/>
           <a:p>
-            <a:pPr indent="0" marL="0">
+            <a:pPr marL="0" indent="0">
               <a:buNone/>
             </a:pPr>
             <a:r>
@@ -5971,6 +5973,7 @@
         <a:solidFill>
           <a:srgbClr val="0F1729"/>
         </a:solidFill>
+        <a:effectLst/>
       </p:bgPr>
     </p:bg>
     <p:spTree>
@@ -6008,6 +6011,13 @@
           </a:solidFill>
           <a:ln/>
         </p:spPr>
+        <p:txBody>
+          <a:bodyPr/>
+          <a:lstStyle/>
+          <a:p>
+            <a:endParaRPr lang="en-US"/>
+          </a:p>
+        </p:txBody>
       </p:sp>
       <p:sp>
         <p:nvSpPr>
@@ -6030,7 +6040,7 @@
           <a:bodyPr wrap="square" lIns="0" tIns="0" rIns="0" bIns="0" rtlCol="0" anchor="ctr"/>
           <a:lstStyle/>
           <a:p>
-            <a:pPr indent="0" marL="0">
+            <a:pPr marL="0" indent="0">
               <a:buNone/>
             </a:pPr>
             <a:r>
@@ -6067,136 +6077,17 @@
           </a:solidFill>
           <a:ln/>
         </p:spPr>
+        <p:txBody>
+          <a:bodyPr/>
+          <a:lstStyle/>
+          <a:p>
+            <a:endParaRPr lang="en-US"/>
+          </a:p>
+        </p:txBody>
       </p:sp>
       <p:pic>
         <p:nvPicPr>
-          <p:cNvPr id="5" name="Image 0" descr="preencoded.png">    </p:cNvPr>
-          <p:cNvPicPr>
-            <a:picLocks noChangeAspect="1"/>
-          </p:cNvPicPr>
-          <p:nvPr/>
-        </p:nvPicPr>
-        <p:blipFill>
-          <a:blip r:embed="rId1"/>
-          <a:stretch>
-            <a:fillRect/>
-          </a:stretch>
-        </p:blipFill>
-        <p:spPr>
-          <a:xfrm>
-            <a:off x="914400" y="1417320"/>
-            <a:ext cx="320040" cy="320040"/>
-          </a:xfrm>
-          <a:prstGeom prst="rect">
-            <a:avLst/>
-          </a:prstGeom>
-        </p:spPr>
-      </p:pic>
-      <p:sp>
-        <p:nvSpPr>
-          <p:cNvPr id="6" name="Text 3"/>
-          <p:cNvSpPr/>
-          <p:nvPr/>
-        </p:nvSpPr>
-        <p:spPr>
-          <a:xfrm>
-            <a:off x="1463040" y="1371600"/>
-            <a:ext cx="6858000" cy="457200"/>
-          </a:xfrm>
-          <a:prstGeom prst="rect">
-            <a:avLst/>
-          </a:prstGeom>
-          <a:noFill/>
-          <a:ln/>
-        </p:spPr>
-        <p:txBody>
-          <a:bodyPr wrap="square" lIns="0" tIns="0" rIns="0" bIns="0" rtlCol="0" anchor="ctr"/>
-          <a:lstStyle/>
-          <a:p>
-            <a:pPr indent="0" marL="0">
-              <a:buNone/>
-            </a:pPr>
-            <a:r>
-              <a:rPr lang="en-US" sz="1600" dirty="0">
-                <a:solidFill>
-                  <a:srgbClr val="F8FAFC"/>
-                </a:solidFill>
-                <a:latin typeface="Calibri" pitchFamily="34" charset="0"/>
-                <a:ea typeface="Calibri" pitchFamily="34" charset="-122"/>
-                <a:cs typeface="Calibri" pitchFamily="34" charset="-120"/>
-              </a:rPr>
-              <a:t>State Management = Daten zur Laufzeit verwalten</a:t>
-            </a:r>
-            <a:endParaRPr lang="en-US" sz="1600" dirty="0"/>
-          </a:p>
-        </p:txBody>
-      </p:sp>
-      <p:pic>
-        <p:nvPicPr>
-          <p:cNvPr id="7" name="Image 1" descr="preencoded.png">    </p:cNvPr>
-          <p:cNvPicPr>
-            <a:picLocks noChangeAspect="1"/>
-          </p:cNvPicPr>
-          <p:nvPr/>
-        </p:nvPicPr>
-        <p:blipFill>
-          <a:blip r:embed="rId2"/>
-          <a:stretch>
-            <a:fillRect/>
-          </a:stretch>
-        </p:blipFill>
-        <p:spPr>
-          <a:xfrm>
-            <a:off x="914400" y="1965960"/>
-            <a:ext cx="320040" cy="320040"/>
-          </a:xfrm>
-          <a:prstGeom prst="rect">
-            <a:avLst/>
-          </a:prstGeom>
-        </p:spPr>
-      </p:pic>
-      <p:sp>
-        <p:nvSpPr>
-          <p:cNvPr id="8" name="Text 4"/>
-          <p:cNvSpPr/>
-          <p:nvPr/>
-        </p:nvSpPr>
-        <p:spPr>
-          <a:xfrm>
-            <a:off x="1463040" y="1920240"/>
-            <a:ext cx="6858000" cy="457200"/>
-          </a:xfrm>
-          <a:prstGeom prst="rect">
-            <a:avLst/>
-          </a:prstGeom>
-          <a:noFill/>
-          <a:ln/>
-        </p:spPr>
-        <p:txBody>
-          <a:bodyPr wrap="square" lIns="0" tIns="0" rIns="0" bIns="0" rtlCol="0" anchor="ctr"/>
-          <a:lstStyle/>
-          <a:p>
-            <a:pPr indent="0" marL="0">
-              <a:buNone/>
-            </a:pPr>
-            <a:r>
-              <a:rPr lang="en-US" sz="1600" dirty="0">
-                <a:solidFill>
-                  <a:srgbClr val="F8FAFC"/>
-                </a:solidFill>
-                <a:latin typeface="Calibri" pitchFamily="34" charset="0"/>
-                <a:ea typeface="Calibri" pitchFamily="34" charset="-122"/>
-                <a:cs typeface="Calibri" pitchFamily="34" charset="-120"/>
-              </a:rPr>
-              <a:t>useState für einfache, lokale Werte</a:t>
-            </a:r>
-            <a:endParaRPr lang="en-US" sz="1600" dirty="0"/>
-          </a:p>
-        </p:txBody>
-      </p:sp>
-      <p:pic>
-        <p:nvPicPr>
-          <p:cNvPr id="9" name="Image 2" descr="preencoded.png">    </p:cNvPr>
+          <p:cNvPr id="5" name="Image 0" descr="preencoded.png"/>
           <p:cNvPicPr>
             <a:picLocks noChangeAspect="1"/>
           </p:cNvPicPr>
@@ -6210,7 +6101,7 @@
         </p:blipFill>
         <p:spPr>
           <a:xfrm>
-            <a:off x="914400" y="2514600"/>
+            <a:off x="914400" y="1417320"/>
             <a:ext cx="320040" cy="320040"/>
           </a:xfrm>
           <a:prstGeom prst="rect">
@@ -6220,13 +6111,13 @@
       </p:pic>
       <p:sp>
         <p:nvSpPr>
-          <p:cNvPr id="10" name="Text 5"/>
-          <p:cNvSpPr/>
-          <p:nvPr/>
-        </p:nvSpPr>
-        <p:spPr>
-          <a:xfrm>
-            <a:off x="1463040" y="2468880"/>
+          <p:cNvPr id="6" name="Text 3"/>
+          <p:cNvSpPr/>
+          <p:nvPr/>
+        </p:nvSpPr>
+        <p:spPr>
+          <a:xfrm>
+            <a:off x="1463040" y="1371600"/>
             <a:ext cx="6858000" cy="457200"/>
           </a:xfrm>
           <a:prstGeom prst="rect">
@@ -6239,7 +6130,7 @@
           <a:bodyPr wrap="square" lIns="0" tIns="0" rIns="0" bIns="0" rtlCol="0" anchor="ctr"/>
           <a:lstStyle/>
           <a:p>
-            <a:pPr indent="0" marL="0">
+            <a:pPr marL="0" indent="0">
               <a:buNone/>
             </a:pPr>
             <a:r>
@@ -6251,7 +6142,7 @@
                 <a:ea typeface="Calibri" pitchFamily="34" charset="-122"/>
                 <a:cs typeface="Calibri" pitchFamily="34" charset="-120"/>
               </a:rPr>
-              <a:t>useReducer für komplexe, zusammenhängende Logik</a:t>
+              <a:t>State Management = Daten zur Laufzeit verwalten</a:t>
             </a:r>
             <a:endParaRPr lang="en-US" sz="1600" dirty="0"/>
           </a:p>
@@ -6259,21 +6150,21 @@
       </p:sp>
       <p:pic>
         <p:nvPicPr>
-          <p:cNvPr id="11" name="Image 3" descr="preencoded.png">    </p:cNvPr>
+          <p:cNvPr id="7" name="Image 1" descr="preencoded.png"/>
           <p:cNvPicPr>
             <a:picLocks noChangeAspect="1"/>
           </p:cNvPicPr>
           <p:nvPr/>
         </p:nvPicPr>
         <p:blipFill>
-          <a:blip r:embed="rId4"/>
+          <a:blip r:embed="rId3"/>
           <a:stretch>
             <a:fillRect/>
           </a:stretch>
         </p:blipFill>
         <p:spPr>
           <a:xfrm>
-            <a:off x="914400" y="3063240"/>
+            <a:off x="914400" y="1965960"/>
             <a:ext cx="320040" cy="320040"/>
           </a:xfrm>
           <a:prstGeom prst="rect">
@@ -6283,13 +6174,13 @@
       </p:pic>
       <p:sp>
         <p:nvSpPr>
-          <p:cNvPr id="12" name="Text 6"/>
-          <p:cNvSpPr/>
-          <p:nvPr/>
-        </p:nvSpPr>
-        <p:spPr>
-          <a:xfrm>
-            <a:off x="1463040" y="3017520"/>
+          <p:cNvPr id="8" name="Text 4"/>
+          <p:cNvSpPr/>
+          <p:nvPr/>
+        </p:nvSpPr>
+        <p:spPr>
+          <a:xfrm>
+            <a:off x="1463040" y="1920240"/>
             <a:ext cx="6858000" cy="457200"/>
           </a:xfrm>
           <a:prstGeom prst="rect">
@@ -6302,7 +6193,7 @@
           <a:bodyPr wrap="square" lIns="0" tIns="0" rIns="0" bIns="0" rtlCol="0" anchor="ctr"/>
           <a:lstStyle/>
           <a:p>
-            <a:pPr indent="0" marL="0">
+            <a:pPr marL="0" indent="0">
               <a:buNone/>
             </a:pPr>
             <a:r>
@@ -6314,7 +6205,7 @@
                 <a:ea typeface="Calibri" pitchFamily="34" charset="-122"/>
                 <a:cs typeface="Calibri" pitchFamily="34" charset="-120"/>
               </a:rPr>
-              <a:t>Context API löst Prop Drilling</a:t>
+              <a:t>useState für einfache, lokale Werte</a:t>
             </a:r>
             <a:endParaRPr lang="en-US" sz="1600" dirty="0"/>
           </a:p>
@@ -6322,21 +6213,21 @@
       </p:sp>
       <p:pic>
         <p:nvPicPr>
-          <p:cNvPr id="13" name="Image 4" descr="preencoded.png">    </p:cNvPr>
+          <p:cNvPr id="9" name="Image 2" descr="preencoded.png"/>
           <p:cNvPicPr>
             <a:picLocks noChangeAspect="1"/>
           </p:cNvPicPr>
           <p:nvPr/>
         </p:nvPicPr>
         <p:blipFill>
-          <a:blip r:embed="rId5"/>
+          <a:blip r:embed="rId3"/>
           <a:stretch>
             <a:fillRect/>
           </a:stretch>
         </p:blipFill>
         <p:spPr>
           <a:xfrm>
-            <a:off x="914400" y="3611880"/>
+            <a:off x="914400" y="2514600"/>
             <a:ext cx="320040" cy="320040"/>
           </a:xfrm>
           <a:prstGeom prst="rect">
@@ -6346,13 +6237,13 @@
       </p:pic>
       <p:sp>
         <p:nvSpPr>
-          <p:cNvPr id="14" name="Text 7"/>
-          <p:cNvSpPr/>
-          <p:nvPr/>
-        </p:nvSpPr>
-        <p:spPr>
-          <a:xfrm>
-            <a:off x="1463040" y="3566160"/>
+          <p:cNvPr id="10" name="Text 5"/>
+          <p:cNvSpPr/>
+          <p:nvPr/>
+        </p:nvSpPr>
+        <p:spPr>
+          <a:xfrm>
+            <a:off x="1463040" y="2468880"/>
             <a:ext cx="6858000" cy="457200"/>
           </a:xfrm>
           <a:prstGeom prst="rect">
@@ -6365,7 +6256,7 @@
           <a:bodyPr wrap="square" lIns="0" tIns="0" rIns="0" bIns="0" rtlCol="0" anchor="ctr"/>
           <a:lstStyle/>
           <a:p>
-            <a:pPr indent="0" marL="0">
+            <a:pPr marL="0" indent="0">
               <a:buNone/>
             </a:pPr>
             <a:r>
@@ -6377,7 +6268,7 @@
                 <a:ea typeface="Calibri" pitchFamily="34" charset="-122"/>
                 <a:cs typeface="Calibri" pitchFamily="34" charset="-120"/>
               </a:rPr>
-              <a:t>Externe Libs (Zustand, Redux) für große Projekte</a:t>
+              <a:t>useReducer für komplexe, zusammenhängende Logik</a:t>
             </a:r>
             <a:endParaRPr lang="en-US" sz="1600" dirty="0"/>
           </a:p>
@@ -6385,20 +6276,146 @@
       </p:sp>
       <p:pic>
         <p:nvPicPr>
-          <p:cNvPr id="15" name="Image 5" descr="preencoded.png">    </p:cNvPr>
+          <p:cNvPr id="11" name="Image 3" descr="preencoded.png"/>
           <p:cNvPicPr>
             <a:picLocks noChangeAspect="1"/>
           </p:cNvPicPr>
           <p:nvPr/>
         </p:nvPicPr>
         <p:blipFill>
-          <a:blip r:embed="rId6"/>
+          <a:blip r:embed="rId3"/>
           <a:stretch>
             <a:fillRect/>
           </a:stretch>
         </p:blipFill>
         <p:spPr>
           <a:xfrm>
+            <a:off x="914400" y="3063240"/>
+            <a:ext cx="320040" cy="320040"/>
+          </a:xfrm>
+          <a:prstGeom prst="rect">
+            <a:avLst/>
+          </a:prstGeom>
+        </p:spPr>
+      </p:pic>
+      <p:sp>
+        <p:nvSpPr>
+          <p:cNvPr id="12" name="Text 6"/>
+          <p:cNvSpPr/>
+          <p:nvPr/>
+        </p:nvSpPr>
+        <p:spPr>
+          <a:xfrm>
+            <a:off x="1463040" y="3017520"/>
+            <a:ext cx="6858000" cy="457200"/>
+          </a:xfrm>
+          <a:prstGeom prst="rect">
+            <a:avLst/>
+          </a:prstGeom>
+          <a:noFill/>
+          <a:ln/>
+        </p:spPr>
+        <p:txBody>
+          <a:bodyPr wrap="square" lIns="0" tIns="0" rIns="0" bIns="0" rtlCol="0" anchor="ctr"/>
+          <a:lstStyle/>
+          <a:p>
+            <a:pPr marL="0" indent="0">
+              <a:buNone/>
+            </a:pPr>
+            <a:r>
+              <a:rPr lang="en-US" sz="1600" dirty="0">
+                <a:solidFill>
+                  <a:srgbClr val="F8FAFC"/>
+                </a:solidFill>
+                <a:latin typeface="Calibri" pitchFamily="34" charset="0"/>
+                <a:ea typeface="Calibri" pitchFamily="34" charset="-122"/>
+                <a:cs typeface="Calibri" pitchFamily="34" charset="-120"/>
+              </a:rPr>
+              <a:t>Context API löst Prop Drilling</a:t>
+            </a:r>
+            <a:endParaRPr lang="en-US" sz="1600" dirty="0"/>
+          </a:p>
+        </p:txBody>
+      </p:sp>
+      <p:pic>
+        <p:nvPicPr>
+          <p:cNvPr id="13" name="Image 4" descr="preencoded.png"/>
+          <p:cNvPicPr>
+            <a:picLocks noChangeAspect="1"/>
+          </p:cNvPicPr>
+          <p:nvPr/>
+        </p:nvPicPr>
+        <p:blipFill>
+          <a:blip r:embed="rId3"/>
+          <a:stretch>
+            <a:fillRect/>
+          </a:stretch>
+        </p:blipFill>
+        <p:spPr>
+          <a:xfrm>
+            <a:off x="914400" y="3611880"/>
+            <a:ext cx="320040" cy="320040"/>
+          </a:xfrm>
+          <a:prstGeom prst="rect">
+            <a:avLst/>
+          </a:prstGeom>
+        </p:spPr>
+      </p:pic>
+      <p:sp>
+        <p:nvSpPr>
+          <p:cNvPr id="14" name="Text 7"/>
+          <p:cNvSpPr/>
+          <p:nvPr/>
+        </p:nvSpPr>
+        <p:spPr>
+          <a:xfrm>
+            <a:off x="1463040" y="3566160"/>
+            <a:ext cx="6858000" cy="457200"/>
+          </a:xfrm>
+          <a:prstGeom prst="rect">
+            <a:avLst/>
+          </a:prstGeom>
+          <a:noFill/>
+          <a:ln/>
+        </p:spPr>
+        <p:txBody>
+          <a:bodyPr wrap="square" lIns="0" tIns="0" rIns="0" bIns="0" rtlCol="0" anchor="ctr"/>
+          <a:lstStyle/>
+          <a:p>
+            <a:pPr marL="0" indent="0">
+              <a:buNone/>
+            </a:pPr>
+            <a:r>
+              <a:rPr lang="en-US" sz="1600" dirty="0">
+                <a:solidFill>
+                  <a:srgbClr val="F8FAFC"/>
+                </a:solidFill>
+                <a:latin typeface="Calibri" pitchFamily="34" charset="0"/>
+                <a:ea typeface="Calibri" pitchFamily="34" charset="-122"/>
+                <a:cs typeface="Calibri" pitchFamily="34" charset="-120"/>
+              </a:rPr>
+              <a:t>Externe Libs (Zustand, Redux) für große Projekte</a:t>
+            </a:r>
+            <a:endParaRPr lang="en-US" sz="1600" dirty="0"/>
+          </a:p>
+        </p:txBody>
+      </p:sp>
+      <p:pic>
+        <p:nvPicPr>
+          <p:cNvPr id="15" name="Image 5" descr="preencoded.png"/>
+          <p:cNvPicPr>
+            <a:picLocks noChangeAspect="1"/>
+          </p:cNvPicPr>
+          <p:nvPr/>
+        </p:nvPicPr>
+        <p:blipFill>
+          <a:blip r:embed="rId3"/>
+          <a:stretch>
+            <a:fillRect/>
+          </a:stretch>
+        </p:blipFill>
+        <p:spPr>
+          <a:xfrm>
             <a:off x="914400" y="4160520"/>
             <a:ext cx="320040" cy="320040"/>
           </a:xfrm>
@@ -6428,7 +6445,7 @@
           <a:bodyPr wrap="square" lIns="0" tIns="0" rIns="0" bIns="0" rtlCol="0" anchor="ctr"/>
           <a:lstStyle/>
           <a:p>
-            <a:pPr indent="0" marL="0">
+            <a:pPr marL="0" indent="0">
               <a:buNone/>
             </a:pPr>
             <a:r>
@@ -6462,6 +6479,7 @@
         <a:solidFill>
           <a:srgbClr val="0F1729"/>
         </a:solidFill>
+        <a:effectLst/>
       </p:bgPr>
     </p:bg>
     <p:spTree>
@@ -6499,6 +6517,13 @@
           </a:solidFill>
           <a:ln/>
         </p:spPr>
+        <p:txBody>
+          <a:bodyPr/>
+          <a:lstStyle/>
+          <a:p>
+            <a:endParaRPr lang="en-US"/>
+          </a:p>
+        </p:txBody>
       </p:sp>
       <p:sp>
         <p:nvSpPr>
@@ -6521,6 +6546,13 @@
           </a:solidFill>
           <a:ln/>
         </p:spPr>
+        <p:txBody>
+          <a:bodyPr/>
+          <a:lstStyle/>
+          <a:p>
+            <a:endParaRPr lang="en-US"/>
+          </a:p>
+        </p:txBody>
       </p:sp>
       <p:sp>
         <p:nvSpPr>
@@ -6543,7 +6575,7 @@
           <a:bodyPr wrap="square" lIns="0" tIns="0" rIns="0" bIns="0" rtlCol="0" anchor="ctr"/>
           <a:lstStyle/>
           <a:p>
-            <a:pPr algn="ctr" indent="0" marL="0">
+            <a:pPr marL="0" indent="0" algn="ctr">
               <a:buNone/>
             </a:pPr>
             <a:r>
@@ -6582,7 +6614,7 @@
           <a:bodyPr wrap="square" lIns="0" tIns="0" rIns="0" bIns="0" rtlCol="0" anchor="ctr"/>
           <a:lstStyle/>
           <a:p>
-            <a:pPr algn="ctr" indent="0" marL="0">
+            <a:pPr marL="0" indent="0" algn="ctr">
               <a:buNone/>
             </a:pPr>
             <a:r>
@@ -6616,6 +6648,7 @@
         <a:solidFill>
           <a:srgbClr val="0F1729"/>
         </a:solidFill>
+        <a:effectLst/>
       </p:bgPr>
     </p:bg>
     <p:spTree>
@@ -6653,7 +6686,7 @@
           <a:bodyPr wrap="square" lIns="0" tIns="0" rIns="0" bIns="0" rtlCol="0" anchor="ctr"/>
           <a:lstStyle/>
           <a:p>
-            <a:pPr indent="0" marL="0">
+            <a:pPr marL="0" indent="0">
               <a:buNone/>
             </a:pPr>
             <a:r>
@@ -6690,6 +6723,13 @@
           </a:solidFill>
           <a:ln/>
         </p:spPr>
+        <p:txBody>
+          <a:bodyPr/>
+          <a:lstStyle/>
+          <a:p>
+            <a:endParaRPr lang="en-US"/>
+          </a:p>
+        </p:txBody>
       </p:sp>
       <p:sp>
         <p:nvSpPr>
@@ -6712,258 +6752,17 @@
           </a:solidFill>
           <a:ln/>
         </p:spPr>
+        <p:txBody>
+          <a:bodyPr/>
+          <a:lstStyle/>
+          <a:p>
+            <a:endParaRPr lang="en-US"/>
+          </a:p>
+        </p:txBody>
       </p:sp>
       <p:pic>
         <p:nvPicPr>
-          <p:cNvPr id="5" name="Image 0" descr="preencoded.png">    </p:cNvPr>
-          <p:cNvPicPr>
-            <a:picLocks noChangeAspect="1"/>
-          </p:cNvPicPr>
-          <p:nvPr/>
-        </p:nvPicPr>
-        <p:blipFill>
-          <a:blip r:embed="rId1"/>
-          <a:stretch>
-            <a:fillRect/>
-          </a:stretch>
-        </p:blipFill>
-        <p:spPr>
-          <a:xfrm>
-            <a:off x="914400" y="1463040"/>
-            <a:ext cx="320040" cy="320040"/>
-          </a:xfrm>
-          <a:prstGeom prst="rect">
-            <a:avLst/>
-          </a:prstGeom>
-        </p:spPr>
-      </p:pic>
-      <p:sp>
-        <p:nvSpPr>
-          <p:cNvPr id="6" name="Text 3"/>
-          <p:cNvSpPr/>
-          <p:nvPr/>
-        </p:nvSpPr>
-        <p:spPr>
-          <a:xfrm>
-            <a:off x="1417320" y="1371600"/>
-            <a:ext cx="3200400" cy="502920"/>
-          </a:xfrm>
-          <a:prstGeom prst="rect">
-            <a:avLst/>
-          </a:prstGeom>
-          <a:noFill/>
-          <a:ln/>
-        </p:spPr>
-        <p:txBody>
-          <a:bodyPr wrap="square" lIns="0" tIns="0" rIns="0" bIns="0" rtlCol="0" anchor="ctr"/>
-          <a:lstStyle/>
-          <a:p>
-            <a:pPr indent="0" marL="0">
-              <a:buNone/>
-            </a:pPr>
-            <a:r>
-              <a:rPr lang="en-US" sz="1500" b="1" dirty="0">
-                <a:solidFill>
-                  <a:srgbClr val="F8FAFC"/>
-                </a:solidFill>
-                <a:latin typeface="Trebuchet MS" pitchFamily="34" charset="0"/>
-                <a:ea typeface="Trebuchet MS" pitchFamily="34" charset="-122"/>
-                <a:cs typeface="Trebuchet MS" pitchFamily="34" charset="-120"/>
-              </a:rPr>
-              <a:t>Warum State Management?</a:t>
-            </a:r>
-            <a:endParaRPr lang="en-US" sz="1500" dirty="0"/>
-          </a:p>
-        </p:txBody>
-      </p:sp>
-      <p:sp>
-        <p:nvSpPr>
-          <p:cNvPr id="7" name="Text 4"/>
-          <p:cNvSpPr/>
-          <p:nvPr/>
-        </p:nvSpPr>
-        <p:spPr>
-          <a:xfrm>
-            <a:off x="4754880" y="1371600"/>
-            <a:ext cx="3474720" cy="502920"/>
-          </a:xfrm>
-          <a:prstGeom prst="rect">
-            <a:avLst/>
-          </a:prstGeom>
-          <a:noFill/>
-          <a:ln/>
-        </p:spPr>
-        <p:txBody>
-          <a:bodyPr wrap="square" lIns="0" tIns="0" rIns="0" bIns="0" rtlCol="0" anchor="ctr"/>
-          <a:lstStyle/>
-          <a:p>
-            <a:pPr indent="0" marL="0">
-              <a:buNone/>
-            </a:pPr>
-            <a:r>
-              <a:rPr lang="en-US" sz="1300" dirty="0">
-                <a:solidFill>
-                  <a:srgbClr val="94A3B8"/>
-                </a:solidFill>
-                <a:latin typeface="Calibri" pitchFamily="34" charset="0"/>
-                <a:ea typeface="Calibri" pitchFamily="34" charset="-122"/>
-                <a:cs typeface="Calibri" pitchFamily="34" charset="-120"/>
-              </a:rPr>
-              <a:t>Das Problem mit Prop Drilling</a:t>
-            </a:r>
-            <a:endParaRPr lang="en-US" sz="1300" dirty="0"/>
-          </a:p>
-        </p:txBody>
-      </p:sp>
-      <p:sp>
-        <p:nvSpPr>
-          <p:cNvPr id="8" name="Shape 5"/>
-          <p:cNvSpPr/>
-          <p:nvPr/>
-        </p:nvSpPr>
-        <p:spPr>
-          <a:xfrm>
-            <a:off x="731520" y="1965960"/>
-            <a:ext cx="7680960" cy="502920"/>
-          </a:xfrm>
-          <a:prstGeom prst="roundRect">
-            <a:avLst>
-              <a:gd name="adj" fmla="val 9091"/>
-            </a:avLst>
-          </a:prstGeom>
-          <a:solidFill>
-            <a:srgbClr val="1A2744"/>
-          </a:solidFill>
-          <a:ln/>
-        </p:spPr>
-      </p:sp>
-      <p:pic>
-        <p:nvPicPr>
-          <p:cNvPr id="9" name="Image 1" descr="preencoded.png">    </p:cNvPr>
-          <p:cNvPicPr>
-            <a:picLocks noChangeAspect="1"/>
-          </p:cNvPicPr>
-          <p:nvPr/>
-        </p:nvPicPr>
-        <p:blipFill>
-          <a:blip r:embed="rId2"/>
-          <a:stretch>
-            <a:fillRect/>
-          </a:stretch>
-        </p:blipFill>
-        <p:spPr>
-          <a:xfrm>
-            <a:off x="914400" y="2057400"/>
-            <a:ext cx="320040" cy="320040"/>
-          </a:xfrm>
-          <a:prstGeom prst="rect">
-            <a:avLst/>
-          </a:prstGeom>
-        </p:spPr>
-      </p:pic>
-      <p:sp>
-        <p:nvSpPr>
-          <p:cNvPr id="10" name="Text 6"/>
-          <p:cNvSpPr/>
-          <p:nvPr/>
-        </p:nvSpPr>
-        <p:spPr>
-          <a:xfrm>
-            <a:off x="1417320" y="1965960"/>
-            <a:ext cx="3200400" cy="502920"/>
-          </a:xfrm>
-          <a:prstGeom prst="rect">
-            <a:avLst/>
-          </a:prstGeom>
-          <a:noFill/>
-          <a:ln/>
-        </p:spPr>
-        <p:txBody>
-          <a:bodyPr wrap="square" lIns="0" tIns="0" rIns="0" bIns="0" rtlCol="0" anchor="ctr"/>
-          <a:lstStyle/>
-          <a:p>
-            <a:pPr indent="0" marL="0">
-              <a:buNone/>
-            </a:pPr>
-            <a:r>
-              <a:rPr lang="en-US" sz="1500" b="1" dirty="0">
-                <a:solidFill>
-                  <a:srgbClr val="F8FAFC"/>
-                </a:solidFill>
-                <a:latin typeface="Trebuchet MS" pitchFamily="34" charset="0"/>
-                <a:ea typeface="Trebuchet MS" pitchFamily="34" charset="-122"/>
-                <a:cs typeface="Trebuchet MS" pitchFamily="34" charset="-120"/>
-              </a:rPr>
-              <a:t>useState – Recap &amp; Grenzen</a:t>
-            </a:r>
-            <a:endParaRPr lang="en-US" sz="1500" dirty="0"/>
-          </a:p>
-        </p:txBody>
-      </p:sp>
-      <p:sp>
-        <p:nvSpPr>
-          <p:cNvPr id="11" name="Text 7"/>
-          <p:cNvSpPr/>
-          <p:nvPr/>
-        </p:nvSpPr>
-        <p:spPr>
-          <a:xfrm>
-            <a:off x="4754880" y="1965960"/>
-            <a:ext cx="3474720" cy="502920"/>
-          </a:xfrm>
-          <a:prstGeom prst="rect">
-            <a:avLst/>
-          </a:prstGeom>
-          <a:noFill/>
-          <a:ln/>
-        </p:spPr>
-        <p:txBody>
-          <a:bodyPr wrap="square" lIns="0" tIns="0" rIns="0" bIns="0" rtlCol="0" anchor="ctr"/>
-          <a:lstStyle/>
-          <a:p>
-            <a:pPr indent="0" marL="0">
-              <a:buNone/>
-            </a:pPr>
-            <a:r>
-              <a:rPr lang="en-US" sz="1300" dirty="0">
-                <a:solidFill>
-                  <a:srgbClr val="94A3B8"/>
-                </a:solidFill>
-                <a:latin typeface="Calibri" pitchFamily="34" charset="0"/>
-                <a:ea typeface="Calibri" pitchFamily="34" charset="-122"/>
-                <a:cs typeface="Calibri" pitchFamily="34" charset="-120"/>
-              </a:rPr>
-              <a:t>Wann reicht useState nicht mehr?</a:t>
-            </a:r>
-            <a:endParaRPr lang="en-US" sz="1300" dirty="0"/>
-          </a:p>
-        </p:txBody>
-      </p:sp>
-      <p:sp>
-        <p:nvSpPr>
-          <p:cNvPr id="12" name="Shape 8"/>
-          <p:cNvSpPr/>
-          <p:nvPr/>
-        </p:nvSpPr>
-        <p:spPr>
-          <a:xfrm>
-            <a:off x="731520" y="2560320"/>
-            <a:ext cx="7680960" cy="502920"/>
-          </a:xfrm>
-          <a:prstGeom prst="roundRect">
-            <a:avLst>
-              <a:gd name="adj" fmla="val 9091"/>
-            </a:avLst>
-          </a:prstGeom>
-          <a:solidFill>
-            <a:srgbClr val="1A2744"/>
-          </a:solidFill>
-          <a:ln/>
-        </p:spPr>
-      </p:sp>
-      <p:pic>
-        <p:nvPicPr>
-          <p:cNvPr id="13" name="Image 2" descr="preencoded.png">    </p:cNvPr>
+          <p:cNvPr id="5" name="Image 0" descr="preencoded.png"/>
           <p:cNvPicPr>
             <a:picLocks noChangeAspect="1"/>
           </p:cNvPicPr>
@@ -6977,7 +6776,7 @@
         </p:blipFill>
         <p:spPr>
           <a:xfrm>
-            <a:off x="914400" y="2651760"/>
+            <a:off x="914400" y="1463040"/>
             <a:ext cx="320040" cy="320040"/>
           </a:xfrm>
           <a:prstGeom prst="rect">
@@ -6987,13 +6786,13 @@
       </p:pic>
       <p:sp>
         <p:nvSpPr>
-          <p:cNvPr id="14" name="Text 9"/>
-          <p:cNvSpPr/>
-          <p:nvPr/>
-        </p:nvSpPr>
-        <p:spPr>
-          <a:xfrm>
-            <a:off x="1417320" y="2560320"/>
+          <p:cNvPr id="6" name="Text 3"/>
+          <p:cNvSpPr/>
+          <p:nvPr/>
+        </p:nvSpPr>
+        <p:spPr>
+          <a:xfrm>
+            <a:off x="1417320" y="1371600"/>
             <a:ext cx="3200400" cy="502920"/>
           </a:xfrm>
           <a:prstGeom prst="rect">
@@ -7006,7 +6805,7 @@
           <a:bodyPr wrap="square" lIns="0" tIns="0" rIns="0" bIns="0" rtlCol="0" anchor="ctr"/>
           <a:lstStyle/>
           <a:p>
-            <a:pPr indent="0" marL="0">
+            <a:pPr marL="0" indent="0">
               <a:buNone/>
             </a:pPr>
             <a:r>
@@ -7018,7 +6817,7 @@
                 <a:ea typeface="Trebuchet MS" pitchFamily="34" charset="-122"/>
                 <a:cs typeface="Trebuchet MS" pitchFamily="34" charset="-120"/>
               </a:rPr>
-              <a:t>useReducer</a:t>
+              <a:t>Warum State Management?</a:t>
             </a:r>
             <a:endParaRPr lang="en-US" sz="1500" dirty="0"/>
           </a:p>
@@ -7026,13 +6825,13 @@
       </p:sp>
       <p:sp>
         <p:nvSpPr>
-          <p:cNvPr id="15" name="Text 10"/>
-          <p:cNvSpPr/>
-          <p:nvPr/>
-        </p:nvSpPr>
-        <p:spPr>
-          <a:xfrm>
-            <a:off x="4754880" y="2560320"/>
+          <p:cNvPr id="7" name="Text 4"/>
+          <p:cNvSpPr/>
+          <p:nvPr/>
+        </p:nvSpPr>
+        <p:spPr>
+          <a:xfrm>
+            <a:off x="4754880" y="1371600"/>
             <a:ext cx="3474720" cy="502920"/>
           </a:xfrm>
           <a:prstGeom prst="rect">
@@ -7045,7 +6844,7 @@
           <a:bodyPr wrap="square" lIns="0" tIns="0" rIns="0" bIns="0" rtlCol="0" anchor="ctr"/>
           <a:lstStyle/>
           <a:p>
-            <a:pPr indent="0" marL="0">
+            <a:pPr marL="0" indent="0">
               <a:buNone/>
             </a:pPr>
             <a:r>
@@ -7057,7 +6856,7 @@
                 <a:ea typeface="Calibri" pitchFamily="34" charset="-122"/>
                 <a:cs typeface="Calibri" pitchFamily="34" charset="-120"/>
               </a:rPr>
-              <a:t>Komplexen State strukturieren</a:t>
+              <a:t>Das Problem mit Prop Drilling</a:t>
             </a:r>
             <a:endParaRPr lang="en-US" sz="1300" dirty="0"/>
           </a:p>
@@ -7065,13 +6864,13 @@
       </p:sp>
       <p:sp>
         <p:nvSpPr>
-          <p:cNvPr id="16" name="Shape 11"/>
-          <p:cNvSpPr/>
-          <p:nvPr/>
-        </p:nvSpPr>
-        <p:spPr>
-          <a:xfrm>
-            <a:off x="731520" y="3154680"/>
+          <p:cNvPr id="8" name="Shape 5"/>
+          <p:cNvSpPr/>
+          <p:nvPr/>
+        </p:nvSpPr>
+        <p:spPr>
+          <a:xfrm>
+            <a:off x="731520" y="1965960"/>
             <a:ext cx="7680960" cy="502920"/>
           </a:xfrm>
           <a:prstGeom prst="roundRect">
@@ -7084,10 +6883,17 @@
           </a:solidFill>
           <a:ln/>
         </p:spPr>
+        <p:txBody>
+          <a:bodyPr/>
+          <a:lstStyle/>
+          <a:p>
+            <a:endParaRPr lang="en-US"/>
+          </a:p>
+        </p:txBody>
       </p:sp>
       <p:pic>
         <p:nvPicPr>
-          <p:cNvPr id="17" name="Image 3" descr="preencoded.png">    </p:cNvPr>
+          <p:cNvPr id="9" name="Image 1" descr="preencoded.png"/>
           <p:cNvPicPr>
             <a:picLocks noChangeAspect="1"/>
           </p:cNvPicPr>
@@ -7101,7 +6907,7 @@
         </p:blipFill>
         <p:spPr>
           <a:xfrm>
-            <a:off x="914400" y="3246120"/>
+            <a:off x="914400" y="2057400"/>
             <a:ext cx="320040" cy="320040"/>
           </a:xfrm>
           <a:prstGeom prst="rect">
@@ -7111,13 +6917,13 @@
       </p:pic>
       <p:sp>
         <p:nvSpPr>
-          <p:cNvPr id="18" name="Text 12"/>
-          <p:cNvSpPr/>
-          <p:nvPr/>
-        </p:nvSpPr>
-        <p:spPr>
-          <a:xfrm>
-            <a:off x="1417320" y="3154680"/>
+          <p:cNvPr id="10" name="Text 6"/>
+          <p:cNvSpPr/>
+          <p:nvPr/>
+        </p:nvSpPr>
+        <p:spPr>
+          <a:xfrm>
+            <a:off x="1417320" y="1965960"/>
             <a:ext cx="3200400" cy="502920"/>
           </a:xfrm>
           <a:prstGeom prst="rect">
@@ -7130,7 +6936,7 @@
           <a:bodyPr wrap="square" lIns="0" tIns="0" rIns="0" bIns="0" rtlCol="0" anchor="ctr"/>
           <a:lstStyle/>
           <a:p>
-            <a:pPr indent="0" marL="0">
+            <a:pPr marL="0" indent="0">
               <a:buNone/>
             </a:pPr>
             <a:r>
@@ -7142,7 +6948,7 @@
                 <a:ea typeface="Trebuchet MS" pitchFamily="34" charset="-122"/>
                 <a:cs typeface="Trebuchet MS" pitchFamily="34" charset="-120"/>
               </a:rPr>
-              <a:t>Context API</a:t>
+              <a:t>useState – Recap &amp; Grenzen</a:t>
             </a:r>
             <a:endParaRPr lang="en-US" sz="1500" dirty="0"/>
           </a:p>
@@ -7150,13 +6956,13 @@
       </p:sp>
       <p:sp>
         <p:nvSpPr>
-          <p:cNvPr id="19" name="Text 13"/>
-          <p:cNvSpPr/>
-          <p:nvPr/>
-        </p:nvSpPr>
-        <p:spPr>
-          <a:xfrm>
-            <a:off x="4754880" y="3154680"/>
+          <p:cNvPr id="11" name="Text 7"/>
+          <p:cNvSpPr/>
+          <p:nvPr/>
+        </p:nvSpPr>
+        <p:spPr>
+          <a:xfrm>
+            <a:off x="4754880" y="1965960"/>
             <a:ext cx="3474720" cy="502920"/>
           </a:xfrm>
           <a:prstGeom prst="rect">
@@ -7169,7 +6975,7 @@
           <a:bodyPr wrap="square" lIns="0" tIns="0" rIns="0" bIns="0" rtlCol="0" anchor="ctr"/>
           <a:lstStyle/>
           <a:p>
-            <a:pPr indent="0" marL="0">
+            <a:pPr marL="0" indent="0">
               <a:buNone/>
             </a:pPr>
             <a:r>
@@ -7181,7 +6987,7 @@
                 <a:ea typeface="Calibri" pitchFamily="34" charset="-122"/>
                 <a:cs typeface="Calibri" pitchFamily="34" charset="-120"/>
               </a:rPr>
-              <a:t>State global teilen ohne Props</a:t>
+              <a:t>Wann reicht useState nicht mehr?</a:t>
             </a:r>
             <a:endParaRPr lang="en-US" sz="1300" dirty="0"/>
           </a:p>
@@ -7189,13 +6995,13 @@
       </p:sp>
       <p:sp>
         <p:nvSpPr>
-          <p:cNvPr id="20" name="Shape 14"/>
-          <p:cNvSpPr/>
-          <p:nvPr/>
-        </p:nvSpPr>
-        <p:spPr>
-          <a:xfrm>
-            <a:off x="731520" y="3749040"/>
+          <p:cNvPr id="12" name="Shape 8"/>
+          <p:cNvSpPr/>
+          <p:nvPr/>
+        </p:nvSpPr>
+        <p:spPr>
+          <a:xfrm>
+            <a:off x="731520" y="2560320"/>
             <a:ext cx="7680960" cy="502920"/>
           </a:xfrm>
           <a:prstGeom prst="roundRect">
@@ -7208,10 +7014,17 @@
           </a:solidFill>
           <a:ln/>
         </p:spPr>
+        <p:txBody>
+          <a:bodyPr/>
+          <a:lstStyle/>
+          <a:p>
+            <a:endParaRPr lang="en-US"/>
+          </a:p>
+        </p:txBody>
       </p:sp>
       <p:pic>
         <p:nvPicPr>
-          <p:cNvPr id="21" name="Image 4" descr="preencoded.png">    </p:cNvPr>
+          <p:cNvPr id="13" name="Image 2" descr="preencoded.png"/>
           <p:cNvPicPr>
             <a:picLocks noChangeAspect="1"/>
           </p:cNvPicPr>
@@ -7225,7 +7038,7 @@
         </p:blipFill>
         <p:spPr>
           <a:xfrm>
-            <a:off x="914400" y="3840480"/>
+            <a:off x="914400" y="2651760"/>
             <a:ext cx="320040" cy="320040"/>
           </a:xfrm>
           <a:prstGeom prst="rect">
@@ -7235,13 +7048,13 @@
       </p:pic>
       <p:sp>
         <p:nvSpPr>
-          <p:cNvPr id="22" name="Text 15"/>
-          <p:cNvSpPr/>
-          <p:nvPr/>
-        </p:nvSpPr>
-        <p:spPr>
-          <a:xfrm>
-            <a:off x="1417320" y="3749040"/>
+          <p:cNvPr id="14" name="Text 9"/>
+          <p:cNvSpPr/>
+          <p:nvPr/>
+        </p:nvSpPr>
+        <p:spPr>
+          <a:xfrm>
+            <a:off x="1417320" y="2560320"/>
             <a:ext cx="3200400" cy="502920"/>
           </a:xfrm>
           <a:prstGeom prst="rect">
@@ -7254,7 +7067,7 @@
           <a:bodyPr wrap="square" lIns="0" tIns="0" rIns="0" bIns="0" rtlCol="0" anchor="ctr"/>
           <a:lstStyle/>
           <a:p>
-            <a:pPr indent="0" marL="0">
+            <a:pPr marL="0" indent="0">
               <a:buNone/>
             </a:pPr>
             <a:r>
@@ -7266,7 +7079,7 @@
                 <a:ea typeface="Trebuchet MS" pitchFamily="34" charset="-122"/>
                 <a:cs typeface="Trebuchet MS" pitchFamily="34" charset="-120"/>
               </a:rPr>
-              <a:t>Externe Libraries</a:t>
+              <a:t>useReducer</a:t>
             </a:r>
             <a:endParaRPr lang="en-US" sz="1500" dirty="0"/>
           </a:p>
@@ -7274,13 +7087,13 @@
       </p:sp>
       <p:sp>
         <p:nvSpPr>
-          <p:cNvPr id="23" name="Text 16"/>
-          <p:cNvSpPr/>
-          <p:nvPr/>
-        </p:nvSpPr>
-        <p:spPr>
-          <a:xfrm>
-            <a:off x="4754880" y="3749040"/>
+          <p:cNvPr id="15" name="Text 10"/>
+          <p:cNvSpPr/>
+          <p:nvPr/>
+        </p:nvSpPr>
+        <p:spPr>
+          <a:xfrm>
+            <a:off x="4754880" y="2560320"/>
             <a:ext cx="3474720" cy="502920"/>
           </a:xfrm>
           <a:prstGeom prst="rect">
@@ -7293,7 +7106,7 @@
           <a:bodyPr wrap="square" lIns="0" tIns="0" rIns="0" bIns="0" rtlCol="0" anchor="ctr"/>
           <a:lstStyle/>
           <a:p>
-            <a:pPr indent="0" marL="0">
+            <a:pPr marL="0" indent="0">
               <a:buNone/>
             </a:pPr>
             <a:r>
@@ -7305,7 +7118,7 @@
                 <a:ea typeface="Calibri" pitchFamily="34" charset="-122"/>
                 <a:cs typeface="Calibri" pitchFamily="34" charset="-120"/>
               </a:rPr>
-              <a:t>Redux, Zustand &amp; Co.</a:t>
+              <a:t>Komplexen State strukturieren</a:t>
             </a:r>
             <a:endParaRPr lang="en-US" sz="1300" dirty="0"/>
           </a:p>
@@ -7313,13 +7126,13 @@
       </p:sp>
       <p:sp>
         <p:nvSpPr>
-          <p:cNvPr id="24" name="Shape 17"/>
-          <p:cNvSpPr/>
-          <p:nvPr/>
-        </p:nvSpPr>
-        <p:spPr>
-          <a:xfrm>
-            <a:off x="731520" y="4343400"/>
+          <p:cNvPr id="16" name="Shape 11"/>
+          <p:cNvSpPr/>
+          <p:nvPr/>
+        </p:nvSpPr>
+        <p:spPr>
+          <a:xfrm>
+            <a:off x="731520" y="3154680"/>
             <a:ext cx="7680960" cy="502920"/>
           </a:xfrm>
           <a:prstGeom prst="roundRect">
@@ -7332,10 +7145,17 @@
           </a:solidFill>
           <a:ln/>
         </p:spPr>
+        <p:txBody>
+          <a:bodyPr/>
+          <a:lstStyle/>
+          <a:p>
+            <a:endParaRPr lang="en-US"/>
+          </a:p>
+        </p:txBody>
       </p:sp>
       <p:pic>
         <p:nvPicPr>
-          <p:cNvPr id="25" name="Image 5" descr="preencoded.png">    </p:cNvPr>
+          <p:cNvPr id="17" name="Image 3" descr="preencoded.png"/>
           <p:cNvPicPr>
             <a:picLocks noChangeAspect="1"/>
           </p:cNvPicPr>
@@ -7349,7 +7169,7 @@
         </p:blipFill>
         <p:spPr>
           <a:xfrm>
-            <a:off x="914400" y="4434840"/>
+            <a:off x="914400" y="3246120"/>
             <a:ext cx="320040" cy="320040"/>
           </a:xfrm>
           <a:prstGeom prst="rect">
@@ -7359,13 +7179,13 @@
       </p:pic>
       <p:sp>
         <p:nvSpPr>
-          <p:cNvPr id="26" name="Text 18"/>
-          <p:cNvSpPr/>
-          <p:nvPr/>
-        </p:nvSpPr>
-        <p:spPr>
-          <a:xfrm>
-            <a:off x="1417320" y="4343400"/>
+          <p:cNvPr id="18" name="Text 12"/>
+          <p:cNvSpPr/>
+          <p:nvPr/>
+        </p:nvSpPr>
+        <p:spPr>
+          <a:xfrm>
+            <a:off x="1417320" y="3154680"/>
             <a:ext cx="3200400" cy="502920"/>
           </a:xfrm>
           <a:prstGeom prst="rect">
@@ -7378,7 +7198,7 @@
           <a:bodyPr wrap="square" lIns="0" tIns="0" rIns="0" bIns="0" rtlCol="0" anchor="ctr"/>
           <a:lstStyle/>
           <a:p>
-            <a:pPr indent="0" marL="0">
+            <a:pPr marL="0" indent="0">
               <a:buNone/>
             </a:pPr>
             <a:r>
@@ -7390,6 +7210,268 @@
                 <a:ea typeface="Trebuchet MS" pitchFamily="34" charset="-122"/>
                 <a:cs typeface="Trebuchet MS" pitchFamily="34" charset="-120"/>
               </a:rPr>
+              <a:t>Context API</a:t>
+            </a:r>
+            <a:endParaRPr lang="en-US" sz="1500" dirty="0"/>
+          </a:p>
+        </p:txBody>
+      </p:sp>
+      <p:sp>
+        <p:nvSpPr>
+          <p:cNvPr id="19" name="Text 13"/>
+          <p:cNvSpPr/>
+          <p:nvPr/>
+        </p:nvSpPr>
+        <p:spPr>
+          <a:xfrm>
+            <a:off x="4754880" y="3154680"/>
+            <a:ext cx="3474720" cy="502920"/>
+          </a:xfrm>
+          <a:prstGeom prst="rect">
+            <a:avLst/>
+          </a:prstGeom>
+          <a:noFill/>
+          <a:ln/>
+        </p:spPr>
+        <p:txBody>
+          <a:bodyPr wrap="square" lIns="0" tIns="0" rIns="0" bIns="0" rtlCol="0" anchor="ctr"/>
+          <a:lstStyle/>
+          <a:p>
+            <a:pPr marL="0" indent="0">
+              <a:buNone/>
+            </a:pPr>
+            <a:r>
+              <a:rPr lang="en-US" sz="1300" dirty="0">
+                <a:solidFill>
+                  <a:srgbClr val="94A3B8"/>
+                </a:solidFill>
+                <a:latin typeface="Calibri" pitchFamily="34" charset="0"/>
+                <a:ea typeface="Calibri" pitchFamily="34" charset="-122"/>
+                <a:cs typeface="Calibri" pitchFamily="34" charset="-120"/>
+              </a:rPr>
+              <a:t>State global teilen ohne Props</a:t>
+            </a:r>
+            <a:endParaRPr lang="en-US" sz="1300" dirty="0"/>
+          </a:p>
+        </p:txBody>
+      </p:sp>
+      <p:sp>
+        <p:nvSpPr>
+          <p:cNvPr id="20" name="Shape 14"/>
+          <p:cNvSpPr/>
+          <p:nvPr/>
+        </p:nvSpPr>
+        <p:spPr>
+          <a:xfrm>
+            <a:off x="731520" y="3749040"/>
+            <a:ext cx="7680960" cy="502920"/>
+          </a:xfrm>
+          <a:prstGeom prst="roundRect">
+            <a:avLst>
+              <a:gd name="adj" fmla="val 9091"/>
+            </a:avLst>
+          </a:prstGeom>
+          <a:solidFill>
+            <a:srgbClr val="1A2744"/>
+          </a:solidFill>
+          <a:ln/>
+        </p:spPr>
+        <p:txBody>
+          <a:bodyPr/>
+          <a:lstStyle/>
+          <a:p>
+            <a:endParaRPr lang="en-US"/>
+          </a:p>
+        </p:txBody>
+      </p:sp>
+      <p:pic>
+        <p:nvPicPr>
+          <p:cNvPr id="21" name="Image 4" descr="preencoded.png"/>
+          <p:cNvPicPr>
+            <a:picLocks noChangeAspect="1"/>
+          </p:cNvPicPr>
+          <p:nvPr/>
+        </p:nvPicPr>
+        <p:blipFill>
+          <a:blip r:embed="rId7"/>
+          <a:stretch>
+            <a:fillRect/>
+          </a:stretch>
+        </p:blipFill>
+        <p:spPr>
+          <a:xfrm>
+            <a:off x="914400" y="3840480"/>
+            <a:ext cx="320040" cy="320040"/>
+          </a:xfrm>
+          <a:prstGeom prst="rect">
+            <a:avLst/>
+          </a:prstGeom>
+        </p:spPr>
+      </p:pic>
+      <p:sp>
+        <p:nvSpPr>
+          <p:cNvPr id="22" name="Text 15"/>
+          <p:cNvSpPr/>
+          <p:nvPr/>
+        </p:nvSpPr>
+        <p:spPr>
+          <a:xfrm>
+            <a:off x="1417320" y="3749040"/>
+            <a:ext cx="3200400" cy="502920"/>
+          </a:xfrm>
+          <a:prstGeom prst="rect">
+            <a:avLst/>
+          </a:prstGeom>
+          <a:noFill/>
+          <a:ln/>
+        </p:spPr>
+        <p:txBody>
+          <a:bodyPr wrap="square" lIns="0" tIns="0" rIns="0" bIns="0" rtlCol="0" anchor="ctr"/>
+          <a:lstStyle/>
+          <a:p>
+            <a:pPr marL="0" indent="0">
+              <a:buNone/>
+            </a:pPr>
+            <a:r>
+              <a:rPr lang="en-US" sz="1500" b="1" dirty="0">
+                <a:solidFill>
+                  <a:srgbClr val="F8FAFC"/>
+                </a:solidFill>
+                <a:latin typeface="Trebuchet MS" pitchFamily="34" charset="0"/>
+                <a:ea typeface="Trebuchet MS" pitchFamily="34" charset="-122"/>
+                <a:cs typeface="Trebuchet MS" pitchFamily="34" charset="-120"/>
+              </a:rPr>
+              <a:t>Externe Libraries</a:t>
+            </a:r>
+            <a:endParaRPr lang="en-US" sz="1500" dirty="0"/>
+          </a:p>
+        </p:txBody>
+      </p:sp>
+      <p:sp>
+        <p:nvSpPr>
+          <p:cNvPr id="23" name="Text 16"/>
+          <p:cNvSpPr/>
+          <p:nvPr/>
+        </p:nvSpPr>
+        <p:spPr>
+          <a:xfrm>
+            <a:off x="4754880" y="3749040"/>
+            <a:ext cx="3474720" cy="502920"/>
+          </a:xfrm>
+          <a:prstGeom prst="rect">
+            <a:avLst/>
+          </a:prstGeom>
+          <a:noFill/>
+          <a:ln/>
+        </p:spPr>
+        <p:txBody>
+          <a:bodyPr wrap="square" lIns="0" tIns="0" rIns="0" bIns="0" rtlCol="0" anchor="ctr"/>
+          <a:lstStyle/>
+          <a:p>
+            <a:pPr marL="0" indent="0">
+              <a:buNone/>
+            </a:pPr>
+            <a:r>
+              <a:rPr lang="en-US" sz="1300" dirty="0">
+                <a:solidFill>
+                  <a:srgbClr val="94A3B8"/>
+                </a:solidFill>
+                <a:latin typeface="Calibri" pitchFamily="34" charset="0"/>
+                <a:ea typeface="Calibri" pitchFamily="34" charset="-122"/>
+                <a:cs typeface="Calibri" pitchFamily="34" charset="-120"/>
+              </a:rPr>
+              <a:t>Redux, Zustand &amp; Co.</a:t>
+            </a:r>
+            <a:endParaRPr lang="en-US" sz="1300" dirty="0"/>
+          </a:p>
+        </p:txBody>
+      </p:sp>
+      <p:sp>
+        <p:nvSpPr>
+          <p:cNvPr id="24" name="Shape 17"/>
+          <p:cNvSpPr/>
+          <p:nvPr/>
+        </p:nvSpPr>
+        <p:spPr>
+          <a:xfrm>
+            <a:off x="731520" y="4343400"/>
+            <a:ext cx="7680960" cy="502920"/>
+          </a:xfrm>
+          <a:prstGeom prst="roundRect">
+            <a:avLst>
+              <a:gd name="adj" fmla="val 9091"/>
+            </a:avLst>
+          </a:prstGeom>
+          <a:solidFill>
+            <a:srgbClr val="1A2744"/>
+          </a:solidFill>
+          <a:ln/>
+        </p:spPr>
+        <p:txBody>
+          <a:bodyPr/>
+          <a:lstStyle/>
+          <a:p>
+            <a:endParaRPr lang="en-US"/>
+          </a:p>
+        </p:txBody>
+      </p:sp>
+      <p:pic>
+        <p:nvPicPr>
+          <p:cNvPr id="25" name="Image 5" descr="preencoded.png"/>
+          <p:cNvPicPr>
+            <a:picLocks noChangeAspect="1"/>
+          </p:cNvPicPr>
+          <p:nvPr/>
+        </p:nvPicPr>
+        <p:blipFill>
+          <a:blip r:embed="rId8"/>
+          <a:stretch>
+            <a:fillRect/>
+          </a:stretch>
+        </p:blipFill>
+        <p:spPr>
+          <a:xfrm>
+            <a:off x="914400" y="4434840"/>
+            <a:ext cx="320040" cy="320040"/>
+          </a:xfrm>
+          <a:prstGeom prst="rect">
+            <a:avLst/>
+          </a:prstGeom>
+        </p:spPr>
+      </p:pic>
+      <p:sp>
+        <p:nvSpPr>
+          <p:cNvPr id="26" name="Text 18"/>
+          <p:cNvSpPr/>
+          <p:nvPr/>
+        </p:nvSpPr>
+        <p:spPr>
+          <a:xfrm>
+            <a:off x="1417320" y="4343400"/>
+            <a:ext cx="3200400" cy="502920"/>
+          </a:xfrm>
+          <a:prstGeom prst="rect">
+            <a:avLst/>
+          </a:prstGeom>
+          <a:noFill/>
+          <a:ln/>
+        </p:spPr>
+        <p:txBody>
+          <a:bodyPr wrap="square" lIns="0" tIns="0" rIns="0" bIns="0" rtlCol="0" anchor="ctr"/>
+          <a:lstStyle/>
+          <a:p>
+            <a:pPr marL="0" indent="0">
+              <a:buNone/>
+            </a:pPr>
+            <a:r>
+              <a:rPr lang="en-US" sz="1500" b="1" dirty="0">
+                <a:solidFill>
+                  <a:srgbClr val="F8FAFC"/>
+                </a:solidFill>
+                <a:latin typeface="Trebuchet MS" pitchFamily="34" charset="0"/>
+                <a:ea typeface="Trebuchet MS" pitchFamily="34" charset="-122"/>
+                <a:cs typeface="Trebuchet MS" pitchFamily="34" charset="-120"/>
+              </a:rPr>
               <a:t>Vergleich &amp; Empfehlung</a:t>
             </a:r>
             <a:endParaRPr lang="en-US" sz="1500" dirty="0"/>
@@ -7417,7 +7499,7 @@
           <a:bodyPr wrap="square" lIns="0" tIns="0" rIns="0" bIns="0" rtlCol="0" anchor="ctr"/>
           <a:lstStyle/>
           <a:p>
-            <a:pPr indent="0" marL="0">
+            <a:pPr marL="0" indent="0">
               <a:buNone/>
             </a:pPr>
             <a:r>
@@ -7451,6 +7533,7 @@
         <a:solidFill>
           <a:srgbClr val="0F1729"/>
         </a:solidFill>
+        <a:effectLst/>
       </p:bgPr>
     </p:bg>
     <p:spTree>
@@ -7488,7 +7571,7 @@
           <a:bodyPr wrap="square" lIns="0" tIns="0" rIns="0" bIns="0" rtlCol="0" anchor="ctr"/>
           <a:lstStyle/>
           <a:p>
-            <a:pPr indent="0" marL="0">
+            <a:pPr marL="0" indent="0">
               <a:buNone/>
             </a:pPr>
             <a:r>
@@ -7525,6 +7608,13 @@
           </a:solidFill>
           <a:ln/>
         </p:spPr>
+        <p:txBody>
+          <a:bodyPr/>
+          <a:lstStyle/>
+          <a:p>
+            <a:endParaRPr lang="en-US"/>
+          </a:p>
+        </p:txBody>
       </p:sp>
       <p:sp>
         <p:nvSpPr>
@@ -7547,7 +7637,7 @@
           <a:bodyPr wrap="square" lIns="0" tIns="0" rIns="0" bIns="0" rtlCol="0" anchor="ctr"/>
           <a:lstStyle/>
           <a:p>
-            <a:pPr indent="0" marL="0">
+            <a:pPr marL="0" indent="0">
               <a:buNone/>
             </a:pPr>
             <a:r>
@@ -7692,17 +7782,24 @@
           </a:solidFill>
           <a:ln/>
         </p:spPr>
+        <p:txBody>
+          <a:bodyPr/>
+          <a:lstStyle/>
+          <a:p>
+            <a:endParaRPr lang="en-US"/>
+          </a:p>
+        </p:txBody>
       </p:sp>
       <p:pic>
         <p:nvPicPr>
-          <p:cNvPr id="7" name="Image 0" descr="preencoded.png">    </p:cNvPr>
+          <p:cNvPr id="7" name="Image 0" descr="preencoded.png"/>
           <p:cNvPicPr>
             <a:picLocks noChangeAspect="1"/>
           </p:cNvPicPr>
           <p:nvPr/>
         </p:nvPicPr>
         <p:blipFill>
-          <a:blip r:embed="rId1"/>
+          <a:blip r:embed="rId3"/>
           <a:stretch>
             <a:fillRect/>
           </a:stretch>
@@ -7738,7 +7835,7 @@
           <a:bodyPr wrap="square" lIns="0" tIns="0" rIns="0" bIns="0" rtlCol="0" anchor="ctr"/>
           <a:lstStyle/>
           <a:p>
-            <a:pPr algn="ctr" indent="0" marL="0">
+            <a:pPr marL="0" indent="0" algn="ctr">
               <a:buNone/>
             </a:pPr>
             <a:r>
@@ -7777,7 +7874,7 @@
           <a:bodyPr wrap="square" lIns="0" tIns="0" rIns="0" bIns="0" rtlCol="0" anchor="ctr"/>
           <a:lstStyle/>
           <a:p>
-            <a:pPr algn="ctr" indent="0" marL="0">
+            <a:pPr marL="0" indent="0" algn="ctr">
               <a:buNone/>
             </a:pPr>
             <a:r>
@@ -7811,6 +7908,7 @@
         <a:solidFill>
           <a:srgbClr val="0F1729"/>
         </a:solidFill>
+        <a:effectLst/>
       </p:bgPr>
     </p:bg>
     <p:spTree>
@@ -7848,7 +7946,7 @@
           <a:bodyPr wrap="square" lIns="0" tIns="0" rIns="0" bIns="0" rtlCol="0" anchor="ctr"/>
           <a:lstStyle/>
           <a:p>
-            <a:pPr indent="0" marL="0">
+            <a:pPr marL="0" indent="0">
               <a:buNone/>
             </a:pPr>
             <a:r>
@@ -7885,6 +7983,13 @@
           </a:solidFill>
           <a:ln/>
         </p:spPr>
+        <p:txBody>
+          <a:bodyPr/>
+          <a:lstStyle/>
+          <a:p>
+            <a:endParaRPr lang="en-US"/>
+          </a:p>
+        </p:txBody>
       </p:sp>
       <p:sp>
         <p:nvSpPr>
@@ -7907,7 +8012,7 @@
           <a:bodyPr wrap="square" lIns="0" tIns="0" rIns="0" bIns="0" rtlCol="0" anchor="ctr"/>
           <a:lstStyle/>
           <a:p>
-            <a:pPr indent="0" marL="0">
+            <a:pPr marL="0" indent="0">
               <a:buNone/>
             </a:pPr>
             <a:r>
@@ -7946,6 +8051,13 @@
           </a:solidFill>
           <a:ln/>
         </p:spPr>
+        <p:txBody>
+          <a:bodyPr/>
+          <a:lstStyle/>
+          <a:p>
+            <a:endParaRPr lang="en-US"/>
+          </a:p>
+        </p:txBody>
       </p:sp>
       <p:sp>
         <p:nvSpPr>
@@ -7968,7 +8080,7 @@
           <a:bodyPr wrap="square" lIns="0" tIns="0" rIns="0" bIns="0" rtlCol="0" anchor="ctr"/>
           <a:lstStyle/>
           <a:p>
-            <a:pPr algn="ctr" indent="0" marL="0">
+            <a:pPr marL="0" indent="0" algn="ctr">
               <a:buNone/>
             </a:pPr>
             <a:r>
@@ -8008,6 +8120,13 @@
             <a:prstDash val="solid"/>
           </a:ln>
         </p:spPr>
+        <p:txBody>
+          <a:bodyPr/>
+          <a:lstStyle/>
+          <a:p>
+            <a:endParaRPr lang="en-US"/>
+          </a:p>
+        </p:txBody>
       </p:sp>
       <p:sp>
         <p:nvSpPr>
@@ -8030,6 +8149,13 @@
           </a:solidFill>
           <a:ln/>
         </p:spPr>
+        <p:txBody>
+          <a:bodyPr/>
+          <a:lstStyle/>
+          <a:p>
+            <a:endParaRPr lang="en-US"/>
+          </a:p>
+        </p:txBody>
       </p:sp>
       <p:sp>
         <p:nvSpPr>
@@ -8052,7 +8178,7 @@
           <a:bodyPr wrap="square" lIns="0" tIns="0" rIns="0" bIns="0" rtlCol="0" anchor="ctr"/>
           <a:lstStyle/>
           <a:p>
-            <a:pPr algn="ctr" indent="0" marL="0">
+            <a:pPr marL="0" indent="0" algn="ctr">
               <a:buNone/>
             </a:pPr>
             <a:r>
@@ -8092,6 +8218,13 @@
             <a:prstDash val="solid"/>
           </a:ln>
         </p:spPr>
+        <p:txBody>
+          <a:bodyPr/>
+          <a:lstStyle/>
+          <a:p>
+            <a:endParaRPr lang="en-US"/>
+          </a:p>
+        </p:txBody>
       </p:sp>
       <p:sp>
         <p:nvSpPr>
@@ -8114,6 +8247,13 @@
           </a:solidFill>
           <a:ln/>
         </p:spPr>
+        <p:txBody>
+          <a:bodyPr/>
+          <a:lstStyle/>
+          <a:p>
+            <a:endParaRPr lang="en-US"/>
+          </a:p>
+        </p:txBody>
       </p:sp>
       <p:sp>
         <p:nvSpPr>
@@ -8136,7 +8276,7 @@
           <a:bodyPr wrap="square" lIns="0" tIns="0" rIns="0" bIns="0" rtlCol="0" anchor="ctr"/>
           <a:lstStyle/>
           <a:p>
-            <a:pPr algn="ctr" indent="0" marL="0">
+            <a:pPr marL="0" indent="0" algn="ctr">
               <a:buNone/>
             </a:pPr>
             <a:r>
@@ -8176,6 +8316,13 @@
             <a:prstDash val="solid"/>
           </a:ln>
         </p:spPr>
+        <p:txBody>
+          <a:bodyPr/>
+          <a:lstStyle/>
+          <a:p>
+            <a:endParaRPr lang="en-US"/>
+          </a:p>
+        </p:txBody>
       </p:sp>
       <p:sp>
         <p:nvSpPr>
@@ -8198,6 +8345,13 @@
           </a:solidFill>
           <a:ln/>
         </p:spPr>
+        <p:txBody>
+          <a:bodyPr/>
+          <a:lstStyle/>
+          <a:p>
+            <a:endParaRPr lang="en-US"/>
+          </a:p>
+        </p:txBody>
       </p:sp>
       <p:sp>
         <p:nvSpPr>
@@ -8220,7 +8374,7 @@
           <a:bodyPr wrap="square" lIns="0" tIns="0" rIns="0" bIns="0" rtlCol="0" anchor="ctr"/>
           <a:lstStyle/>
           <a:p>
-            <a:pPr algn="ctr" indent="0" marL="0">
+            <a:pPr marL="0" indent="0" algn="ctr">
               <a:buNone/>
             </a:pPr>
             <a:r>
@@ -8259,7 +8413,7 @@
           <a:bodyPr wrap="square" lIns="0" tIns="0" rIns="0" bIns="0" rtlCol="0" anchor="ctr"/>
           <a:lstStyle/>
           <a:p>
-            <a:pPr indent="0" marL="0">
+            <a:pPr marL="0" indent="0">
               <a:buNone/>
             </a:pPr>
             <a:r>
@@ -8298,7 +8452,7 @@
           <a:bodyPr wrap="square" lIns="0" tIns="0" rIns="0" bIns="0" rtlCol="0" anchor="ctr"/>
           <a:lstStyle/>
           <a:p>
-            <a:pPr indent="0" marL="0">
+            <a:pPr marL="0" indent="0">
               <a:buNone/>
             </a:pPr>
             <a:r>
@@ -8332,6 +8486,7 @@
         <a:solidFill>
           <a:srgbClr val="0F1729"/>
         </a:solidFill>
+        <a:effectLst/>
       </p:bgPr>
     </p:bg>
     <p:spTree>
@@ -8369,7 +8524,7 @@
           <a:bodyPr wrap="square" lIns="0" tIns="0" rIns="0" bIns="0" rtlCol="0" anchor="ctr"/>
           <a:lstStyle/>
           <a:p>
-            <a:pPr indent="0" marL="0">
+            <a:pPr marL="0" indent="0">
               <a:buNone/>
             </a:pPr>
             <a:r>
@@ -8406,6 +8561,13 @@
           </a:solidFill>
           <a:ln/>
         </p:spPr>
+        <p:txBody>
+          <a:bodyPr/>
+          <a:lstStyle/>
+          <a:p>
+            <a:endParaRPr lang="en-US"/>
+          </a:p>
+        </p:txBody>
       </p:sp>
       <p:sp>
         <p:nvSpPr>
@@ -8428,6 +8590,13 @@
           </a:solidFill>
           <a:ln/>
         </p:spPr>
+        <p:txBody>
+          <a:bodyPr/>
+          <a:lstStyle/>
+          <a:p>
+            <a:endParaRPr lang="en-US"/>
+          </a:p>
+        </p:txBody>
       </p:sp>
       <p:sp>
         <p:nvSpPr>
@@ -8450,7 +8619,7 @@
           <a:bodyPr wrap="square" rtlCol="0" anchor="t"/>
           <a:lstStyle/>
           <a:p>
-            <a:pPr indent="0" marL="0">
+            <a:pPr marL="0" indent="0">
               <a:buNone/>
             </a:pPr>
             <a:r>
@@ -8467,13 +8636,13 @@
             <a:endParaRPr lang="en-US" sz="1300" dirty="0"/>
           </a:p>
           <a:p>
-            <a:pPr indent="0" marL="0">
+            <a:pPr marL="0" indent="0">
               <a:buNone/>
             </a:pPr>
             <a:endParaRPr lang="en-US" sz="1300" dirty="0"/>
           </a:p>
           <a:p>
-            <a:pPr indent="0" marL="0">
+            <a:pPr marL="0" indent="0">
               <a:buNone/>
             </a:pPr>
             <a:r>
@@ -8490,13 +8659,13 @@
             <a:endParaRPr lang="en-US" sz="1300" dirty="0"/>
           </a:p>
           <a:p>
-            <a:pPr indent="0" marL="0">
+            <a:pPr marL="0" indent="0">
               <a:buNone/>
             </a:pPr>
             <a:endParaRPr lang="en-US" sz="1300" dirty="0"/>
           </a:p>
           <a:p>
-            <a:pPr indent="0" marL="0">
+            <a:pPr marL="0" indent="0">
               <a:buNone/>
             </a:pPr>
             <a:r>
@@ -8513,7 +8682,7 @@
             <a:endParaRPr lang="en-US" sz="1300" dirty="0"/>
           </a:p>
           <a:p>
-            <a:pPr indent="0" marL="0">
+            <a:pPr marL="0" indent="0">
               <a:buNone/>
             </a:pPr>
             <a:r>
@@ -8552,17 +8721,24 @@
           </a:solidFill>
           <a:ln/>
         </p:spPr>
+        <p:txBody>
+          <a:bodyPr/>
+          <a:lstStyle/>
+          <a:p>
+            <a:endParaRPr lang="en-US"/>
+          </a:p>
+        </p:txBody>
       </p:sp>
       <p:pic>
         <p:nvPicPr>
-          <p:cNvPr id="7" name="Image 0" descr="preencoded.png">    </p:cNvPr>
+          <p:cNvPr id="7" name="Image 0" descr="preencoded.png"/>
           <p:cNvPicPr>
             <a:picLocks noChangeAspect="1"/>
           </p:cNvPicPr>
           <p:nvPr/>
         </p:nvPicPr>
         <p:blipFill>
-          <a:blip r:embed="rId1"/>
+          <a:blip r:embed="rId3"/>
           <a:stretch>
             <a:fillRect/>
           </a:stretch>
@@ -8598,7 +8774,7 @@
           <a:bodyPr wrap="square" lIns="0" tIns="0" rIns="0" bIns="0" rtlCol="0" anchor="ctr"/>
           <a:lstStyle/>
           <a:p>
-            <a:pPr indent="0" marL="0">
+            <a:pPr marL="0" indent="0">
               <a:buNone/>
             </a:pPr>
             <a:r>
@@ -8695,6 +8871,13 @@
           </a:solidFill>
           <a:ln/>
         </p:spPr>
+        <p:txBody>
+          <a:bodyPr/>
+          <a:lstStyle/>
+          <a:p>
+            <a:endParaRPr lang="en-US"/>
+          </a:p>
+        </p:txBody>
       </p:sp>
       <p:sp>
         <p:nvSpPr>
@@ -8717,7 +8900,7 @@
           <a:bodyPr wrap="square" lIns="0" tIns="0" rIns="0" bIns="0" rtlCol="0" anchor="ctr"/>
           <a:lstStyle/>
           <a:p>
-            <a:pPr indent="0" marL="0">
+            <a:pPr marL="0" indent="0">
               <a:buNone/>
             </a:pPr>
             <a:r>
@@ -8827,6 +9010,7 @@
         <a:solidFill>
           <a:srgbClr val="0F1729"/>
         </a:solidFill>
+        <a:effectLst/>
       </p:bgPr>
     </p:bg>
     <p:spTree>
@@ -8864,7 +9048,7 @@
           <a:bodyPr wrap="square" lIns="0" tIns="0" rIns="0" bIns="0" rtlCol="0" anchor="ctr"/>
           <a:lstStyle/>
           <a:p>
-            <a:pPr indent="0" marL="0">
+            <a:pPr marL="0" indent="0">
               <a:buNone/>
             </a:pPr>
             <a:r>
@@ -8901,6 +9085,13 @@
           </a:solidFill>
           <a:ln/>
         </p:spPr>
+        <p:txBody>
+          <a:bodyPr/>
+          <a:lstStyle/>
+          <a:p>
+            <a:endParaRPr lang="en-US"/>
+          </a:p>
+        </p:txBody>
       </p:sp>
       <p:sp>
         <p:nvSpPr>
@@ -8923,6 +9114,13 @@
           </a:solidFill>
           <a:ln/>
         </p:spPr>
+        <p:txBody>
+          <a:bodyPr/>
+          <a:lstStyle/>
+          <a:p>
+            <a:endParaRPr lang="en-US"/>
+          </a:p>
+        </p:txBody>
       </p:sp>
       <p:sp>
         <p:nvSpPr>
@@ -8945,7 +9143,7 @@
           <a:bodyPr wrap="square" rtlCol="0" anchor="t"/>
           <a:lstStyle/>
           <a:p>
-            <a:pPr indent="0" marL="0">
+            <a:pPr marL="0" indent="0">
               <a:buNone/>
             </a:pPr>
             <a:r>
@@ -8962,7 +9160,7 @@
             <a:endParaRPr lang="en-US" sz="1200" dirty="0"/>
           </a:p>
           <a:p>
-            <a:pPr indent="0" marL="0">
+            <a:pPr marL="0" indent="0">
               <a:buNone/>
             </a:pPr>
             <a:r>
@@ -8979,7 +9177,7 @@
             <a:endParaRPr lang="en-US" sz="1200" dirty="0"/>
           </a:p>
           <a:p>
-            <a:pPr indent="0" marL="0">
+            <a:pPr marL="0" indent="0">
               <a:buNone/>
             </a:pPr>
             <a:r>
@@ -8996,7 +9194,7 @@
             <a:endParaRPr lang="en-US" sz="1200" dirty="0"/>
           </a:p>
           <a:p>
-            <a:pPr indent="0" marL="0">
+            <a:pPr marL="0" indent="0">
               <a:buNone/>
             </a:pPr>
             <a:r>
@@ -9013,13 +9211,13 @@
             <a:endParaRPr lang="en-US" sz="1200" dirty="0"/>
           </a:p>
           <a:p>
-            <a:pPr indent="0" marL="0">
+            <a:pPr marL="0" indent="0">
               <a:buNone/>
             </a:pPr>
             <a:endParaRPr lang="en-US" sz="1200" dirty="0"/>
           </a:p>
           <a:p>
-            <a:pPr indent="0" marL="0">
+            <a:pPr marL="0" indent="0">
               <a:buNone/>
             </a:pPr>
             <a:r>
@@ -9036,7 +9234,7 @@
             <a:endParaRPr lang="en-US" sz="1200" dirty="0"/>
           </a:p>
           <a:p>
-            <a:pPr indent="0" marL="0">
+            <a:pPr marL="0" indent="0">
               <a:buNone/>
             </a:pPr>
             <a:r>
@@ -9053,7 +9251,7 @@
             <a:endParaRPr lang="en-US" sz="1200" dirty="0"/>
           </a:p>
           <a:p>
-            <a:pPr indent="0" marL="0">
+            <a:pPr marL="0" indent="0">
               <a:buNone/>
             </a:pPr>
             <a:r>
@@ -9070,7 +9268,7 @@
             <a:endParaRPr lang="en-US" sz="1200" dirty="0"/>
           </a:p>
           <a:p>
-            <a:pPr indent="0" marL="0">
+            <a:pPr marL="0" indent="0">
               <a:buNone/>
             </a:pPr>
             <a:r>
@@ -9087,7 +9285,7 @@
             <a:endParaRPr lang="en-US" sz="1200" dirty="0"/>
           </a:p>
           <a:p>
-            <a:pPr indent="0" marL="0">
+            <a:pPr marL="0" indent="0">
               <a:buNone/>
             </a:pPr>
             <a:r>
@@ -9104,7 +9302,7 @@
             <a:endParaRPr lang="en-US" sz="1200" dirty="0"/>
           </a:p>
           <a:p>
-            <a:pPr indent="0" marL="0">
+            <a:pPr marL="0" indent="0">
               <a:buNone/>
             </a:pPr>
             <a:r>
@@ -9121,7 +9319,7 @@
             <a:endParaRPr lang="en-US" sz="1200" dirty="0"/>
           </a:p>
           <a:p>
-            <a:pPr indent="0" marL="0">
+            <a:pPr marL="0" indent="0">
               <a:buNone/>
             </a:pPr>
             <a:r>
@@ -9138,7 +9336,7 @@
             <a:endParaRPr lang="en-US" sz="1200" dirty="0"/>
           </a:p>
           <a:p>
-            <a:pPr indent="0" marL="0">
+            <a:pPr marL="0" indent="0">
               <a:buNone/>
             </a:pPr>
             <a:r>
@@ -9172,6 +9370,7 @@
         <a:solidFill>
           <a:srgbClr val="0F1729"/>
         </a:solidFill>
+        <a:effectLst/>
       </p:bgPr>
     </p:bg>
     <p:spTree>
@@ -9209,7 +9408,7 @@
           <a:bodyPr wrap="square" lIns="0" tIns="0" rIns="0" bIns="0" rtlCol="0" anchor="ctr"/>
           <a:lstStyle/>
           <a:p>
-            <a:pPr indent="0" marL="0">
+            <a:pPr marL="0" indent="0">
               <a:buNone/>
             </a:pPr>
             <a:r>
@@ -9246,6 +9445,13 @@
           </a:solidFill>
           <a:ln/>
         </p:spPr>
+        <p:txBody>
+          <a:bodyPr/>
+          <a:lstStyle/>
+          <a:p>
+            <a:endParaRPr lang="en-US"/>
+          </a:p>
+        </p:txBody>
       </p:sp>
       <p:sp>
         <p:nvSpPr>
@@ -9268,6 +9474,13 @@
           </a:solidFill>
           <a:ln/>
         </p:spPr>
+        <p:txBody>
+          <a:bodyPr/>
+          <a:lstStyle/>
+          <a:p>
+            <a:endParaRPr lang="en-US"/>
+          </a:p>
+        </p:txBody>
       </p:sp>
       <p:sp>
         <p:nvSpPr>
@@ -9290,7 +9503,7 @@
           <a:bodyPr wrap="square" lIns="0" tIns="0" rIns="0" bIns="0" rtlCol="0" anchor="ctr"/>
           <a:lstStyle/>
           <a:p>
-            <a:pPr algn="ctr" indent="0" marL="0">
+            <a:pPr marL="0" indent="0" algn="ctr">
               <a:buNone/>
             </a:pPr>
             <a:r>
@@ -9329,7 +9542,7 @@
           <a:bodyPr wrap="square" lIns="0" tIns="0" rIns="0" bIns="0" rtlCol="0" anchor="ctr"/>
           <a:lstStyle/>
           <a:p>
-            <a:pPr algn="ctr" indent="0" marL="0">
+            <a:pPr marL="0" indent="0" algn="ctr">
               <a:buNone/>
             </a:pPr>
             <a:r>
@@ -9346,7 +9559,7 @@
             <a:endParaRPr lang="en-US" sz="1200" dirty="0"/>
           </a:p>
           <a:p>
-            <a:pPr algn="ctr" indent="0" marL="0">
+            <a:pPr marL="0" indent="0" algn="ctr">
               <a:buNone/>
             </a:pPr>
             <a:r>
@@ -9385,6 +9598,13 @@
           </a:solidFill>
           <a:ln/>
         </p:spPr>
+        <p:txBody>
+          <a:bodyPr/>
+          <a:lstStyle/>
+          <a:p>
+            <a:endParaRPr lang="en-US"/>
+          </a:p>
+        </p:txBody>
       </p:sp>
       <p:sp>
         <p:nvSpPr>
@@ -9407,7 +9627,7 @@
           <a:bodyPr wrap="square" lIns="0" tIns="0" rIns="0" bIns="0" rtlCol="0" anchor="ctr"/>
           <a:lstStyle/>
           <a:p>
-            <a:pPr algn="ctr" indent="0" marL="0">
+            <a:pPr marL="0" indent="0" algn="ctr">
               <a:buNone/>
             </a:pPr>
             <a:r>
@@ -9446,7 +9666,7 @@
           <a:bodyPr wrap="square" lIns="0" tIns="0" rIns="0" bIns="0" rtlCol="0" anchor="ctr"/>
           <a:lstStyle/>
           <a:p>
-            <a:pPr algn="ctr" indent="0" marL="0">
+            <a:pPr marL="0" indent="0" algn="ctr">
               <a:buNone/>
             </a:pPr>
             <a:r>
@@ -9463,7 +9683,7 @@
             <a:endParaRPr lang="en-US" sz="1200" dirty="0"/>
           </a:p>
           <a:p>
-            <a:pPr algn="ctr" indent="0" marL="0">
+            <a:pPr marL="0" indent="0" algn="ctr">
               <a:buNone/>
             </a:pPr>
             <a:r>
@@ -9502,6 +9722,13 @@
           </a:solidFill>
           <a:ln/>
         </p:spPr>
+        <p:txBody>
+          <a:bodyPr/>
+          <a:lstStyle/>
+          <a:p>
+            <a:endParaRPr lang="en-US"/>
+          </a:p>
+        </p:txBody>
       </p:sp>
       <p:sp>
         <p:nvSpPr>
@@ -9524,7 +9751,7 @@
           <a:bodyPr wrap="square" lIns="0" tIns="0" rIns="0" bIns="0" rtlCol="0" anchor="ctr"/>
           <a:lstStyle/>
           <a:p>
-            <a:pPr algn="ctr" indent="0" marL="0">
+            <a:pPr marL="0" indent="0" algn="ctr">
               <a:buNone/>
             </a:pPr>
             <a:r>
@@ -9563,7 +9790,7 @@
           <a:bodyPr wrap="square" lIns="0" tIns="0" rIns="0" bIns="0" rtlCol="0" anchor="ctr"/>
           <a:lstStyle/>
           <a:p>
-            <a:pPr algn="ctr" indent="0" marL="0">
+            <a:pPr marL="0" indent="0" algn="ctr">
               <a:buNone/>
             </a:pPr>
             <a:r>
@@ -9580,7 +9807,7 @@
             <a:endParaRPr lang="en-US" sz="1200" dirty="0"/>
           </a:p>
           <a:p>
-            <a:pPr algn="ctr" indent="0" marL="0">
+            <a:pPr marL="0" indent="0" algn="ctr">
               <a:buNone/>
             </a:pPr>
             <a:r>
@@ -9600,14 +9827,14 @@
       </p:sp>
       <p:pic>
         <p:nvPicPr>
-          <p:cNvPr id="13" name="Image 0" descr="preencoded.png">    </p:cNvPr>
+          <p:cNvPr id="13" name="Image 0" descr="preencoded.png"/>
           <p:cNvPicPr>
             <a:picLocks noChangeAspect="1"/>
           </p:cNvPicPr>
           <p:nvPr/>
         </p:nvPicPr>
         <p:blipFill>
-          <a:blip r:embed="rId1"/>
+          <a:blip r:embed="rId3"/>
           <a:stretch>
             <a:fillRect/>
           </a:stretch>
@@ -9624,14 +9851,14 @@
       </p:pic>
       <p:pic>
         <p:nvPicPr>
-          <p:cNvPr id="14" name="Image 1" descr="preencoded.png">    </p:cNvPr>
+          <p:cNvPr id="14" name="Image 1" descr="preencoded.png"/>
           <p:cNvPicPr>
             <a:picLocks noChangeAspect="1"/>
           </p:cNvPicPr>
           <p:nvPr/>
         </p:nvPicPr>
         <p:blipFill>
-          <a:blip r:embed="rId2"/>
+          <a:blip r:embed="rId3"/>
           <a:stretch>
             <a:fillRect/>
           </a:stretch>
@@ -9667,6 +9894,13 @@
           </a:solidFill>
           <a:ln/>
         </p:spPr>
+        <p:txBody>
+          <a:bodyPr/>
+          <a:lstStyle/>
+          <a:p>
+            <a:endParaRPr lang="en-US"/>
+          </a:p>
+        </p:txBody>
       </p:sp>
       <p:sp>
         <p:nvSpPr>
@@ -9689,7 +9923,7 @@
           <a:bodyPr wrap="square" rtlCol="0" anchor="t"/>
           <a:lstStyle/>
           <a:p>
-            <a:pPr indent="0" marL="0">
+            <a:pPr marL="0" indent="0">
               <a:buNone/>
             </a:pPr>
             <a:r>
@@ -9706,13 +9940,13 @@
             <a:endParaRPr lang="en-US" sz="1300" dirty="0"/>
           </a:p>
           <a:p>
-            <a:pPr indent="0" marL="0">
+            <a:pPr marL="0" indent="0">
               <a:buNone/>
             </a:pPr>
             <a:endParaRPr lang="en-US" sz="1300" dirty="0"/>
           </a:p>
           <a:p>
-            <a:pPr indent="0" marL="0">
+            <a:pPr marL="0" indent="0">
               <a:buNone/>
             </a:pPr>
             <a:r>
@@ -9729,7 +9963,7 @@
             <a:endParaRPr lang="en-US" sz="1300" dirty="0"/>
           </a:p>
           <a:p>
-            <a:pPr indent="0" marL="0">
+            <a:pPr marL="0" indent="0">
               <a:buNone/>
             </a:pPr>
             <a:r>
@@ -9746,7 +9980,7 @@
             <a:endParaRPr lang="en-US" sz="1300" dirty="0"/>
           </a:p>
           <a:p>
-            <a:pPr indent="0" marL="0">
+            <a:pPr marL="0" indent="0">
               <a:buNone/>
             </a:pPr>
             <a:r>
@@ -9780,6 +10014,7 @@
         <a:solidFill>
           <a:srgbClr val="0F1729"/>
         </a:solidFill>
+        <a:effectLst/>
       </p:bgPr>
     </p:bg>
     <p:spTree>
@@ -9817,7 +10052,7 @@
           <a:bodyPr wrap="square" lIns="0" tIns="0" rIns="0" bIns="0" rtlCol="0" anchor="ctr"/>
           <a:lstStyle/>
           <a:p>
-            <a:pPr indent="0" marL="0">
+            <a:pPr marL="0" indent="0">
               <a:buNone/>
             </a:pPr>
             <a:r>
@@ -9854,6 +10089,13 @@
           </a:solidFill>
           <a:ln/>
         </p:spPr>
+        <p:txBody>
+          <a:bodyPr/>
+          <a:lstStyle/>
+          <a:p>
+            <a:endParaRPr lang="en-US"/>
+          </a:p>
+        </p:txBody>
       </p:sp>
       <p:sp>
         <p:nvSpPr>
@@ -9876,6 +10118,13 @@
           </a:solidFill>
           <a:ln/>
         </p:spPr>
+        <p:txBody>
+          <a:bodyPr/>
+          <a:lstStyle/>
+          <a:p>
+            <a:endParaRPr lang="en-US"/>
+          </a:p>
+        </p:txBody>
       </p:sp>
       <p:sp>
         <p:nvSpPr>
@@ -9898,7 +10147,7 @@
           <a:bodyPr wrap="square" rtlCol="0" anchor="t"/>
           <a:lstStyle/>
           <a:p>
-            <a:pPr indent="0" marL="0">
+            <a:pPr marL="0" indent="0">
               <a:buNone/>
             </a:pPr>
             <a:r>
@@ -9915,7 +10164,7 @@
             <a:endParaRPr lang="en-US" sz="1100" dirty="0"/>
           </a:p>
           <a:p>
-            <a:pPr indent="0" marL="0">
+            <a:pPr marL="0" indent="0">
               <a:buNone/>
             </a:pPr>
             <a:r>
@@ -9932,7 +10181,7 @@
             <a:endParaRPr lang="en-US" sz="1100" dirty="0"/>
           </a:p>
           <a:p>
-            <a:pPr indent="0" marL="0">
+            <a:pPr marL="0" indent="0">
               <a:buNone/>
             </a:pPr>
             <a:r>
@@ -9949,7 +10198,7 @@
             <a:endParaRPr lang="en-US" sz="1100" dirty="0"/>
           </a:p>
           <a:p>
-            <a:pPr indent="0" marL="0">
+            <a:pPr marL="0" indent="0">
               <a:buNone/>
             </a:pPr>
             <a:r>
@@ -9966,7 +10215,7 @@
             <a:endParaRPr lang="en-US" sz="1100" dirty="0"/>
           </a:p>
           <a:p>
-            <a:pPr indent="0" marL="0">
+            <a:pPr marL="0" indent="0">
               <a:buNone/>
             </a:pPr>
             <a:r>
@@ -9983,7 +10232,7 @@
             <a:endParaRPr lang="en-US" sz="1100" dirty="0"/>
           </a:p>
           <a:p>
-            <a:pPr indent="0" marL="0">
+            <a:pPr marL="0" indent="0">
               <a:buNone/>
             </a:pPr>
             <a:r>
@@ -10000,7 +10249,7 @@
             <a:endParaRPr lang="en-US" sz="1100" dirty="0"/>
           </a:p>
           <a:p>
-            <a:pPr indent="0" marL="0">
+            <a:pPr marL="0" indent="0">
               <a:buNone/>
             </a:pPr>
             <a:r>
@@ -10017,7 +10266,7 @@
             <a:endParaRPr lang="en-US" sz="1100" dirty="0"/>
           </a:p>
           <a:p>
-            <a:pPr indent="0" marL="0">
+            <a:pPr marL="0" indent="0">
               <a:buNone/>
             </a:pPr>
             <a:r>
@@ -10034,7 +10283,7 @@
             <a:endParaRPr lang="en-US" sz="1100" dirty="0"/>
           </a:p>
           <a:p>
-            <a:pPr indent="0" marL="0">
+            <a:pPr marL="0" indent="0">
               <a:buNone/>
             </a:pPr>
             <a:r>
@@ -10051,7 +10300,7 @@
             <a:endParaRPr lang="en-US" sz="1100" dirty="0"/>
           </a:p>
           <a:p>
-            <a:pPr indent="0" marL="0">
+            <a:pPr marL="0" indent="0">
               <a:buNone/>
             </a:pPr>
             <a:r>
@@ -10068,7 +10317,7 @@
             <a:endParaRPr lang="en-US" sz="1100" dirty="0"/>
           </a:p>
           <a:p>
-            <a:pPr indent="0" marL="0">
+            <a:pPr marL="0" indent="0">
               <a:buNone/>
             </a:pPr>
             <a:r>
@@ -10085,13 +10334,13 @@
             <a:endParaRPr lang="en-US" sz="1100" dirty="0"/>
           </a:p>
           <a:p>
-            <a:pPr indent="0" marL="0">
+            <a:pPr marL="0" indent="0">
               <a:buNone/>
             </a:pPr>
             <a:endParaRPr lang="en-US" sz="1100" dirty="0"/>
           </a:p>
           <a:p>
-            <a:pPr indent="0" marL="0">
+            <a:pPr marL="0" indent="0">
               <a:buNone/>
             </a:pPr>
             <a:r>
@@ -10108,7 +10357,7 @@
             <a:endParaRPr lang="en-US" sz="1100" dirty="0"/>
           </a:p>
           <a:p>
-            <a:pPr indent="0" marL="0">
+            <a:pPr marL="0" indent="0">
               <a:buNone/>
             </a:pPr>
             <a:r>
@@ -10142,6 +10391,7 @@
         <a:solidFill>
           <a:srgbClr val="0F1729"/>
         </a:solidFill>
+        <a:effectLst/>
       </p:bgPr>
     </p:bg>
     <p:spTree>
@@ -10179,7 +10429,7 @@
           <a:bodyPr wrap="square" lIns="0" tIns="0" rIns="0" bIns="0" rtlCol="0" anchor="ctr"/>
           <a:lstStyle/>
           <a:p>
-            <a:pPr indent="0" marL="0">
+            <a:pPr marL="0" indent="0">
               <a:buNone/>
             </a:pPr>
             <a:r>
@@ -10191,7 +10441,7 @@
                 <a:ea typeface="Trebuchet MS" pitchFamily="34" charset="-122"/>
                 <a:cs typeface="Trebuchet MS" pitchFamily="34" charset="-120"/>
               </a:rPr>
-              <a:t>Context API</a:t>
+              <a:t>Context</a:t>
             </a:r>
             <a:endParaRPr lang="en-US" sz="3600" dirty="0"/>
           </a:p>
@@ -10216,6 +10466,13 @@
           </a:solidFill>
           <a:ln/>
         </p:spPr>
+        <p:txBody>
+          <a:bodyPr/>
+          <a:lstStyle/>
+          <a:p>
+            <a:endParaRPr lang="en-US"/>
+          </a:p>
+        </p:txBody>
       </p:sp>
       <p:sp>
         <p:nvSpPr>
@@ -10238,7 +10495,7 @@
           <a:bodyPr wrap="square" lIns="0" tIns="0" rIns="0" bIns="0" rtlCol="0" anchor="ctr"/>
           <a:lstStyle/>
           <a:p>
-            <a:pPr indent="0" marL="0">
+            <a:pPr marL="0" indent="0">
               <a:buNone/>
             </a:pPr>
             <a:r>
@@ -10275,6 +10532,13 @@
           </a:solidFill>
           <a:ln/>
         </p:spPr>
+        <p:txBody>
+          <a:bodyPr/>
+          <a:lstStyle/>
+          <a:p>
+            <a:endParaRPr lang="en-US"/>
+          </a:p>
+        </p:txBody>
       </p:sp>
       <p:sp>
         <p:nvSpPr>
@@ -10297,7 +10561,7 @@
           <a:bodyPr wrap="square" lIns="0" tIns="0" rIns="0" bIns="0" rtlCol="0" anchor="ctr"/>
           <a:lstStyle/>
           <a:p>
-            <a:pPr algn="ctr" indent="0" marL="0">
+            <a:pPr marL="0" indent="0" algn="ctr">
               <a:buNone/>
             </a:pPr>
             <a:r>
@@ -10336,7 +10600,7 @@
           <a:bodyPr wrap="square" lIns="0" tIns="0" rIns="0" bIns="0" rtlCol="0" anchor="ctr"/>
           <a:lstStyle/>
           <a:p>
-            <a:pPr indent="0" marL="0">
+            <a:pPr marL="0" indent="0">
               <a:buNone/>
             </a:pPr>
             <a:r>
@@ -10375,6 +10639,13 @@
           </a:solidFill>
           <a:ln/>
         </p:spPr>
+        <p:txBody>
+          <a:bodyPr/>
+          <a:lstStyle/>
+          <a:p>
+            <a:endParaRPr lang="en-US"/>
+          </a:p>
+        </p:txBody>
       </p:sp>
       <p:sp>
         <p:nvSpPr>
@@ -10397,7 +10668,7 @@
           <a:bodyPr wrap="square" lIns="0" tIns="0" rIns="0" bIns="0" rtlCol="0" anchor="ctr"/>
           <a:lstStyle/>
           <a:p>
-            <a:pPr indent="0" marL="0">
+            <a:pPr marL="0" indent="0">
               <a:buNone/>
             </a:pPr>
             <a:r>
@@ -10434,6 +10705,13 @@
           </a:solidFill>
           <a:ln/>
         </p:spPr>
+        <p:txBody>
+          <a:bodyPr/>
+          <a:lstStyle/>
+          <a:p>
+            <a:endParaRPr lang="en-US"/>
+          </a:p>
+        </p:txBody>
       </p:sp>
       <p:sp>
         <p:nvSpPr>
@@ -10456,7 +10734,7 @@
           <a:bodyPr wrap="square" lIns="0" tIns="0" rIns="0" bIns="0" rtlCol="0" anchor="ctr"/>
           <a:lstStyle/>
           <a:p>
-            <a:pPr algn="ctr" indent="0" marL="0">
+            <a:pPr marL="0" indent="0" algn="ctr">
               <a:buNone/>
             </a:pPr>
             <a:r>
@@ -10495,7 +10773,7 @@
           <a:bodyPr wrap="square" lIns="0" tIns="0" rIns="0" bIns="0" rtlCol="0" anchor="ctr"/>
           <a:lstStyle/>
           <a:p>
-            <a:pPr indent="0" marL="0">
+            <a:pPr marL="0" indent="0">
               <a:buNone/>
             </a:pPr>
             <a:r>
@@ -10534,6 +10812,13 @@
           </a:solidFill>
           <a:ln/>
         </p:spPr>
+        <p:txBody>
+          <a:bodyPr/>
+          <a:lstStyle/>
+          <a:p>
+            <a:endParaRPr lang="en-US"/>
+          </a:p>
+        </p:txBody>
       </p:sp>
       <p:sp>
         <p:nvSpPr>
@@ -10556,7 +10841,7 @@
           <a:bodyPr wrap="square" lIns="0" tIns="0" rIns="0" bIns="0" rtlCol="0" anchor="ctr"/>
           <a:lstStyle/>
           <a:p>
-            <a:pPr indent="0" marL="0">
+            <a:pPr marL="0" indent="0">
               <a:buNone/>
             </a:pPr>
             <a:r>
@@ -10573,7 +10858,7 @@
             <a:endParaRPr lang="en-US" sz="1200" dirty="0"/>
           </a:p>
           <a:p>
-            <a:pPr indent="0" marL="0">
+            <a:pPr marL="0" indent="0">
               <a:buNone/>
             </a:pPr>
             <a:r>
@@ -10590,7 +10875,7 @@
             <a:endParaRPr lang="en-US" sz="1200" dirty="0"/>
           </a:p>
           <a:p>
-            <a:pPr indent="0" marL="0">
+            <a:pPr marL="0" indent="0">
               <a:buNone/>
             </a:pPr>
             <a:r>
@@ -10627,6 +10912,13 @@
           </a:solidFill>
           <a:ln/>
         </p:spPr>
+        <p:txBody>
+          <a:bodyPr/>
+          <a:lstStyle/>
+          <a:p>
+            <a:endParaRPr lang="en-US"/>
+          </a:p>
+        </p:txBody>
       </p:sp>
       <p:sp>
         <p:nvSpPr>
@@ -10649,7 +10941,7 @@
           <a:bodyPr wrap="square" lIns="0" tIns="0" rIns="0" bIns="0" rtlCol="0" anchor="ctr"/>
           <a:lstStyle/>
           <a:p>
-            <a:pPr algn="ctr" indent="0" marL="0">
+            <a:pPr marL="0" indent="0" algn="ctr">
               <a:buNone/>
             </a:pPr>
             <a:r>
@@ -10688,7 +10980,7 @@
           <a:bodyPr wrap="square" lIns="0" tIns="0" rIns="0" bIns="0" rtlCol="0" anchor="ctr"/>
           <a:lstStyle/>
           <a:p>
-            <a:pPr indent="0" marL="0">
+            <a:pPr marL="0" indent="0">
               <a:buNone/>
             </a:pPr>
             <a:r>
@@ -10727,6 +11019,13 @@
           </a:solidFill>
           <a:ln/>
         </p:spPr>
+        <p:txBody>
+          <a:bodyPr/>
+          <a:lstStyle/>
+          <a:p>
+            <a:endParaRPr lang="en-US"/>
+          </a:p>
+        </p:txBody>
       </p:sp>
       <p:sp>
         <p:nvSpPr>
@@ -10749,7 +11048,7 @@
           <a:bodyPr wrap="square" lIns="0" tIns="0" rIns="0" bIns="0" rtlCol="0" anchor="ctr"/>
           <a:lstStyle/>
           <a:p>
-            <a:pPr indent="0" marL="0">
+            <a:pPr marL="0" indent="0">
               <a:buNone/>
             </a:pPr>
             <a:r>
@@ -11068,4 +11367,319 @@
     </a:ext>
   </a:extLst>
 </a:theme>
+</file>
+
+<file path=ppt/theme/theme2.xml><?xml version="1.0" encoding="utf-8"?>
+<a:theme xmlns:a="http://schemas.openxmlformats.org/drawingml/2006/main" name="Office Theme">
+  <a:themeElements>
+    <a:clrScheme name="Office">
+      <a:dk1>
+        <a:sysClr val="windowText" lastClr="000000"/>
+      </a:dk1>
+      <a:lt1>
+        <a:sysClr val="window" lastClr="FFFFFF"/>
+      </a:lt1>
+      <a:dk2>
+        <a:srgbClr val="0E2841"/>
+      </a:dk2>
+      <a:lt2>
+        <a:srgbClr val="E8E8E8"/>
+      </a:lt2>
+      <a:accent1>
+        <a:srgbClr val="156082"/>
+      </a:accent1>
+      <a:accent2>
+        <a:srgbClr val="E97132"/>
+      </a:accent2>
+      <a:accent3>
+        <a:srgbClr val="196B24"/>
+      </a:accent3>
+      <a:accent4>
+        <a:srgbClr val="0F9ED5"/>
+      </a:accent4>
+      <a:accent5>
+        <a:srgbClr val="A02B93"/>
+      </a:accent5>
+      <a:accent6>
+        <a:srgbClr val="4EA72E"/>
+      </a:accent6>
+      <a:hlink>
+        <a:srgbClr val="467886"/>
+      </a:hlink>
+      <a:folHlink>
+        <a:srgbClr val="96607D"/>
+      </a:folHlink>
+    </a:clrScheme>
+    <a:fontScheme name="Office">
+      <a:majorFont>
+        <a:latin typeface="Aptos Display" panose="02110004020202020204"/>
+        <a:ea typeface=""/>
+        <a:cs typeface=""/>
+        <a:font script="Jpan" typeface="游ゴシック Light"/>
+        <a:font script="Hang" typeface="맑은 고딕"/>
+        <a:font script="Hans" typeface="等线 Light"/>
+        <a:font script="Hant" typeface="新細明體"/>
+        <a:font script="Arab" typeface="Times New Roman"/>
+        <a:font script="Hebr" typeface="Times New Roman"/>
+        <a:font script="Thai" typeface="Angsana New"/>
+        <a:font script="Ethi" typeface="Nyala"/>
+        <a:font script="Beng" typeface="Vrinda"/>
+        <a:font script="Gujr" typeface="Shruti"/>
+        <a:font script="Khmr" typeface="MoolBoran"/>
+        <a:font script="Knda" typeface="Tunga"/>
+        <a:font script="Guru" typeface="Raavi"/>
+        <a:font script="Cans" typeface="Euphemia"/>
+        <a:font script="Cher" typeface="Plantagenet Cherokee"/>
+        <a:font script="Yiii" typeface="Microsoft Yi Baiti"/>
+        <a:font script="Tibt" typeface="Microsoft Himalaya"/>
+        <a:font script="Thaa" typeface="MV Boli"/>
+        <a:font script="Deva" typeface="Mangal"/>
+        <a:font script="Telu" typeface="Gautami"/>
+        <a:font script="Taml" typeface="Latha"/>
+        <a:font script="Syrc" typeface="Estrangelo Edessa"/>
+        <a:font script="Orya" typeface="Kalinga"/>
+        <a:font script="Mlym" typeface="Kartika"/>
+        <a:font script="Laoo" typeface="DokChampa"/>
+        <a:font script="Sinh" typeface="Iskoola Pota"/>
+        <a:font script="Mong" typeface="Mongolian Baiti"/>
+        <a:font script="Viet" typeface="Times New Roman"/>
+        <a:font script="Uigh" typeface="Microsoft Uighur"/>
+        <a:font script="Geor" typeface="Sylfaen"/>
+        <a:font script="Armn" typeface="Arial"/>
+        <a:font script="Bugi" typeface="Leelawadee UI"/>
+        <a:font script="Bopo" typeface="Microsoft JhengHei"/>
+        <a:font script="Java" typeface="Javanese Text"/>
+        <a:font script="Lisu" typeface="Segoe UI"/>
+        <a:font script="Mymr" typeface="Myanmar Text"/>
+        <a:font script="Nkoo" typeface="Ebrima"/>
+        <a:font script="Olck" typeface="Nirmala UI"/>
+        <a:font script="Osma" typeface="Ebrima"/>
+        <a:font script="Phag" typeface="Phagspa"/>
+        <a:font script="Syrn" typeface="Estrangelo Edessa"/>
+        <a:font script="Syrj" typeface="Estrangelo Edessa"/>
+        <a:font script="Syre" typeface="Estrangelo Edessa"/>
+        <a:font script="Sora" typeface="Nirmala UI"/>
+        <a:font script="Tale" typeface="Microsoft Tai Le"/>
+        <a:font script="Talu" typeface="Microsoft New Tai Lue"/>
+        <a:font script="Tfng" typeface="Ebrima"/>
+      </a:majorFont>
+      <a:minorFont>
+        <a:latin typeface="Aptos" panose="02110004020202020204"/>
+        <a:ea typeface=""/>
+        <a:cs typeface=""/>
+        <a:font script="Jpan" typeface="游ゴシック"/>
+        <a:font script="Hang" typeface="맑은 고딕"/>
+        <a:font script="Hans" typeface="等线"/>
+        <a:font script="Hant" typeface="新細明體"/>
+        <a:font script="Arab" typeface="Arial"/>
+        <a:font script="Hebr" typeface="Arial"/>
+        <a:font script="Thai" typeface="Cordia New"/>
+        <a:font script="Ethi" typeface="Nyala"/>
+        <a:font script="Beng" typeface="Vrinda"/>
+        <a:font script="Gujr" typeface="Shruti"/>
+        <a:font script="Khmr" typeface="DaunPenh"/>
+        <a:font script="Knda" typeface="Tunga"/>
+        <a:font script="Guru" typeface="Raavi"/>
+        <a:font script="Cans" typeface="Euphemia"/>
+        <a:font script="Cher" typeface="Plantagenet Cherokee"/>
+        <a:font script="Yiii" typeface="Microsoft Yi Baiti"/>
+        <a:font script="Tibt" typeface="Microsoft Himalaya"/>
+        <a:font script="Thaa" typeface="MV Boli"/>
+        <a:font script="Deva" typeface="Mangal"/>
+        <a:font script="Telu" typeface="Gautami"/>
+        <a:font script="Taml" typeface="Latha"/>
+        <a:font script="Syrc" typeface="Estrangelo Edessa"/>
+        <a:font script="Orya" typeface="Kalinga"/>
+        <a:font script="Mlym" typeface="Kartika"/>
+        <a:font script="Laoo" typeface="DokChampa"/>
+        <a:font script="Sinh" typeface="Iskoola Pota"/>
+        <a:font script="Mong" typeface="Mongolian Baiti"/>
+        <a:font script="Viet" typeface="Arial"/>
+        <a:font script="Uigh" typeface="Microsoft Uighur"/>
+        <a:font script="Geor" typeface="Sylfaen"/>
+        <a:font script="Armn" typeface="Arial"/>
+        <a:font script="Bugi" typeface="Leelawadee UI"/>
+        <a:font script="Bopo" typeface="Microsoft JhengHei"/>
+        <a:font script="Java" typeface="Javanese Text"/>
+        <a:font script="Lisu" typeface="Segoe UI"/>
+        <a:font script="Mymr" typeface="Myanmar Text"/>
+        <a:font script="Nkoo" typeface="Ebrima"/>
+        <a:font script="Olck" typeface="Nirmala UI"/>
+        <a:font script="Osma" typeface="Ebrima"/>
+        <a:font script="Phag" typeface="Phagspa"/>
+        <a:font script="Syrn" typeface="Estrangelo Edessa"/>
+        <a:font script="Syrj" typeface="Estrangelo Edessa"/>
+        <a:font script="Syre" typeface="Estrangelo Edessa"/>
+        <a:font script="Sora" typeface="Nirmala UI"/>
+        <a:font script="Tale" typeface="Microsoft Tai Le"/>
+        <a:font script="Talu" typeface="Microsoft New Tai Lue"/>
+        <a:font script="Tfng" typeface="Ebrima"/>
+      </a:minorFont>
+    </a:fontScheme>
+    <a:fmtScheme name="Office">
+      <a:fillStyleLst>
+        <a:solidFill>
+          <a:schemeClr val="phClr"/>
+        </a:solidFill>
+        <a:gradFill rotWithShape="1">
+          <a:gsLst>
+            <a:gs pos="0">
+              <a:schemeClr val="phClr">
+                <a:lumMod val="110000"/>
+                <a:satMod val="105000"/>
+                <a:tint val="67000"/>
+              </a:schemeClr>
+            </a:gs>
+            <a:gs pos="50000">
+              <a:schemeClr val="phClr">
+                <a:lumMod val="105000"/>
+                <a:satMod val="103000"/>
+                <a:tint val="73000"/>
+              </a:schemeClr>
+            </a:gs>
+            <a:gs pos="100000">
+              <a:schemeClr val="phClr">
+                <a:lumMod val="105000"/>
+                <a:satMod val="109000"/>
+                <a:tint val="81000"/>
+              </a:schemeClr>
+            </a:gs>
+          </a:gsLst>
+          <a:lin ang="5400000" scaled="0"/>
+        </a:gradFill>
+        <a:gradFill rotWithShape="1">
+          <a:gsLst>
+            <a:gs pos="0">
+              <a:schemeClr val="phClr">
+                <a:satMod val="103000"/>
+                <a:lumMod val="102000"/>
+                <a:tint val="94000"/>
+              </a:schemeClr>
+            </a:gs>
+            <a:gs pos="50000">
+              <a:schemeClr val="phClr">
+                <a:satMod val="110000"/>
+                <a:lumMod val="100000"/>
+                <a:shade val="100000"/>
+              </a:schemeClr>
+            </a:gs>
+            <a:gs pos="100000">
+              <a:schemeClr val="phClr">
+                <a:lumMod val="99000"/>
+                <a:satMod val="120000"/>
+                <a:shade val="78000"/>
+              </a:schemeClr>
+            </a:gs>
+          </a:gsLst>
+          <a:lin ang="5400000" scaled="0"/>
+        </a:gradFill>
+      </a:fillStyleLst>
+      <a:lnStyleLst>
+        <a:ln w="12700" cap="flat" cmpd="sng" algn="ctr">
+          <a:solidFill>
+            <a:schemeClr val="phClr"/>
+          </a:solidFill>
+          <a:prstDash val="solid"/>
+          <a:miter lim="800000"/>
+        </a:ln>
+        <a:ln w="19050" cap="flat" cmpd="sng" algn="ctr">
+          <a:solidFill>
+            <a:schemeClr val="phClr"/>
+          </a:solidFill>
+          <a:prstDash val="solid"/>
+          <a:miter lim="800000"/>
+        </a:ln>
+        <a:ln w="25400" cap="flat" cmpd="sng" algn="ctr">
+          <a:solidFill>
+            <a:schemeClr val="phClr"/>
+          </a:solidFill>
+          <a:prstDash val="solid"/>
+          <a:miter lim="800000"/>
+        </a:ln>
+      </a:lnStyleLst>
+      <a:effectStyleLst>
+        <a:effectStyle>
+          <a:effectLst/>
+        </a:effectStyle>
+        <a:effectStyle>
+          <a:effectLst/>
+        </a:effectStyle>
+        <a:effectStyle>
+          <a:effectLst>
+            <a:outerShdw blurRad="57150" dist="19050" dir="5400000" algn="ctr" rotWithShape="0">
+              <a:srgbClr val="000000">
+                <a:alpha val="63000"/>
+              </a:srgbClr>
+            </a:outerShdw>
+          </a:effectLst>
+        </a:effectStyle>
+      </a:effectStyleLst>
+      <a:bgFillStyleLst>
+        <a:solidFill>
+          <a:schemeClr val="phClr"/>
+        </a:solidFill>
+        <a:solidFill>
+          <a:schemeClr val="phClr">
+            <a:tint val="95000"/>
+            <a:satMod val="170000"/>
+          </a:schemeClr>
+        </a:solidFill>
+        <a:gradFill rotWithShape="1">
+          <a:gsLst>
+            <a:gs pos="0">
+              <a:schemeClr val="phClr">
+                <a:tint val="93000"/>
+                <a:satMod val="150000"/>
+                <a:shade val="98000"/>
+                <a:lumMod val="102000"/>
+              </a:schemeClr>
+            </a:gs>
+            <a:gs pos="50000">
+              <a:schemeClr val="phClr">
+                <a:tint val="98000"/>
+                <a:satMod val="130000"/>
+                <a:shade val="90000"/>
+                <a:lumMod val="103000"/>
+              </a:schemeClr>
+            </a:gs>
+            <a:gs pos="100000">
+              <a:schemeClr val="phClr">
+                <a:shade val="63000"/>
+                <a:satMod val="120000"/>
+              </a:schemeClr>
+            </a:gs>
+          </a:gsLst>
+          <a:lin ang="5400000" scaled="0"/>
+        </a:gradFill>
+      </a:bgFillStyleLst>
+    </a:fmtScheme>
+  </a:themeElements>
+  <a:objectDefaults>
+    <a:lnDef>
+      <a:spPr/>
+      <a:bodyPr/>
+      <a:lstStyle/>
+      <a:style>
+        <a:lnRef idx="2">
+          <a:schemeClr val="accent1"/>
+        </a:lnRef>
+        <a:fillRef idx="0">
+          <a:schemeClr val="accent1"/>
+        </a:fillRef>
+        <a:effectRef idx="1">
+          <a:schemeClr val="accent1"/>
+        </a:effectRef>
+        <a:fontRef idx="minor">
+          <a:schemeClr val="tx1"/>
+        </a:fontRef>
+      </a:style>
+    </a:lnDef>
+  </a:objectDefaults>
+  <a:extraClrSchemeLst/>
+  <a:extLst>
+    <a:ext uri="{05A4C25C-085E-4340-85A3-A5531E510DB2}">
+      <thm15:themeFamily xmlns:thm15="http://schemas.microsoft.com/office/thememl/2012/main" name="Office Theme" id="{2E142A2C-CD16-42D6-873A-C26D2A0506FA}" vid="{1BDDFF52-6CD6-40A5-AB3C-68EB2F1E4D0A}"/>
+    </a:ext>
+  </a:extLst>
+</a:theme>
 </file>
--- a/WebProgramming/6.Termin/state-management-react.pptx
+++ b/WebProgramming/6.Termin/state-management-react.pptx
@@ -4,6 +4,9 @@
   <p:sldMasterIdLst>
     <p:sldMasterId id="2147483648" r:id="rId1"/>
   </p:sldMasterIdLst>
+  <p:notesMasterIdLst>
+    <p:notesMasterId r:id="rId20"/>
+  </p:notesMasterIdLst>
   <p:sldIdLst>
     <p:sldId id="256" r:id="rId2"/>
     <p:sldId id="257" r:id="rId3"/>
@@ -20,11 +23,11 @@
     <p:sldId id="268" r:id="rId14"/>
     <p:sldId id="269" r:id="rId15"/>
     <p:sldId id="270" r:id="rId16"/>
+    <p:sldId id="273" r:id="rId17"/>
+    <p:sldId id="271" r:id="rId18"/>
+    <p:sldId id="272" r:id="rId19"/>
   </p:sldIdLst>
-  <p:notesMasterIdLst>
-    <p:notesMasterId r:id="rId17"/>
-  </p:notesMasterIdLst>
-  <p:sldSz cx="9144000" cy="5143500"/>
+  <p:sldSz cx="9144000" cy="5143500" type="screen16x9"/>
   <p:notesSz cx="5143500" cy="9144000"/>
   <p:defaultTextStyle>
     <a:lvl1pPr marL="0" algn="l" defTabSz="914400" rtl="0" eaLnBrk="1" latinLnBrk="0" hangingPunct="1">
@@ -118,6 +121,11 @@
       </a:defRPr>
     </a:lvl9pPr>
   </p:defaultTextStyle>
+  <p:extLst>
+    <p:ext uri="{EFAFB233-063F-42B5-8137-9DF3F51BA10A}">
+      <p15:sldGuideLst xmlns:p15="http://schemas.microsoft.com/office/powerpoint/2012/main"/>
+    </p:ext>
+  </p:extLst>
 </p:presentation>
 </file>
 
@@ -143,234 +151,10 @@
           <a:chExt cx="0" cy="0"/>
         </a:xfrm>
       </p:grpSpPr>
-      <p:sp>
-        <p:nvSpPr>
-          <p:cNvPr id="2" name="Header Placeholder 1"/>
-          <p:cNvSpPr>
-            <a:spLocks noGrp="1"/>
-          </p:cNvSpPr>
-          <p:nvPr>
-            <p:ph type="hdr" sz="quarter"/>
-          </p:nvPr>
-        </p:nvSpPr>
-        <p:spPr>
-          <a:xfrm>
-            <a:off x="0" y="0"/>
-            <a:ext cx="2971800" cy="458788"/>
-          </a:xfrm>
-          <a:prstGeom prst="rect">
-            <a:avLst/>
-          </a:prstGeom>
-        </p:spPr>
-        <p:txBody>
-          <a:bodyPr vert="horz" lIns="91440" tIns="45720" rIns="91440" bIns="45720" rtlCol="0"/>
-          <a:lstStyle>
-            <a:lvl1pPr algn="l">
-              <a:defRPr sz="1200"/>
-            </a:lvl1pPr>
-          </a:lstStyle>
-          <a:p>
-            <a:endParaRPr lang="en-US"/>
-          </a:p>
-        </p:txBody>
-      </p:sp>
-      <p:sp>
-        <p:nvSpPr>
-          <p:cNvPr id="3" name="Date Placeholder 2"/>
-          <p:cNvSpPr>
-            <a:spLocks noGrp="1"/>
-          </p:cNvSpPr>
-          <p:nvPr>
-            <p:ph type="dt" idx="1"/>
-          </p:nvPr>
-        </p:nvSpPr>
-        <p:spPr>
-          <a:xfrm>
-            <a:off x="3884613" y="0"/>
-            <a:ext cx="2971800" cy="458788"/>
-          </a:xfrm>
-          <a:prstGeom prst="rect">
-            <a:avLst/>
-          </a:prstGeom>
-        </p:spPr>
-        <p:txBody>
-          <a:bodyPr vert="horz" lIns="91440" tIns="45720" rIns="91440" bIns="45720" rtlCol="0"/>
-          <a:lstStyle>
-            <a:lvl1pPr algn="r">
-              <a:defRPr sz="1200"/>
-            </a:lvl1pPr>
-          </a:lstStyle>
-          <a:p>
-            <a:fld id="{5282F153-3F37-0F45-9E97-73ACFA13230C}" type="datetimeFigureOut">
-              <a:rPr lang="en-US"/>
-              <a:t>7/23/19</a:t>
-            </a:fld>
-            <a:endParaRPr lang="en-US"/>
-          </a:p>
-        </p:txBody>
-      </p:sp>
-      <p:sp>
-        <p:nvSpPr>
-          <p:cNvPr id="4" name="Slide Image Placeholder 3"/>
-          <p:cNvSpPr>
-            <a:spLocks noGrp="1" noRot="1" noChangeAspect="1"/>
-          </p:cNvSpPr>
-          <p:nvPr>
-            <p:ph type="sldImg" idx="2"/>
-          </p:nvPr>
-        </p:nvSpPr>
-        <p:spPr>
-          <a:xfrm>
-            <a:off x="685800" y="1143000"/>
-            <a:ext cx="5486400" cy="3086100"/>
-          </a:xfrm>
-          <a:prstGeom prst="rect">
-            <a:avLst/>
-          </a:prstGeom>
-          <a:noFill/>
-          <a:ln w="12700">
-            <a:solidFill>
-              <a:prstClr val="black"/>
-            </a:solidFill>
-          </a:ln>
-        </p:spPr>
-        <p:txBody>
-          <a:bodyPr vert="horz" lIns="91440" tIns="45720" rIns="91440" bIns="45720" rtlCol="0" anchor="ctr"/>
-          <a:lstStyle/>
-          <a:p>
-            <a:endParaRPr lang="en-US"/>
-          </a:p>
-        </p:txBody>
-      </p:sp>
-      <p:sp>
-        <p:nvSpPr>
-          <p:cNvPr id="5" name="Notes Placeholder 4"/>
-          <p:cNvSpPr>
-            <a:spLocks noGrp="1"/>
-          </p:cNvSpPr>
-          <p:nvPr>
-            <p:ph type="body" sz="quarter" idx="3"/>
-          </p:nvPr>
-        </p:nvSpPr>
-        <p:spPr>
-          <a:xfrm>
-            <a:off x="685800" y="4400550"/>
-            <a:ext cx="5486400" cy="3600450"/>
-          </a:xfrm>
-          <a:prstGeom prst="rect">
-            <a:avLst/>
-          </a:prstGeom>
-        </p:spPr>
-        <p:txBody>
-          <a:bodyPr vert="horz" lIns="91440" tIns="45720" rIns="91440" bIns="45720" rtlCol="0"/>
-          <a:lstStyle/>
-          <a:p>
-            <a:pPr lvl="0"/>
-            <a:r>
-              <a:rPr lang="en-US"/>
-              <a:t>Click to edit Master text styles</a:t>
-            </a:r>
-          </a:p>
-          <a:p>
-            <a:pPr lvl="1"/>
-            <a:r>
-              <a:rPr lang="en-US"/>
-              <a:t>Second level</a:t>
-            </a:r>
-          </a:p>
-          <a:p>
-            <a:pPr lvl="2"/>
-            <a:r>
-              <a:rPr lang="en-US"/>
-              <a:t>Third level</a:t>
-            </a:r>
-          </a:p>
-          <a:p>
-            <a:pPr lvl="3"/>
-            <a:r>
-              <a:rPr lang="en-US"/>
-              <a:t>Fourth level</a:t>
-            </a:r>
-          </a:p>
-          <a:p>
-            <a:pPr lvl="4"/>
-            <a:r>
-              <a:rPr lang="en-US"/>
-              <a:t>Fifth level</a:t>
-            </a:r>
-          </a:p>
-        </p:txBody>
-      </p:sp>
-      <p:sp>
-        <p:nvSpPr>
-          <p:cNvPr id="6" name="Footer Placeholder 5"/>
-          <p:cNvSpPr>
-            <a:spLocks noGrp="1"/>
-          </p:cNvSpPr>
-          <p:nvPr>
-            <p:ph type="ftr" sz="quarter" idx="4"/>
-          </p:nvPr>
-        </p:nvSpPr>
-        <p:spPr>
-          <a:xfrm>
-            <a:off x="0" y="8685213"/>
-            <a:ext cx="2971800" cy="458787"/>
-          </a:xfrm>
-          <a:prstGeom prst="rect">
-            <a:avLst/>
-          </a:prstGeom>
-        </p:spPr>
-        <p:txBody>
-          <a:bodyPr vert="horz" lIns="91440" tIns="45720" rIns="91440" bIns="45720" rtlCol="0" anchor="b"/>
-          <a:lstStyle>
-            <a:lvl1pPr algn="l">
-              <a:defRPr sz="1200"/>
-            </a:lvl1pPr>
-          </a:lstStyle>
-          <a:p>
-            <a:endParaRPr lang="en-US"/>
-          </a:p>
-        </p:txBody>
-      </p:sp>
-      <p:sp>
-        <p:nvSpPr>
-          <p:cNvPr id="7" name="Slide Number Placeholder 6"/>
-          <p:cNvSpPr>
-            <a:spLocks noGrp="1"/>
-          </p:cNvSpPr>
-          <p:nvPr>
-            <p:ph type="sldNum" sz="quarter" idx="5"/>
-          </p:nvPr>
-        </p:nvSpPr>
-        <p:spPr>
-          <a:xfrm>
-            <a:off x="3884613" y="8685213"/>
-            <a:ext cx="2971800" cy="458787"/>
-          </a:xfrm>
-          <a:prstGeom prst="rect">
-            <a:avLst/>
-          </a:prstGeom>
-        </p:spPr>
-        <p:txBody>
-          <a:bodyPr vert="horz" lIns="91440" tIns="45720" rIns="91440" bIns="45720" rtlCol="0" anchor="b"/>
-          <a:lstStyle>
-            <a:lvl1pPr algn="r">
-              <a:defRPr sz="1200"/>
-            </a:lvl1pPr>
-          </a:lstStyle>
-          <a:p>
-            <a:fld id="{CE5E9CC1-C706-0F49-92D6-E571CC5EEA8F}" type="slidenum">
-              <a:rPr lang="en-US"/>
-              <a:t>‹#›</a:t>
-            </a:fld>
-            <a:endParaRPr lang="en-US"/>
-          </a:p>
-        </p:txBody>
-      </p:sp>
     </p:spTree>
     <p:extLst>
       <p:ext uri="{BB962C8B-B14F-4D97-AF65-F5344CB8AC3E}">
-        <p14:creationId xmlns:p14="http://schemas.microsoft.com/office/powerpoint/2010/main" val="1024086991"/>
+        <p14:creationId xmlns:p14="http://schemas.microsoft.com/office/powerpoint/2010/main" val="970624850"/>
       </p:ext>
     </p:extLst>
   </p:cSld>
@@ -514,10 +298,6 @@
           <a:bodyPr/>
           <a:lstStyle/>
           <a:p>
-            <a:r>
-              <a:rPr lang="en-US" dirty="0"/>
-              <a:t/>
-            </a:r>
             <a:endParaRPr lang="en-US" dirty="0"/>
           </a:p>
         </p:txBody>
@@ -602,10 +382,6 @@
           <a:bodyPr/>
           <a:lstStyle/>
           <a:p>
-            <a:r>
-              <a:rPr lang="en-US" dirty="0"/>
-              <a:t/>
-            </a:r>
             <a:endParaRPr lang="en-US" dirty="0"/>
           </a:p>
         </p:txBody>
@@ -690,10 +466,6 @@
           <a:bodyPr/>
           <a:lstStyle/>
           <a:p>
-            <a:r>
-              <a:rPr lang="en-US" dirty="0"/>
-              <a:t/>
-            </a:r>
             <a:endParaRPr lang="en-US" dirty="0"/>
           </a:p>
         </p:txBody>
@@ -778,10 +550,6 @@
           <a:bodyPr/>
           <a:lstStyle/>
           <a:p>
-            <a:r>
-              <a:rPr lang="en-US" dirty="0"/>
-              <a:t/>
-            </a:r>
             <a:endParaRPr lang="en-US" dirty="0"/>
           </a:p>
         </p:txBody>
@@ -866,10 +634,6 @@
           <a:bodyPr/>
           <a:lstStyle/>
           <a:p>
-            <a:r>
-              <a:rPr lang="en-US" dirty="0"/>
-              <a:t/>
-            </a:r>
             <a:endParaRPr lang="en-US" dirty="0"/>
           </a:p>
         </p:txBody>
@@ -954,10 +718,6 @@
           <a:bodyPr/>
           <a:lstStyle/>
           <a:p>
-            <a:r>
-              <a:rPr lang="en-US" dirty="0"/>
-              <a:t/>
-            </a:r>
             <a:endParaRPr lang="en-US" dirty="0"/>
           </a:p>
         </p:txBody>
@@ -1042,10 +802,6 @@
           <a:bodyPr/>
           <a:lstStyle/>
           <a:p>
-            <a:r>
-              <a:rPr lang="en-US" dirty="0"/>
-              <a:t/>
-            </a:r>
             <a:endParaRPr lang="en-US" dirty="0"/>
           </a:p>
         </p:txBody>
@@ -1068,6 +824,282 @@
             <a:fld id="{F7021451-1387-4CA6-816F-3879F97B5CBC}" type="slidenum">
               <a:rPr lang="en-US"/>
               <a:t>15</a:t>
+            </a:fld>
+            <a:endParaRPr lang="en-US"/>
+          </a:p>
+        </p:txBody>
+      </p:sp>
+    </p:spTree>
+    <p:extLst>
+      <p:ext uri="{BB962C8B-B14F-4D97-AF65-F5344CB8AC3E}">
+        <p14:creationId xmlns:p14="http://schemas.microsoft.com/office/powerpoint/2010/main" val="1024086991"/>
+      </p:ext>
+    </p:extLst>
+  </p:cSld>
+  <p:clrMapOvr>
+    <a:masterClrMapping/>
+  </p:clrMapOvr>
+</p:notes>
+</file>
+
+<file path=ppt/notesSlides/notesSlide16.xml><?xml version="1.0" encoding="utf-8"?>
+<p:notes xmlns:a="http://schemas.openxmlformats.org/drawingml/2006/main" xmlns:r="http://schemas.openxmlformats.org/officeDocument/2006/relationships" xmlns:p="http://schemas.openxmlformats.org/presentationml/2006/main">
+  <p:cSld>
+    <p:spTree>
+      <p:nvGrpSpPr>
+        <p:cNvPr id="1" name="">
+          <a:extLst>
+            <a:ext uri="{FF2B5EF4-FFF2-40B4-BE49-F238E27FC236}">
+              <a16:creationId xmlns:a16="http://schemas.microsoft.com/office/drawing/2014/main" id="{7C498A80-6748-A1FD-E078-4B349A094900}"/>
+            </a:ext>
+          </a:extLst>
+        </p:cNvPr>
+        <p:cNvGrpSpPr/>
+        <p:nvPr/>
+      </p:nvGrpSpPr>
+      <p:grpSpPr>
+        <a:xfrm>
+          <a:off x="0" y="0"/>
+          <a:ext cx="0" cy="0"/>
+          <a:chOff x="0" y="0"/>
+          <a:chExt cx="0" cy="0"/>
+        </a:xfrm>
+      </p:grpSpPr>
+      <p:sp>
+        <p:nvSpPr>
+          <p:cNvPr id="2" name="Slide Image Placeholder 1">
+            <a:extLst>
+              <a:ext uri="{FF2B5EF4-FFF2-40B4-BE49-F238E27FC236}">
+                <a16:creationId xmlns:a16="http://schemas.microsoft.com/office/drawing/2014/main" id="{8D7054F9-777A-861A-9420-780DB132BF19}"/>
+              </a:ext>
+            </a:extLst>
+          </p:cNvPr>
+          <p:cNvSpPr>
+            <a:spLocks noGrp="1" noRot="1" noChangeAspect="1"/>
+          </p:cNvSpPr>
+          <p:nvPr>
+            <p:ph type="sldImg"/>
+          </p:nvPr>
+        </p:nvSpPr>
+        <p:spPr/>
+      </p:sp>
+      <p:sp>
+        <p:nvSpPr>
+          <p:cNvPr id="3" name="Notes Placeholder 2">
+            <a:extLst>
+              <a:ext uri="{FF2B5EF4-FFF2-40B4-BE49-F238E27FC236}">
+                <a16:creationId xmlns:a16="http://schemas.microsoft.com/office/drawing/2014/main" id="{820F441D-46F9-3F5D-6406-EE97EEDE763E}"/>
+              </a:ext>
+            </a:extLst>
+          </p:cNvPr>
+          <p:cNvSpPr>
+            <a:spLocks noGrp="1"/>
+          </p:cNvSpPr>
+          <p:nvPr>
+            <p:ph type="body" idx="1"/>
+          </p:nvPr>
+        </p:nvSpPr>
+        <p:spPr/>
+        <p:txBody>
+          <a:bodyPr/>
+          <a:lstStyle/>
+          <a:p>
+            <a:endParaRPr lang="en-US" dirty="0"/>
+          </a:p>
+        </p:txBody>
+      </p:sp>
+      <p:sp>
+        <p:nvSpPr>
+          <p:cNvPr id="4" name="Slide Number Placeholder 3">
+            <a:extLst>
+              <a:ext uri="{FF2B5EF4-FFF2-40B4-BE49-F238E27FC236}">
+                <a16:creationId xmlns:a16="http://schemas.microsoft.com/office/drawing/2014/main" id="{9B582661-4F3C-8115-65CB-D4913A4550BA}"/>
+              </a:ext>
+            </a:extLst>
+          </p:cNvPr>
+          <p:cNvSpPr>
+            <a:spLocks noGrp="1"/>
+          </p:cNvSpPr>
+          <p:nvPr>
+            <p:ph type="sldNum" sz="quarter" idx="10"/>
+          </p:nvPr>
+        </p:nvSpPr>
+        <p:spPr/>
+        <p:txBody>
+          <a:bodyPr/>
+          <a:lstStyle/>
+          <a:p>
+            <a:fld id="{F7021451-1387-4CA6-816F-3879F97B5CBC}" type="slidenum">
+              <a:rPr lang="en-US"/>
+              <a:t>16</a:t>
+            </a:fld>
+            <a:endParaRPr lang="en-US"/>
+          </a:p>
+        </p:txBody>
+      </p:sp>
+    </p:spTree>
+    <p:extLst>
+      <p:ext uri="{BB962C8B-B14F-4D97-AF65-F5344CB8AC3E}">
+        <p14:creationId xmlns:p14="http://schemas.microsoft.com/office/powerpoint/2010/main" val="1771721042"/>
+      </p:ext>
+    </p:extLst>
+  </p:cSld>
+  <p:clrMapOvr>
+    <a:masterClrMapping/>
+  </p:clrMapOvr>
+</p:notes>
+</file>
+
+<file path=ppt/notesSlides/notesSlide17.xml><?xml version="1.0" encoding="utf-8"?>
+<p:notes xmlns:a="http://schemas.openxmlformats.org/drawingml/2006/main" xmlns:r="http://schemas.openxmlformats.org/officeDocument/2006/relationships" xmlns:p="http://schemas.openxmlformats.org/presentationml/2006/main">
+  <p:cSld>
+    <p:spTree>
+      <p:nvGrpSpPr>
+        <p:cNvPr id="1" name=""/>
+        <p:cNvGrpSpPr/>
+        <p:nvPr/>
+      </p:nvGrpSpPr>
+      <p:grpSpPr>
+        <a:xfrm>
+          <a:off x="0" y="0"/>
+          <a:ext cx="0" cy="0"/>
+          <a:chOff x="0" y="0"/>
+          <a:chExt cx="0" cy="0"/>
+        </a:xfrm>
+      </p:grpSpPr>
+      <p:sp>
+        <p:nvSpPr>
+          <p:cNvPr id="2" name="Slide Image Placeholder 1"/>
+          <p:cNvSpPr>
+            <a:spLocks noGrp="1" noRot="1" noChangeAspect="1"/>
+          </p:cNvSpPr>
+          <p:nvPr>
+            <p:ph type="sldImg"/>
+          </p:nvPr>
+        </p:nvSpPr>
+        <p:spPr/>
+      </p:sp>
+      <p:sp>
+        <p:nvSpPr>
+          <p:cNvPr id="3" name="Notes Placeholder 2"/>
+          <p:cNvSpPr>
+            <a:spLocks noGrp="1"/>
+          </p:cNvSpPr>
+          <p:nvPr>
+            <p:ph type="body" idx="1"/>
+          </p:nvPr>
+        </p:nvSpPr>
+        <p:spPr/>
+        <p:txBody>
+          <a:bodyPr/>
+          <a:lstStyle/>
+          <a:p>
+            <a:endParaRPr lang="en-US" dirty="0"/>
+          </a:p>
+        </p:txBody>
+      </p:sp>
+      <p:sp>
+        <p:nvSpPr>
+          <p:cNvPr id="4" name="Slide Number Placeholder 3"/>
+          <p:cNvSpPr>
+            <a:spLocks noGrp="1"/>
+          </p:cNvSpPr>
+          <p:nvPr>
+            <p:ph type="sldNum" sz="quarter" idx="10"/>
+          </p:nvPr>
+        </p:nvSpPr>
+        <p:spPr/>
+        <p:txBody>
+          <a:bodyPr/>
+          <a:lstStyle/>
+          <a:p>
+            <a:fld id="{F7021451-1387-4CA6-816F-3879F97B5CBC}" type="slidenum">
+              <a:rPr lang="en-US"/>
+              <a:t>17</a:t>
+            </a:fld>
+            <a:endParaRPr lang="en-US"/>
+          </a:p>
+        </p:txBody>
+      </p:sp>
+    </p:spTree>
+    <p:extLst>
+      <p:ext uri="{BB962C8B-B14F-4D97-AF65-F5344CB8AC3E}">
+        <p14:creationId xmlns:p14="http://schemas.microsoft.com/office/powerpoint/2010/main" val="1024086991"/>
+      </p:ext>
+    </p:extLst>
+  </p:cSld>
+  <p:clrMapOvr>
+    <a:masterClrMapping/>
+  </p:clrMapOvr>
+</p:notes>
+</file>
+
+<file path=ppt/notesSlides/notesSlide18.xml><?xml version="1.0" encoding="utf-8"?>
+<p:notes xmlns:a="http://schemas.openxmlformats.org/drawingml/2006/main" xmlns:r="http://schemas.openxmlformats.org/officeDocument/2006/relationships" xmlns:p="http://schemas.openxmlformats.org/presentationml/2006/main">
+  <p:cSld>
+    <p:spTree>
+      <p:nvGrpSpPr>
+        <p:cNvPr id="1" name=""/>
+        <p:cNvGrpSpPr/>
+        <p:nvPr/>
+      </p:nvGrpSpPr>
+      <p:grpSpPr>
+        <a:xfrm>
+          <a:off x="0" y="0"/>
+          <a:ext cx="0" cy="0"/>
+          <a:chOff x="0" y="0"/>
+          <a:chExt cx="0" cy="0"/>
+        </a:xfrm>
+      </p:grpSpPr>
+      <p:sp>
+        <p:nvSpPr>
+          <p:cNvPr id="2" name="Slide Image Placeholder 1"/>
+          <p:cNvSpPr>
+            <a:spLocks noGrp="1" noRot="1" noChangeAspect="1"/>
+          </p:cNvSpPr>
+          <p:nvPr>
+            <p:ph type="sldImg"/>
+          </p:nvPr>
+        </p:nvSpPr>
+        <p:spPr/>
+      </p:sp>
+      <p:sp>
+        <p:nvSpPr>
+          <p:cNvPr id="3" name="Notes Placeholder 2"/>
+          <p:cNvSpPr>
+            <a:spLocks noGrp="1"/>
+          </p:cNvSpPr>
+          <p:nvPr>
+            <p:ph type="body" idx="1"/>
+          </p:nvPr>
+        </p:nvSpPr>
+        <p:spPr/>
+        <p:txBody>
+          <a:bodyPr/>
+          <a:lstStyle/>
+          <a:p>
+            <a:endParaRPr lang="en-US" dirty="0"/>
+          </a:p>
+        </p:txBody>
+      </p:sp>
+      <p:sp>
+        <p:nvSpPr>
+          <p:cNvPr id="4" name="Slide Number Placeholder 3"/>
+          <p:cNvSpPr>
+            <a:spLocks noGrp="1"/>
+          </p:cNvSpPr>
+          <p:nvPr>
+            <p:ph type="sldNum" sz="quarter" idx="10"/>
+          </p:nvPr>
+        </p:nvSpPr>
+        <p:spPr/>
+        <p:txBody>
+          <a:bodyPr/>
+          <a:lstStyle/>
+          <a:p>
+            <a:fld id="{F7021451-1387-4CA6-816F-3879F97B5CBC}" type="slidenum">
+              <a:rPr lang="en-US"/>
+              <a:t>18</a:t>
             </a:fld>
             <a:endParaRPr lang="en-US"/>
           </a:p>
@@ -1130,10 +1162,6 @@
           <a:bodyPr/>
           <a:lstStyle/>
           <a:p>
-            <a:r>
-              <a:rPr lang="en-US" dirty="0"/>
-              <a:t/>
-            </a:r>
             <a:endParaRPr lang="en-US" dirty="0"/>
           </a:p>
         </p:txBody>
@@ -1218,10 +1246,6 @@
           <a:bodyPr/>
           <a:lstStyle/>
           <a:p>
-            <a:r>
-              <a:rPr lang="en-US" dirty="0"/>
-              <a:t/>
-            </a:r>
             <a:endParaRPr lang="en-US" dirty="0"/>
           </a:p>
         </p:txBody>
@@ -1306,10 +1330,6 @@
           <a:bodyPr/>
           <a:lstStyle/>
           <a:p>
-            <a:r>
-              <a:rPr lang="en-US" dirty="0"/>
-              <a:t/>
-            </a:r>
             <a:endParaRPr lang="en-US" dirty="0"/>
           </a:p>
         </p:txBody>
@@ -1394,10 +1414,6 @@
           <a:bodyPr/>
           <a:lstStyle/>
           <a:p>
-            <a:r>
-              <a:rPr lang="en-US" dirty="0"/>
-              <a:t/>
-            </a:r>
             <a:endParaRPr lang="en-US" dirty="0"/>
           </a:p>
         </p:txBody>
@@ -1482,10 +1498,6 @@
           <a:bodyPr/>
           <a:lstStyle/>
           <a:p>
-            <a:r>
-              <a:rPr lang="en-US" dirty="0"/>
-              <a:t/>
-            </a:r>
             <a:endParaRPr lang="en-US" dirty="0"/>
           </a:p>
         </p:txBody>
@@ -1570,10 +1582,6 @@
           <a:bodyPr/>
           <a:lstStyle/>
           <a:p>
-            <a:r>
-              <a:rPr lang="en-US" dirty="0"/>
-              <a:t/>
-            </a:r>
             <a:endParaRPr lang="en-US" dirty="0"/>
           </a:p>
         </p:txBody>
@@ -1658,10 +1666,6 @@
           <a:bodyPr/>
           <a:lstStyle/>
           <a:p>
-            <a:r>
-              <a:rPr lang="en-US" dirty="0"/>
-              <a:t/>
-            </a:r>
             <a:endParaRPr lang="en-US" dirty="0"/>
           </a:p>
         </p:txBody>
@@ -1746,10 +1750,6 @@
           <a:bodyPr/>
           <a:lstStyle/>
           <a:p>
-            <a:r>
-              <a:rPr lang="en-US" dirty="0"/>
-              <a:t/>
-            </a:r>
             <a:endParaRPr lang="en-US" dirty="0"/>
           </a:p>
         </p:txBody>
@@ -1823,6 +1823,11 @@
 <file path=ppt/slideMasters/slideMaster1.xml><?xml version="1.0" encoding="utf-8"?>
 <p:sldMaster xmlns:a="http://schemas.openxmlformats.org/drawingml/2006/main" xmlns:r="http://schemas.openxmlformats.org/officeDocument/2006/relationships" xmlns:p="http://schemas.openxmlformats.org/presentationml/2006/main">
   <p:cSld>
+    <p:bg>
+      <p:bgRef idx="1001">
+        <a:schemeClr val="bg1"/>
+      </p:bgRef>
+    </p:bg>
     <p:spTree>
       <p:nvGrpSpPr>
         <p:cNvPr id="1" name=""/>
@@ -2105,6 +2110,7 @@
         <a:solidFill>
           <a:srgbClr val="0F1729"/>
         </a:solidFill>
+        <a:effectLst/>
       </p:bgPr>
     </p:bg>
     <p:spTree>
@@ -2142,6 +2148,13 @@
           </a:solidFill>
           <a:ln/>
         </p:spPr>
+        <p:txBody>
+          <a:bodyPr/>
+          <a:lstStyle/>
+          <a:p>
+            <a:endParaRPr lang="en-DE"/>
+          </a:p>
+        </p:txBody>
       </p:sp>
       <p:sp>
         <p:nvSpPr>
@@ -2164,6 +2177,13 @@
           </a:solidFill>
           <a:ln/>
         </p:spPr>
+        <p:txBody>
+          <a:bodyPr/>
+          <a:lstStyle/>
+          <a:p>
+            <a:endParaRPr lang="en-DE"/>
+          </a:p>
+        </p:txBody>
       </p:sp>
       <p:sp>
         <p:nvSpPr>
@@ -2186,7 +2206,7 @@
           <a:bodyPr wrap="square" lIns="0" tIns="0" rIns="0" bIns="0" rtlCol="0" anchor="ctr"/>
           <a:lstStyle/>
           <a:p>
-            <a:pPr indent="0" marL="0">
+            <a:pPr marL="0" indent="0">
               <a:buNone/>
             </a:pPr>
             <a:r>
@@ -2225,7 +2245,7 @@
           <a:bodyPr wrap="square" lIns="0" tIns="0" rIns="0" bIns="0" rtlCol="0" anchor="ctr"/>
           <a:lstStyle/>
           <a:p>
-            <a:pPr indent="0" marL="0">
+            <a:pPr marL="0" indent="0">
               <a:buNone/>
             </a:pPr>
             <a:r>
@@ -2264,7 +2284,7 @@
           <a:bodyPr wrap="square" lIns="0" tIns="0" rIns="0" bIns="0" rtlCol="0" anchor="ctr"/>
           <a:lstStyle/>
           <a:p>
-            <a:pPr indent="0" marL="0">
+            <a:pPr marL="0" indent="0">
               <a:buNone/>
             </a:pPr>
             <a:r>
@@ -2284,14 +2304,14 @@
       </p:sp>
       <p:pic>
         <p:nvPicPr>
-          <p:cNvPr id="7" name="Image 0" descr="preencoded.png">    </p:cNvPr>
+          <p:cNvPr id="7" name="Image 0" descr="preencoded.png"/>
           <p:cNvPicPr>
             <a:picLocks noChangeAspect="1"/>
           </p:cNvPicPr>
           <p:nvPr/>
         </p:nvPicPr>
         <p:blipFill>
-          <a:blip r:embed="rId1"/>
+          <a:blip r:embed="rId3"/>
           <a:stretch>
             <a:fillRect/>
           </a:stretch>
@@ -2322,6 +2342,7 @@
         <a:solidFill>
           <a:srgbClr val="0F1729"/>
         </a:solidFill>
+        <a:effectLst/>
       </p:bgPr>
     </p:bg>
     <p:spTree>
@@ -2359,7 +2380,7 @@
           <a:bodyPr wrap="square" lIns="0" tIns="0" rIns="0" bIns="0" rtlCol="0" anchor="ctr"/>
           <a:lstStyle/>
           <a:p>
-            <a:pPr indent="0" marL="0">
+            <a:pPr marL="0" indent="0">
               <a:buNone/>
             </a:pPr>
             <a:r>
@@ -2398,7 +2419,7 @@
           <a:bodyPr wrap="square" lIns="0" tIns="0" rIns="0" bIns="0" rtlCol="0" anchor="ctr"/>
           <a:lstStyle/>
           <a:p>
-            <a:pPr algn="ctr" indent="0" marL="0">
+            <a:pPr marL="0" indent="0" algn="ctr">
               <a:buNone/>
             </a:pPr>
             <a:r>
@@ -2437,6 +2458,13 @@
           </a:solidFill>
           <a:ln/>
         </p:spPr>
+        <p:txBody>
+          <a:bodyPr/>
+          <a:lstStyle/>
+          <a:p>
+            <a:endParaRPr lang="en-DE"/>
+          </a:p>
+        </p:txBody>
       </p:sp>
       <p:sp>
         <p:nvSpPr>
@@ -2459,7 +2487,7 @@
           <a:bodyPr wrap="square" lIns="0" tIns="0" rIns="0" bIns="0" rtlCol="0" anchor="ctr"/>
           <a:lstStyle/>
           <a:p>
-            <a:pPr algn="ctr" indent="0" marL="0">
+            <a:pPr marL="0" indent="0" algn="ctr">
               <a:buNone/>
             </a:pPr>
             <a:r>
@@ -2499,6 +2527,13 @@
             <a:prstDash val="solid"/>
           </a:ln>
         </p:spPr>
+        <p:txBody>
+          <a:bodyPr/>
+          <a:lstStyle/>
+          <a:p>
+            <a:endParaRPr lang="en-DE"/>
+          </a:p>
+        </p:txBody>
       </p:sp>
       <p:sp>
         <p:nvSpPr>
@@ -2521,6 +2556,13 @@
           </a:solidFill>
           <a:ln/>
         </p:spPr>
+        <p:txBody>
+          <a:bodyPr/>
+          <a:lstStyle/>
+          <a:p>
+            <a:endParaRPr lang="en-DE"/>
+          </a:p>
+        </p:txBody>
       </p:sp>
       <p:sp>
         <p:nvSpPr>
@@ -2543,7 +2585,7 @@
           <a:bodyPr wrap="square" lIns="0" tIns="0" rIns="0" bIns="0" rtlCol="0" anchor="ctr"/>
           <a:lstStyle/>
           <a:p>
-            <a:pPr algn="ctr" indent="0" marL="0">
+            <a:pPr marL="0" indent="0" algn="ctr">
               <a:buNone/>
             </a:pPr>
             <a:r>
@@ -2583,6 +2625,13 @@
             <a:prstDash val="solid"/>
           </a:ln>
         </p:spPr>
+        <p:txBody>
+          <a:bodyPr/>
+          <a:lstStyle/>
+          <a:p>
+            <a:endParaRPr lang="en-DE"/>
+          </a:p>
+        </p:txBody>
       </p:sp>
       <p:sp>
         <p:nvSpPr>
@@ -2605,6 +2654,13 @@
           </a:solidFill>
           <a:ln/>
         </p:spPr>
+        <p:txBody>
+          <a:bodyPr/>
+          <a:lstStyle/>
+          <a:p>
+            <a:endParaRPr lang="en-DE"/>
+          </a:p>
+        </p:txBody>
       </p:sp>
       <p:sp>
         <p:nvSpPr>
@@ -2627,7 +2683,7 @@
           <a:bodyPr wrap="square" lIns="0" tIns="0" rIns="0" bIns="0" rtlCol="0" anchor="ctr"/>
           <a:lstStyle/>
           <a:p>
-            <a:pPr algn="ctr" indent="0" marL="0">
+            <a:pPr marL="0" indent="0" algn="ctr">
               <a:buNone/>
             </a:pPr>
             <a:r>
@@ -2667,6 +2723,13 @@
             <a:prstDash val="solid"/>
           </a:ln>
         </p:spPr>
+        <p:txBody>
+          <a:bodyPr/>
+          <a:lstStyle/>
+          <a:p>
+            <a:endParaRPr lang="en-DE"/>
+          </a:p>
+        </p:txBody>
       </p:sp>
       <p:sp>
         <p:nvSpPr>
@@ -2689,6 +2752,13 @@
           </a:solidFill>
           <a:ln/>
         </p:spPr>
+        <p:txBody>
+          <a:bodyPr/>
+          <a:lstStyle/>
+          <a:p>
+            <a:endParaRPr lang="en-DE"/>
+          </a:p>
+        </p:txBody>
       </p:sp>
       <p:sp>
         <p:nvSpPr>
@@ -2711,7 +2781,7 @@
           <a:bodyPr wrap="square" lIns="0" tIns="0" rIns="0" bIns="0" rtlCol="0" anchor="ctr"/>
           <a:lstStyle/>
           <a:p>
-            <a:pPr algn="ctr" indent="0" marL="0">
+            <a:pPr marL="0" indent="0" algn="ctr">
               <a:buNone/>
             </a:pPr>
             <a:r>
@@ -2750,7 +2820,7 @@
           <a:bodyPr wrap="square" lIns="0" tIns="0" rIns="0" bIns="0" rtlCol="0" anchor="ctr"/>
           <a:lstStyle/>
           <a:p>
-            <a:pPr algn="ctr" indent="0" marL="0">
+            <a:pPr marL="0" indent="0" algn="ctr">
               <a:buNone/>
             </a:pPr>
             <a:r>
@@ -2789,6 +2859,13 @@
           </a:solidFill>
           <a:ln/>
         </p:spPr>
+        <p:txBody>
+          <a:bodyPr/>
+          <a:lstStyle/>
+          <a:p>
+            <a:endParaRPr lang="en-DE"/>
+          </a:p>
+        </p:txBody>
       </p:sp>
       <p:sp>
         <p:nvSpPr>
@@ -2811,7 +2888,7 @@
           <a:bodyPr wrap="square" lIns="0" tIns="0" rIns="0" bIns="0" rtlCol="0" anchor="ctr"/>
           <a:lstStyle/>
           <a:p>
-            <a:pPr algn="ctr" indent="0" marL="0">
+            <a:pPr marL="0" indent="0" algn="ctr">
               <a:buNone/>
             </a:pPr>
             <a:r>
@@ -2850,6 +2927,13 @@
           </a:solidFill>
           <a:ln/>
         </p:spPr>
+        <p:txBody>
+          <a:bodyPr/>
+          <a:lstStyle/>
+          <a:p>
+            <a:endParaRPr lang="en-DE"/>
+          </a:p>
+        </p:txBody>
       </p:sp>
       <p:sp>
         <p:nvSpPr>
@@ -2872,7 +2956,7 @@
           <a:bodyPr wrap="square" lIns="0" tIns="0" rIns="0" bIns="0" rtlCol="0" anchor="ctr"/>
           <a:lstStyle/>
           <a:p>
-            <a:pPr algn="ctr" indent="0" marL="0">
+            <a:pPr marL="0" indent="0" algn="ctr">
               <a:buNone/>
             </a:pPr>
             <a:r>
@@ -2911,6 +2995,13 @@
           </a:solidFill>
           <a:ln/>
         </p:spPr>
+        <p:txBody>
+          <a:bodyPr/>
+          <a:lstStyle/>
+          <a:p>
+            <a:endParaRPr lang="en-DE"/>
+          </a:p>
+        </p:txBody>
       </p:sp>
       <p:sp>
         <p:nvSpPr>
@@ -2920,7 +3011,7 @@
         </p:nvSpPr>
         <p:spPr>
           <a:xfrm>
-            <a:off x="5760720" y="2788920"/>
+            <a:off x="5760720" y="2743200"/>
             <a:ext cx="2286000" cy="411480"/>
           </a:xfrm>
           <a:prstGeom prst="rect">
@@ -2933,7 +3024,7 @@
           <a:bodyPr wrap="square" lIns="0" tIns="0" rIns="0" bIns="0" rtlCol="0" anchor="ctr"/>
           <a:lstStyle/>
           <a:p>
-            <a:pPr algn="ctr" indent="0" marL="0">
+            <a:pPr marL="0" indent="0" algn="ctr">
               <a:buNone/>
             </a:pPr>
             <a:r>
@@ -2972,6 +3063,13 @@
           </a:solidFill>
           <a:ln/>
         </p:spPr>
+        <p:txBody>
+          <a:bodyPr/>
+          <a:lstStyle/>
+          <a:p>
+            <a:endParaRPr lang="en-DE"/>
+          </a:p>
+        </p:txBody>
       </p:sp>
       <p:sp>
         <p:nvSpPr>
@@ -2981,7 +3079,7 @@
         </p:nvSpPr>
         <p:spPr>
           <a:xfrm>
-            <a:off x="5760720" y="3383280"/>
+            <a:off x="5760720" y="3200400"/>
             <a:ext cx="2286000" cy="411480"/>
           </a:xfrm>
           <a:prstGeom prst="rect">
@@ -2994,7 +3092,7 @@
           <a:bodyPr wrap="square" lIns="0" tIns="0" rIns="0" bIns="0" rtlCol="0" anchor="ctr"/>
           <a:lstStyle/>
           <a:p>
-            <a:pPr algn="ctr" indent="0" marL="0">
+            <a:pPr marL="0" indent="0" algn="ctr">
               <a:buNone/>
             </a:pPr>
             <a:r>
@@ -3033,6 +3131,13 @@
           </a:solidFill>
           <a:ln/>
         </p:spPr>
+        <p:txBody>
+          <a:bodyPr/>
+          <a:lstStyle/>
+          <a:p>
+            <a:endParaRPr lang="en-DE"/>
+          </a:p>
+        </p:txBody>
       </p:sp>
       <p:sp>
         <p:nvSpPr>
@@ -3055,7 +3160,7 @@
           <a:bodyPr wrap="square" lIns="0" tIns="0" rIns="0" bIns="0" rtlCol="0" anchor="ctr"/>
           <a:lstStyle/>
           <a:p>
-            <a:pPr algn="ctr" indent="0" marL="0">
+            <a:pPr marL="0" indent="0" algn="ctr">
               <a:buNone/>
             </a:pPr>
             <a:r>
@@ -3081,7 +3186,7 @@
         </p:nvSpPr>
         <p:spPr>
           <a:xfrm>
-            <a:off x="8138160" y="2743200"/>
+            <a:off x="7863840" y="2766060"/>
             <a:ext cx="914400" cy="365760"/>
           </a:xfrm>
           <a:prstGeom prst="rect">
@@ -3094,7 +3199,7 @@
           <a:bodyPr wrap="square" lIns="0" tIns="0" rIns="0" bIns="0" rtlCol="0" anchor="ctr"/>
           <a:lstStyle/>
           <a:p>
-            <a:pPr indent="0" marL="0">
+            <a:pPr marL="0" indent="0">
               <a:buNone/>
             </a:pPr>
             <a:r>
@@ -3128,6 +3233,7 @@
         <a:solidFill>
           <a:srgbClr val="0F1729"/>
         </a:solidFill>
+        <a:effectLst/>
       </p:bgPr>
     </p:bg>
     <p:spTree>
@@ -3165,7 +3271,7 @@
           <a:bodyPr wrap="square" lIns="0" tIns="0" rIns="0" bIns="0" rtlCol="0" anchor="ctr"/>
           <a:lstStyle/>
           <a:p>
-            <a:pPr indent="0" marL="0">
+            <a:pPr marL="0" indent="0">
               <a:buNone/>
             </a:pPr>
             <a:r>
@@ -3204,17 +3310,24 @@
           </a:solidFill>
           <a:ln/>
         </p:spPr>
+        <p:txBody>
+          <a:bodyPr/>
+          <a:lstStyle/>
+          <a:p>
+            <a:endParaRPr lang="en-DE"/>
+          </a:p>
+        </p:txBody>
       </p:sp>
       <p:pic>
         <p:nvPicPr>
-          <p:cNvPr id="4" name="Image 0" descr="preencoded.png">    </p:cNvPr>
+          <p:cNvPr id="4" name="Image 0" descr="preencoded.png"/>
           <p:cNvPicPr>
             <a:picLocks noChangeAspect="1"/>
           </p:cNvPicPr>
           <p:nvPr/>
         </p:nvPicPr>
         <p:blipFill>
-          <a:blip r:embed="rId1"/>
+          <a:blip r:embed="rId3"/>
           <a:stretch>
             <a:fillRect/>
           </a:stretch>
@@ -3250,7 +3363,7 @@
           <a:bodyPr wrap="square" lIns="0" tIns="0" rIns="0" bIns="0" rtlCol="0" anchor="ctr"/>
           <a:lstStyle/>
           <a:p>
-            <a:pPr indent="0" marL="0">
+            <a:pPr marL="0" indent="0">
               <a:buNone/>
             </a:pPr>
             <a:r>
@@ -3339,7 +3452,7 @@
               <a:buChar char="•"/>
             </a:pPr>
             <a:r>
-              <a:rPr lang="en-US" sz="1300" dirty="0">
+              <a:rPr lang="en-US" sz="1300" dirty="0" err="1">
                 <a:solidFill>
                   <a:srgbClr val="CBD5E1"/>
                 </a:solidFill>
@@ -3347,18 +3460,8 @@
                 <a:ea typeface="Calibri" pitchFamily="34" charset="-122"/>
                 <a:cs typeface="Calibri" pitchFamily="34" charset="-120"/>
               </a:rPr>
-              <a:t>Sprache / i18n</a:t>
-            </a:r>
-            <a:endParaRPr lang="en-US" sz="1300" dirty="0"/>
-          </a:p>
-          <a:p>
-            <a:pPr marL="342900" indent="-342900">
-              <a:spcAft>
-                <a:spcPts val="400"/>
-              </a:spcAft>
-              <a:buSzPct val="100000"/>
-              <a:buChar char="•"/>
-            </a:pPr>
+              <a:t>Sprache</a:t>
+            </a:r>
             <a:r>
               <a:rPr lang="en-US" sz="1300" dirty="0">
                 <a:solidFill>
@@ -3368,7 +3471,18 @@
                 <a:ea typeface="Calibri" pitchFamily="34" charset="-122"/>
                 <a:cs typeface="Calibri" pitchFamily="34" charset="-120"/>
               </a:rPr>
-              <a:t>Dinge die sich selten ändern</a:t>
+              <a:t> </a:t>
+            </a:r>
+            <a:r>
+              <a:rPr lang="en-US" sz="1300" dirty="0" err="1">
+                <a:solidFill>
+                  <a:srgbClr val="CBD5E1"/>
+                </a:solidFill>
+                <a:latin typeface="Calibri" pitchFamily="34" charset="0"/>
+                <a:ea typeface="Calibri" pitchFamily="34" charset="-122"/>
+                <a:cs typeface="Calibri" pitchFamily="34" charset="-120"/>
+              </a:rPr>
+              <a:t>wechseln</a:t>
             </a:r>
             <a:endParaRPr lang="en-US" sz="1300" dirty="0"/>
           </a:p>
@@ -3395,6 +3509,13 @@
           </a:solidFill>
           <a:ln/>
         </p:spPr>
+        <p:txBody>
+          <a:bodyPr/>
+          <a:lstStyle/>
+          <a:p>
+            <a:endParaRPr lang="en-DE"/>
+          </a:p>
+        </p:txBody>
       </p:sp>
       <p:sp>
         <p:nvSpPr>
@@ -3417,7 +3538,7 @@
           <a:bodyPr wrap="square" lIns="0" tIns="0" rIns="0" bIns="0" rtlCol="0" anchor="ctr"/>
           <a:lstStyle/>
           <a:p>
-            <a:pPr indent="0" marL="0">
+            <a:pPr marL="0" indent="0">
               <a:buNone/>
             </a:pPr>
             <a:r>
@@ -3536,6 +3657,7 @@
         <a:solidFill>
           <a:srgbClr val="0F1729"/>
         </a:solidFill>
+        <a:effectLst/>
       </p:bgPr>
     </p:bg>
     <p:spTree>
@@ -3561,7 +3683,7 @@
         <p:spPr>
           <a:xfrm>
             <a:off x="731520" y="365760"/>
-            <a:ext cx="7315200" cy="640080"/>
+            <a:ext cx="5733360" cy="640080"/>
           </a:xfrm>
           <a:prstGeom prst="rect">
             <a:avLst/>
@@ -3573,19 +3695,19 @@
           <a:bodyPr wrap="square" lIns="0" tIns="0" rIns="0" bIns="0" rtlCol="0" anchor="ctr"/>
           <a:lstStyle/>
           <a:p>
-            <a:pPr indent="0" marL="0">
+            <a:pPr marL="0" indent="0">
               <a:buNone/>
             </a:pPr>
             <a:r>
               <a:rPr lang="en-US" sz="3600" b="1" dirty="0">
                 <a:solidFill>
-                  <a:srgbClr val="F8FAFC"/>
+                  <a:srgbClr val="06B6D4"/>
                 </a:solidFill>
                 <a:latin typeface="Trebuchet MS" pitchFamily="34" charset="0"/>
                 <a:ea typeface="Trebuchet MS" pitchFamily="34" charset="-122"/>
                 <a:cs typeface="Trebuchet MS" pitchFamily="34" charset="-120"/>
               </a:rPr>
-              <a:t>Redux – Ausblick</a:t>
+              <a:t>useReducer</a:t>
             </a:r>
             <a:endParaRPr lang="en-US" sz="3600" dirty="0"/>
           </a:p>
@@ -3600,7 +3722,7 @@
         <p:spPr>
           <a:xfrm>
             <a:off x="731520" y="1005840"/>
-            <a:ext cx="7315200" cy="365760"/>
+            <a:ext cx="5733360" cy="365760"/>
           </a:xfrm>
           <a:prstGeom prst="rect">
             <a:avLst/>
@@ -3612,7 +3734,7 @@
           <a:bodyPr wrap="square" lIns="0" tIns="0" rIns="0" bIns="0" rtlCol="0" anchor="ctr"/>
           <a:lstStyle/>
           <a:p>
-            <a:pPr indent="0" marL="0">
+            <a:pPr marL="0" indent="0">
               <a:buNone/>
             </a:pPr>
             <a:r>
@@ -3624,7 +3746,7 @@
                 <a:ea typeface="Calibri" pitchFamily="34" charset="-122"/>
                 <a:cs typeface="Calibri" pitchFamily="34" charset="-120"/>
               </a:rPr>
-              <a:t>Für große Apps mit komplexem State</a:t>
+              <a:t>Strukturierte State-Logik mit festen Regeln</a:t>
             </a:r>
             <a:endParaRPr lang="en-US" sz="1500" dirty="0"/>
           </a:p>
@@ -3638,12 +3760,12 @@
         </p:nvSpPr>
         <p:spPr>
           <a:xfrm>
-            <a:off x="731520" y="1645920"/>
-            <a:ext cx="2560320" cy="1554480"/>
+            <a:off x="731520" y="1554480"/>
+            <a:ext cx="2006676" cy="1371600"/>
           </a:xfrm>
           <a:prstGeom prst="roundRect">
             <a:avLst>
-              <a:gd name="adj" fmla="val 5882"/>
+              <a:gd name="adj" fmla="val 6667"/>
             </a:avLst>
           </a:prstGeom>
           <a:solidFill>
@@ -3651,6 +3773,13 @@
           </a:solidFill>
           <a:ln/>
         </p:spPr>
+        <p:txBody>
+          <a:bodyPr/>
+          <a:lstStyle/>
+          <a:p>
+            <a:endParaRPr lang="en-DE"/>
+          </a:p>
+        </p:txBody>
       </p:sp>
       <p:sp>
         <p:nvSpPr>
@@ -3660,8 +3789,8 @@
         </p:nvSpPr>
         <p:spPr>
           <a:xfrm>
-            <a:off x="731520" y="1737360"/>
-            <a:ext cx="2560320" cy="411480"/>
+            <a:off x="731520" y="1645920"/>
+            <a:ext cx="2006676" cy="411480"/>
           </a:xfrm>
           <a:prstGeom prst="rect">
             <a:avLst/>
@@ -3673,19 +3802,19 @@
           <a:bodyPr wrap="square" lIns="0" tIns="0" rIns="0" bIns="0" rtlCol="0" anchor="ctr"/>
           <a:lstStyle/>
           <a:p>
-            <a:pPr algn="ctr" indent="0" marL="0">
+            <a:pPr marL="0" indent="0" algn="ctr">
               <a:buNone/>
             </a:pPr>
             <a:r>
               <a:rPr lang="en-US" sz="1800" b="1" dirty="0">
                 <a:solidFill>
-                  <a:srgbClr val="A78BFA"/>
+                  <a:srgbClr val="06B6D4"/>
                 </a:solidFill>
                 <a:latin typeface="Trebuchet MS" pitchFamily="34" charset="0"/>
                 <a:ea typeface="Trebuchet MS" pitchFamily="34" charset="-122"/>
                 <a:cs typeface="Trebuchet MS" pitchFamily="34" charset="-120"/>
               </a:rPr>
-              <a:t>Store</a:t>
+              <a:t>State</a:t>
             </a:r>
             <a:endParaRPr lang="en-US" sz="1800" dirty="0"/>
           </a:p>
@@ -3699,8 +3828,8 @@
         </p:nvSpPr>
         <p:spPr>
           <a:xfrm>
-            <a:off x="914400" y="2148840"/>
-            <a:ext cx="2194560" cy="914400"/>
+            <a:off x="914400" y="2057400"/>
+            <a:ext cx="1720008" cy="777240"/>
           </a:xfrm>
           <a:prstGeom prst="rect">
             <a:avLst/>
@@ -3712,7 +3841,7 @@
           <a:bodyPr wrap="square" lIns="0" tIns="0" rIns="0" bIns="0" rtlCol="0" anchor="ctr"/>
           <a:lstStyle/>
           <a:p>
-            <a:pPr algn="ctr" indent="0" marL="0">
+            <a:pPr marL="0" indent="0" algn="ctr">
               <a:buNone/>
             </a:pPr>
             <a:r>
@@ -3724,12 +3853,12 @@
                 <a:ea typeface="Consolas" pitchFamily="34" charset="-122"/>
                 <a:cs typeface="Consolas" pitchFamily="34" charset="-120"/>
               </a:rPr>
-              <a:t>Eine zentrale Quelle</a:t>
+              <a:t>Ein Objekt mit</a:t>
             </a:r>
             <a:endParaRPr lang="en-US" sz="1200" dirty="0"/>
           </a:p>
           <a:p>
-            <a:pPr algn="ctr" indent="0" marL="0">
+            <a:pPr marL="0" indent="0" algn="ctr">
               <a:buNone/>
             </a:pPr>
             <a:r>
@@ -3741,12 +3870,102 @@
                 <a:ea typeface="Consolas" pitchFamily="34" charset="-122"/>
                 <a:cs typeface="Consolas" pitchFamily="34" charset="-120"/>
               </a:rPr>
-              <a:t>für den gesamten</a:t>
+              <a:t>allem Zustand</a:t>
             </a:r>
             <a:endParaRPr lang="en-US" sz="1200" dirty="0"/>
           </a:p>
-          <a:p>
-            <a:pPr algn="ctr" indent="0" marL="0">
+        </p:txBody>
+      </p:sp>
+      <p:sp>
+        <p:nvSpPr>
+          <p:cNvPr id="7" name="Shape 5"/>
+          <p:cNvSpPr/>
+          <p:nvPr/>
+        </p:nvSpPr>
+        <p:spPr>
+          <a:xfrm>
+            <a:off x="3520440" y="1554480"/>
+            <a:ext cx="2006676" cy="1371600"/>
+          </a:xfrm>
+          <a:prstGeom prst="roundRect">
+            <a:avLst>
+              <a:gd name="adj" fmla="val 6667"/>
+            </a:avLst>
+          </a:prstGeom>
+          <a:solidFill>
+            <a:srgbClr val="1A2744"/>
+          </a:solidFill>
+          <a:ln/>
+        </p:spPr>
+        <p:txBody>
+          <a:bodyPr/>
+          <a:lstStyle/>
+          <a:p>
+            <a:endParaRPr lang="en-DE"/>
+          </a:p>
+        </p:txBody>
+      </p:sp>
+      <p:sp>
+        <p:nvSpPr>
+          <p:cNvPr id="8" name="Text 6"/>
+          <p:cNvSpPr/>
+          <p:nvPr/>
+        </p:nvSpPr>
+        <p:spPr>
+          <a:xfrm>
+            <a:off x="3520440" y="1645920"/>
+            <a:ext cx="2006676" cy="411480"/>
+          </a:xfrm>
+          <a:prstGeom prst="rect">
+            <a:avLst/>
+          </a:prstGeom>
+          <a:noFill/>
+          <a:ln/>
+        </p:spPr>
+        <p:txBody>
+          <a:bodyPr wrap="square" lIns="0" tIns="0" rIns="0" bIns="0" rtlCol="0" anchor="ctr"/>
+          <a:lstStyle/>
+          <a:p>
+            <a:pPr marL="0" indent="0" algn="ctr">
+              <a:buNone/>
+            </a:pPr>
+            <a:r>
+              <a:rPr lang="en-US" sz="1800" b="1" dirty="0">
+                <a:solidFill>
+                  <a:srgbClr val="F59E0B"/>
+                </a:solidFill>
+                <a:latin typeface="Trebuchet MS" pitchFamily="34" charset="0"/>
+                <a:ea typeface="Trebuchet MS" pitchFamily="34" charset="-122"/>
+                <a:cs typeface="Trebuchet MS" pitchFamily="34" charset="-120"/>
+              </a:rPr>
+              <a:t>Action</a:t>
+            </a:r>
+            <a:endParaRPr lang="en-US" sz="1800" dirty="0"/>
+          </a:p>
+        </p:txBody>
+      </p:sp>
+      <p:sp>
+        <p:nvSpPr>
+          <p:cNvPr id="9" name="Text 7"/>
+          <p:cNvSpPr/>
+          <p:nvPr/>
+        </p:nvSpPr>
+        <p:spPr>
+          <a:xfrm>
+            <a:off x="3648501" y="2057400"/>
+            <a:ext cx="1774827" cy="777240"/>
+          </a:xfrm>
+          <a:prstGeom prst="rect">
+            <a:avLst/>
+          </a:prstGeom>
+          <a:noFill/>
+          <a:ln/>
+        </p:spPr>
+        <p:txBody>
+          <a:bodyPr wrap="square" lIns="0" tIns="0" rIns="0" bIns="0" rtlCol="0" anchor="ctr"/>
+          <a:lstStyle/>
+          <a:p>
+            <a:pPr marL="0" indent="0" algn="ctr">
               <a:buNone/>
             </a:pPr>
             <a:r>
@@ -3758,26 +3977,43 @@
                 <a:ea typeface="Consolas" pitchFamily="34" charset="-122"/>
                 <a:cs typeface="Consolas" pitchFamily="34" charset="-120"/>
               </a:rPr>
-              <a:t>App-State</a:t>
+              <a:t>Ein Zettel:</a:t>
             </a:r>
             <a:endParaRPr lang="en-US" sz="1200" dirty="0"/>
           </a:p>
-        </p:txBody>
-      </p:sp>
-      <p:sp>
-        <p:nvSpPr>
-          <p:cNvPr id="7" name="Shape 5"/>
-          <p:cNvSpPr/>
-          <p:nvPr/>
-        </p:nvSpPr>
-        <p:spPr>
-          <a:xfrm>
-            <a:off x="3566160" y="1645920"/>
-            <a:ext cx="2560320" cy="1554480"/>
+          <a:p>
+            <a:pPr marL="0" indent="0" algn="ctr">
+              <a:buNone/>
+            </a:pPr>
+            <a:r>
+              <a:rPr lang="en-US" sz="1200" dirty="0">
+                <a:solidFill>
+                  <a:srgbClr val="CBD5E1"/>
+                </a:solidFill>
+                <a:latin typeface="Consolas" pitchFamily="34" charset="0"/>
+                <a:ea typeface="Consolas" pitchFamily="34" charset="-122"/>
+                <a:cs typeface="Consolas" pitchFamily="34" charset="-120"/>
+              </a:rPr>
+              <a:t>{ type: 'increment' }</a:t>
+            </a:r>
+            <a:endParaRPr lang="en-US" sz="1200" dirty="0"/>
+          </a:p>
+        </p:txBody>
+      </p:sp>
+      <p:sp>
+        <p:nvSpPr>
+          <p:cNvPr id="10" name="Shape 8"/>
+          <p:cNvSpPr/>
+          <p:nvPr/>
+        </p:nvSpPr>
+        <p:spPr>
+          <a:xfrm>
+            <a:off x="6309360" y="1554480"/>
+            <a:ext cx="2006676" cy="1371600"/>
           </a:xfrm>
           <a:prstGeom prst="roundRect">
             <a:avLst>
-              <a:gd name="adj" fmla="val 5882"/>
+              <a:gd name="adj" fmla="val 6667"/>
             </a:avLst>
           </a:prstGeom>
           <a:solidFill>
@@ -3785,17 +4021,24 @@
           </a:solidFill>
           <a:ln/>
         </p:spPr>
-      </p:sp>
-      <p:sp>
-        <p:nvSpPr>
-          <p:cNvPr id="8" name="Text 6"/>
-          <p:cNvSpPr/>
-          <p:nvPr/>
-        </p:nvSpPr>
-        <p:spPr>
-          <a:xfrm>
-            <a:off x="3566160" y="1737360"/>
-            <a:ext cx="2560320" cy="411480"/>
+        <p:txBody>
+          <a:bodyPr/>
+          <a:lstStyle/>
+          <a:p>
+            <a:endParaRPr lang="en-DE"/>
+          </a:p>
+        </p:txBody>
+      </p:sp>
+      <p:sp>
+        <p:nvSpPr>
+          <p:cNvPr id="11" name="Text 9"/>
+          <p:cNvSpPr/>
+          <p:nvPr/>
+        </p:nvSpPr>
+        <p:spPr>
+          <a:xfrm>
+            <a:off x="6309360" y="1645920"/>
+            <a:ext cx="2006676" cy="411480"/>
           </a:xfrm>
           <a:prstGeom prst="rect">
             <a:avLst/>
@@ -3807,19 +4050,19 @@
           <a:bodyPr wrap="square" lIns="0" tIns="0" rIns="0" bIns="0" rtlCol="0" anchor="ctr"/>
           <a:lstStyle/>
           <a:p>
-            <a:pPr algn="ctr" indent="0" marL="0">
+            <a:pPr marL="0" indent="0" algn="ctr">
               <a:buNone/>
             </a:pPr>
             <a:r>
               <a:rPr lang="en-US" sz="1800" b="1" dirty="0">
                 <a:solidFill>
-                  <a:srgbClr val="F59E0B"/>
+                  <a:srgbClr val="10B981"/>
                 </a:solidFill>
                 <a:latin typeface="Trebuchet MS" pitchFamily="34" charset="0"/>
                 <a:ea typeface="Trebuchet MS" pitchFamily="34" charset="-122"/>
                 <a:cs typeface="Trebuchet MS" pitchFamily="34" charset="-120"/>
               </a:rPr>
-              <a:t>Actions</a:t>
+              <a:t>Reducer</a:t>
             </a:r>
             <a:endParaRPr lang="en-US" sz="1800" dirty="0"/>
           </a:p>
@@ -3827,14 +4070,14 @@
       </p:sp>
       <p:sp>
         <p:nvSpPr>
-          <p:cNvPr id="9" name="Text 7"/>
-          <p:cNvSpPr/>
-          <p:nvPr/>
-        </p:nvSpPr>
-        <p:spPr>
-          <a:xfrm>
-            <a:off x="3749040" y="2148840"/>
-            <a:ext cx="2194560" cy="914400"/>
+          <p:cNvPr id="12" name="Text 10"/>
+          <p:cNvSpPr/>
+          <p:nvPr/>
+        </p:nvSpPr>
+        <p:spPr>
+          <a:xfrm>
+            <a:off x="6492240" y="2057400"/>
+            <a:ext cx="1720008" cy="777240"/>
           </a:xfrm>
           <a:prstGeom prst="rect">
             <a:avLst/>
@@ -3846,7 +4089,7 @@
           <a:bodyPr wrap="square" lIns="0" tIns="0" rIns="0" bIns="0" rtlCol="0" anchor="ctr"/>
           <a:lstStyle/>
           <a:p>
-            <a:pPr algn="ctr" indent="0" marL="0">
+            <a:pPr marL="0" indent="0" algn="ctr">
               <a:buNone/>
             </a:pPr>
             <a:r>
@@ -3858,12 +4101,12 @@
                 <a:ea typeface="Consolas" pitchFamily="34" charset="-122"/>
                 <a:cs typeface="Consolas" pitchFamily="34" charset="-120"/>
               </a:rPr>
-              <a:t>Beschreiben was</a:t>
+              <a:t>Regeln (switch/case):</a:t>
             </a:r>
             <a:endParaRPr lang="en-US" sz="1200" dirty="0"/>
           </a:p>
           <a:p>
-            <a:pPr algn="ctr" indent="0" marL="0">
+            <a:pPr marL="0" indent="0" algn="ctr">
               <a:buNone/>
             </a:pPr>
             <a:r>
@@ -3875,157 +4118,6 @@
                 <a:ea typeface="Consolas" pitchFamily="34" charset="-122"/>
                 <a:cs typeface="Consolas" pitchFamily="34" charset="-120"/>
               </a:rPr>
-              <a:t>passieren soll:</a:t>
-            </a:r>
-            <a:endParaRPr lang="en-US" sz="1200" dirty="0"/>
-          </a:p>
-          <a:p>
-            <a:pPr algn="ctr" indent="0" marL="0">
-              <a:buNone/>
-            </a:pPr>
-            <a:r>
-              <a:rPr lang="en-US" sz="1200" dirty="0">
-                <a:solidFill>
-                  <a:srgbClr val="CBD5E1"/>
-                </a:solidFill>
-                <a:latin typeface="Consolas" pitchFamily="34" charset="0"/>
-                <a:ea typeface="Consolas" pitchFamily="34" charset="-122"/>
-                <a:cs typeface="Consolas" pitchFamily="34" charset="-120"/>
-              </a:rPr>
-              <a:t>{ type: 'add_todo' }</a:t>
-            </a:r>
-            <a:endParaRPr lang="en-US" sz="1200" dirty="0"/>
-          </a:p>
-        </p:txBody>
-      </p:sp>
-      <p:sp>
-        <p:nvSpPr>
-          <p:cNvPr id="10" name="Shape 8"/>
-          <p:cNvSpPr/>
-          <p:nvPr/>
-        </p:nvSpPr>
-        <p:spPr>
-          <a:xfrm>
-            <a:off x="6400800" y="1645920"/>
-            <a:ext cx="2560320" cy="1554480"/>
-          </a:xfrm>
-          <a:prstGeom prst="roundRect">
-            <a:avLst>
-              <a:gd name="adj" fmla="val 5882"/>
-            </a:avLst>
-          </a:prstGeom>
-          <a:solidFill>
-            <a:srgbClr val="1A2744"/>
-          </a:solidFill>
-          <a:ln/>
-        </p:spPr>
-      </p:sp>
-      <p:sp>
-        <p:nvSpPr>
-          <p:cNvPr id="11" name="Text 9"/>
-          <p:cNvSpPr/>
-          <p:nvPr/>
-        </p:nvSpPr>
-        <p:spPr>
-          <a:xfrm>
-            <a:off x="6400800" y="1737360"/>
-            <a:ext cx="2560320" cy="411480"/>
-          </a:xfrm>
-          <a:prstGeom prst="rect">
-            <a:avLst/>
-          </a:prstGeom>
-          <a:noFill/>
-          <a:ln/>
-        </p:spPr>
-        <p:txBody>
-          <a:bodyPr wrap="square" lIns="0" tIns="0" rIns="0" bIns="0" rtlCol="0" anchor="ctr"/>
-          <a:lstStyle/>
-          <a:p>
-            <a:pPr algn="ctr" indent="0" marL="0">
-              <a:buNone/>
-            </a:pPr>
-            <a:r>
-              <a:rPr lang="en-US" sz="1800" b="1" dirty="0">
-                <a:solidFill>
-                  <a:srgbClr val="10B981"/>
-                </a:solidFill>
-                <a:latin typeface="Trebuchet MS" pitchFamily="34" charset="0"/>
-                <a:ea typeface="Trebuchet MS" pitchFamily="34" charset="-122"/>
-                <a:cs typeface="Trebuchet MS" pitchFamily="34" charset="-120"/>
-              </a:rPr>
-              <a:t>Reducers</a:t>
-            </a:r>
-            <a:endParaRPr lang="en-US" sz="1800" dirty="0"/>
-          </a:p>
-        </p:txBody>
-      </p:sp>
-      <p:sp>
-        <p:nvSpPr>
-          <p:cNvPr id="12" name="Text 10"/>
-          <p:cNvSpPr/>
-          <p:nvPr/>
-        </p:nvSpPr>
-        <p:spPr>
-          <a:xfrm>
-            <a:off x="6583680" y="2148840"/>
-            <a:ext cx="2194560" cy="914400"/>
-          </a:xfrm>
-          <a:prstGeom prst="rect">
-            <a:avLst/>
-          </a:prstGeom>
-          <a:noFill/>
-          <a:ln/>
-        </p:spPr>
-        <p:txBody>
-          <a:bodyPr wrap="square" lIns="0" tIns="0" rIns="0" bIns="0" rtlCol="0" anchor="ctr"/>
-          <a:lstStyle/>
-          <a:p>
-            <a:pPr algn="ctr" indent="0" marL="0">
-              <a:buNone/>
-            </a:pPr>
-            <a:r>
-              <a:rPr lang="en-US" sz="1200" dirty="0">
-                <a:solidFill>
-                  <a:srgbClr val="CBD5E1"/>
-                </a:solidFill>
-                <a:latin typeface="Consolas" pitchFamily="34" charset="0"/>
-                <a:ea typeface="Consolas" pitchFamily="34" charset="-122"/>
-                <a:cs typeface="Consolas" pitchFamily="34" charset="-120"/>
-              </a:rPr>
-              <a:t>Regeln die den</a:t>
-            </a:r>
-            <a:endParaRPr lang="en-US" sz="1200" dirty="0"/>
-          </a:p>
-          <a:p>
-            <a:pPr algn="ctr" indent="0" marL="0">
-              <a:buNone/>
-            </a:pPr>
-            <a:r>
-              <a:rPr lang="en-US" sz="1200" dirty="0">
-                <a:solidFill>
-                  <a:srgbClr val="CBD5E1"/>
-                </a:solidFill>
-                <a:latin typeface="Consolas" pitchFamily="34" charset="0"/>
-                <a:ea typeface="Consolas" pitchFamily="34" charset="-122"/>
-                <a:cs typeface="Consolas" pitchFamily="34" charset="-120"/>
-              </a:rPr>
-              <a:t>neuen State berechnen</a:t>
-            </a:r>
-            <a:endParaRPr lang="en-US" sz="1200" dirty="0"/>
-          </a:p>
-          <a:p>
-            <a:pPr algn="ctr" indent="0" marL="0">
-              <a:buNone/>
-            </a:pPr>
-            <a:r>
-              <a:rPr lang="en-US" sz="1200" dirty="0">
-                <a:solidFill>
-                  <a:srgbClr val="CBD5E1"/>
-                </a:solidFill>
-                <a:latin typeface="Consolas" pitchFamily="34" charset="0"/>
-                <a:ea typeface="Consolas" pitchFamily="34" charset="-122"/>
-                <a:cs typeface="Consolas" pitchFamily="34" charset="-120"/>
-              </a:rPr>
               <a:t>(state, action) =&gt; new</a:t>
             </a:r>
             <a:endParaRPr lang="en-US" sz="1200" dirty="0"/>
@@ -4034,77 +4126,7 @@
       </p:sp>
       <p:pic>
         <p:nvPicPr>
-          <p:cNvPr id="13" name="Image 0" descr="preencoded.png">    </p:cNvPr>
-          <p:cNvPicPr>
-            <a:picLocks noChangeAspect="1"/>
-          </p:cNvPicPr>
-          <p:nvPr/>
-        </p:nvPicPr>
-        <p:blipFill>
-          <a:blip r:embed="rId1"/>
-          <a:stretch>
-            <a:fillRect/>
-          </a:stretch>
-        </p:blipFill>
-        <p:spPr>
-          <a:xfrm>
-            <a:off x="3108960" y="2148840"/>
-            <a:ext cx="320040" cy="320040"/>
-          </a:xfrm>
-          <a:prstGeom prst="rect">
-            <a:avLst/>
-          </a:prstGeom>
-        </p:spPr>
-      </p:pic>
-      <p:pic>
-        <p:nvPicPr>
-          <p:cNvPr id="14" name="Image 1" descr="preencoded.png">    </p:cNvPr>
-          <p:cNvPicPr>
-            <a:picLocks noChangeAspect="1"/>
-          </p:cNvPicPr>
-          <p:nvPr/>
-        </p:nvPicPr>
-        <p:blipFill>
-          <a:blip r:embed="rId2"/>
-          <a:stretch>
-            <a:fillRect/>
-          </a:stretch>
-        </p:blipFill>
-        <p:spPr>
-          <a:xfrm>
-            <a:off x="5943600" y="2148840"/>
-            <a:ext cx="320040" cy="320040"/>
-          </a:xfrm>
-          <a:prstGeom prst="rect">
-            <a:avLst/>
-          </a:prstGeom>
-        </p:spPr>
-      </p:pic>
-      <p:sp>
-        <p:nvSpPr>
-          <p:cNvPr id="15" name="Shape 11"/>
-          <p:cNvSpPr/>
-          <p:nvPr/>
-        </p:nvSpPr>
-        <p:spPr>
-          <a:xfrm>
-            <a:off x="731520" y="3474720"/>
-            <a:ext cx="7680960" cy="1097280"/>
-          </a:xfrm>
-          <a:prstGeom prst="roundRect">
-            <a:avLst>
-              <a:gd name="adj" fmla="val 8333"/>
-            </a:avLst>
-          </a:prstGeom>
-          <a:solidFill>
-            <a:srgbClr val="1A2744"/>
-          </a:solidFill>
-          <a:ln/>
-        </p:spPr>
-      </p:sp>
-      <p:pic>
-        <p:nvPicPr>
-          <p:cNvPr id="16" name="Image 2" descr="preencoded.png">    </p:cNvPr>
+          <p:cNvPr id="13" name="Image 0" descr="preencoded.png"/>
           <p:cNvPicPr>
             <a:picLocks noChangeAspect="1"/>
           </p:cNvPicPr>
@@ -4118,87 +4140,158 @@
         </p:blipFill>
         <p:spPr>
           <a:xfrm>
-            <a:off x="914400" y="3611880"/>
-            <a:ext cx="365760" cy="365760"/>
+            <a:off x="3108960" y="1965960"/>
+            <a:ext cx="250835" cy="320040"/>
           </a:xfrm>
           <a:prstGeom prst="rect">
             <a:avLst/>
           </a:prstGeom>
         </p:spPr>
       </p:pic>
-      <p:sp>
-        <p:nvSpPr>
-          <p:cNvPr id="17" name="Text 12"/>
-          <p:cNvSpPr/>
-          <p:nvPr/>
-        </p:nvSpPr>
-        <p:spPr>
-          <a:xfrm>
-            <a:off x="1463040" y="3566160"/>
-            <a:ext cx="6400800" cy="365760"/>
+      <p:pic>
+        <p:nvPicPr>
+          <p:cNvPr id="14" name="Image 1" descr="preencoded.png"/>
+          <p:cNvPicPr>
+            <a:picLocks noChangeAspect="1"/>
+          </p:cNvPicPr>
+          <p:nvPr/>
+        </p:nvPicPr>
+        <p:blipFill>
+          <a:blip r:embed="rId3"/>
+          <a:stretch>
+            <a:fillRect/>
+          </a:stretch>
+        </p:blipFill>
+        <p:spPr>
+          <a:xfrm>
+            <a:off x="5897880" y="1965960"/>
+            <a:ext cx="250835" cy="320040"/>
           </a:xfrm>
           <a:prstGeom prst="rect">
             <a:avLst/>
           </a:prstGeom>
+        </p:spPr>
+      </p:pic>
+      <p:sp>
+        <p:nvSpPr>
+          <p:cNvPr id="15" name="Shape 11"/>
+          <p:cNvSpPr/>
+          <p:nvPr/>
+        </p:nvSpPr>
+        <p:spPr>
+          <a:xfrm>
+            <a:off x="731520" y="3200400"/>
+            <a:ext cx="6020028" cy="1554480"/>
+          </a:xfrm>
+          <a:prstGeom prst="roundRect">
+            <a:avLst>
+              <a:gd name="adj" fmla="val 5882"/>
+            </a:avLst>
+          </a:prstGeom>
+          <a:solidFill>
+            <a:srgbClr val="0D1117"/>
+          </a:solidFill>
+          <a:ln/>
+        </p:spPr>
+        <p:txBody>
+          <a:bodyPr/>
+          <a:lstStyle/>
+          <a:p>
+            <a:endParaRPr lang="en-DE"/>
+          </a:p>
+        </p:txBody>
+      </p:sp>
+      <p:sp>
+        <p:nvSpPr>
+          <p:cNvPr id="16" name="Text 12"/>
+          <p:cNvSpPr/>
+          <p:nvPr/>
+        </p:nvSpPr>
+        <p:spPr>
+          <a:xfrm>
+            <a:off x="1005840" y="3291840"/>
+            <a:ext cx="5661693" cy="1371600"/>
+          </a:xfrm>
+          <a:prstGeom prst="rect">
+            <a:avLst/>
+          </a:prstGeom>
           <a:noFill/>
           <a:ln/>
         </p:spPr>
         <p:txBody>
-          <a:bodyPr wrap="square" lIns="0" tIns="0" rIns="0" bIns="0" rtlCol="0" anchor="ctr"/>
-          <a:lstStyle/>
-          <a:p>
-            <a:pPr indent="0" marL="0">
-              <a:buNone/>
-            </a:pPr>
-            <a:r>
-              <a:rPr lang="en-US" sz="1600" b="1" dirty="0">
+          <a:bodyPr wrap="square" rtlCol="0" anchor="t"/>
+          <a:lstStyle/>
+          <a:p>
+            <a:pPr marL="0" indent="0">
+              <a:buNone/>
+            </a:pPr>
+            <a:r>
+              <a:rPr lang="en-US" sz="1300" dirty="0">
+                <a:solidFill>
+                  <a:srgbClr val="67E8F9"/>
+                </a:solidFill>
+                <a:latin typeface="Consolas" pitchFamily="34" charset="0"/>
+                <a:ea typeface="Consolas" pitchFamily="34" charset="-122"/>
+                <a:cs typeface="Consolas" pitchFamily="34" charset="-120"/>
+              </a:rPr>
+              <a:t>const [state, dispatch] = useReducer(reducer, initialState);</a:t>
+            </a:r>
+            <a:endParaRPr lang="en-US" sz="1300" dirty="0"/>
+          </a:p>
+          <a:p>
+            <a:pPr marL="0" indent="0">
+              <a:buNone/>
+            </a:pPr>
+            <a:endParaRPr lang="en-US" sz="1300" dirty="0"/>
+          </a:p>
+          <a:p>
+            <a:pPr marL="0" indent="0">
+              <a:buNone/>
+            </a:pPr>
+            <a:r>
+              <a:rPr lang="en-US" sz="1200" dirty="0">
+                <a:solidFill>
+                  <a:srgbClr val="475569"/>
+                </a:solidFill>
+                <a:latin typeface="Consolas" pitchFamily="34" charset="0"/>
+                <a:ea typeface="Consolas" pitchFamily="34" charset="-122"/>
+                <a:cs typeface="Consolas" pitchFamily="34" charset="-120"/>
+              </a:rPr>
+              <a:t>// Statt setCount(count + 1):</a:t>
+            </a:r>
+            <a:endParaRPr lang="en-US" sz="1300" dirty="0"/>
+          </a:p>
+          <a:p>
+            <a:pPr marL="0" indent="0">
+              <a:buNone/>
+            </a:pPr>
+            <a:r>
+              <a:rPr lang="en-US" sz="1300" dirty="0">
                 <a:solidFill>
                   <a:srgbClr val="F59E0B"/>
                 </a:solidFill>
-                <a:latin typeface="Trebuchet MS" pitchFamily="34" charset="0"/>
-                <a:ea typeface="Trebuchet MS" pitchFamily="34" charset="-122"/>
-                <a:cs typeface="Trebuchet MS" pitchFamily="34" charset="-120"/>
-              </a:rPr>
-              <a:t>Redux Toolkit</a:t>
-            </a:r>
-            <a:endParaRPr lang="en-US" sz="1600" dirty="0"/>
-          </a:p>
-        </p:txBody>
-      </p:sp>
-      <p:sp>
-        <p:nvSpPr>
-          <p:cNvPr id="18" name="Text 13"/>
-          <p:cNvSpPr/>
-          <p:nvPr/>
-        </p:nvSpPr>
-        <p:spPr>
-          <a:xfrm>
-            <a:off x="1463040" y="3931920"/>
-            <a:ext cx="6583680" cy="548640"/>
-          </a:xfrm>
-          <a:prstGeom prst="rect">
-            <a:avLst/>
-          </a:prstGeom>
-          <a:noFill/>
-          <a:ln/>
-        </p:spPr>
-        <p:txBody>
-          <a:bodyPr wrap="square" lIns="0" tIns="0" rIns="0" bIns="0" rtlCol="0" anchor="ctr"/>
-          <a:lstStyle/>
-          <a:p>
-            <a:pPr indent="0" marL="0">
-              <a:buNone/>
-            </a:pPr>
-            <a:r>
-              <a:rPr lang="en-US" sz="1300" dirty="0">
-                <a:solidFill>
-                  <a:srgbClr val="CBD5E1"/>
-                </a:solidFill>
-                <a:latin typeface="Calibri" pitchFamily="34" charset="0"/>
-                <a:ea typeface="Calibri" pitchFamily="34" charset="-122"/>
-                <a:cs typeface="Calibri" pitchFamily="34" charset="-120"/>
-              </a:rPr>
-              <a:t>Heute nutzt man Redux Toolkit – deutlich weniger Boilerplate als das originale Redux. Lohnt sich erst bei großen Projekten mit vielen Features und Teams.</a:t>
+                <a:latin typeface="Consolas" pitchFamily="34" charset="0"/>
+                <a:ea typeface="Consolas" pitchFamily="34" charset="-122"/>
+                <a:cs typeface="Consolas" pitchFamily="34" charset="-120"/>
+              </a:rPr>
+              <a:t>dispatch({ type: 'increment' });</a:t>
+            </a:r>
+            <a:endParaRPr lang="en-US" sz="1300" dirty="0"/>
+          </a:p>
+          <a:p>
+            <a:pPr marL="0" indent="0">
+              <a:buNone/>
+            </a:pPr>
+            <a:r>
+              <a:rPr lang="en-US" sz="1200" dirty="0">
+                <a:solidFill>
+                  <a:srgbClr val="475569"/>
+                </a:solidFill>
+                <a:latin typeface="Consolas" pitchFamily="34" charset="0"/>
+                <a:ea typeface="Consolas" pitchFamily="34" charset="-122"/>
+                <a:cs typeface="Consolas" pitchFamily="34" charset="-120"/>
+              </a:rPr>
+              <a:t>// → Reducer entscheidet was passiert</a:t>
             </a:r>
             <a:endParaRPr lang="en-US" sz="1300" dirty="0"/>
           </a:p>
@@ -4220,6 +4313,7 @@
         <a:solidFill>
           <a:srgbClr val="0F1729"/>
         </a:solidFill>
+        <a:effectLst/>
       </p:bgPr>
     </p:bg>
     <p:spTree>
@@ -4244,8 +4338,8 @@
         </p:nvSpPr>
         <p:spPr>
           <a:xfrm>
-            <a:off x="731520" y="365760"/>
-            <a:ext cx="7315200" cy="640080"/>
+            <a:off x="731520" y="274320"/>
+            <a:ext cx="7315200" cy="548640"/>
           </a:xfrm>
           <a:prstGeom prst="rect">
             <a:avLst/>
@@ -4257,11 +4351,11 @@
           <a:bodyPr wrap="square" lIns="0" tIns="0" rIns="0" bIns="0" rtlCol="0" anchor="ctr"/>
           <a:lstStyle/>
           <a:p>
-            <a:pPr indent="0" marL="0">
-              <a:buNone/>
-            </a:pPr>
-            <a:r>
-              <a:rPr lang="en-US" sz="3200" b="1" dirty="0">
+            <a:pPr marL="0" indent="0">
+              <a:buNone/>
+            </a:pPr>
+            <a:r>
+              <a:rPr lang="en-US" sz="2800" b="1" dirty="0">
                 <a:solidFill>
                   <a:srgbClr val="F8FAFC"/>
                 </a:solidFill>
@@ -4269,6 +4363,1029 @@
                 <a:ea typeface="Trebuchet MS" pitchFamily="34" charset="-122"/>
                 <a:cs typeface="Trebuchet MS" pitchFamily="34" charset="-120"/>
               </a:rPr>
+              <a:t>useReducer – Counter</a:t>
+            </a:r>
+            <a:endParaRPr lang="en-US" sz="2800" dirty="0"/>
+          </a:p>
+        </p:txBody>
+      </p:sp>
+      <p:sp>
+        <p:nvSpPr>
+          <p:cNvPr id="3" name="Shape 1"/>
+          <p:cNvSpPr/>
+          <p:nvPr/>
+        </p:nvSpPr>
+        <p:spPr>
+          <a:xfrm>
+            <a:off x="457200" y="914400"/>
+            <a:ext cx="8229600" cy="3840480"/>
+          </a:xfrm>
+          <a:prstGeom prst="roundRect">
+            <a:avLst>
+              <a:gd name="adj" fmla="val 2381"/>
+            </a:avLst>
+          </a:prstGeom>
+          <a:solidFill>
+            <a:srgbClr val="0D1117"/>
+          </a:solidFill>
+          <a:ln/>
+        </p:spPr>
+        <p:txBody>
+          <a:bodyPr/>
+          <a:lstStyle/>
+          <a:p>
+            <a:endParaRPr lang="en-DE"/>
+          </a:p>
+        </p:txBody>
+      </p:sp>
+      <p:sp>
+        <p:nvSpPr>
+          <p:cNvPr id="4" name="Text 2"/>
+          <p:cNvSpPr/>
+          <p:nvPr/>
+        </p:nvSpPr>
+        <p:spPr>
+          <a:xfrm>
+            <a:off x="731520" y="1005840"/>
+            <a:ext cx="7772400" cy="3657600"/>
+          </a:xfrm>
+          <a:prstGeom prst="rect">
+            <a:avLst/>
+          </a:prstGeom>
+          <a:noFill/>
+          <a:ln/>
+        </p:spPr>
+        <p:txBody>
+          <a:bodyPr wrap="square" rtlCol="0" anchor="t"/>
+          <a:lstStyle/>
+          <a:p>
+            <a:pPr marL="0" indent="0">
+              <a:buNone/>
+            </a:pPr>
+            <a:r>
+              <a:rPr lang="en-US" sz="1100" dirty="0">
+                <a:solidFill>
+                  <a:srgbClr val="67E8F9"/>
+                </a:solidFill>
+                <a:latin typeface="Consolas" pitchFamily="34" charset="0"/>
+                <a:ea typeface="Consolas" pitchFamily="34" charset="-122"/>
+                <a:cs typeface="Consolas" pitchFamily="34" charset="-120"/>
+              </a:rPr>
+              <a:t>function reducer(state, action) {</a:t>
+            </a:r>
+            <a:endParaRPr lang="en-US" sz="1100" dirty="0"/>
+          </a:p>
+          <a:p>
+            <a:pPr marL="0" indent="0">
+              <a:buNone/>
+            </a:pPr>
+            <a:r>
+              <a:rPr lang="en-US" sz="1100" dirty="0">
+                <a:solidFill>
+                  <a:srgbClr val="67E8F9"/>
+                </a:solidFill>
+                <a:latin typeface="Consolas" pitchFamily="34" charset="0"/>
+                <a:ea typeface="Consolas" pitchFamily="34" charset="-122"/>
+                <a:cs typeface="Consolas" pitchFamily="34" charset="-120"/>
+              </a:rPr>
+              <a:t>  switch (action.type) {</a:t>
+            </a:r>
+            <a:endParaRPr lang="en-US" sz="1100" dirty="0"/>
+          </a:p>
+          <a:p>
+            <a:pPr marL="0" indent="0">
+              <a:buNone/>
+            </a:pPr>
+            <a:r>
+              <a:rPr lang="en-US" sz="1100" dirty="0">
+                <a:solidFill>
+                  <a:srgbClr val="F59E0B"/>
+                </a:solidFill>
+                <a:latin typeface="Consolas" pitchFamily="34" charset="0"/>
+                <a:ea typeface="Consolas" pitchFamily="34" charset="-122"/>
+                <a:cs typeface="Consolas" pitchFamily="34" charset="-120"/>
+              </a:rPr>
+              <a:t>    case 'increment':</a:t>
+            </a:r>
+            <a:endParaRPr lang="en-US" sz="1100" dirty="0"/>
+          </a:p>
+          <a:p>
+            <a:pPr marL="0" indent="0">
+              <a:buNone/>
+            </a:pPr>
+            <a:r>
+              <a:rPr lang="en-US" sz="1100" dirty="0">
+                <a:solidFill>
+                  <a:srgbClr val="F59E0B"/>
+                </a:solidFill>
+                <a:latin typeface="Consolas" pitchFamily="34" charset="0"/>
+                <a:ea typeface="Consolas" pitchFamily="34" charset="-122"/>
+                <a:cs typeface="Consolas" pitchFamily="34" charset="-120"/>
+              </a:rPr>
+              <a:t>      return { count: state.count + 1 };</a:t>
+            </a:r>
+            <a:endParaRPr lang="en-US" sz="1100" dirty="0"/>
+          </a:p>
+          <a:p>
+            <a:pPr marL="0" indent="0">
+              <a:buNone/>
+            </a:pPr>
+            <a:r>
+              <a:rPr lang="en-US" sz="1100" dirty="0">
+                <a:solidFill>
+                  <a:srgbClr val="10B981"/>
+                </a:solidFill>
+                <a:latin typeface="Consolas" pitchFamily="34" charset="0"/>
+                <a:ea typeface="Consolas" pitchFamily="34" charset="-122"/>
+                <a:cs typeface="Consolas" pitchFamily="34" charset="-120"/>
+              </a:rPr>
+              <a:t>    case 'decrement':</a:t>
+            </a:r>
+            <a:endParaRPr lang="en-US" sz="1100" dirty="0"/>
+          </a:p>
+          <a:p>
+            <a:pPr marL="0" indent="0">
+              <a:buNone/>
+            </a:pPr>
+            <a:r>
+              <a:rPr lang="en-US" sz="1100" dirty="0">
+                <a:solidFill>
+                  <a:srgbClr val="10B981"/>
+                </a:solidFill>
+                <a:latin typeface="Consolas" pitchFamily="34" charset="0"/>
+                <a:ea typeface="Consolas" pitchFamily="34" charset="-122"/>
+                <a:cs typeface="Consolas" pitchFamily="34" charset="-120"/>
+              </a:rPr>
+              <a:t>      return { count: state.count - 1 };</a:t>
+            </a:r>
+            <a:endParaRPr lang="en-US" sz="1100" dirty="0"/>
+          </a:p>
+          <a:p>
+            <a:pPr marL="0" indent="0">
+              <a:buNone/>
+            </a:pPr>
+            <a:r>
+              <a:rPr lang="en-US" sz="1100" dirty="0">
+                <a:solidFill>
+                  <a:srgbClr val="A78BFA"/>
+                </a:solidFill>
+                <a:latin typeface="Consolas" pitchFamily="34" charset="0"/>
+                <a:ea typeface="Consolas" pitchFamily="34" charset="-122"/>
+                <a:cs typeface="Consolas" pitchFamily="34" charset="-120"/>
+              </a:rPr>
+              <a:t>    case 'reset':</a:t>
+            </a:r>
+            <a:endParaRPr lang="en-US" sz="1100" dirty="0"/>
+          </a:p>
+          <a:p>
+            <a:pPr marL="0" indent="0">
+              <a:buNone/>
+            </a:pPr>
+            <a:r>
+              <a:rPr lang="en-US" sz="1100" dirty="0">
+                <a:solidFill>
+                  <a:srgbClr val="A78BFA"/>
+                </a:solidFill>
+                <a:latin typeface="Consolas" pitchFamily="34" charset="0"/>
+                <a:ea typeface="Consolas" pitchFamily="34" charset="-122"/>
+                <a:cs typeface="Consolas" pitchFamily="34" charset="-120"/>
+              </a:rPr>
+              <a:t>      return { count: 0 };</a:t>
+            </a:r>
+            <a:endParaRPr lang="en-US" sz="1100" dirty="0"/>
+          </a:p>
+          <a:p>
+            <a:pPr marL="0" indent="0">
+              <a:buNone/>
+            </a:pPr>
+            <a:r>
+              <a:rPr lang="en-US" sz="1100" dirty="0">
+                <a:solidFill>
+                  <a:srgbClr val="475569"/>
+                </a:solidFill>
+                <a:latin typeface="Consolas" pitchFamily="34" charset="0"/>
+                <a:ea typeface="Consolas" pitchFamily="34" charset="-122"/>
+                <a:cs typeface="Consolas" pitchFamily="34" charset="-120"/>
+              </a:rPr>
+              <a:t>    default: return state;</a:t>
+            </a:r>
+            <a:endParaRPr lang="en-US" sz="1100" dirty="0"/>
+          </a:p>
+          <a:p>
+            <a:pPr marL="0" indent="0">
+              <a:buNone/>
+            </a:pPr>
+            <a:r>
+              <a:rPr lang="en-US" sz="1100" dirty="0">
+                <a:solidFill>
+                  <a:srgbClr val="67E8F9"/>
+                </a:solidFill>
+                <a:latin typeface="Consolas" pitchFamily="34" charset="0"/>
+                <a:ea typeface="Consolas" pitchFamily="34" charset="-122"/>
+                <a:cs typeface="Consolas" pitchFamily="34" charset="-120"/>
+              </a:rPr>
+              <a:t>  }</a:t>
+            </a:r>
+            <a:endParaRPr lang="en-US" sz="1100" dirty="0"/>
+          </a:p>
+          <a:p>
+            <a:pPr marL="0" indent="0">
+              <a:buNone/>
+            </a:pPr>
+            <a:r>
+              <a:rPr lang="en-US" sz="1100" dirty="0">
+                <a:solidFill>
+                  <a:srgbClr val="67E8F9"/>
+                </a:solidFill>
+                <a:latin typeface="Consolas" pitchFamily="34" charset="0"/>
+                <a:ea typeface="Consolas" pitchFamily="34" charset="-122"/>
+                <a:cs typeface="Consolas" pitchFamily="34" charset="-120"/>
+              </a:rPr>
+              <a:t>}</a:t>
+            </a:r>
+            <a:endParaRPr lang="en-US" sz="1100" dirty="0"/>
+          </a:p>
+          <a:p>
+            <a:pPr marL="0" indent="0">
+              <a:buNone/>
+            </a:pPr>
+            <a:endParaRPr lang="en-US" sz="1100" dirty="0"/>
+          </a:p>
+          <a:p>
+            <a:pPr marL="0" indent="0">
+              <a:buNone/>
+            </a:pPr>
+            <a:r>
+              <a:rPr lang="en-US" sz="1100" dirty="0">
+                <a:solidFill>
+                  <a:srgbClr val="CBD5E1"/>
+                </a:solidFill>
+                <a:latin typeface="Consolas" pitchFamily="34" charset="0"/>
+                <a:ea typeface="Consolas" pitchFamily="34" charset="-122"/>
+                <a:cs typeface="Consolas" pitchFamily="34" charset="-120"/>
+              </a:rPr>
+              <a:t>const [state, dispatch] = useReducer(reducer, { count: 0 });</a:t>
+            </a:r>
+            <a:endParaRPr lang="en-US" sz="1100" dirty="0"/>
+          </a:p>
+          <a:p>
+            <a:pPr marL="0" indent="0">
+              <a:buNone/>
+            </a:pPr>
+            <a:endParaRPr lang="en-US" sz="1100" dirty="0"/>
+          </a:p>
+          <a:p>
+            <a:pPr marL="0" indent="0">
+              <a:buNone/>
+            </a:pPr>
+            <a:r>
+              <a:rPr lang="en-US" sz="1100" dirty="0">
+                <a:solidFill>
+                  <a:srgbClr val="67E8F9"/>
+                </a:solidFill>
+                <a:latin typeface="Consolas" pitchFamily="34" charset="0"/>
+                <a:ea typeface="Consolas" pitchFamily="34" charset="-122"/>
+                <a:cs typeface="Consolas" pitchFamily="34" charset="-120"/>
+              </a:rPr>
+              <a:t>&lt;button onClick={() =&gt; dispatch({ type: 'increment' })}&gt;</a:t>
+            </a:r>
+            <a:endParaRPr lang="en-US" sz="1100" dirty="0"/>
+          </a:p>
+          <a:p>
+            <a:pPr marL="0" indent="0">
+              <a:buNone/>
+            </a:pPr>
+            <a:r>
+              <a:rPr lang="en-US" sz="1100" dirty="0">
+                <a:solidFill>
+                  <a:srgbClr val="67E8F9"/>
+                </a:solidFill>
+                <a:latin typeface="Consolas" pitchFamily="34" charset="0"/>
+                <a:ea typeface="Consolas" pitchFamily="34" charset="-122"/>
+                <a:cs typeface="Consolas" pitchFamily="34" charset="-120"/>
+              </a:rPr>
+              <a:t>  +1</a:t>
+            </a:r>
+            <a:endParaRPr lang="en-US" sz="1100" dirty="0"/>
+          </a:p>
+          <a:p>
+            <a:pPr marL="0" indent="0">
+              <a:buNone/>
+            </a:pPr>
+            <a:r>
+              <a:rPr lang="en-US" sz="1100" dirty="0">
+                <a:solidFill>
+                  <a:srgbClr val="67E8F9"/>
+                </a:solidFill>
+                <a:latin typeface="Consolas" pitchFamily="34" charset="0"/>
+                <a:ea typeface="Consolas" pitchFamily="34" charset="-122"/>
+                <a:cs typeface="Consolas" pitchFamily="34" charset="-120"/>
+              </a:rPr>
+              <a:t>&lt;/button&gt;</a:t>
+            </a:r>
+            <a:endParaRPr lang="en-US" sz="1100" dirty="0"/>
+          </a:p>
+        </p:txBody>
+      </p:sp>
+    </p:spTree>
+  </p:cSld>
+  <p:clrMapOvr>
+    <a:masterClrMapping/>
+  </p:clrMapOvr>
+</p:sld>
+</file>
+
+<file path=ppt/slides/slide14.xml><?xml version="1.0" encoding="utf-8"?>
+<p:sld xmlns:a="http://schemas.openxmlformats.org/drawingml/2006/main" xmlns:r="http://schemas.openxmlformats.org/officeDocument/2006/relationships" xmlns:p="http://schemas.openxmlformats.org/presentationml/2006/main">
+  <p:cSld name="Slide 14">
+    <p:bg>
+      <p:bgPr>
+        <a:solidFill>
+          <a:srgbClr val="0F1729"/>
+        </a:solidFill>
+        <a:effectLst/>
+      </p:bgPr>
+    </p:bg>
+    <p:spTree>
+      <p:nvGrpSpPr>
+        <p:cNvPr id="1" name=""/>
+        <p:cNvGrpSpPr/>
+        <p:nvPr/>
+      </p:nvGrpSpPr>
+      <p:grpSpPr>
+        <a:xfrm>
+          <a:off x="0" y="0"/>
+          <a:ext cx="0" cy="0"/>
+          <a:chOff x="0" y="0"/>
+          <a:chExt cx="0" cy="0"/>
+        </a:xfrm>
+      </p:grpSpPr>
+      <p:sp>
+        <p:nvSpPr>
+          <p:cNvPr id="2" name="Text 0"/>
+          <p:cNvSpPr/>
+          <p:nvPr/>
+        </p:nvSpPr>
+        <p:spPr>
+          <a:xfrm>
+            <a:off x="731520" y="365760"/>
+            <a:ext cx="7315200" cy="640080"/>
+          </a:xfrm>
+          <a:prstGeom prst="rect">
+            <a:avLst/>
+          </a:prstGeom>
+          <a:noFill/>
+          <a:ln/>
+        </p:spPr>
+        <p:txBody>
+          <a:bodyPr wrap="square" lIns="0" tIns="0" rIns="0" bIns="0" rtlCol="0" anchor="ctr"/>
+          <a:lstStyle/>
+          <a:p>
+            <a:pPr marL="0" indent="0">
+              <a:buNone/>
+            </a:pPr>
+            <a:r>
+              <a:rPr lang="en-US" sz="3600" b="1" dirty="0">
+                <a:solidFill>
+                  <a:srgbClr val="F8FAFC"/>
+                </a:solidFill>
+                <a:latin typeface="Trebuchet MS" pitchFamily="34" charset="0"/>
+                <a:ea typeface="Trebuchet MS" pitchFamily="34" charset="-122"/>
+                <a:cs typeface="Trebuchet MS" pitchFamily="34" charset="-120"/>
+              </a:rPr>
+              <a:t>Redux</a:t>
+            </a:r>
+            <a:endParaRPr lang="en-US" sz="3600" dirty="0"/>
+          </a:p>
+        </p:txBody>
+      </p:sp>
+      <p:sp>
+        <p:nvSpPr>
+          <p:cNvPr id="3" name="Text 1"/>
+          <p:cNvSpPr/>
+          <p:nvPr/>
+        </p:nvSpPr>
+        <p:spPr>
+          <a:xfrm>
+            <a:off x="731520" y="1005840"/>
+            <a:ext cx="7315200" cy="365760"/>
+          </a:xfrm>
+          <a:prstGeom prst="rect">
+            <a:avLst/>
+          </a:prstGeom>
+          <a:noFill/>
+          <a:ln/>
+        </p:spPr>
+        <p:txBody>
+          <a:bodyPr wrap="square" lIns="0" tIns="0" rIns="0" bIns="0" rtlCol="0" anchor="ctr"/>
+          <a:lstStyle/>
+          <a:p>
+            <a:pPr marL="0" indent="0">
+              <a:buNone/>
+            </a:pPr>
+            <a:r>
+              <a:rPr lang="en-US" sz="1700" i="1" dirty="0">
+                <a:solidFill>
+                  <a:srgbClr val="F59E0B"/>
+                </a:solidFill>
+                <a:latin typeface="Calibri" pitchFamily="34" charset="0"/>
+                <a:ea typeface="Calibri" pitchFamily="34" charset="-122"/>
+                <a:cs typeface="Calibri" pitchFamily="34" charset="-120"/>
+              </a:rPr>
+              <a:t>= useReducer auf App-Ebene</a:t>
+            </a:r>
+            <a:endParaRPr lang="en-US" sz="1700" dirty="0"/>
+          </a:p>
+        </p:txBody>
+      </p:sp>
+      <p:sp>
+        <p:nvSpPr>
+          <p:cNvPr id="4" name="Text 2"/>
+          <p:cNvSpPr/>
+          <p:nvPr/>
+        </p:nvSpPr>
+        <p:spPr>
+          <a:xfrm>
+            <a:off x="731520" y="1554480"/>
+            <a:ext cx="3840480" cy="365760"/>
+          </a:xfrm>
+          <a:prstGeom prst="rect">
+            <a:avLst/>
+          </a:prstGeom>
+          <a:noFill/>
+          <a:ln/>
+        </p:spPr>
+        <p:txBody>
+          <a:bodyPr wrap="square" lIns="0" tIns="0" rIns="0" bIns="0" rtlCol="0" anchor="ctr"/>
+          <a:lstStyle/>
+          <a:p>
+            <a:pPr marL="0" indent="0">
+              <a:buNone/>
+            </a:pPr>
+            <a:r>
+              <a:rPr lang="en-US" sz="1400" b="1" dirty="0">
+                <a:solidFill>
+                  <a:srgbClr val="06B6D4"/>
+                </a:solidFill>
+                <a:latin typeface="Trebuchet MS" pitchFamily="34" charset="0"/>
+                <a:ea typeface="Trebuchet MS" pitchFamily="34" charset="-122"/>
+                <a:cs typeface="Trebuchet MS" pitchFamily="34" charset="-120"/>
+              </a:rPr>
+              <a:t>useReducer (lokal)</a:t>
+            </a:r>
+            <a:endParaRPr lang="en-US" sz="1400" dirty="0"/>
+          </a:p>
+        </p:txBody>
+      </p:sp>
+      <p:sp>
+        <p:nvSpPr>
+          <p:cNvPr id="5" name="Shape 3"/>
+          <p:cNvSpPr/>
+          <p:nvPr/>
+        </p:nvSpPr>
+        <p:spPr>
+          <a:xfrm>
+            <a:off x="731520" y="1920240"/>
+            <a:ext cx="3840480" cy="1645920"/>
+          </a:xfrm>
+          <a:prstGeom prst="roundRect">
+            <a:avLst>
+              <a:gd name="adj" fmla="val 5556"/>
+            </a:avLst>
+          </a:prstGeom>
+          <a:solidFill>
+            <a:srgbClr val="0D1117"/>
+          </a:solidFill>
+          <a:ln/>
+        </p:spPr>
+        <p:txBody>
+          <a:bodyPr/>
+          <a:lstStyle/>
+          <a:p>
+            <a:endParaRPr lang="en-DE"/>
+          </a:p>
+        </p:txBody>
+      </p:sp>
+      <p:sp>
+        <p:nvSpPr>
+          <p:cNvPr id="6" name="Text 4"/>
+          <p:cNvSpPr/>
+          <p:nvPr/>
+        </p:nvSpPr>
+        <p:spPr>
+          <a:xfrm>
+            <a:off x="914400" y="2011680"/>
+            <a:ext cx="3474720" cy="1463040"/>
+          </a:xfrm>
+          <a:prstGeom prst="rect">
+            <a:avLst/>
+          </a:prstGeom>
+          <a:noFill/>
+          <a:ln/>
+        </p:spPr>
+        <p:txBody>
+          <a:bodyPr wrap="square" rtlCol="0" anchor="t"/>
+          <a:lstStyle/>
+          <a:p>
+            <a:pPr marL="0" indent="0">
+              <a:buNone/>
+            </a:pPr>
+            <a:r>
+              <a:rPr lang="en-US" sz="1000" dirty="0">
+                <a:solidFill>
+                  <a:srgbClr val="67E8F9"/>
+                </a:solidFill>
+                <a:latin typeface="Consolas" pitchFamily="34" charset="0"/>
+                <a:ea typeface="Consolas" pitchFamily="34" charset="-122"/>
+                <a:cs typeface="Consolas" pitchFamily="34" charset="-120"/>
+              </a:rPr>
+              <a:t>function reducer(state, action) {</a:t>
+            </a:r>
+            <a:endParaRPr lang="en-US" sz="1000" dirty="0"/>
+          </a:p>
+          <a:p>
+            <a:pPr marL="0" indent="0">
+              <a:buNone/>
+            </a:pPr>
+            <a:r>
+              <a:rPr lang="en-US" sz="1000" dirty="0">
+                <a:solidFill>
+                  <a:srgbClr val="67E8F9"/>
+                </a:solidFill>
+                <a:latin typeface="Consolas" pitchFamily="34" charset="0"/>
+                <a:ea typeface="Consolas" pitchFamily="34" charset="-122"/>
+                <a:cs typeface="Consolas" pitchFamily="34" charset="-120"/>
+              </a:rPr>
+              <a:t>  switch (action.type) {</a:t>
+            </a:r>
+            <a:endParaRPr lang="en-US" sz="1000" dirty="0"/>
+          </a:p>
+          <a:p>
+            <a:pPr marL="0" indent="0">
+              <a:buNone/>
+            </a:pPr>
+            <a:r>
+              <a:rPr lang="en-US" sz="1000" dirty="0">
+                <a:solidFill>
+                  <a:srgbClr val="F59E0B"/>
+                </a:solidFill>
+                <a:latin typeface="Consolas" pitchFamily="34" charset="0"/>
+                <a:ea typeface="Consolas" pitchFamily="34" charset="-122"/>
+                <a:cs typeface="Consolas" pitchFamily="34" charset="-120"/>
+              </a:rPr>
+              <a:t>    case 'increment':</a:t>
+            </a:r>
+            <a:endParaRPr lang="en-US" sz="1000" dirty="0"/>
+          </a:p>
+          <a:p>
+            <a:pPr marL="0" indent="0">
+              <a:buNone/>
+            </a:pPr>
+            <a:r>
+              <a:rPr lang="en-US" sz="1000" dirty="0">
+                <a:solidFill>
+                  <a:srgbClr val="F59E0B"/>
+                </a:solidFill>
+                <a:latin typeface="Consolas" pitchFamily="34" charset="0"/>
+                <a:ea typeface="Consolas" pitchFamily="34" charset="-122"/>
+                <a:cs typeface="Consolas" pitchFamily="34" charset="-120"/>
+              </a:rPr>
+              <a:t>      return {count: state.count+1}</a:t>
+            </a:r>
+            <a:endParaRPr lang="en-US" sz="1000" dirty="0"/>
+          </a:p>
+          <a:p>
+            <a:pPr marL="0" indent="0">
+              <a:buNone/>
+            </a:pPr>
+            <a:r>
+              <a:rPr lang="en-US" sz="1000" dirty="0">
+                <a:solidFill>
+                  <a:srgbClr val="67E8F9"/>
+                </a:solidFill>
+                <a:latin typeface="Consolas" pitchFamily="34" charset="0"/>
+                <a:ea typeface="Consolas" pitchFamily="34" charset="-122"/>
+                <a:cs typeface="Consolas" pitchFamily="34" charset="-120"/>
+              </a:rPr>
+              <a:t>  }</a:t>
+            </a:r>
+            <a:endParaRPr lang="en-US" sz="1000" dirty="0"/>
+          </a:p>
+          <a:p>
+            <a:pPr marL="0" indent="0">
+              <a:buNone/>
+            </a:pPr>
+            <a:r>
+              <a:rPr lang="en-US" sz="1000" dirty="0">
+                <a:solidFill>
+                  <a:srgbClr val="67E8F9"/>
+                </a:solidFill>
+                <a:latin typeface="Consolas" pitchFamily="34" charset="0"/>
+                <a:ea typeface="Consolas" pitchFamily="34" charset="-122"/>
+                <a:cs typeface="Consolas" pitchFamily="34" charset="-120"/>
+              </a:rPr>
+              <a:t>}</a:t>
+            </a:r>
+            <a:endParaRPr lang="en-US" sz="1000" dirty="0"/>
+          </a:p>
+          <a:p>
+            <a:pPr marL="0" indent="0">
+              <a:buNone/>
+            </a:pPr>
+            <a:endParaRPr lang="en-US" sz="1000" dirty="0"/>
+          </a:p>
+          <a:p>
+            <a:pPr marL="0" indent="0">
+              <a:buNone/>
+            </a:pPr>
+            <a:r>
+              <a:rPr lang="en-US" sz="1000" dirty="0">
+                <a:solidFill>
+                  <a:srgbClr val="10B981"/>
+                </a:solidFill>
+                <a:latin typeface="Consolas" pitchFamily="34" charset="0"/>
+                <a:ea typeface="Consolas" pitchFamily="34" charset="-122"/>
+                <a:cs typeface="Consolas" pitchFamily="34" charset="-120"/>
+              </a:rPr>
+              <a:t>dispatch({ type: 'increment' })</a:t>
+            </a:r>
+            <a:endParaRPr lang="en-US" sz="1000" dirty="0"/>
+          </a:p>
+        </p:txBody>
+      </p:sp>
+      <p:sp>
+        <p:nvSpPr>
+          <p:cNvPr id="7" name="Text 5"/>
+          <p:cNvSpPr/>
+          <p:nvPr/>
+        </p:nvSpPr>
+        <p:spPr>
+          <a:xfrm>
+            <a:off x="4846320" y="1554480"/>
+            <a:ext cx="3840480" cy="365760"/>
+          </a:xfrm>
+          <a:prstGeom prst="rect">
+            <a:avLst/>
+          </a:prstGeom>
+          <a:noFill/>
+          <a:ln/>
+        </p:spPr>
+        <p:txBody>
+          <a:bodyPr wrap="square" lIns="0" tIns="0" rIns="0" bIns="0" rtlCol="0" anchor="ctr"/>
+          <a:lstStyle/>
+          <a:p>
+            <a:pPr marL="0" indent="0">
+              <a:buNone/>
+            </a:pPr>
+            <a:r>
+              <a:rPr lang="en-US" sz="1400" b="1" dirty="0">
+                <a:solidFill>
+                  <a:srgbClr val="A78BFA"/>
+                </a:solidFill>
+                <a:latin typeface="Trebuchet MS" pitchFamily="34" charset="0"/>
+                <a:ea typeface="Trebuchet MS" pitchFamily="34" charset="-122"/>
+                <a:cs typeface="Trebuchet MS" pitchFamily="34" charset="-120"/>
+              </a:rPr>
+              <a:t>Redux Toolkit (global)</a:t>
+            </a:r>
+            <a:endParaRPr lang="en-US" sz="1400" dirty="0"/>
+          </a:p>
+        </p:txBody>
+      </p:sp>
+      <p:sp>
+        <p:nvSpPr>
+          <p:cNvPr id="8" name="Shape 6"/>
+          <p:cNvSpPr/>
+          <p:nvPr/>
+        </p:nvSpPr>
+        <p:spPr>
+          <a:xfrm>
+            <a:off x="4846320" y="1920240"/>
+            <a:ext cx="3840480" cy="1645920"/>
+          </a:xfrm>
+          <a:prstGeom prst="roundRect">
+            <a:avLst>
+              <a:gd name="adj" fmla="val 5556"/>
+            </a:avLst>
+          </a:prstGeom>
+          <a:solidFill>
+            <a:srgbClr val="0D1117"/>
+          </a:solidFill>
+          <a:ln/>
+        </p:spPr>
+        <p:txBody>
+          <a:bodyPr/>
+          <a:lstStyle/>
+          <a:p>
+            <a:endParaRPr lang="en-DE"/>
+          </a:p>
+        </p:txBody>
+      </p:sp>
+      <p:sp>
+        <p:nvSpPr>
+          <p:cNvPr id="9" name="Text 7"/>
+          <p:cNvSpPr/>
+          <p:nvPr/>
+        </p:nvSpPr>
+        <p:spPr>
+          <a:xfrm>
+            <a:off x="5029200" y="2011680"/>
+            <a:ext cx="3474720" cy="1463040"/>
+          </a:xfrm>
+          <a:prstGeom prst="rect">
+            <a:avLst/>
+          </a:prstGeom>
+          <a:noFill/>
+          <a:ln/>
+        </p:spPr>
+        <p:txBody>
+          <a:bodyPr wrap="square" rtlCol="0" anchor="t"/>
+          <a:lstStyle/>
+          <a:p>
+            <a:pPr marL="0" indent="0">
+              <a:buNone/>
+            </a:pPr>
+            <a:r>
+              <a:rPr lang="en-US" sz="1000" dirty="0">
+                <a:solidFill>
+                  <a:srgbClr val="67E8F9"/>
+                </a:solidFill>
+                <a:latin typeface="Consolas" pitchFamily="34" charset="0"/>
+                <a:ea typeface="Consolas" pitchFamily="34" charset="-122"/>
+                <a:cs typeface="Consolas" pitchFamily="34" charset="-120"/>
+              </a:rPr>
+              <a:t>const slice = createSlice({</a:t>
+            </a:r>
+            <a:endParaRPr lang="en-US" sz="1000" dirty="0"/>
+          </a:p>
+          <a:p>
+            <a:pPr marL="0" indent="0">
+              <a:buNone/>
+            </a:pPr>
+            <a:r>
+              <a:rPr lang="en-US" sz="1000" dirty="0">
+                <a:solidFill>
+                  <a:srgbClr val="67E8F9"/>
+                </a:solidFill>
+                <a:latin typeface="Consolas" pitchFamily="34" charset="0"/>
+                <a:ea typeface="Consolas" pitchFamily="34" charset="-122"/>
+                <a:cs typeface="Consolas" pitchFamily="34" charset="-120"/>
+              </a:rPr>
+              <a:t>  reducers: {</a:t>
+            </a:r>
+            <a:endParaRPr lang="en-US" sz="1000" dirty="0"/>
+          </a:p>
+          <a:p>
+            <a:pPr marL="0" indent="0">
+              <a:buNone/>
+            </a:pPr>
+            <a:r>
+              <a:rPr lang="en-US" sz="1000" dirty="0">
+                <a:solidFill>
+                  <a:srgbClr val="F59E0B"/>
+                </a:solidFill>
+                <a:latin typeface="Consolas" pitchFamily="34" charset="0"/>
+                <a:ea typeface="Consolas" pitchFamily="34" charset="-122"/>
+                <a:cs typeface="Consolas" pitchFamily="34" charset="-120"/>
+              </a:rPr>
+              <a:t>    increment: (state) =&gt; {</a:t>
+            </a:r>
+            <a:endParaRPr lang="en-US" sz="1000" dirty="0"/>
+          </a:p>
+          <a:p>
+            <a:pPr marL="0" indent="0">
+              <a:buNone/>
+            </a:pPr>
+            <a:r>
+              <a:rPr lang="en-US" sz="1000" dirty="0">
+                <a:solidFill>
+                  <a:srgbClr val="F59E0B"/>
+                </a:solidFill>
+                <a:latin typeface="Consolas" pitchFamily="34" charset="0"/>
+                <a:ea typeface="Consolas" pitchFamily="34" charset="-122"/>
+                <a:cs typeface="Consolas" pitchFamily="34" charset="-120"/>
+              </a:rPr>
+              <a:t>      state.value += 1 }</a:t>
+            </a:r>
+            <a:endParaRPr lang="en-US" sz="1000" dirty="0"/>
+          </a:p>
+          <a:p>
+            <a:pPr marL="0" indent="0">
+              <a:buNone/>
+            </a:pPr>
+            <a:r>
+              <a:rPr lang="en-US" sz="1000" dirty="0">
+                <a:solidFill>
+                  <a:srgbClr val="67E8F9"/>
+                </a:solidFill>
+                <a:latin typeface="Consolas" pitchFamily="34" charset="0"/>
+                <a:ea typeface="Consolas" pitchFamily="34" charset="-122"/>
+                <a:cs typeface="Consolas" pitchFamily="34" charset="-120"/>
+              </a:rPr>
+              <a:t>  }</a:t>
+            </a:r>
+            <a:endParaRPr lang="en-US" sz="1000" dirty="0"/>
+          </a:p>
+          <a:p>
+            <a:pPr marL="0" indent="0">
+              <a:buNone/>
+            </a:pPr>
+            <a:r>
+              <a:rPr lang="en-US" sz="1000" dirty="0">
+                <a:solidFill>
+                  <a:srgbClr val="67E8F9"/>
+                </a:solidFill>
+                <a:latin typeface="Consolas" pitchFamily="34" charset="0"/>
+                <a:ea typeface="Consolas" pitchFamily="34" charset="-122"/>
+                <a:cs typeface="Consolas" pitchFamily="34" charset="-120"/>
+              </a:rPr>
+              <a:t>})</a:t>
+            </a:r>
+            <a:endParaRPr lang="en-US" sz="1000" dirty="0"/>
+          </a:p>
+          <a:p>
+            <a:pPr marL="0" indent="0">
+              <a:buNone/>
+            </a:pPr>
+            <a:endParaRPr lang="en-US" sz="1000" dirty="0"/>
+          </a:p>
+          <a:p>
+            <a:pPr marL="0" indent="0">
+              <a:buNone/>
+            </a:pPr>
+            <a:r>
+              <a:rPr lang="en-US" sz="1000" dirty="0">
+                <a:solidFill>
+                  <a:srgbClr val="10B981"/>
+                </a:solidFill>
+                <a:latin typeface="Consolas" pitchFamily="34" charset="0"/>
+                <a:ea typeface="Consolas" pitchFamily="34" charset="-122"/>
+                <a:cs typeface="Consolas" pitchFamily="34" charset="-120"/>
+              </a:rPr>
+              <a:t>dispatch(increment())</a:t>
+            </a:r>
+            <a:endParaRPr lang="en-US" sz="1000" dirty="0"/>
+          </a:p>
+        </p:txBody>
+      </p:sp>
+      <p:sp>
+        <p:nvSpPr>
+          <p:cNvPr id="10" name="Shape 8"/>
+          <p:cNvSpPr/>
+          <p:nvPr/>
+        </p:nvSpPr>
+        <p:spPr>
+          <a:xfrm>
+            <a:off x="731520" y="3840480"/>
+            <a:ext cx="7680960" cy="822960"/>
+          </a:xfrm>
+          <a:prstGeom prst="roundRect">
+            <a:avLst>
+              <a:gd name="adj" fmla="val 11111"/>
+            </a:avLst>
+          </a:prstGeom>
+          <a:solidFill>
+            <a:srgbClr val="1A2744"/>
+          </a:solidFill>
+          <a:ln/>
+        </p:spPr>
+        <p:txBody>
+          <a:bodyPr/>
+          <a:lstStyle/>
+          <a:p>
+            <a:endParaRPr lang="en-DE"/>
+          </a:p>
+        </p:txBody>
+      </p:sp>
+      <p:pic>
+        <p:nvPicPr>
+          <p:cNvPr id="11" name="Image 0" descr="preencoded.png"/>
+          <p:cNvPicPr>
+            <a:picLocks noChangeAspect="1"/>
+          </p:cNvPicPr>
+          <p:nvPr/>
+        </p:nvPicPr>
+        <p:blipFill>
+          <a:blip r:embed="rId3"/>
+          <a:stretch>
+            <a:fillRect/>
+          </a:stretch>
+        </p:blipFill>
+        <p:spPr>
+          <a:xfrm>
+            <a:off x="914400" y="3977640"/>
+            <a:ext cx="320040" cy="320040"/>
+          </a:xfrm>
+          <a:prstGeom prst="rect">
+            <a:avLst/>
+          </a:prstGeom>
+        </p:spPr>
+      </p:pic>
+      <p:sp>
+        <p:nvSpPr>
+          <p:cNvPr id="12" name="Text 9"/>
+          <p:cNvSpPr/>
+          <p:nvPr/>
+        </p:nvSpPr>
+        <p:spPr>
+          <a:xfrm>
+            <a:off x="1371600" y="3840480"/>
+            <a:ext cx="6766560" cy="822960"/>
+          </a:xfrm>
+          <a:prstGeom prst="rect">
+            <a:avLst/>
+          </a:prstGeom>
+          <a:noFill/>
+          <a:ln/>
+        </p:spPr>
+        <p:txBody>
+          <a:bodyPr wrap="square" lIns="0" tIns="0" rIns="0" bIns="0" rtlCol="0" anchor="ctr"/>
+          <a:lstStyle/>
+          <a:p>
+            <a:pPr marL="0" indent="0">
+              <a:buNone/>
+            </a:pPr>
+            <a:r>
+              <a:rPr lang="en-US" sz="1300" dirty="0">
+                <a:solidFill>
+                  <a:srgbClr val="CBD5E1"/>
+                </a:solidFill>
+                <a:latin typeface="Calibri" pitchFamily="34" charset="0"/>
+                <a:ea typeface="Calibri" pitchFamily="34" charset="-122"/>
+                <a:cs typeface="Calibri" pitchFamily="34" charset="-120"/>
+              </a:rPr>
+              <a:t>Gleiche Konzepte (State, Action, Reducer) – Redux macht es global mit einem zentralen Store + Redux Toolkit reduziert Boilerplate.</a:t>
+            </a:r>
+            <a:endParaRPr lang="en-US" sz="1300" dirty="0"/>
+          </a:p>
+        </p:txBody>
+      </p:sp>
+    </p:spTree>
+  </p:cSld>
+  <p:clrMapOvr>
+    <a:masterClrMapping/>
+  </p:clrMapOvr>
+</p:sld>
+</file>
+
+<file path=ppt/slides/slide15.xml><?xml version="1.0" encoding="utf-8"?>
+<p:sld xmlns:a="http://schemas.openxmlformats.org/drawingml/2006/main" xmlns:r="http://schemas.openxmlformats.org/officeDocument/2006/relationships" xmlns:p="http://schemas.openxmlformats.org/presentationml/2006/main">
+  <p:cSld name="Slide 15">
+    <p:bg>
+      <p:bgPr>
+        <a:solidFill>
+          <a:srgbClr val="0F1729"/>
+        </a:solidFill>
+        <a:effectLst/>
+      </p:bgPr>
+    </p:bg>
+    <p:spTree>
+      <p:nvGrpSpPr>
+        <p:cNvPr id="1" name=""/>
+        <p:cNvGrpSpPr/>
+        <p:nvPr/>
+      </p:nvGrpSpPr>
+      <p:grpSpPr>
+        <a:xfrm>
+          <a:off x="0" y="0"/>
+          <a:ext cx="0" cy="0"/>
+          <a:chOff x="0" y="0"/>
+          <a:chExt cx="0" cy="0"/>
+        </a:xfrm>
+      </p:grpSpPr>
+      <p:sp>
+        <p:nvSpPr>
+          <p:cNvPr id="2" name="Text 0"/>
+          <p:cNvSpPr/>
+          <p:nvPr/>
+        </p:nvSpPr>
+        <p:spPr>
+          <a:xfrm>
+            <a:off x="731520" y="365760"/>
+            <a:ext cx="7315200" cy="640080"/>
+          </a:xfrm>
+          <a:prstGeom prst="rect">
+            <a:avLst/>
+          </a:prstGeom>
+          <a:noFill/>
+          <a:ln/>
+        </p:spPr>
+        <p:txBody>
+          <a:bodyPr wrap="square" lIns="0" tIns="0" rIns="0" bIns="0" rtlCol="0" anchor="ctr"/>
+          <a:lstStyle/>
+          <a:p>
+            <a:pPr marL="0" indent="0">
+              <a:buNone/>
+            </a:pPr>
+            <a:r>
+              <a:rPr lang="en-US" sz="3200" b="1" dirty="0">
+                <a:solidFill>
+                  <a:srgbClr val="F8FAFC"/>
+                </a:solidFill>
+                <a:latin typeface="Trebuchet MS" pitchFamily="34" charset="0"/>
+                <a:ea typeface="Trebuchet MS" pitchFamily="34" charset="-122"/>
+                <a:cs typeface="Trebuchet MS" pitchFamily="34" charset="-120"/>
+              </a:rPr>
               <a:t>Vergleich – Wann was?</a:t>
             </a:r>
             <a:endParaRPr lang="en-US" sz="3200" dirty="0"/>
@@ -4277,7 +5394,7 @@
       </p:sp>
       <p:graphicFrame>
         <p:nvGraphicFramePr>
-          <p:cNvPr id="14" name="Table 0"/>
+          <p:cNvPr id="16" name="Table 0"/>
           <p:cNvGraphicFramePr>
             <a:graphicFrameLocks noGrp="1"/>
           </p:cNvGraphicFramePr>
@@ -4291,24 +5408,42 @@
         </p:nvGraphicFramePr>
         <p:xfrm>
           <a:off x="731520" y="1188720"/>
-          <a:ext cx="7680960" cy="914400"/>
+          <a:ext cx="7680960" cy="2743200"/>
         </p:xfrm>
         <a:graphic>
           <a:graphicData uri="http://schemas.openxmlformats.org/drawingml/2006/table">
             <a:tbl>
               <a:tblPr/>
               <a:tblGrid>
-                <a:gridCol w="2011680"/>
-                <a:gridCol w="1645920"/>
-                <a:gridCol w="4023360"/>
+                <a:gridCol w="2011680">
+                  <a:extLst>
+                    <a:ext uri="{9D8B030D-6E8A-4147-A177-3AD203B41FA5}">
+                      <a16:colId xmlns:a16="http://schemas.microsoft.com/office/drawing/2014/main" val="20000"/>
+                    </a:ext>
+                  </a:extLst>
+                </a:gridCol>
+                <a:gridCol w="1645920">
+                  <a:extLst>
+                    <a:ext uri="{9D8B030D-6E8A-4147-A177-3AD203B41FA5}">
+                      <a16:colId xmlns:a16="http://schemas.microsoft.com/office/drawing/2014/main" val="20001"/>
+                    </a:ext>
+                  </a:extLst>
+                </a:gridCol>
+                <a:gridCol w="4023360">
+                  <a:extLst>
+                    <a:ext uri="{9D8B030D-6E8A-4147-A177-3AD203B41FA5}">
+                      <a16:colId xmlns:a16="http://schemas.microsoft.com/office/drawing/2014/main" val="20002"/>
+                    </a:ext>
+                  </a:extLst>
+                </a:gridCol>
               </a:tblGrid>
-              <a:tr h="502920">
+              <a:tr h="457200">
                 <a:tc>
                   <a:txBody>
                     <a:bodyPr/>
                     <a:lstStyle/>
                     <a:p>
-                      <a:pPr indent="0" marL="0">
+                      <a:pPr marL="0" indent="0">
                         <a:buNone/>
                       </a:pPr>
                       <a:endParaRPr lang="en-US" sz="1300" dirty="0">
@@ -4318,7 +5453,7 @@
                       </a:endParaRPr>
                     </a:p>
                   </a:txBody>
-                  <a:tcPr marL="91440" marR="91440" marT="45720" marB="45720">
+                  <a:tcPr>
                     <a:lnL w="6350" cap="flat" cmpd="sng" algn="ctr">
                       <a:solidFill>
                         <a:srgbClr val="475569"/>
@@ -4365,7 +5500,7 @@
                     <a:bodyPr/>
                     <a:lstStyle/>
                     <a:p>
-                      <a:pPr algn="ctr" indent="0" marL="0">
+                      <a:pPr marL="0" indent="0" algn="ctr">
                         <a:buNone/>
                       </a:pPr>
                       <a:r>
@@ -4386,7 +5521,7 @@
                       </a:endParaRPr>
                     </a:p>
                   </a:txBody>
-                  <a:tcPr marL="91440" marR="91440" marT="45720" marB="45720">
+                  <a:tcPr>
                     <a:lnL w="6350" cap="flat" cmpd="sng" algn="ctr">
                       <a:solidFill>
                         <a:srgbClr val="475569"/>
@@ -4433,7 +5568,7 @@
                     <a:bodyPr/>
                     <a:lstStyle/>
                     <a:p>
-                      <a:pPr algn="ctr" indent="0" marL="0">
+                      <a:pPr marL="0" indent="0" algn="ctr">
                         <a:buNone/>
                       </a:pPr>
                       <a:r>
@@ -4454,7 +5589,7 @@
                       </a:endParaRPr>
                     </a:p>
                   </a:txBody>
-                  <a:tcPr marL="91440" marR="91440" marT="45720" marB="45720">
+                  <a:tcPr>
                     <a:lnL w="6350" cap="flat" cmpd="sng" algn="ctr">
                       <a:solidFill>
                         <a:srgbClr val="475569"/>
@@ -4496,14 +5631,19 @@
                     </a:solidFill>
                   </a:tcPr>
                 </a:tc>
+                <a:extLst>
+                  <a:ext uri="{0D108BD9-81ED-4DB2-BD59-A6C34878D82A}">
+                    <a16:rowId xmlns:a16="http://schemas.microsoft.com/office/drawing/2014/main" val="10000"/>
+                  </a:ext>
+                </a:extLst>
               </a:tr>
-              <a:tr h="502920">
+              <a:tr h="457200">
                 <a:tc>
                   <a:txBody>
                     <a:bodyPr/>
                     <a:lstStyle/>
                     <a:p>
-                      <a:pPr indent="0" marL="0">
+                      <a:pPr marL="0" indent="0">
                         <a:buNone/>
                       </a:pPr>
                       <a:r>
@@ -4524,7 +5664,7 @@
                       </a:endParaRPr>
                     </a:p>
                   </a:txBody>
-                  <a:tcPr marL="91440" marR="91440" marT="45720" marB="45720">
+                  <a:tcPr>
                     <a:lnL w="6350" cap="flat" cmpd="sng" algn="ctr">
                       <a:solidFill>
                         <a:srgbClr val="475569"/>
@@ -4571,7 +5711,7 @@
                     <a:bodyPr/>
                     <a:lstStyle/>
                     <a:p>
-                      <a:pPr algn="ctr" indent="0" marL="0">
+                      <a:pPr marL="0" indent="0" algn="ctr">
                         <a:buNone/>
                       </a:pPr>
                       <a:r>
@@ -4592,7 +5732,7 @@
                       </a:endParaRPr>
                     </a:p>
                   </a:txBody>
-                  <a:tcPr marL="91440" marR="91440" marT="45720" marB="45720">
+                  <a:tcPr>
                     <a:lnL w="6350" cap="flat" cmpd="sng" algn="ctr">
                       <a:solidFill>
                         <a:srgbClr val="475569"/>
@@ -4639,7 +5779,7 @@
                     <a:bodyPr/>
                     <a:lstStyle/>
                     <a:p>
-                      <a:pPr algn="ctr" indent="0" marL="0">
+                      <a:pPr marL="0" indent="0" algn="ctr">
                         <a:buNone/>
                       </a:pPr>
                       <a:r>
@@ -4660,7 +5800,7 @@
                       </a:endParaRPr>
                     </a:p>
                   </a:txBody>
-                  <a:tcPr marL="91440" marR="91440" marT="45720" marB="45720">
+                  <a:tcPr>
                     <a:lnL w="6350" cap="flat" cmpd="sng" algn="ctr">
                       <a:solidFill>
                         <a:srgbClr val="475569"/>
@@ -4702,14 +5842,19 @@
                     </a:solidFill>
                   </a:tcPr>
                 </a:tc>
+                <a:extLst>
+                  <a:ext uri="{0D108BD9-81ED-4DB2-BD59-A6C34878D82A}">
+                    <a16:rowId xmlns:a16="http://schemas.microsoft.com/office/drawing/2014/main" val="10001"/>
+                  </a:ext>
+                </a:extLst>
               </a:tr>
-              <a:tr h="502920">
+              <a:tr h="457200">
                 <a:tc>
                   <a:txBody>
                     <a:bodyPr/>
                     <a:lstStyle/>
                     <a:p>
-                      <a:pPr indent="0" marL="0">
+                      <a:pPr marL="0" indent="0">
                         <a:buNone/>
                       </a:pPr>
                       <a:r>
@@ -4730,7 +5875,7 @@
                       </a:endParaRPr>
                     </a:p>
                   </a:txBody>
-                  <a:tcPr marL="91440" marR="91440" marT="45720" marB="45720">
+                  <a:tcPr>
                     <a:lnL w="6350" cap="flat" cmpd="sng" algn="ctr">
                       <a:solidFill>
                         <a:srgbClr val="475569"/>
@@ -4777,7 +5922,7 @@
                     <a:bodyPr/>
                     <a:lstStyle/>
                     <a:p>
-                      <a:pPr algn="ctr" indent="0" marL="0">
+                      <a:pPr marL="0" indent="0" algn="ctr">
                         <a:buNone/>
                       </a:pPr>
                       <a:r>
@@ -4798,7 +5943,7 @@
                       </a:endParaRPr>
                     </a:p>
                   </a:txBody>
-                  <a:tcPr marL="91440" marR="91440" marT="45720" marB="45720">
+                  <a:tcPr>
                     <a:lnL w="6350" cap="flat" cmpd="sng" algn="ctr">
                       <a:solidFill>
                         <a:srgbClr val="475569"/>
@@ -4845,7 +5990,7 @@
                     <a:bodyPr/>
                     <a:lstStyle/>
                     <a:p>
-                      <a:pPr algn="ctr" indent="0" marL="0">
+                      <a:pPr marL="0" indent="0" algn="ctr">
                         <a:buNone/>
                       </a:pPr>
                       <a:r>
@@ -4866,7 +6011,7 @@
                       </a:endParaRPr>
                     </a:p>
                   </a:txBody>
-                  <a:tcPr marL="91440" marR="91440" marT="45720" marB="45720">
+                  <a:tcPr>
                     <a:lnL w="6350" cap="flat" cmpd="sng" algn="ctr">
                       <a:solidFill>
                         <a:srgbClr val="475569"/>
@@ -4908,14 +6053,19 @@
                     </a:solidFill>
                   </a:tcPr>
                 </a:tc>
+                <a:extLst>
+                  <a:ext uri="{0D108BD9-81ED-4DB2-BD59-A6C34878D82A}">
+                    <a16:rowId xmlns:a16="http://schemas.microsoft.com/office/drawing/2014/main" val="10002"/>
+                  </a:ext>
+                </a:extLst>
               </a:tr>
-              <a:tr h="502920">
+              <a:tr h="457200">
                 <a:tc>
                   <a:txBody>
                     <a:bodyPr/>
                     <a:lstStyle/>
                     <a:p>
-                      <a:pPr indent="0" marL="0">
+                      <a:pPr marL="0" indent="0">
                         <a:buNone/>
                       </a:pPr>
                       <a:r>
@@ -4936,7 +6086,7 @@
                       </a:endParaRPr>
                     </a:p>
                   </a:txBody>
-                  <a:tcPr marL="91440" marR="91440" marT="45720" marB="45720">
+                  <a:tcPr>
                     <a:lnL w="6350" cap="flat" cmpd="sng" algn="ctr">
                       <a:solidFill>
                         <a:srgbClr val="475569"/>
@@ -4983,7 +6133,7 @@
                     <a:bodyPr/>
                     <a:lstStyle/>
                     <a:p>
-                      <a:pPr algn="ctr" indent="0" marL="0">
+                      <a:pPr marL="0" indent="0" algn="ctr">
                         <a:buNone/>
                       </a:pPr>
                       <a:r>
@@ -5004,7 +6154,7 @@
                       </a:endParaRPr>
                     </a:p>
                   </a:txBody>
-                  <a:tcPr marL="91440" marR="91440" marT="45720" marB="45720">
+                  <a:tcPr>
                     <a:lnL w="6350" cap="flat" cmpd="sng" algn="ctr">
                       <a:solidFill>
                         <a:srgbClr val="475569"/>
@@ -5051,7 +6201,7 @@
                     <a:bodyPr/>
                     <a:lstStyle/>
                     <a:p>
-                      <a:pPr algn="ctr" indent="0" marL="0">
+                      <a:pPr marL="0" indent="0" algn="ctr">
                         <a:buNone/>
                       </a:pPr>
                       <a:r>
@@ -5072,7 +6222,7 @@
                       </a:endParaRPr>
                     </a:p>
                   </a:txBody>
-                  <a:tcPr marL="91440" marR="91440" marT="45720" marB="45720">
+                  <a:tcPr>
                     <a:lnL w="6350" cap="flat" cmpd="sng" algn="ctr">
                       <a:solidFill>
                         <a:srgbClr val="475569"/>
@@ -5114,14 +6264,19 @@
                     </a:solidFill>
                   </a:tcPr>
                 </a:tc>
+                <a:extLst>
+                  <a:ext uri="{0D108BD9-81ED-4DB2-BD59-A6C34878D82A}">
+                    <a16:rowId xmlns:a16="http://schemas.microsoft.com/office/drawing/2014/main" val="10003"/>
+                  </a:ext>
+                </a:extLst>
               </a:tr>
-              <a:tr h="502920">
+              <a:tr h="457200">
                 <a:tc>
                   <a:txBody>
                     <a:bodyPr/>
                     <a:lstStyle/>
                     <a:p>
-                      <a:pPr indent="0" marL="0">
+                      <a:pPr marL="0" indent="0">
                         <a:buNone/>
                       </a:pPr>
                       <a:r>
@@ -5133,7 +6288,7 @@
                           <a:ea typeface="Consolas" pitchFamily="34" charset="-122"/>
                           <a:cs typeface="Consolas" pitchFamily="34" charset="-120"/>
                         </a:rPr>
-                        <a:t>Redux</a:t>
+                        <a:t>useReducer</a:t>
                       </a:r>
                       <a:endParaRPr lang="en-US" sz="1300" dirty="0">
                         <a:latin typeface="Consolas" charset="0"/>
@@ -5142,7 +6297,7 @@
                       </a:endParaRPr>
                     </a:p>
                   </a:txBody>
-                  <a:tcPr marL="91440" marR="91440" marT="45720" marB="45720">
+                  <a:tcPr>
                     <a:lnL w="6350" cap="flat" cmpd="sng" algn="ctr">
                       <a:solidFill>
                         <a:srgbClr val="475569"/>
@@ -5189,7 +6344,7 @@
                     <a:bodyPr/>
                     <a:lstStyle/>
                     <a:p>
-                      <a:pPr algn="ctr" indent="0" marL="0">
+                      <a:pPr marL="0" indent="0" algn="ctr">
                         <a:buNone/>
                       </a:pPr>
                       <a:r>
@@ -5201,7 +6356,7 @@
                           <a:ea typeface="Calibri" pitchFamily="34" charset="-122"/>
                           <a:cs typeface="Calibri" pitchFamily="34" charset="-120"/>
                         </a:rPr>
-                        <a:t>Global</a:t>
+                        <a:t>Lokal</a:t>
                       </a:r>
                       <a:endParaRPr lang="en-US" sz="1200" dirty="0">
                         <a:latin typeface="Calibri" charset="0"/>
@@ -5210,7 +6365,7 @@
                       </a:endParaRPr>
                     </a:p>
                   </a:txBody>
-                  <a:tcPr marL="91440" marR="91440" marT="45720" marB="45720">
+                  <a:tcPr>
                     <a:lnL w="6350" cap="flat" cmpd="sng" algn="ctr">
                       <a:solidFill>
                         <a:srgbClr val="475569"/>
@@ -5257,7 +6412,7 @@
                     <a:bodyPr/>
                     <a:lstStyle/>
                     <a:p>
-                      <a:pPr algn="ctr" indent="0" marL="0">
+                      <a:pPr marL="0" indent="0" algn="ctr">
                         <a:buNone/>
                       </a:pPr>
                       <a:r>
@@ -5269,7 +6424,7 @@
                           <a:ea typeface="Calibri" pitchFamily="34" charset="-122"/>
                           <a:cs typeface="Calibri" pitchFamily="34" charset="-120"/>
                         </a:rPr>
-                        <a:t>Große Enterprise Apps</a:t>
+                        <a:t>Komplexe State-Logik</a:t>
                       </a:r>
                       <a:endParaRPr lang="en-US" sz="1200" dirty="0">
                         <a:latin typeface="Calibri" charset="0"/>
@@ -5278,7 +6433,7 @@
                       </a:endParaRPr>
                     </a:p>
                   </a:txBody>
-                  <a:tcPr marL="91440" marR="91440" marT="45720" marB="45720">
+                  <a:tcPr>
                     <a:lnL w="6350" cap="flat" cmpd="sng" algn="ctr">
                       <a:solidFill>
                         <a:srgbClr val="475569"/>
@@ -5320,6 +6475,222 @@
                     </a:solidFill>
                   </a:tcPr>
                 </a:tc>
+                <a:extLst>
+                  <a:ext uri="{0D108BD9-81ED-4DB2-BD59-A6C34878D82A}">
+                    <a16:rowId xmlns:a16="http://schemas.microsoft.com/office/drawing/2014/main" val="10004"/>
+                  </a:ext>
+                </a:extLst>
+              </a:tr>
+              <a:tr h="457200">
+                <a:tc>
+                  <a:txBody>
+                    <a:bodyPr/>
+                    <a:lstStyle/>
+                    <a:p>
+                      <a:pPr marL="0" indent="0">
+                        <a:buNone/>
+                      </a:pPr>
+                      <a:r>
+                        <a:rPr lang="en-US" sz="1300" b="1" dirty="0">
+                          <a:solidFill>
+                            <a:srgbClr val="67E8F9"/>
+                          </a:solidFill>
+                          <a:latin typeface="Consolas" pitchFamily="34" charset="0"/>
+                          <a:ea typeface="Consolas" pitchFamily="34" charset="-122"/>
+                          <a:cs typeface="Consolas" pitchFamily="34" charset="-120"/>
+                        </a:rPr>
+                        <a:t>Redux</a:t>
+                      </a:r>
+                      <a:endParaRPr lang="en-US" sz="1300" dirty="0">
+                        <a:latin typeface="Consolas" charset="0"/>
+                        <a:ea typeface="Consolas" charset="0"/>
+                        <a:cs typeface="Consolas" charset="0"/>
+                      </a:endParaRPr>
+                    </a:p>
+                  </a:txBody>
+                  <a:tcPr>
+                    <a:lnL w="6350" cap="flat" cmpd="sng" algn="ctr">
+                      <a:solidFill>
+                        <a:srgbClr val="475569"/>
+                      </a:solidFill>
+                      <a:prstDash val="solid"/>
+                      <a:round/>
+                      <a:headEnd type="none" w="med" len="med"/>
+                      <a:tailEnd type="none" w="med" len="med"/>
+                    </a:lnL>
+                    <a:lnR w="6350" cap="flat" cmpd="sng" algn="ctr">
+                      <a:solidFill>
+                        <a:srgbClr val="475569"/>
+                      </a:solidFill>
+                      <a:prstDash val="solid"/>
+                      <a:round/>
+                      <a:headEnd type="none" w="med" len="med"/>
+                      <a:tailEnd type="none" w="med" len="med"/>
+                    </a:lnR>
+                    <a:lnT w="6350" cap="flat" cmpd="sng" algn="ctr">
+                      <a:solidFill>
+                        <a:srgbClr val="475569"/>
+                      </a:solidFill>
+                      <a:prstDash val="solid"/>
+                      <a:round/>
+                      <a:headEnd type="none" w="med" len="med"/>
+                      <a:tailEnd type="none" w="med" len="med"/>
+                    </a:lnT>
+                    <a:lnB w="6350" cap="flat" cmpd="sng" algn="ctr">
+                      <a:solidFill>
+                        <a:srgbClr val="475569"/>
+                      </a:solidFill>
+                      <a:prstDash val="solid"/>
+                      <a:round/>
+                      <a:headEnd type="none" w="med" len="med"/>
+                      <a:tailEnd type="none" w="med" len="med"/>
+                    </a:lnB>
+                    <a:solidFill>
+                      <a:srgbClr val="1A2744"/>
+                    </a:solidFill>
+                  </a:tcPr>
+                </a:tc>
+                <a:tc>
+                  <a:txBody>
+                    <a:bodyPr/>
+                    <a:lstStyle/>
+                    <a:p>
+                      <a:pPr marL="0" indent="0" algn="ctr">
+                        <a:buNone/>
+                      </a:pPr>
+                      <a:r>
+                        <a:rPr lang="en-US" sz="1200" dirty="0">
+                          <a:solidFill>
+                            <a:srgbClr val="CBD5E1"/>
+                          </a:solidFill>
+                          <a:latin typeface="Calibri" pitchFamily="34" charset="0"/>
+                          <a:ea typeface="Calibri" pitchFamily="34" charset="-122"/>
+                          <a:cs typeface="Calibri" pitchFamily="34" charset="-120"/>
+                        </a:rPr>
+                        <a:t>Global</a:t>
+                      </a:r>
+                      <a:endParaRPr lang="en-US" sz="1200" dirty="0">
+                        <a:latin typeface="Calibri" charset="0"/>
+                        <a:ea typeface="Calibri" charset="0"/>
+                        <a:cs typeface="Calibri" charset="0"/>
+                      </a:endParaRPr>
+                    </a:p>
+                  </a:txBody>
+                  <a:tcPr>
+                    <a:lnL w="6350" cap="flat" cmpd="sng" algn="ctr">
+                      <a:solidFill>
+                        <a:srgbClr val="475569"/>
+                      </a:solidFill>
+                      <a:prstDash val="solid"/>
+                      <a:round/>
+                      <a:headEnd type="none" w="med" len="med"/>
+                      <a:tailEnd type="none" w="med" len="med"/>
+                    </a:lnL>
+                    <a:lnR w="6350" cap="flat" cmpd="sng" algn="ctr">
+                      <a:solidFill>
+                        <a:srgbClr val="475569"/>
+                      </a:solidFill>
+                      <a:prstDash val="solid"/>
+                      <a:round/>
+                      <a:headEnd type="none" w="med" len="med"/>
+                      <a:tailEnd type="none" w="med" len="med"/>
+                    </a:lnR>
+                    <a:lnT w="6350" cap="flat" cmpd="sng" algn="ctr">
+                      <a:solidFill>
+                        <a:srgbClr val="475569"/>
+                      </a:solidFill>
+                      <a:prstDash val="solid"/>
+                      <a:round/>
+                      <a:headEnd type="none" w="med" len="med"/>
+                      <a:tailEnd type="none" w="med" len="med"/>
+                    </a:lnT>
+                    <a:lnB w="6350" cap="flat" cmpd="sng" algn="ctr">
+                      <a:solidFill>
+                        <a:srgbClr val="475569"/>
+                      </a:solidFill>
+                      <a:prstDash val="solid"/>
+                      <a:round/>
+                      <a:headEnd type="none" w="med" len="med"/>
+                      <a:tailEnd type="none" w="med" len="med"/>
+                    </a:lnB>
+                    <a:solidFill>
+                      <a:srgbClr val="1A2744"/>
+                    </a:solidFill>
+                  </a:tcPr>
+                </a:tc>
+                <a:tc>
+                  <a:txBody>
+                    <a:bodyPr/>
+                    <a:lstStyle/>
+                    <a:p>
+                      <a:pPr marL="0" indent="0" algn="ctr">
+                        <a:buNone/>
+                      </a:pPr>
+                      <a:r>
+                        <a:rPr lang="en-US" sz="1200" dirty="0">
+                          <a:solidFill>
+                            <a:srgbClr val="CBD5E1"/>
+                          </a:solidFill>
+                          <a:latin typeface="Calibri" pitchFamily="34" charset="0"/>
+                          <a:ea typeface="Calibri" pitchFamily="34" charset="-122"/>
+                          <a:cs typeface="Calibri" pitchFamily="34" charset="-120"/>
+                        </a:rPr>
+                        <a:t>Große Enterprise Apps</a:t>
+                      </a:r>
+                      <a:endParaRPr lang="en-US" sz="1200" dirty="0">
+                        <a:latin typeface="Calibri" charset="0"/>
+                        <a:ea typeface="Calibri" charset="0"/>
+                        <a:cs typeface="Calibri" charset="0"/>
+                      </a:endParaRPr>
+                    </a:p>
+                  </a:txBody>
+                  <a:tcPr>
+                    <a:lnL w="6350" cap="flat" cmpd="sng" algn="ctr">
+                      <a:solidFill>
+                        <a:srgbClr val="475569"/>
+                      </a:solidFill>
+                      <a:prstDash val="solid"/>
+                      <a:round/>
+                      <a:headEnd type="none" w="med" len="med"/>
+                      <a:tailEnd type="none" w="med" len="med"/>
+                    </a:lnL>
+                    <a:lnR w="6350" cap="flat" cmpd="sng" algn="ctr">
+                      <a:solidFill>
+                        <a:srgbClr val="475569"/>
+                      </a:solidFill>
+                      <a:prstDash val="solid"/>
+                      <a:round/>
+                      <a:headEnd type="none" w="med" len="med"/>
+                      <a:tailEnd type="none" w="med" len="med"/>
+                    </a:lnR>
+                    <a:lnT w="6350" cap="flat" cmpd="sng" algn="ctr">
+                      <a:solidFill>
+                        <a:srgbClr val="475569"/>
+                      </a:solidFill>
+                      <a:prstDash val="solid"/>
+                      <a:round/>
+                      <a:headEnd type="none" w="med" len="med"/>
+                      <a:tailEnd type="none" w="med" len="med"/>
+                    </a:lnT>
+                    <a:lnB w="6350" cap="flat" cmpd="sng" algn="ctr">
+                      <a:solidFill>
+                        <a:srgbClr val="475569"/>
+                      </a:solidFill>
+                      <a:prstDash val="solid"/>
+                      <a:round/>
+                      <a:headEnd type="none" w="med" len="med"/>
+                      <a:tailEnd type="none" w="med" len="med"/>
+                    </a:lnB>
+                    <a:solidFill>
+                      <a:srgbClr val="1A2744"/>
+                    </a:solidFill>
+                  </a:tcPr>
+                </a:tc>
+                <a:extLst>
+                  <a:ext uri="{0D108BD9-81ED-4DB2-BD59-A6C34878D82A}">
+                    <a16:rowId xmlns:a16="http://schemas.microsoft.com/office/drawing/2014/main" val="10005"/>
+                  </a:ext>
+                </a:extLst>
               </a:tr>
             </a:tbl>
           </a:graphicData>
@@ -5327,21 +6698,21 @@
       </p:graphicFrame>
       <p:pic>
         <p:nvPicPr>
-          <p:cNvPr id="4" name="Image 0" descr="preencoded.png">    </p:cNvPr>
+          <p:cNvPr id="4" name="Image 0" descr="preencoded.png"/>
           <p:cNvPicPr>
             <a:picLocks noChangeAspect="1"/>
           </p:cNvPicPr>
           <p:nvPr/>
         </p:nvPicPr>
         <p:blipFill>
-          <a:blip r:embed="rId1"/>
+          <a:blip r:embed="rId3"/>
           <a:stretch>
             <a:fillRect/>
           </a:stretch>
         </p:blipFill>
         <p:spPr>
           <a:xfrm>
-            <a:off x="731520" y="3840480"/>
+            <a:off x="731520" y="4114800"/>
             <a:ext cx="365760" cy="365760"/>
           </a:xfrm>
           <a:prstGeom prst="rect">
@@ -5357,8 +6728,8 @@
         </p:nvSpPr>
         <p:spPr>
           <a:xfrm>
-            <a:off x="1234440" y="3840480"/>
-            <a:ext cx="7132320" cy="548640"/>
+            <a:off x="1234440" y="4114800"/>
+            <a:ext cx="7132320" cy="457200"/>
           </a:xfrm>
           <a:prstGeom prst="rect">
             <a:avLst/>
@@ -5370,7 +6741,7 @@
           <a:bodyPr wrap="square" lIns="0" tIns="0" rIns="0" bIns="0" rtlCol="0" anchor="ctr"/>
           <a:lstStyle/>
           <a:p>
-            <a:pPr indent="0" marL="0">
+            <a:pPr marL="0" indent="0">
               <a:buNone/>
             </a:pPr>
             <a:r>
@@ -5382,7 +6753,7 @@
                 <a:ea typeface="Calibri" pitchFamily="34" charset="-122"/>
                 <a:cs typeface="Calibri" pitchFamily="34" charset="-120"/>
               </a:rPr>
-              <a:t>Starte mit useState → brauchst du's sauber → Custom Hook → brauchst du's global → Context → wird's richtig groß → Redux</a:t>
+              <a:t>useState → Custom Hook → Context → useReducer → Redux</a:t>
             </a:r>
             <a:endParaRPr lang="en-US" sz="1400" dirty="0"/>
           </a:p>
@@ -5396,14 +6767,282 @@
 </p:sld>
 </file>
 
-<file path=ppt/slides/slide14.xml><?xml version="1.0" encoding="utf-8"?>
+<file path=ppt/slides/slide16.xml><?xml version="1.0" encoding="utf-8"?>
 <p:sld xmlns:a="http://schemas.openxmlformats.org/drawingml/2006/main" xmlns:r="http://schemas.openxmlformats.org/officeDocument/2006/relationships" xmlns:p="http://schemas.openxmlformats.org/presentationml/2006/main">
-  <p:cSld name="Slide 14">
+  <p:cSld>
     <p:bg>
       <p:bgPr>
         <a:solidFill>
           <a:srgbClr val="0F1729"/>
         </a:solidFill>
+        <a:effectLst/>
+      </p:bgPr>
+    </p:bg>
+    <p:spTree>
+      <p:nvGrpSpPr>
+        <p:cNvPr id="1" name="">
+          <a:extLst>
+            <a:ext uri="{FF2B5EF4-FFF2-40B4-BE49-F238E27FC236}">
+              <a16:creationId xmlns:a16="http://schemas.microsoft.com/office/drawing/2014/main" id="{B53A1620-476B-03F2-259C-A2EF670BB5B0}"/>
+            </a:ext>
+          </a:extLst>
+        </p:cNvPr>
+        <p:cNvGrpSpPr/>
+        <p:nvPr/>
+      </p:nvGrpSpPr>
+      <p:grpSpPr>
+        <a:xfrm>
+          <a:off x="0" y="0"/>
+          <a:ext cx="0" cy="0"/>
+          <a:chOff x="0" y="0"/>
+          <a:chExt cx="0" cy="0"/>
+        </a:xfrm>
+      </p:grpSpPr>
+      <p:sp>
+        <p:nvSpPr>
+          <p:cNvPr id="2" name="Shape 0">
+            <a:extLst>
+              <a:ext uri="{FF2B5EF4-FFF2-40B4-BE49-F238E27FC236}">
+                <a16:creationId xmlns:a16="http://schemas.microsoft.com/office/drawing/2014/main" id="{29B22D7A-E877-468E-FB51-28C2759139E6}"/>
+              </a:ext>
+            </a:extLst>
+          </p:cNvPr>
+          <p:cNvSpPr/>
+          <p:nvPr/>
+        </p:nvSpPr>
+        <p:spPr>
+          <a:xfrm>
+            <a:off x="-1371600" y="2743200"/>
+            <a:ext cx="3657600" cy="3657600"/>
+          </a:xfrm>
+          <a:prstGeom prst="ellipse">
+            <a:avLst/>
+          </a:prstGeom>
+          <a:solidFill>
+            <a:srgbClr val="06B6D4">
+              <a:alpha val="8000"/>
+            </a:srgbClr>
+          </a:solidFill>
+          <a:ln/>
+        </p:spPr>
+        <p:txBody>
+          <a:bodyPr/>
+          <a:lstStyle/>
+          <a:p>
+            <a:endParaRPr lang="en-DE"/>
+          </a:p>
+        </p:txBody>
+      </p:sp>
+      <p:sp>
+        <p:nvSpPr>
+          <p:cNvPr id="3" name="Text 1">
+            <a:extLst>
+              <a:ext uri="{FF2B5EF4-FFF2-40B4-BE49-F238E27FC236}">
+                <a16:creationId xmlns:a16="http://schemas.microsoft.com/office/drawing/2014/main" id="{5613F93A-9B4D-FFCF-A5CA-15F4FB8E939E}"/>
+              </a:ext>
+            </a:extLst>
+          </p:cNvPr>
+          <p:cNvSpPr/>
+          <p:nvPr/>
+        </p:nvSpPr>
+        <p:spPr>
+          <a:xfrm>
+            <a:off x="731520" y="365760"/>
+            <a:ext cx="7315200" cy="640080"/>
+          </a:xfrm>
+          <a:prstGeom prst="rect">
+            <a:avLst/>
+          </a:prstGeom>
+          <a:noFill/>
+          <a:ln/>
+        </p:spPr>
+        <p:txBody>
+          <a:bodyPr wrap="square" lIns="0" tIns="0" rIns="0" bIns="0" rtlCol="0" anchor="ctr"/>
+          <a:lstStyle/>
+          <a:p>
+            <a:pPr marL="0" indent="0">
+              <a:buNone/>
+            </a:pPr>
+            <a:r>
+              <a:rPr lang="en-US" sz="3600" b="1" dirty="0" err="1">
+                <a:solidFill>
+                  <a:srgbClr val="F8FAFC"/>
+                </a:solidFill>
+                <a:latin typeface="Trebuchet MS" pitchFamily="34" charset="0"/>
+                <a:ea typeface="Trebuchet MS" pitchFamily="34" charset="-122"/>
+                <a:cs typeface="Trebuchet MS" pitchFamily="34" charset="-120"/>
+              </a:rPr>
+              <a:t>Quellen</a:t>
+            </a:r>
+            <a:endParaRPr lang="en-US" sz="3600" dirty="0"/>
+          </a:p>
+        </p:txBody>
+      </p:sp>
+      <p:sp>
+        <p:nvSpPr>
+          <p:cNvPr id="5" name="Text 2">
+            <a:extLst>
+              <a:ext uri="{FF2B5EF4-FFF2-40B4-BE49-F238E27FC236}">
+                <a16:creationId xmlns:a16="http://schemas.microsoft.com/office/drawing/2014/main" id="{9FF7D75F-3485-1E3C-6966-D1A5CEE85F83}"/>
+              </a:ext>
+            </a:extLst>
+          </p:cNvPr>
+          <p:cNvSpPr/>
+          <p:nvPr/>
+        </p:nvSpPr>
+        <p:spPr>
+          <a:xfrm>
+            <a:off x="1371600" y="1097280"/>
+            <a:ext cx="6949440" cy="411480"/>
+          </a:xfrm>
+          <a:prstGeom prst="rect">
+            <a:avLst/>
+          </a:prstGeom>
+          <a:noFill/>
+          <a:ln/>
+        </p:spPr>
+        <p:txBody>
+          <a:bodyPr wrap="square" lIns="0" tIns="0" rIns="0" bIns="0" rtlCol="0" anchor="ctr"/>
+          <a:lstStyle/>
+          <a:p>
+            <a:r>
+              <a:rPr lang="en-US" sz="1500" dirty="0">
+                <a:solidFill>
+                  <a:srgbClr val="F8FAFC"/>
+                </a:solidFill>
+                <a:latin typeface="Calibri" pitchFamily="34" charset="0"/>
+                <a:ea typeface="Calibri" pitchFamily="34" charset="-122"/>
+                <a:cs typeface="Calibri" pitchFamily="34" charset="-120"/>
+                <a:hlinkClick r:id="rId3"/>
+              </a:rPr>
+              <a:t>https://www.youtube.com/watch?v=-bEzt5ISACA&amp;t=1952s</a:t>
+            </a:r>
+            <a:br>
+              <a:rPr lang="en-US" sz="1500" dirty="0">
+                <a:solidFill>
+                  <a:srgbClr val="F8FAFC"/>
+                </a:solidFill>
+                <a:latin typeface="Calibri" pitchFamily="34" charset="0"/>
+                <a:ea typeface="Calibri" pitchFamily="34" charset="-122"/>
+                <a:cs typeface="Calibri" pitchFamily="34" charset="-120"/>
+              </a:rPr>
+            </a:br>
+            <a:endParaRPr lang="en-US" sz="1500" dirty="0">
+              <a:solidFill>
+                <a:srgbClr val="F8FAFC"/>
+              </a:solidFill>
+              <a:latin typeface="Calibri" pitchFamily="34" charset="0"/>
+              <a:ea typeface="Calibri" pitchFamily="34" charset="-122"/>
+              <a:cs typeface="Calibri" pitchFamily="34" charset="-120"/>
+            </a:endParaRPr>
+          </a:p>
+          <a:p>
+            <a:r>
+              <a:rPr lang="en-US" sz="1500" dirty="0">
+                <a:solidFill>
+                  <a:srgbClr val="F8FAFC"/>
+                </a:solidFill>
+                <a:latin typeface="Calibri" pitchFamily="34" charset="0"/>
+                <a:ea typeface="Calibri" pitchFamily="34" charset="-122"/>
+                <a:cs typeface="Calibri" pitchFamily="34" charset="-120"/>
+                <a:hlinkClick r:id="rId4"/>
+              </a:rPr>
+              <a:t>https://www.youtube.com/watch?v=qqqyUTTS-9g&amp;t</a:t>
+            </a:r>
+            <a:r>
+              <a:rPr lang="en-US" sz="1500">
+                <a:solidFill>
+                  <a:srgbClr val="F8FAFC"/>
+                </a:solidFill>
+                <a:latin typeface="Calibri" pitchFamily="34" charset="0"/>
+                <a:ea typeface="Calibri" pitchFamily="34" charset="-122"/>
+                <a:cs typeface="Calibri" pitchFamily="34" charset="-120"/>
+                <a:hlinkClick r:id="rId4"/>
+              </a:rPr>
+              <a:t>=1297s</a:t>
+            </a:r>
+            <a:r>
+              <a:rPr lang="en-US" sz="1500">
+                <a:solidFill>
+                  <a:srgbClr val="F8FAFC"/>
+                </a:solidFill>
+                <a:latin typeface="Calibri" pitchFamily="34" charset="0"/>
+                <a:ea typeface="Calibri" pitchFamily="34" charset="-122"/>
+                <a:cs typeface="Calibri" pitchFamily="34" charset="-120"/>
+              </a:rPr>
+              <a:t> </a:t>
+            </a:r>
+            <a:endParaRPr lang="en-US" sz="1500" dirty="0"/>
+          </a:p>
+          <a:p>
+            <a:endParaRPr lang="en-US" sz="1500" dirty="0"/>
+          </a:p>
+        </p:txBody>
+      </p:sp>
+      <p:sp>
+        <p:nvSpPr>
+          <p:cNvPr id="7" name="Text 3">
+            <a:extLst>
+              <a:ext uri="{FF2B5EF4-FFF2-40B4-BE49-F238E27FC236}">
+                <a16:creationId xmlns:a16="http://schemas.microsoft.com/office/drawing/2014/main" id="{2CBA4739-9E26-34B2-6B23-B6F555B2F407}"/>
+              </a:ext>
+            </a:extLst>
+          </p:cNvPr>
+          <p:cNvSpPr/>
+          <p:nvPr/>
+        </p:nvSpPr>
+        <p:spPr>
+          <a:xfrm>
+            <a:off x="1371600" y="2985654"/>
+            <a:ext cx="6949440" cy="411480"/>
+          </a:xfrm>
+          <a:prstGeom prst="rect">
+            <a:avLst/>
+          </a:prstGeom>
+          <a:noFill/>
+          <a:ln/>
+        </p:spPr>
+        <p:txBody>
+          <a:bodyPr wrap="square" lIns="0" tIns="0" rIns="0" bIns="0" rtlCol="0" anchor="ctr"/>
+          <a:lstStyle/>
+          <a:p>
+            <a:r>
+              <a:rPr lang="en-US" sz="1500" dirty="0">
+                <a:solidFill>
+                  <a:srgbClr val="F8FAFC"/>
+                </a:solidFill>
+                <a:latin typeface="Calibri" pitchFamily="34" charset="0"/>
+                <a:ea typeface="Calibri" pitchFamily="34" charset="-122"/>
+                <a:cs typeface="Calibri" pitchFamily="34" charset="-120"/>
+              </a:rPr>
+              <a:t>https://www.youtube.com/watch?v=qqqyUTTS-9g&amp;t=1297s</a:t>
+            </a:r>
+            <a:endParaRPr lang="en-US" sz="1500" dirty="0"/>
+          </a:p>
+        </p:txBody>
+      </p:sp>
+    </p:spTree>
+    <p:extLst>
+      <p:ext uri="{BB962C8B-B14F-4D97-AF65-F5344CB8AC3E}">
+        <p14:creationId xmlns:p14="http://schemas.microsoft.com/office/powerpoint/2010/main" val="1751160007"/>
+      </p:ext>
+    </p:extLst>
+  </p:cSld>
+  <p:clrMapOvr>
+    <a:masterClrMapping/>
+  </p:clrMapOvr>
+</p:sld>
+</file>
+
+<file path=ppt/slides/slide17.xml><?xml version="1.0" encoding="utf-8"?>
+<p:sld xmlns:a="http://schemas.openxmlformats.org/drawingml/2006/main" xmlns:r="http://schemas.openxmlformats.org/officeDocument/2006/relationships" xmlns:p="http://schemas.openxmlformats.org/presentationml/2006/main">
+  <p:cSld name="Slide 16">
+    <p:bg>
+      <p:bgPr>
+        <a:solidFill>
+          <a:srgbClr val="0F1729"/>
+        </a:solidFill>
+        <a:effectLst/>
       </p:bgPr>
     </p:bg>
     <p:spTree>
@@ -5441,6 +7080,13 @@
           </a:solidFill>
           <a:ln/>
         </p:spPr>
+        <p:txBody>
+          <a:bodyPr/>
+          <a:lstStyle/>
+          <a:p>
+            <a:endParaRPr lang="en-DE"/>
+          </a:p>
+        </p:txBody>
       </p:sp>
       <p:sp>
         <p:nvSpPr>
@@ -5463,7 +7109,7 @@
           <a:bodyPr wrap="square" lIns="0" tIns="0" rIns="0" bIns="0" rtlCol="0" anchor="ctr"/>
           <a:lstStyle/>
           <a:p>
-            <a:pPr indent="0" marL="0">
+            <a:pPr marL="0" indent="0">
               <a:buNone/>
             </a:pPr>
             <a:r>
@@ -5483,133 +7129,7 @@
       </p:sp>
       <p:pic>
         <p:nvPicPr>
-          <p:cNvPr id="4" name="Image 0" descr="preencoded.png">    </p:cNvPr>
-          <p:cNvPicPr>
-            <a:picLocks noChangeAspect="1"/>
-          </p:cNvPicPr>
-          <p:nvPr/>
-        </p:nvPicPr>
-        <p:blipFill>
-          <a:blip r:embed="rId1"/>
-          <a:stretch>
-            <a:fillRect/>
-          </a:stretch>
-        </p:blipFill>
-        <p:spPr>
-          <a:xfrm>
-            <a:off x="914400" y="1234440"/>
-            <a:ext cx="320040" cy="320040"/>
-          </a:xfrm>
-          <a:prstGeom prst="rect">
-            <a:avLst/>
-          </a:prstGeom>
-        </p:spPr>
-      </p:pic>
-      <p:sp>
-        <p:nvSpPr>
-          <p:cNvPr id="5" name="Text 2"/>
-          <p:cNvSpPr/>
-          <p:nvPr/>
-        </p:nvSpPr>
-        <p:spPr>
-          <a:xfrm>
-            <a:off x="1463040" y="1188720"/>
-            <a:ext cx="6858000" cy="457200"/>
-          </a:xfrm>
-          <a:prstGeom prst="rect">
-            <a:avLst/>
-          </a:prstGeom>
-          <a:noFill/>
-          <a:ln/>
-        </p:spPr>
-        <p:txBody>
-          <a:bodyPr wrap="square" lIns="0" tIns="0" rIns="0" bIns="0" rtlCol="0" anchor="ctr"/>
-          <a:lstStyle/>
-          <a:p>
-            <a:pPr indent="0" marL="0">
-              <a:buNone/>
-            </a:pPr>
-            <a:r>
-              <a:rPr lang="en-US" sz="1600" dirty="0">
-                <a:solidFill>
-                  <a:srgbClr val="F8FAFC"/>
-                </a:solidFill>
-                <a:latin typeface="Calibri" pitchFamily="34" charset="0"/>
-                <a:ea typeface="Calibri" pitchFamily="34" charset="-122"/>
-                <a:cs typeface="Calibri" pitchFamily="34" charset="-120"/>
-              </a:rPr>
-              <a:t>State = Daten die sich zur Laufzeit ändern</a:t>
-            </a:r>
-            <a:endParaRPr lang="en-US" sz="1600" dirty="0"/>
-          </a:p>
-        </p:txBody>
-      </p:sp>
-      <p:pic>
-        <p:nvPicPr>
-          <p:cNvPr id="6" name="Image 1" descr="preencoded.png">    </p:cNvPr>
-          <p:cNvPicPr>
-            <a:picLocks noChangeAspect="1"/>
-          </p:cNvPicPr>
-          <p:nvPr/>
-        </p:nvPicPr>
-        <p:blipFill>
-          <a:blip r:embed="rId2"/>
-          <a:stretch>
-            <a:fillRect/>
-          </a:stretch>
-        </p:blipFill>
-        <p:spPr>
-          <a:xfrm>
-            <a:off x="914400" y="1783080"/>
-            <a:ext cx="320040" cy="320040"/>
-          </a:xfrm>
-          <a:prstGeom prst="rect">
-            <a:avLst/>
-          </a:prstGeom>
-        </p:spPr>
-      </p:pic>
-      <p:sp>
-        <p:nvSpPr>
-          <p:cNvPr id="7" name="Text 3"/>
-          <p:cNvSpPr/>
-          <p:nvPr/>
-        </p:nvSpPr>
-        <p:spPr>
-          <a:xfrm>
-            <a:off x="1463040" y="1737360"/>
-            <a:ext cx="6858000" cy="457200"/>
-          </a:xfrm>
-          <a:prstGeom prst="rect">
-            <a:avLst/>
-          </a:prstGeom>
-          <a:noFill/>
-          <a:ln/>
-        </p:spPr>
-        <p:txBody>
-          <a:bodyPr wrap="square" lIns="0" tIns="0" rIns="0" bIns="0" rtlCol="0" anchor="ctr"/>
-          <a:lstStyle/>
-          <a:p>
-            <a:pPr indent="0" marL="0">
-              <a:buNone/>
-            </a:pPr>
-            <a:r>
-              <a:rPr lang="en-US" sz="1600" dirty="0">
-                <a:solidFill>
-                  <a:srgbClr val="F8FAFC"/>
-                </a:solidFill>
-                <a:latin typeface="Calibri" pitchFamily="34" charset="0"/>
-                <a:ea typeface="Calibri" pitchFamily="34" charset="-122"/>
-                <a:cs typeface="Calibri" pitchFamily="34" charset="-120"/>
-              </a:rPr>
-              <a:t>useState für lokalen State in einer Komponente</a:t>
-            </a:r>
-            <a:endParaRPr lang="en-US" sz="1600" dirty="0"/>
-          </a:p>
-        </p:txBody>
-      </p:sp>
-      <p:pic>
-        <p:nvPicPr>
-          <p:cNvPr id="8" name="Image 2" descr="preencoded.png">    </p:cNvPr>
+          <p:cNvPr id="4" name="Image 0" descr="preencoded.png"/>
           <p:cNvPicPr>
             <a:picLocks noChangeAspect="1"/>
           </p:cNvPicPr>
@@ -5623,8 +7143,8 @@
         </p:blipFill>
         <p:spPr>
           <a:xfrm>
-            <a:off x="914400" y="2331720"/>
-            <a:ext cx="320040" cy="320040"/>
+            <a:off x="914400" y="1143000"/>
+            <a:ext cx="274320" cy="274320"/>
           </a:xfrm>
           <a:prstGeom prst="rect">
             <a:avLst/>
@@ -5633,14 +7153,14 @@
       </p:pic>
       <p:sp>
         <p:nvSpPr>
-          <p:cNvPr id="9" name="Text 4"/>
-          <p:cNvSpPr/>
-          <p:nvPr/>
-        </p:nvSpPr>
-        <p:spPr>
-          <a:xfrm>
-            <a:off x="1463040" y="2286000"/>
-            <a:ext cx="6858000" cy="457200"/>
+          <p:cNvPr id="5" name="Text 2"/>
+          <p:cNvSpPr/>
+          <p:nvPr/>
+        </p:nvSpPr>
+        <p:spPr>
+          <a:xfrm>
+            <a:off x="1371600" y="1097280"/>
+            <a:ext cx="6949440" cy="411480"/>
           </a:xfrm>
           <a:prstGeom prst="rect">
             <a:avLst/>
@@ -5652,11 +7172,11 @@
           <a:bodyPr wrap="square" lIns="0" tIns="0" rIns="0" bIns="0" rtlCol="0" anchor="ctr"/>
           <a:lstStyle/>
           <a:p>
-            <a:pPr indent="0" marL="0">
-              <a:buNone/>
-            </a:pPr>
-            <a:r>
-              <a:rPr lang="en-US" sz="1600" dirty="0">
+            <a:pPr marL="0" indent="0">
+              <a:buNone/>
+            </a:pPr>
+            <a:r>
+              <a:rPr lang="en-US" sz="1500" dirty="0">
                 <a:solidFill>
                   <a:srgbClr val="F8FAFC"/>
                 </a:solidFill>
@@ -5664,30 +7184,30 @@
                 <a:ea typeface="Calibri" pitchFamily="34" charset="-122"/>
                 <a:cs typeface="Calibri" pitchFamily="34" charset="-120"/>
               </a:rPr>
-              <a:t>Custom Hooks für saubere, wiederverwendbare Logik</a:t>
-            </a:r>
-            <a:endParaRPr lang="en-US" sz="1600" dirty="0"/>
+              <a:t>State = Daten die sich zur Laufzeit ändern</a:t>
+            </a:r>
+            <a:endParaRPr lang="en-US" sz="1500" dirty="0"/>
           </a:p>
         </p:txBody>
       </p:sp>
       <p:pic>
         <p:nvPicPr>
-          <p:cNvPr id="10" name="Image 3" descr="preencoded.png">    </p:cNvPr>
+          <p:cNvPr id="6" name="Image 1" descr="preencoded.png"/>
           <p:cNvPicPr>
             <a:picLocks noChangeAspect="1"/>
           </p:cNvPicPr>
           <p:nvPr/>
         </p:nvPicPr>
         <p:blipFill>
-          <a:blip r:embed="rId4"/>
+          <a:blip r:embed="rId3"/>
           <a:stretch>
             <a:fillRect/>
           </a:stretch>
         </p:blipFill>
         <p:spPr>
           <a:xfrm>
-            <a:off x="914400" y="2880360"/>
-            <a:ext cx="320040" cy="320040"/>
+            <a:off x="914400" y="1645920"/>
+            <a:ext cx="274320" cy="274320"/>
           </a:xfrm>
           <a:prstGeom prst="rect">
             <a:avLst/>
@@ -5696,14 +7216,14 @@
       </p:pic>
       <p:sp>
         <p:nvSpPr>
-          <p:cNvPr id="11" name="Text 5"/>
-          <p:cNvSpPr/>
-          <p:nvPr/>
-        </p:nvSpPr>
-        <p:spPr>
-          <a:xfrm>
-            <a:off x="1463040" y="2834640"/>
-            <a:ext cx="6858000" cy="457200"/>
+          <p:cNvPr id="7" name="Text 3"/>
+          <p:cNvSpPr/>
+          <p:nvPr/>
+        </p:nvSpPr>
+        <p:spPr>
+          <a:xfrm>
+            <a:off x="1371600" y="1600200"/>
+            <a:ext cx="6949440" cy="411480"/>
           </a:xfrm>
           <a:prstGeom prst="rect">
             <a:avLst/>
@@ -5715,11 +7235,11 @@
           <a:bodyPr wrap="square" lIns="0" tIns="0" rIns="0" bIns="0" rtlCol="0" anchor="ctr"/>
           <a:lstStyle/>
           <a:p>
-            <a:pPr indent="0" marL="0">
-              <a:buNone/>
-            </a:pPr>
-            <a:r>
-              <a:rPr lang="en-US" sz="1600" dirty="0">
+            <a:pPr marL="0" indent="0">
+              <a:buNone/>
+            </a:pPr>
+            <a:r>
+              <a:rPr lang="en-US" sz="1500" dirty="0">
                 <a:solidFill>
                   <a:srgbClr val="F8FAFC"/>
                 </a:solidFill>
@@ -5727,30 +7247,30 @@
                 <a:ea typeface="Calibri" pitchFamily="34" charset="-122"/>
                 <a:cs typeface="Calibri" pitchFamily="34" charset="-120"/>
               </a:rPr>
-              <a:t>Context API wenn mehrere Komponenten State teilen</a:t>
-            </a:r>
-            <a:endParaRPr lang="en-US" sz="1600" dirty="0"/>
+              <a:t>useState für lokalen State in einer Komponente</a:t>
+            </a:r>
+            <a:endParaRPr lang="en-US" sz="1500" dirty="0"/>
           </a:p>
         </p:txBody>
       </p:sp>
       <p:pic>
         <p:nvPicPr>
-          <p:cNvPr id="12" name="Image 4" descr="preencoded.png">    </p:cNvPr>
+          <p:cNvPr id="8" name="Image 2" descr="preencoded.png"/>
           <p:cNvPicPr>
             <a:picLocks noChangeAspect="1"/>
           </p:cNvPicPr>
           <p:nvPr/>
         </p:nvPicPr>
         <p:blipFill>
-          <a:blip r:embed="rId5"/>
+          <a:blip r:embed="rId3"/>
           <a:stretch>
             <a:fillRect/>
           </a:stretch>
         </p:blipFill>
         <p:spPr>
           <a:xfrm>
-            <a:off x="914400" y="3429000"/>
-            <a:ext cx="320040" cy="320040"/>
+            <a:off x="914400" y="2148840"/>
+            <a:ext cx="274320" cy="274320"/>
           </a:xfrm>
           <a:prstGeom prst="rect">
             <a:avLst/>
@@ -5759,14 +7279,14 @@
       </p:pic>
       <p:sp>
         <p:nvSpPr>
-          <p:cNvPr id="13" name="Text 6"/>
-          <p:cNvSpPr/>
-          <p:nvPr/>
-        </p:nvSpPr>
-        <p:spPr>
-          <a:xfrm>
-            <a:off x="1463040" y="3383280"/>
-            <a:ext cx="6858000" cy="457200"/>
+          <p:cNvPr id="9" name="Text 4"/>
+          <p:cNvSpPr/>
+          <p:nvPr/>
+        </p:nvSpPr>
+        <p:spPr>
+          <a:xfrm>
+            <a:off x="1371600" y="2103120"/>
+            <a:ext cx="6949440" cy="411480"/>
           </a:xfrm>
           <a:prstGeom prst="rect">
             <a:avLst/>
@@ -5778,11 +7298,11 @@
           <a:bodyPr wrap="square" lIns="0" tIns="0" rIns="0" bIns="0" rtlCol="0" anchor="ctr"/>
           <a:lstStyle/>
           <a:p>
-            <a:pPr indent="0" marL="0">
-              <a:buNone/>
-            </a:pPr>
-            <a:r>
-              <a:rPr lang="en-US" sz="1600" dirty="0">
+            <a:pPr marL="0" indent="0">
+              <a:buNone/>
+            </a:pPr>
+            <a:r>
+              <a:rPr lang="en-US" sz="1500" dirty="0">
                 <a:solidFill>
                   <a:srgbClr val="F8FAFC"/>
                 </a:solidFill>
@@ -5790,30 +7310,30 @@
                 <a:ea typeface="Calibri" pitchFamily="34" charset="-122"/>
                 <a:cs typeface="Calibri" pitchFamily="34" charset="-120"/>
               </a:rPr>
-              <a:t>Redux für große, komplexe Anwendungen</a:t>
-            </a:r>
-            <a:endParaRPr lang="en-US" sz="1600" dirty="0"/>
+              <a:t>Custom Hooks für saubere, wiederverwendbare Logik</a:t>
+            </a:r>
+            <a:endParaRPr lang="en-US" sz="1500" dirty="0"/>
           </a:p>
         </p:txBody>
       </p:sp>
       <p:pic>
         <p:nvPicPr>
-          <p:cNvPr id="14" name="Image 5" descr="preencoded.png">    </p:cNvPr>
+          <p:cNvPr id="10" name="Image 3" descr="preencoded.png"/>
           <p:cNvPicPr>
             <a:picLocks noChangeAspect="1"/>
           </p:cNvPicPr>
           <p:nvPr/>
         </p:nvPicPr>
         <p:blipFill>
-          <a:blip r:embed="rId6"/>
+          <a:blip r:embed="rId3"/>
           <a:stretch>
             <a:fillRect/>
           </a:stretch>
         </p:blipFill>
         <p:spPr>
           <a:xfrm>
-            <a:off x="914400" y="3977640"/>
-            <a:ext cx="320040" cy="320040"/>
+            <a:off x="914400" y="2651760"/>
+            <a:ext cx="274320" cy="274320"/>
           </a:xfrm>
           <a:prstGeom prst="rect">
             <a:avLst/>
@@ -5822,14 +7342,14 @@
       </p:pic>
       <p:sp>
         <p:nvSpPr>
-          <p:cNvPr id="15" name="Text 7"/>
-          <p:cNvSpPr/>
-          <p:nvPr/>
-        </p:nvSpPr>
-        <p:spPr>
-          <a:xfrm>
-            <a:off x="1463040" y="3931920"/>
-            <a:ext cx="6858000" cy="457200"/>
+          <p:cNvPr id="11" name="Text 5"/>
+          <p:cNvSpPr/>
+          <p:nvPr/>
+        </p:nvSpPr>
+        <p:spPr>
+          <a:xfrm>
+            <a:off x="1371600" y="2606040"/>
+            <a:ext cx="6949440" cy="411480"/>
           </a:xfrm>
           <a:prstGeom prst="rect">
             <a:avLst/>
@@ -5841,11 +7361,11 @@
           <a:bodyPr wrap="square" lIns="0" tIns="0" rIns="0" bIns="0" rtlCol="0" anchor="ctr"/>
           <a:lstStyle/>
           <a:p>
-            <a:pPr indent="0" marL="0">
-              <a:buNone/>
-            </a:pPr>
-            <a:r>
-              <a:rPr lang="en-US" sz="1600" dirty="0">
+            <a:pPr marL="0" indent="0">
+              <a:buNone/>
+            </a:pPr>
+            <a:r>
+              <a:rPr lang="en-US" sz="1500" dirty="0">
                 <a:solidFill>
                   <a:srgbClr val="F8FAFC"/>
                 </a:solidFill>
@@ -5853,9 +7373,198 @@
                 <a:ea typeface="Calibri" pitchFamily="34" charset="-122"/>
                 <a:cs typeface="Calibri" pitchFamily="34" charset="-120"/>
               </a:rPr>
+              <a:t>Context API wenn mehrere Komponenten State teilen</a:t>
+            </a:r>
+            <a:endParaRPr lang="en-US" sz="1500" dirty="0"/>
+          </a:p>
+        </p:txBody>
+      </p:sp>
+      <p:pic>
+        <p:nvPicPr>
+          <p:cNvPr id="12" name="Image 4" descr="preencoded.png"/>
+          <p:cNvPicPr>
+            <a:picLocks noChangeAspect="1"/>
+          </p:cNvPicPr>
+          <p:nvPr/>
+        </p:nvPicPr>
+        <p:blipFill>
+          <a:blip r:embed="rId3"/>
+          <a:stretch>
+            <a:fillRect/>
+          </a:stretch>
+        </p:blipFill>
+        <p:spPr>
+          <a:xfrm>
+            <a:off x="914400" y="3154680"/>
+            <a:ext cx="274320" cy="274320"/>
+          </a:xfrm>
+          <a:prstGeom prst="rect">
+            <a:avLst/>
+          </a:prstGeom>
+        </p:spPr>
+      </p:pic>
+      <p:sp>
+        <p:nvSpPr>
+          <p:cNvPr id="13" name="Text 6"/>
+          <p:cNvSpPr/>
+          <p:nvPr/>
+        </p:nvSpPr>
+        <p:spPr>
+          <a:xfrm>
+            <a:off x="1371600" y="3108960"/>
+            <a:ext cx="6949440" cy="411480"/>
+          </a:xfrm>
+          <a:prstGeom prst="rect">
+            <a:avLst/>
+          </a:prstGeom>
+          <a:noFill/>
+          <a:ln/>
+        </p:spPr>
+        <p:txBody>
+          <a:bodyPr wrap="square" lIns="0" tIns="0" rIns="0" bIns="0" rtlCol="0" anchor="ctr"/>
+          <a:lstStyle/>
+          <a:p>
+            <a:pPr marL="0" indent="0">
+              <a:buNone/>
+            </a:pPr>
+            <a:r>
+              <a:rPr lang="en-US" sz="1500" dirty="0">
+                <a:solidFill>
+                  <a:srgbClr val="F8FAFC"/>
+                </a:solidFill>
+                <a:latin typeface="Calibri" pitchFamily="34" charset="0"/>
+                <a:ea typeface="Calibri" pitchFamily="34" charset="-122"/>
+                <a:cs typeface="Calibri" pitchFamily="34" charset="-120"/>
+              </a:rPr>
+              <a:t>useReducer für strukturierte, komplexe State-Logik</a:t>
+            </a:r>
+            <a:endParaRPr lang="en-US" sz="1500" dirty="0"/>
+          </a:p>
+        </p:txBody>
+      </p:sp>
+      <p:pic>
+        <p:nvPicPr>
+          <p:cNvPr id="14" name="Image 5" descr="preencoded.png"/>
+          <p:cNvPicPr>
+            <a:picLocks noChangeAspect="1"/>
+          </p:cNvPicPr>
+          <p:nvPr/>
+        </p:nvPicPr>
+        <p:blipFill>
+          <a:blip r:embed="rId3"/>
+          <a:stretch>
+            <a:fillRect/>
+          </a:stretch>
+        </p:blipFill>
+        <p:spPr>
+          <a:xfrm>
+            <a:off x="914400" y="3657600"/>
+            <a:ext cx="274320" cy="274320"/>
+          </a:xfrm>
+          <a:prstGeom prst="rect">
+            <a:avLst/>
+          </a:prstGeom>
+        </p:spPr>
+      </p:pic>
+      <p:sp>
+        <p:nvSpPr>
+          <p:cNvPr id="15" name="Text 7"/>
+          <p:cNvSpPr/>
+          <p:nvPr/>
+        </p:nvSpPr>
+        <p:spPr>
+          <a:xfrm>
+            <a:off x="1371600" y="3611880"/>
+            <a:ext cx="6949440" cy="411480"/>
+          </a:xfrm>
+          <a:prstGeom prst="rect">
+            <a:avLst/>
+          </a:prstGeom>
+          <a:noFill/>
+          <a:ln/>
+        </p:spPr>
+        <p:txBody>
+          <a:bodyPr wrap="square" lIns="0" tIns="0" rIns="0" bIns="0" rtlCol="0" anchor="ctr"/>
+          <a:lstStyle/>
+          <a:p>
+            <a:pPr marL="0" indent="0">
+              <a:buNone/>
+            </a:pPr>
+            <a:r>
+              <a:rPr lang="en-US" sz="1500" dirty="0">
+                <a:solidFill>
+                  <a:srgbClr val="F8FAFC"/>
+                </a:solidFill>
+                <a:latin typeface="Calibri" pitchFamily="34" charset="0"/>
+                <a:ea typeface="Calibri" pitchFamily="34" charset="-122"/>
+                <a:cs typeface="Calibri" pitchFamily="34" charset="-120"/>
+              </a:rPr>
+              <a:t>Redux = useReducer auf App-Ebene</a:t>
+            </a:r>
+            <a:endParaRPr lang="en-US" sz="1500" dirty="0"/>
+          </a:p>
+        </p:txBody>
+      </p:sp>
+      <p:pic>
+        <p:nvPicPr>
+          <p:cNvPr id="16" name="Image 6" descr="preencoded.png"/>
+          <p:cNvPicPr>
+            <a:picLocks noChangeAspect="1"/>
+          </p:cNvPicPr>
+          <p:nvPr/>
+        </p:nvPicPr>
+        <p:blipFill>
+          <a:blip r:embed="rId3"/>
+          <a:stretch>
+            <a:fillRect/>
+          </a:stretch>
+        </p:blipFill>
+        <p:spPr>
+          <a:xfrm>
+            <a:off x="914400" y="4160520"/>
+            <a:ext cx="274320" cy="274320"/>
+          </a:xfrm>
+          <a:prstGeom prst="rect">
+            <a:avLst/>
+          </a:prstGeom>
+        </p:spPr>
+      </p:pic>
+      <p:sp>
+        <p:nvSpPr>
+          <p:cNvPr id="17" name="Text 8"/>
+          <p:cNvSpPr/>
+          <p:nvPr/>
+        </p:nvSpPr>
+        <p:spPr>
+          <a:xfrm>
+            <a:off x="1371600" y="4114800"/>
+            <a:ext cx="6949440" cy="411480"/>
+          </a:xfrm>
+          <a:prstGeom prst="rect">
+            <a:avLst/>
+          </a:prstGeom>
+          <a:noFill/>
+          <a:ln/>
+        </p:spPr>
+        <p:txBody>
+          <a:bodyPr wrap="square" lIns="0" tIns="0" rIns="0" bIns="0" rtlCol="0" anchor="ctr"/>
+          <a:lstStyle/>
+          <a:p>
+            <a:pPr marL="0" indent="0">
+              <a:buNone/>
+            </a:pPr>
+            <a:r>
+              <a:rPr lang="en-US" sz="1500" dirty="0">
+                <a:solidFill>
+                  <a:srgbClr val="F8FAFC"/>
+                </a:solidFill>
+                <a:latin typeface="Calibri" pitchFamily="34" charset="0"/>
+                <a:ea typeface="Calibri" pitchFamily="34" charset="-122"/>
+                <a:cs typeface="Calibri" pitchFamily="34" charset="-120"/>
+              </a:rPr>
               <a:t>Starte einfach – skaliere bei Bedarf!</a:t>
             </a:r>
-            <a:endParaRPr lang="en-US" sz="1600" dirty="0"/>
+            <a:endParaRPr lang="en-US" sz="1500" dirty="0"/>
           </a:p>
         </p:txBody>
       </p:sp>
@@ -5867,14 +7576,15 @@
 </p:sld>
 </file>
 
-<file path=ppt/slides/slide15.xml><?xml version="1.0" encoding="utf-8"?>
+<file path=ppt/slides/slide18.xml><?xml version="1.0" encoding="utf-8"?>
 <p:sld xmlns:a="http://schemas.openxmlformats.org/drawingml/2006/main" xmlns:r="http://schemas.openxmlformats.org/officeDocument/2006/relationships" xmlns:p="http://schemas.openxmlformats.org/presentationml/2006/main">
-  <p:cSld name="Slide 15">
+  <p:cSld name="Slide 17">
     <p:bg>
       <p:bgPr>
         <a:solidFill>
           <a:srgbClr val="0F1729"/>
         </a:solidFill>
+        <a:effectLst/>
       </p:bgPr>
     </p:bg>
     <p:spTree>
@@ -5912,6 +7622,13 @@
           </a:solidFill>
           <a:ln/>
         </p:spPr>
+        <p:txBody>
+          <a:bodyPr/>
+          <a:lstStyle/>
+          <a:p>
+            <a:endParaRPr lang="en-DE"/>
+          </a:p>
+        </p:txBody>
       </p:sp>
       <p:sp>
         <p:nvSpPr>
@@ -5934,6 +7651,13 @@
           </a:solidFill>
           <a:ln/>
         </p:spPr>
+        <p:txBody>
+          <a:bodyPr/>
+          <a:lstStyle/>
+          <a:p>
+            <a:endParaRPr lang="en-DE"/>
+          </a:p>
+        </p:txBody>
       </p:sp>
       <p:sp>
         <p:nvSpPr>
@@ -5956,7 +7680,7 @@
           <a:bodyPr wrap="square" lIns="0" tIns="0" rIns="0" bIns="0" rtlCol="0" anchor="ctr"/>
           <a:lstStyle/>
           <a:p>
-            <a:pPr algn="ctr" indent="0" marL="0">
+            <a:pPr marL="0" indent="0" algn="ctr">
               <a:buNone/>
             </a:pPr>
             <a:r>
@@ -5995,7 +7719,7 @@
           <a:bodyPr wrap="square" lIns="0" tIns="0" rIns="0" bIns="0" rtlCol="0" anchor="ctr"/>
           <a:lstStyle/>
           <a:p>
-            <a:pPr algn="ctr" indent="0" marL="0">
+            <a:pPr marL="0" indent="0" algn="ctr">
               <a:buNone/>
             </a:pPr>
             <a:r>
@@ -6029,6 +7753,7 @@
         <a:solidFill>
           <a:srgbClr val="0F1729"/>
         </a:solidFill>
+        <a:effectLst/>
       </p:bgPr>
     </p:bg>
     <p:spTree>
@@ -6066,7 +7791,7 @@
           <a:bodyPr wrap="square" lIns="0" tIns="0" rIns="0" bIns="0" rtlCol="0" anchor="ctr"/>
           <a:lstStyle/>
           <a:p>
-            <a:pPr indent="0" marL="0">
+            <a:pPr marL="0" indent="0">
               <a:buNone/>
             </a:pPr>
             <a:r>
@@ -6105,7 +7830,7 @@
           <a:bodyPr wrap="square" lIns="0" tIns="0" rIns="0" bIns="0" rtlCol="0" anchor="ctr"/>
           <a:lstStyle/>
           <a:p>
-            <a:pPr indent="0" marL="0">
+            <a:pPr marL="0" indent="0">
               <a:buNone/>
             </a:pPr>
             <a:r>
@@ -6144,6 +7869,13 @@
           </a:solidFill>
           <a:ln/>
         </p:spPr>
+        <p:txBody>
+          <a:bodyPr/>
+          <a:lstStyle/>
+          <a:p>
+            <a:endParaRPr lang="en-DE"/>
+          </a:p>
+        </p:txBody>
       </p:sp>
       <p:sp>
         <p:nvSpPr>
@@ -6166,7 +7898,7 @@
           <a:bodyPr wrap="square" lIns="0" tIns="0" rIns="0" bIns="0" rtlCol="0" anchor="ctr"/>
           <a:lstStyle/>
           <a:p>
-            <a:pPr indent="0" marL="0">
+            <a:pPr marL="0" indent="0">
               <a:buNone/>
             </a:pPr>
             <a:r>
@@ -6205,6 +7937,13 @@
           </a:solidFill>
           <a:ln/>
         </p:spPr>
+        <p:txBody>
+          <a:bodyPr/>
+          <a:lstStyle/>
+          <a:p>
+            <a:endParaRPr lang="en-DE"/>
+          </a:p>
+        </p:txBody>
       </p:sp>
       <p:sp>
         <p:nvSpPr>
@@ -6227,7 +7966,7 @@
           <a:bodyPr wrap="square" lIns="0" tIns="0" rIns="0" bIns="0" rtlCol="0" anchor="ctr"/>
           <a:lstStyle/>
           <a:p>
-            <a:pPr indent="0" marL="0">
+            <a:pPr marL="0" indent="0">
               <a:buNone/>
             </a:pPr>
             <a:r>
@@ -6266,6 +8005,13 @@
           </a:solidFill>
           <a:ln/>
         </p:spPr>
+        <p:txBody>
+          <a:bodyPr/>
+          <a:lstStyle/>
+          <a:p>
+            <a:endParaRPr lang="en-DE"/>
+          </a:p>
+        </p:txBody>
       </p:sp>
       <p:sp>
         <p:nvSpPr>
@@ -6288,7 +8034,7 @@
           <a:bodyPr wrap="square" lIns="0" tIns="0" rIns="0" bIns="0" rtlCol="0" anchor="ctr"/>
           <a:lstStyle/>
           <a:p>
-            <a:pPr indent="0" marL="0">
+            <a:pPr marL="0" indent="0">
               <a:buNone/>
             </a:pPr>
             <a:r>
@@ -6327,6 +8073,13 @@
           </a:solidFill>
           <a:ln/>
         </p:spPr>
+        <p:txBody>
+          <a:bodyPr/>
+          <a:lstStyle/>
+          <a:p>
+            <a:endParaRPr lang="en-DE"/>
+          </a:p>
+        </p:txBody>
       </p:sp>
       <p:sp>
         <p:nvSpPr>
@@ -6349,7 +8102,7 @@
           <a:bodyPr wrap="square" lIns="0" tIns="0" rIns="0" bIns="0" rtlCol="0" anchor="ctr"/>
           <a:lstStyle/>
           <a:p>
-            <a:pPr indent="0" marL="0">
+            <a:pPr marL="0" indent="0">
               <a:buNone/>
             </a:pPr>
             <a:r>
@@ -6388,6 +8141,13 @@
           </a:solidFill>
           <a:ln/>
         </p:spPr>
+        <p:txBody>
+          <a:bodyPr/>
+          <a:lstStyle/>
+          <a:p>
+            <a:endParaRPr lang="en-DE"/>
+          </a:p>
+        </p:txBody>
       </p:sp>
       <p:sp>
         <p:nvSpPr>
@@ -6410,7 +8170,7 @@
           <a:bodyPr wrap="square" lIns="0" tIns="0" rIns="0" bIns="0" rtlCol="0" anchor="ctr"/>
           <a:lstStyle/>
           <a:p>
-            <a:pPr indent="0" marL="0">
+            <a:pPr marL="0" indent="0">
               <a:buNone/>
             </a:pPr>
             <a:r>
@@ -6449,7 +8209,7 @@
           <a:bodyPr wrap="square" lIns="0" tIns="0" rIns="0" bIns="0" rtlCol="0" anchor="t"/>
           <a:lstStyle/>
           <a:p>
-            <a:pPr indent="0" marL="0">
+            <a:pPr marL="0" indent="0">
               <a:buNone/>
             </a:pPr>
             <a:r>
@@ -6466,7 +8226,7 @@
             <a:endParaRPr lang="en-US" sz="1500" dirty="0"/>
           </a:p>
           <a:p>
-            <a:pPr indent="0" marL="0">
+            <a:pPr marL="0" indent="0">
               <a:buNone/>
             </a:pPr>
             <a:r>
@@ -6483,13 +8243,13 @@
             <a:endParaRPr lang="en-US" sz="1500" dirty="0"/>
           </a:p>
           <a:p>
-            <a:pPr indent="0" marL="0">
+            <a:pPr marL="0" indent="0">
               <a:buNone/>
             </a:pPr>
             <a:endParaRPr lang="en-US" sz="1500" dirty="0"/>
           </a:p>
           <a:p>
-            <a:pPr indent="0" marL="0">
+            <a:pPr marL="0" indent="0">
               <a:buNone/>
             </a:pPr>
             <a:r>
@@ -6506,7 +8266,7 @@
             <a:endParaRPr lang="en-US" sz="1500" dirty="0"/>
           </a:p>
           <a:p>
-            <a:pPr indent="0" marL="0">
+            <a:pPr marL="0" indent="0">
               <a:buNone/>
             </a:pPr>
             <a:r>
@@ -6523,13 +8283,13 @@
             <a:endParaRPr lang="en-US" sz="1500" dirty="0"/>
           </a:p>
           <a:p>
-            <a:pPr indent="0" marL="0">
+            <a:pPr marL="0" indent="0">
               <a:buNone/>
             </a:pPr>
             <a:endParaRPr lang="en-US" sz="1500" dirty="0"/>
           </a:p>
           <a:p>
-            <a:pPr indent="0" marL="0">
+            <a:pPr marL="0" indent="0">
               <a:buNone/>
             </a:pPr>
             <a:r>
@@ -6546,7 +8306,7 @@
             <a:endParaRPr lang="en-US" sz="1500" dirty="0"/>
           </a:p>
           <a:p>
-            <a:pPr indent="0" marL="0">
+            <a:pPr marL="0" indent="0">
               <a:buNone/>
             </a:pPr>
             <a:r>
@@ -6580,6 +8340,7 @@
         <a:solidFill>
           <a:srgbClr val="0F1729"/>
         </a:solidFill>
+        <a:effectLst/>
       </p:bgPr>
     </p:bg>
     <p:spTree>
@@ -6617,7 +8378,7 @@
           <a:bodyPr wrap="square" lIns="0" tIns="0" rIns="0" bIns="0" rtlCol="0" anchor="ctr"/>
           <a:lstStyle/>
           <a:p>
-            <a:pPr indent="0" marL="0">
+            <a:pPr marL="0" indent="0">
               <a:buNone/>
             </a:pPr>
             <a:r>
@@ -6656,7 +8417,7 @@
           <a:bodyPr wrap="square" lIns="0" tIns="0" rIns="0" bIns="0" rtlCol="0" anchor="ctr"/>
           <a:lstStyle/>
           <a:p>
-            <a:pPr indent="0" marL="0">
+            <a:pPr marL="0" indent="0">
               <a:buNone/>
             </a:pPr>
             <a:r>
@@ -6695,6 +8456,13 @@
           </a:solidFill>
           <a:ln/>
         </p:spPr>
+        <p:txBody>
+          <a:bodyPr/>
+          <a:lstStyle/>
+          <a:p>
+            <a:endParaRPr lang="en-DE"/>
+          </a:p>
+        </p:txBody>
       </p:sp>
       <p:sp>
         <p:nvSpPr>
@@ -6717,7 +8485,7 @@
           <a:bodyPr wrap="square" rtlCol="0" anchor="t"/>
           <a:lstStyle/>
           <a:p>
-            <a:pPr indent="0" marL="0">
+            <a:pPr marL="0" indent="0">
               <a:buNone/>
             </a:pPr>
             <a:r>
@@ -6734,13 +8502,13 @@
             <a:endParaRPr lang="en-US" sz="1800" dirty="0"/>
           </a:p>
           <a:p>
-            <a:pPr indent="0" marL="0">
+            <a:pPr marL="0" indent="0">
               <a:buNone/>
             </a:pPr>
             <a:endParaRPr lang="en-US" sz="1800" dirty="0"/>
           </a:p>
           <a:p>
-            <a:pPr indent="0" marL="0">
+            <a:pPr marL="0" indent="0">
               <a:buNone/>
             </a:pPr>
             <a:r>
@@ -6757,7 +8525,7 @@
             <a:endParaRPr lang="en-US" sz="1800" dirty="0"/>
           </a:p>
           <a:p>
-            <a:pPr indent="0" marL="0">
+            <a:pPr marL="0" indent="0">
               <a:buNone/>
             </a:pPr>
             <a:r>
@@ -6796,6 +8564,13 @@
           </a:solidFill>
           <a:ln/>
         </p:spPr>
+        <p:txBody>
+          <a:bodyPr/>
+          <a:lstStyle/>
+          <a:p>
+            <a:endParaRPr lang="en-DE"/>
+          </a:p>
+        </p:txBody>
       </p:sp>
       <p:sp>
         <p:nvSpPr>
@@ -6818,7 +8593,7 @@
           <a:bodyPr wrap="square" lIns="0" tIns="0" rIns="0" bIns="0" rtlCol="0" anchor="ctr"/>
           <a:lstStyle/>
           <a:p>
-            <a:pPr algn="ctr" indent="0" marL="0">
+            <a:pPr marL="0" indent="0" algn="ctr">
               <a:buNone/>
             </a:pPr>
             <a:r>
@@ -6857,7 +8632,7 @@
           <a:bodyPr wrap="square" lIns="0" tIns="0" rIns="0" bIns="0" rtlCol="0" anchor="ctr"/>
           <a:lstStyle/>
           <a:p>
-            <a:pPr algn="ctr" indent="0" marL="0">
+            <a:pPr marL="0" indent="0" algn="ctr">
               <a:buNone/>
             </a:pPr>
             <a:r>
@@ -6896,6 +8671,13 @@
           </a:solidFill>
           <a:ln/>
         </p:spPr>
+        <p:txBody>
+          <a:bodyPr/>
+          <a:lstStyle/>
+          <a:p>
+            <a:endParaRPr lang="en-DE"/>
+          </a:p>
+        </p:txBody>
       </p:sp>
       <p:sp>
         <p:nvSpPr>
@@ -6918,7 +8700,7 @@
           <a:bodyPr wrap="square" lIns="0" tIns="0" rIns="0" bIns="0" rtlCol="0" anchor="ctr"/>
           <a:lstStyle/>
           <a:p>
-            <a:pPr algn="ctr" indent="0" marL="0">
+            <a:pPr marL="0" indent="0" algn="ctr">
               <a:buNone/>
             </a:pPr>
             <a:r>
@@ -6957,7 +8739,7 @@
           <a:bodyPr wrap="square" lIns="0" tIns="0" rIns="0" bIns="0" rtlCol="0" anchor="ctr"/>
           <a:lstStyle/>
           <a:p>
-            <a:pPr algn="ctr" indent="0" marL="0">
+            <a:pPr marL="0" indent="0" algn="ctr">
               <a:buNone/>
             </a:pPr>
             <a:r>
@@ -6996,6 +8778,13 @@
           </a:solidFill>
           <a:ln/>
         </p:spPr>
+        <p:txBody>
+          <a:bodyPr/>
+          <a:lstStyle/>
+          <a:p>
+            <a:endParaRPr lang="en-DE"/>
+          </a:p>
+        </p:txBody>
       </p:sp>
       <p:sp>
         <p:nvSpPr>
@@ -7018,7 +8807,7 @@
           <a:bodyPr wrap="square" lIns="0" tIns="0" rIns="0" bIns="0" rtlCol="0" anchor="ctr"/>
           <a:lstStyle/>
           <a:p>
-            <a:pPr algn="ctr" indent="0" marL="0">
+            <a:pPr marL="0" indent="0" algn="ctr">
               <a:buNone/>
             </a:pPr>
             <a:r>
@@ -7057,7 +8846,7 @@
           <a:bodyPr wrap="square" lIns="0" tIns="0" rIns="0" bIns="0" rtlCol="0" anchor="ctr"/>
           <a:lstStyle/>
           <a:p>
-            <a:pPr algn="ctr" indent="0" marL="0">
+            <a:pPr marL="0" indent="0" algn="ctr">
               <a:buNone/>
             </a:pPr>
             <a:r>
@@ -7091,6 +8880,7 @@
         <a:solidFill>
           <a:srgbClr val="0F1729"/>
         </a:solidFill>
+        <a:effectLst/>
       </p:bgPr>
     </p:bg>
     <p:spTree>
@@ -7128,7 +8918,7 @@
           <a:bodyPr wrap="square" lIns="0" tIns="0" rIns="0" bIns="0" rtlCol="0" anchor="ctr"/>
           <a:lstStyle/>
           <a:p>
-            <a:pPr indent="0" marL="0">
+            <a:pPr marL="0" indent="0">
               <a:buNone/>
             </a:pPr>
             <a:r>
@@ -7148,14 +8938,14 @@
       </p:sp>
       <p:pic>
         <p:nvPicPr>
-          <p:cNvPr id="3" name="Image 0" descr="preencoded.png">    </p:cNvPr>
+          <p:cNvPr id="3" name="Image 0" descr="preencoded.png"/>
           <p:cNvPicPr>
             <a:picLocks noChangeAspect="1"/>
           </p:cNvPicPr>
           <p:nvPr/>
         </p:nvPicPr>
         <p:blipFill>
-          <a:blip r:embed="rId1"/>
+          <a:blip r:embed="rId3"/>
           <a:stretch>
             <a:fillRect/>
           </a:stretch>
@@ -7191,6 +8981,13 @@
           </a:solidFill>
           <a:ln/>
         </p:spPr>
+        <p:txBody>
+          <a:bodyPr/>
+          <a:lstStyle/>
+          <a:p>
+            <a:endParaRPr lang="en-DE"/>
+          </a:p>
+        </p:txBody>
       </p:sp>
       <p:sp>
         <p:nvSpPr>
@@ -7213,7 +9010,7 @@
           <a:bodyPr wrap="square" rtlCol="0" anchor="t"/>
           <a:lstStyle/>
           <a:p>
-            <a:pPr indent="0" marL="0">
+            <a:pPr marL="0" indent="0">
               <a:buNone/>
             </a:pPr>
             <a:r>
@@ -7230,13 +9027,13 @@
             <a:endParaRPr lang="en-US" sz="1200" dirty="0"/>
           </a:p>
           <a:p>
-            <a:pPr indent="0" marL="0">
+            <a:pPr marL="0" indent="0">
               <a:buNone/>
             </a:pPr>
             <a:endParaRPr lang="en-US" sz="1200" dirty="0"/>
           </a:p>
           <a:p>
-            <a:pPr indent="0" marL="0">
+            <a:pPr marL="0" indent="0">
               <a:buNone/>
             </a:pPr>
             <a:r>
@@ -7253,7 +9050,7 @@
             <a:endParaRPr lang="en-US" sz="1200" dirty="0"/>
           </a:p>
           <a:p>
-            <a:pPr indent="0" marL="0">
+            <a:pPr marL="0" indent="0">
               <a:buNone/>
             </a:pPr>
             <a:r>
@@ -7270,13 +9067,13 @@
             <a:endParaRPr lang="en-US" sz="1200" dirty="0"/>
           </a:p>
           <a:p>
-            <a:pPr indent="0" marL="0">
+            <a:pPr marL="0" indent="0">
               <a:buNone/>
             </a:pPr>
             <a:endParaRPr lang="en-US" sz="1200" dirty="0"/>
           </a:p>
           <a:p>
-            <a:pPr indent="0" marL="0">
+            <a:pPr marL="0" indent="0">
               <a:buNone/>
             </a:pPr>
             <a:r>
@@ -7293,7 +9090,7 @@
             <a:endParaRPr lang="en-US" sz="1200" dirty="0"/>
           </a:p>
           <a:p>
-            <a:pPr indent="0" marL="0">
+            <a:pPr marL="0" indent="0">
               <a:buNone/>
             </a:pPr>
             <a:r>
@@ -7310,7 +9107,7 @@
             <a:endParaRPr lang="en-US" sz="1200" dirty="0"/>
           </a:p>
           <a:p>
-            <a:pPr indent="0" marL="0">
+            <a:pPr marL="0" indent="0">
               <a:buNone/>
             </a:pPr>
             <a:r>
@@ -7327,7 +9124,7 @@
             <a:endParaRPr lang="en-US" sz="1200" dirty="0"/>
           </a:p>
           <a:p>
-            <a:pPr indent="0" marL="0">
+            <a:pPr marL="0" indent="0">
               <a:buNone/>
             </a:pPr>
             <a:r>
@@ -7344,7 +9141,7 @@
             <a:endParaRPr lang="en-US" sz="1200" dirty="0"/>
           </a:p>
           <a:p>
-            <a:pPr indent="0" marL="0">
+            <a:pPr marL="0" indent="0">
               <a:buNone/>
             </a:pPr>
             <a:r>
@@ -7361,13 +9158,13 @@
             <a:endParaRPr lang="en-US" sz="1200" dirty="0"/>
           </a:p>
           <a:p>
-            <a:pPr indent="0" marL="0">
+            <a:pPr marL="0" indent="0">
               <a:buNone/>
             </a:pPr>
             <a:endParaRPr lang="en-US" sz="1200" dirty="0"/>
           </a:p>
           <a:p>
-            <a:pPr indent="0" marL="0">
+            <a:pPr marL="0" indent="0">
               <a:buNone/>
             </a:pPr>
             <a:r>
@@ -7384,7 +9181,7 @@
             <a:endParaRPr lang="en-US" sz="1200" dirty="0"/>
           </a:p>
           <a:p>
-            <a:pPr indent="0" marL="0">
+            <a:pPr marL="0" indent="0">
               <a:buNone/>
             </a:pPr>
             <a:r>
@@ -7401,7 +9198,7 @@
             <a:endParaRPr lang="en-US" sz="1200" dirty="0"/>
           </a:p>
           <a:p>
-            <a:pPr indent="0" marL="0">
+            <a:pPr marL="0" indent="0">
               <a:buNone/>
             </a:pPr>
             <a:r>
@@ -7418,7 +9215,7 @@
             <a:endParaRPr lang="en-US" sz="1200" dirty="0"/>
           </a:p>
           <a:p>
-            <a:pPr indent="0" marL="0">
+            <a:pPr marL="0" indent="0">
               <a:buNone/>
             </a:pPr>
             <a:r>
@@ -7435,7 +9232,7 @@
             <a:endParaRPr lang="en-US" sz="1200" dirty="0"/>
           </a:p>
           <a:p>
-            <a:pPr indent="0" marL="0">
+            <a:pPr marL="0" indent="0">
               <a:buNone/>
             </a:pPr>
             <a:r>
@@ -7452,7 +9249,7 @@
             <a:endParaRPr lang="en-US" sz="1200" dirty="0"/>
           </a:p>
           <a:p>
-            <a:pPr indent="0" marL="0">
+            <a:pPr marL="0" indent="0">
               <a:buNone/>
             </a:pPr>
             <a:r>
@@ -7469,7 +9266,7 @@
             <a:endParaRPr lang="en-US" sz="1200" dirty="0"/>
           </a:p>
           <a:p>
-            <a:pPr indent="0" marL="0">
+            <a:pPr marL="0" indent="0">
               <a:buNone/>
             </a:pPr>
             <a:r>
@@ -7503,6 +9300,7 @@
         <a:solidFill>
           <a:srgbClr val="0F1729"/>
         </a:solidFill>
+        <a:effectLst/>
       </p:bgPr>
     </p:bg>
     <p:spTree>
@@ -7540,7 +9338,7 @@
           <a:bodyPr wrap="square" lIns="0" tIns="0" rIns="0" bIns="0" rtlCol="0" anchor="ctr"/>
           <a:lstStyle/>
           <a:p>
-            <a:pPr indent="0" marL="0">
+            <a:pPr marL="0" indent="0">
               <a:buNone/>
             </a:pPr>
             <a:r>
@@ -7579,7 +9377,7 @@
           <a:bodyPr wrap="square" lIns="0" tIns="0" rIns="0" bIns="0" rtlCol="0" anchor="ctr"/>
           <a:lstStyle/>
           <a:p>
-            <a:pPr indent="0" marL="0">
+            <a:pPr marL="0" indent="0">
               <a:buNone/>
             </a:pPr>
             <a:r>
@@ -7618,7 +9416,7 @@
           <a:bodyPr wrap="square" lIns="0" tIns="0" rIns="0" bIns="0" rtlCol="0" anchor="ctr"/>
           <a:lstStyle/>
           <a:p>
-            <a:pPr indent="0" marL="0">
+            <a:pPr marL="0" indent="0">
               <a:buNone/>
             </a:pPr>
             <a:r>
@@ -7657,6 +9455,13 @@
           </a:solidFill>
           <a:ln/>
         </p:spPr>
+        <p:txBody>
+          <a:bodyPr/>
+          <a:lstStyle/>
+          <a:p>
+            <a:endParaRPr lang="en-DE"/>
+          </a:p>
+        </p:txBody>
       </p:sp>
       <p:sp>
         <p:nvSpPr>
@@ -7679,7 +9484,7 @@
           <a:bodyPr wrap="square" rtlCol="0" anchor="t"/>
           <a:lstStyle/>
           <a:p>
-            <a:pPr indent="0" marL="0">
+            <a:pPr marL="0" indent="0">
               <a:buNone/>
             </a:pPr>
             <a:r>
@@ -7696,7 +9501,7 @@
             <a:endParaRPr lang="en-US" sz="1100" dirty="0"/>
           </a:p>
           <a:p>
-            <a:pPr indent="0" marL="0">
+            <a:pPr marL="0" indent="0">
               <a:buNone/>
             </a:pPr>
             <a:r>
@@ -7713,7 +9518,7 @@
             <a:endParaRPr lang="en-US" sz="1100" dirty="0"/>
           </a:p>
           <a:p>
-            <a:pPr indent="0" marL="0">
+            <a:pPr marL="0" indent="0">
               <a:buNone/>
             </a:pPr>
             <a:r>
@@ -7730,13 +9535,13 @@
             <a:endParaRPr lang="en-US" sz="1100" dirty="0"/>
           </a:p>
           <a:p>
-            <a:pPr indent="0" marL="0">
+            <a:pPr marL="0" indent="0">
               <a:buNone/>
             </a:pPr>
             <a:endParaRPr lang="en-US" sz="1100" dirty="0"/>
           </a:p>
           <a:p>
-            <a:pPr indent="0" marL="0">
+            <a:pPr marL="0" indent="0">
               <a:buNone/>
             </a:pPr>
             <a:r>
@@ -7753,7 +9558,7 @@
             <a:endParaRPr lang="en-US" sz="1100" dirty="0"/>
           </a:p>
           <a:p>
-            <a:pPr indent="0" marL="0">
+            <a:pPr marL="0" indent="0">
               <a:buNone/>
             </a:pPr>
             <a:r>
@@ -7770,7 +9575,7 @@
             <a:endParaRPr lang="en-US" sz="1100" dirty="0"/>
           </a:p>
           <a:p>
-            <a:pPr indent="0" marL="0">
+            <a:pPr marL="0" indent="0">
               <a:buNone/>
             </a:pPr>
             <a:r>
@@ -7787,13 +9592,13 @@
             <a:endParaRPr lang="en-US" sz="1100" dirty="0"/>
           </a:p>
           <a:p>
-            <a:pPr indent="0" marL="0">
+            <a:pPr marL="0" indent="0">
               <a:buNone/>
             </a:pPr>
             <a:endParaRPr lang="en-US" sz="1100" dirty="0"/>
           </a:p>
           <a:p>
-            <a:pPr indent="0" marL="0">
+            <a:pPr marL="0" indent="0">
               <a:buNone/>
             </a:pPr>
             <a:r>
@@ -7810,7 +9615,7 @@
             <a:endParaRPr lang="en-US" sz="1100" dirty="0"/>
           </a:p>
           <a:p>
-            <a:pPr indent="0" marL="0">
+            <a:pPr marL="0" indent="0">
               <a:buNone/>
             </a:pPr>
             <a:r>
@@ -7830,14 +9635,14 @@
       </p:sp>
       <p:pic>
         <p:nvPicPr>
-          <p:cNvPr id="7" name="Image 0" descr="preencoded.png">    </p:cNvPr>
+          <p:cNvPr id="7" name="Image 0" descr="preencoded.png"/>
           <p:cNvPicPr>
             <a:picLocks noChangeAspect="1"/>
           </p:cNvPicPr>
           <p:nvPr/>
         </p:nvPicPr>
         <p:blipFill>
-          <a:blip r:embed="rId1"/>
+          <a:blip r:embed="rId3"/>
           <a:stretch>
             <a:fillRect/>
           </a:stretch>
@@ -7873,7 +9678,7 @@
           <a:bodyPr wrap="square" lIns="0" tIns="0" rIns="0" bIns="0" rtlCol="0" anchor="ctr"/>
           <a:lstStyle/>
           <a:p>
-            <a:pPr indent="0" marL="0">
+            <a:pPr marL="0" indent="0">
               <a:buNone/>
             </a:pPr>
             <a:r>
@@ -7912,6 +9717,13 @@
           </a:solidFill>
           <a:ln/>
         </p:spPr>
+        <p:txBody>
+          <a:bodyPr/>
+          <a:lstStyle/>
+          <a:p>
+            <a:endParaRPr lang="en-DE"/>
+          </a:p>
+        </p:txBody>
       </p:sp>
       <p:sp>
         <p:nvSpPr>
@@ -7934,7 +9746,7 @@
           <a:bodyPr wrap="square" rtlCol="0" anchor="t"/>
           <a:lstStyle/>
           <a:p>
-            <a:pPr indent="0" marL="0">
+            <a:pPr marL="0" indent="0">
               <a:buNone/>
             </a:pPr>
             <a:r>
@@ -7951,7 +9763,7 @@
             <a:endParaRPr lang="en-US" sz="1100" dirty="0"/>
           </a:p>
           <a:p>
-            <a:pPr indent="0" marL="0">
+            <a:pPr marL="0" indent="0">
               <a:buNone/>
             </a:pPr>
             <a:r>
@@ -7968,7 +9780,7 @@
             <a:endParaRPr lang="en-US" sz="1100" dirty="0"/>
           </a:p>
           <a:p>
-            <a:pPr indent="0" marL="0">
+            <a:pPr marL="0" indent="0">
               <a:buNone/>
             </a:pPr>
             <a:r>
@@ -7985,7 +9797,7 @@
             <a:endParaRPr lang="en-US" sz="1100" dirty="0"/>
           </a:p>
           <a:p>
-            <a:pPr indent="0" marL="0">
+            <a:pPr marL="0" indent="0">
               <a:buNone/>
             </a:pPr>
             <a:r>
@@ -8002,13 +9814,13 @@
             <a:endParaRPr lang="en-US" sz="1100" dirty="0"/>
           </a:p>
           <a:p>
-            <a:pPr indent="0" marL="0">
+            <a:pPr marL="0" indent="0">
               <a:buNone/>
             </a:pPr>
             <a:endParaRPr lang="en-US" sz="1100" dirty="0"/>
           </a:p>
           <a:p>
-            <a:pPr indent="0" marL="0">
+            <a:pPr marL="0" indent="0">
               <a:buNone/>
             </a:pPr>
             <a:r>
@@ -8025,7 +9837,7 @@
             <a:endParaRPr lang="en-US" sz="1100" dirty="0"/>
           </a:p>
           <a:p>
-            <a:pPr indent="0" marL="0">
+            <a:pPr marL="0" indent="0">
               <a:buNone/>
             </a:pPr>
             <a:r>
@@ -8064,6 +9876,13 @@
           </a:solidFill>
           <a:ln/>
         </p:spPr>
+        <p:txBody>
+          <a:bodyPr/>
+          <a:lstStyle/>
+          <a:p>
+            <a:endParaRPr lang="en-DE"/>
+          </a:p>
+        </p:txBody>
       </p:sp>
       <p:sp>
         <p:nvSpPr>
@@ -8086,7 +9905,7 @@
           <a:bodyPr wrap="square" lIns="0" tIns="0" rIns="0" bIns="0" rtlCol="0" anchor="ctr"/>
           <a:lstStyle/>
           <a:p>
-            <a:pPr algn="ctr" indent="0" marL="0">
+            <a:pPr marL="0" indent="0" algn="ctr">
               <a:buNone/>
             </a:pPr>
             <a:r>
@@ -8120,6 +9939,7 @@
         <a:solidFill>
           <a:srgbClr val="0F1729"/>
         </a:solidFill>
+        <a:effectLst/>
       </p:bgPr>
     </p:bg>
     <p:spTree>
@@ -8157,7 +9977,7 @@
           <a:bodyPr wrap="square" lIns="0" tIns="0" rIns="0" bIns="0" rtlCol="0" anchor="ctr"/>
           <a:lstStyle/>
           <a:p>
-            <a:pPr indent="0" marL="0">
+            <a:pPr marL="0" indent="0">
               <a:buNone/>
             </a:pPr>
             <a:r>
@@ -8177,14 +9997,14 @@
       </p:sp>
       <p:pic>
         <p:nvPicPr>
-          <p:cNvPr id="3" name="Image 0" descr="preencoded.png">    </p:cNvPr>
+          <p:cNvPr id="3" name="Image 0" descr="preencoded.png"/>
           <p:cNvPicPr>
             <a:picLocks noChangeAspect="1"/>
           </p:cNvPicPr>
           <p:nvPr/>
         </p:nvPicPr>
         <p:blipFill>
-          <a:blip r:embed="rId1"/>
+          <a:blip r:embed="rId3"/>
           <a:stretch>
             <a:fillRect/>
           </a:stretch>
@@ -8220,6 +10040,13 @@
           </a:solidFill>
           <a:ln/>
         </p:spPr>
+        <p:txBody>
+          <a:bodyPr/>
+          <a:lstStyle/>
+          <a:p>
+            <a:endParaRPr lang="en-DE"/>
+          </a:p>
+        </p:txBody>
       </p:sp>
       <p:sp>
         <p:nvSpPr>
@@ -8242,7 +10069,7 @@
           <a:bodyPr wrap="square" rtlCol="0" anchor="t"/>
           <a:lstStyle/>
           <a:p>
-            <a:pPr indent="0" marL="0">
+            <a:pPr marL="0" indent="0">
               <a:buNone/>
             </a:pPr>
             <a:r>
@@ -8259,13 +10086,13 @@
             <a:endParaRPr lang="en-US" sz="1200" dirty="0"/>
           </a:p>
           <a:p>
-            <a:pPr indent="0" marL="0">
+            <a:pPr marL="0" indent="0">
               <a:buNone/>
             </a:pPr>
             <a:endParaRPr lang="en-US" sz="1200" dirty="0"/>
           </a:p>
           <a:p>
-            <a:pPr indent="0" marL="0">
+            <a:pPr marL="0" indent="0">
               <a:buNone/>
             </a:pPr>
             <a:r>
@@ -8282,7 +10109,7 @@
             <a:endParaRPr lang="en-US" sz="1200" dirty="0"/>
           </a:p>
           <a:p>
-            <a:pPr indent="0" marL="0">
+            <a:pPr marL="0" indent="0">
               <a:buNone/>
             </a:pPr>
             <a:r>
@@ -8299,13 +10126,13 @@
             <a:endParaRPr lang="en-US" sz="1200" dirty="0"/>
           </a:p>
           <a:p>
-            <a:pPr indent="0" marL="0">
+            <a:pPr marL="0" indent="0">
               <a:buNone/>
             </a:pPr>
             <a:endParaRPr lang="en-US" sz="1200" dirty="0"/>
           </a:p>
           <a:p>
-            <a:pPr indent="0" marL="0">
+            <a:pPr marL="0" indent="0">
               <a:buNone/>
             </a:pPr>
             <a:r>
@@ -8322,7 +10149,7 @@
             <a:endParaRPr lang="en-US" sz="1200" dirty="0"/>
           </a:p>
           <a:p>
-            <a:pPr indent="0" marL="0">
+            <a:pPr marL="0" indent="0">
               <a:buNone/>
             </a:pPr>
             <a:r>
@@ -8339,7 +10166,7 @@
             <a:endParaRPr lang="en-US" sz="1200" dirty="0"/>
           </a:p>
           <a:p>
-            <a:pPr indent="0" marL="0">
+            <a:pPr marL="0" indent="0">
               <a:buNone/>
             </a:pPr>
             <a:r>
@@ -8356,7 +10183,7 @@
             <a:endParaRPr lang="en-US" sz="1200" dirty="0"/>
           </a:p>
           <a:p>
-            <a:pPr indent="0" marL="0">
+            <a:pPr marL="0" indent="0">
               <a:buNone/>
             </a:pPr>
             <a:r>
@@ -8373,7 +10200,7 @@
             <a:endParaRPr lang="en-US" sz="1200" dirty="0"/>
           </a:p>
           <a:p>
-            <a:pPr indent="0" marL="0">
+            <a:pPr marL="0" indent="0">
               <a:buNone/>
             </a:pPr>
             <a:r>
@@ -8390,7 +10217,7 @@
             <a:endParaRPr lang="en-US" sz="1200" dirty="0"/>
           </a:p>
           <a:p>
-            <a:pPr indent="0" marL="0">
+            <a:pPr marL="0" indent="0">
               <a:buNone/>
             </a:pPr>
             <a:r>
@@ -8407,7 +10234,7 @@
             <a:endParaRPr lang="en-US" sz="1200" dirty="0"/>
           </a:p>
           <a:p>
-            <a:pPr indent="0" marL="0">
+            <a:pPr marL="0" indent="0">
               <a:buNone/>
             </a:pPr>
             <a:r>
@@ -8424,13 +10251,13 @@
             <a:endParaRPr lang="en-US" sz="1200" dirty="0"/>
           </a:p>
           <a:p>
-            <a:pPr indent="0" marL="0">
+            <a:pPr marL="0" indent="0">
               <a:buNone/>
             </a:pPr>
             <a:endParaRPr lang="en-US" sz="1200" dirty="0"/>
           </a:p>
           <a:p>
-            <a:pPr indent="0" marL="0">
+            <a:pPr marL="0" indent="0">
               <a:buNone/>
             </a:pPr>
             <a:r>
@@ -8447,7 +10274,7 @@
             <a:endParaRPr lang="en-US" sz="1200" dirty="0"/>
           </a:p>
           <a:p>
-            <a:pPr indent="0" marL="0">
+            <a:pPr marL="0" indent="0">
               <a:buNone/>
             </a:pPr>
             <a:r>
@@ -8481,6 +10308,7 @@
         <a:solidFill>
           <a:srgbClr val="0F1729"/>
         </a:solidFill>
+        <a:effectLst/>
       </p:bgPr>
     </p:bg>
     <p:spTree>
@@ -8518,7 +10346,7 @@
           <a:bodyPr wrap="square" lIns="0" tIns="0" rIns="0" bIns="0" rtlCol="0" anchor="ctr"/>
           <a:lstStyle/>
           <a:p>
-            <a:pPr indent="0" marL="0">
+            <a:pPr marL="0" indent="0">
               <a:buNone/>
             </a:pPr>
             <a:r>
@@ -8538,14 +10366,14 @@
       </p:sp>
       <p:pic>
         <p:nvPicPr>
-          <p:cNvPr id="3" name="Image 0" descr="preencoded.png">    </p:cNvPr>
+          <p:cNvPr id="3" name="Image 0" descr="preencoded.png"/>
           <p:cNvPicPr>
             <a:picLocks noChangeAspect="1"/>
           </p:cNvPicPr>
           <p:nvPr/>
         </p:nvPicPr>
         <p:blipFill>
-          <a:blip r:embed="rId1"/>
+          <a:blip r:embed="rId3"/>
           <a:stretch>
             <a:fillRect/>
           </a:stretch>
@@ -8581,6 +10409,13 @@
           </a:solidFill>
           <a:ln/>
         </p:spPr>
+        <p:txBody>
+          <a:bodyPr/>
+          <a:lstStyle/>
+          <a:p>
+            <a:endParaRPr lang="en-DE"/>
+          </a:p>
+        </p:txBody>
       </p:sp>
       <p:sp>
         <p:nvSpPr>
@@ -8603,7 +10438,7 @@
           <a:bodyPr wrap="square" rtlCol="0" anchor="t"/>
           <a:lstStyle/>
           <a:p>
-            <a:pPr indent="0" marL="0">
+            <a:pPr marL="0" indent="0">
               <a:buNone/>
             </a:pPr>
             <a:r>
@@ -8620,7 +10455,7 @@
             <a:endParaRPr lang="en-US" sz="1200" dirty="0"/>
           </a:p>
           <a:p>
-            <a:pPr indent="0" marL="0">
+            <a:pPr marL="0" indent="0">
               <a:buNone/>
             </a:pPr>
             <a:r>
@@ -8637,13 +10472,13 @@
             <a:endParaRPr lang="en-US" sz="1200" dirty="0"/>
           </a:p>
           <a:p>
-            <a:pPr indent="0" marL="0">
+            <a:pPr marL="0" indent="0">
               <a:buNone/>
             </a:pPr>
             <a:endParaRPr lang="en-US" sz="1200" dirty="0"/>
           </a:p>
           <a:p>
-            <a:pPr indent="0" marL="0">
+            <a:pPr marL="0" indent="0">
               <a:buNone/>
             </a:pPr>
             <a:r>
@@ -8660,7 +10495,7 @@
             <a:endParaRPr lang="en-US" sz="1200" dirty="0"/>
           </a:p>
           <a:p>
-            <a:pPr indent="0" marL="0">
+            <a:pPr marL="0" indent="0">
               <a:buNone/>
             </a:pPr>
             <a:r>
@@ -8677,7 +10512,7 @@
             <a:endParaRPr lang="en-US" sz="1200" dirty="0"/>
           </a:p>
           <a:p>
-            <a:pPr indent="0" marL="0">
+            <a:pPr marL="0" indent="0">
               <a:buNone/>
             </a:pPr>
             <a:r>
@@ -8694,7 +10529,7 @@
             <a:endParaRPr lang="en-US" sz="1200" dirty="0"/>
           </a:p>
           <a:p>
-            <a:pPr indent="0" marL="0">
+            <a:pPr marL="0" indent="0">
               <a:buNone/>
             </a:pPr>
             <a:r>
@@ -8711,7 +10546,7 @@
             <a:endParaRPr lang="en-US" sz="1200" dirty="0"/>
           </a:p>
           <a:p>
-            <a:pPr indent="0" marL="0">
+            <a:pPr marL="0" indent="0">
               <a:buNone/>
             </a:pPr>
             <a:r>
@@ -8728,7 +10563,7 @@
             <a:endParaRPr lang="en-US" sz="1200" dirty="0"/>
           </a:p>
           <a:p>
-            <a:pPr indent="0" marL="0">
+            <a:pPr marL="0" indent="0">
               <a:buNone/>
             </a:pPr>
             <a:r>
@@ -8745,13 +10580,13 @@
             <a:endParaRPr lang="en-US" sz="1200" dirty="0"/>
           </a:p>
           <a:p>
-            <a:pPr indent="0" marL="0">
+            <a:pPr marL="0" indent="0">
               <a:buNone/>
             </a:pPr>
             <a:endParaRPr lang="en-US" sz="1200" dirty="0"/>
           </a:p>
           <a:p>
-            <a:pPr indent="0" marL="0">
+            <a:pPr marL="0" indent="0">
               <a:buNone/>
             </a:pPr>
             <a:r>
@@ -8768,7 +10603,7 @@
             <a:endParaRPr lang="en-US" sz="1200" dirty="0"/>
           </a:p>
           <a:p>
-            <a:pPr indent="0" marL="0">
+            <a:pPr marL="0" indent="0">
               <a:buNone/>
             </a:pPr>
             <a:r>
@@ -8785,7 +10620,7 @@
             <a:endParaRPr lang="en-US" sz="1200" dirty="0"/>
           </a:p>
           <a:p>
-            <a:pPr indent="0" marL="0">
+            <a:pPr marL="0" indent="0">
               <a:buNone/>
             </a:pPr>
             <a:r>
@@ -8802,7 +10637,7 @@
             <a:endParaRPr lang="en-US" sz="1200" dirty="0"/>
           </a:p>
           <a:p>
-            <a:pPr indent="0" marL="0">
+            <a:pPr marL="0" indent="0">
               <a:buNone/>
             </a:pPr>
             <a:r>
@@ -8819,13 +10654,13 @@
             <a:endParaRPr lang="en-US" sz="1200" dirty="0"/>
           </a:p>
           <a:p>
-            <a:pPr indent="0" marL="0">
+            <a:pPr marL="0" indent="0">
               <a:buNone/>
             </a:pPr>
             <a:endParaRPr lang="en-US" sz="1200" dirty="0"/>
           </a:p>
           <a:p>
-            <a:pPr indent="0" marL="0">
+            <a:pPr marL="0" indent="0">
               <a:buNone/>
             </a:pPr>
             <a:r>
@@ -8842,7 +10677,7 @@
             <a:endParaRPr lang="en-US" sz="1200" dirty="0"/>
           </a:p>
           <a:p>
-            <a:pPr indent="0" marL="0">
+            <a:pPr marL="0" indent="0">
               <a:buNone/>
             </a:pPr>
             <a:r>
@@ -8859,7 +10694,7 @@
             <a:endParaRPr lang="en-US" sz="1200" dirty="0"/>
           </a:p>
           <a:p>
-            <a:pPr indent="0" marL="0">
+            <a:pPr marL="0" indent="0">
               <a:buNone/>
             </a:pPr>
             <a:r>
@@ -8893,6 +10728,7 @@
         <a:solidFill>
           <a:srgbClr val="0F1729"/>
         </a:solidFill>
+        <a:effectLst/>
       </p:bgPr>
     </p:bg>
     <p:spTree>
@@ -8930,7 +10766,7 @@
           <a:bodyPr wrap="square" lIns="0" tIns="0" rIns="0" bIns="0" rtlCol="0" anchor="ctr"/>
           <a:lstStyle/>
           <a:p>
-            <a:pPr indent="0" marL="0">
+            <a:pPr marL="0" indent="0">
               <a:buNone/>
             </a:pPr>
             <a:r>
@@ -8969,7 +10805,7 @@
           <a:bodyPr wrap="square" lIns="0" tIns="0" rIns="0" bIns="0" rtlCol="0" anchor="ctr"/>
           <a:lstStyle/>
           <a:p>
-            <a:pPr indent="0" marL="0">
+            <a:pPr marL="0" indent="0">
               <a:buNone/>
             </a:pPr>
             <a:r>
@@ -9008,6 +10844,13 @@
           </a:solidFill>
           <a:ln/>
         </p:spPr>
+        <p:txBody>
+          <a:bodyPr/>
+          <a:lstStyle/>
+          <a:p>
+            <a:endParaRPr lang="en-DE"/>
+          </a:p>
+        </p:txBody>
       </p:sp>
       <p:sp>
         <p:nvSpPr>
@@ -9030,7 +10873,7 @@
           <a:bodyPr wrap="square" lIns="0" tIns="0" rIns="0" bIns="0" rtlCol="0" anchor="ctr"/>
           <a:lstStyle/>
           <a:p>
-            <a:pPr algn="ctr" indent="0" marL="0">
+            <a:pPr marL="0" indent="0" algn="ctr">
               <a:buNone/>
             </a:pPr>
             <a:r>
@@ -9069,7 +10912,7 @@
           <a:bodyPr wrap="square" lIns="0" tIns="0" rIns="0" bIns="0" rtlCol="0" anchor="ctr"/>
           <a:lstStyle/>
           <a:p>
-            <a:pPr indent="0" marL="0">
+            <a:pPr marL="0" indent="0">
               <a:buNone/>
             </a:pPr>
             <a:r>
@@ -9109,6 +10952,13 @@
             <a:prstDash val="solid"/>
           </a:ln>
         </p:spPr>
+        <p:txBody>
+          <a:bodyPr/>
+          <a:lstStyle/>
+          <a:p>
+            <a:endParaRPr lang="en-DE"/>
+          </a:p>
+        </p:txBody>
       </p:sp>
       <p:sp>
         <p:nvSpPr>
@@ -9131,6 +10981,13 @@
           </a:solidFill>
           <a:ln/>
         </p:spPr>
+        <p:txBody>
+          <a:bodyPr/>
+          <a:lstStyle/>
+          <a:p>
+            <a:endParaRPr lang="en-DE"/>
+          </a:p>
+        </p:txBody>
       </p:sp>
       <p:sp>
         <p:nvSpPr>
@@ -9153,7 +11010,7 @@
           <a:bodyPr wrap="square" lIns="0" tIns="0" rIns="0" bIns="0" rtlCol="0" anchor="ctr"/>
           <a:lstStyle/>
           <a:p>
-            <a:pPr algn="ctr" indent="0" marL="0">
+            <a:pPr marL="0" indent="0" algn="ctr">
               <a:buNone/>
             </a:pPr>
             <a:r>
@@ -9192,7 +11049,7 @@
           <a:bodyPr wrap="square" lIns="0" tIns="0" rIns="0" bIns="0" rtlCol="0" anchor="ctr"/>
           <a:lstStyle/>
           <a:p>
-            <a:pPr indent="0" marL="0">
+            <a:pPr marL="0" indent="0">
               <a:buNone/>
             </a:pPr>
             <a:r>
@@ -9232,6 +11089,13 @@
             <a:prstDash val="solid"/>
           </a:ln>
         </p:spPr>
+        <p:txBody>
+          <a:bodyPr/>
+          <a:lstStyle/>
+          <a:p>
+            <a:endParaRPr lang="en-DE"/>
+          </a:p>
+        </p:txBody>
       </p:sp>
       <p:sp>
         <p:nvSpPr>
@@ -9254,6 +11118,13 @@
           </a:solidFill>
           <a:ln/>
         </p:spPr>
+        <p:txBody>
+          <a:bodyPr/>
+          <a:lstStyle/>
+          <a:p>
+            <a:endParaRPr lang="en-DE"/>
+          </a:p>
+        </p:txBody>
       </p:sp>
       <p:sp>
         <p:nvSpPr>
@@ -9276,7 +11147,7 @@
           <a:bodyPr wrap="square" lIns="0" tIns="0" rIns="0" bIns="0" rtlCol="0" anchor="ctr"/>
           <a:lstStyle/>
           <a:p>
-            <a:pPr algn="ctr" indent="0" marL="0">
+            <a:pPr marL="0" indent="0" algn="ctr">
               <a:buNone/>
             </a:pPr>
             <a:r>
@@ -9315,7 +11186,7 @@
           <a:bodyPr wrap="square" lIns="0" tIns="0" rIns="0" bIns="0" rtlCol="0" anchor="ctr"/>
           <a:lstStyle/>
           <a:p>
-            <a:pPr indent="0" marL="0">
+            <a:pPr marL="0" indent="0">
               <a:buNone/>
             </a:pPr>
             <a:r>
@@ -9355,6 +11226,13 @@
             <a:prstDash val="solid"/>
           </a:ln>
         </p:spPr>
+        <p:txBody>
+          <a:bodyPr/>
+          <a:lstStyle/>
+          <a:p>
+            <a:endParaRPr lang="en-DE"/>
+          </a:p>
+        </p:txBody>
       </p:sp>
       <p:sp>
         <p:nvSpPr>
@@ -9377,6 +11255,13 @@
           </a:solidFill>
           <a:ln/>
         </p:spPr>
+        <p:txBody>
+          <a:bodyPr/>
+          <a:lstStyle/>
+          <a:p>
+            <a:endParaRPr lang="en-DE"/>
+          </a:p>
+        </p:txBody>
       </p:sp>
       <p:sp>
         <p:nvSpPr>
@@ -9399,7 +11284,7 @@
           <a:bodyPr wrap="square" lIns="0" tIns="0" rIns="0" bIns="0" rtlCol="0" anchor="ctr"/>
           <a:lstStyle/>
           <a:p>
-            <a:pPr algn="ctr" indent="0" marL="0">
+            <a:pPr marL="0" indent="0" algn="ctr">
               <a:buNone/>
             </a:pPr>
             <a:r>
@@ -9438,7 +11323,7 @@
           <a:bodyPr wrap="square" lIns="0" tIns="0" rIns="0" bIns="0" rtlCol="0" anchor="ctr"/>
           <a:lstStyle/>
           <a:p>
-            <a:pPr indent="0" marL="0">
+            <a:pPr marL="0" indent="0">
               <a:buNone/>
             </a:pPr>
             <a:r>
@@ -9472,6 +11357,7 @@
         <a:solidFill>
           <a:srgbClr val="0F1729"/>
         </a:solidFill>
+        <a:effectLst/>
       </p:bgPr>
     </p:bg>
     <p:spTree>
@@ -9509,7 +11395,7 @@
           <a:bodyPr wrap="square" lIns="0" tIns="0" rIns="0" bIns="0" rtlCol="0" anchor="ctr"/>
           <a:lstStyle/>
           <a:p>
-            <a:pPr indent="0" marL="0">
+            <a:pPr marL="0" indent="0">
               <a:buNone/>
             </a:pPr>
             <a:r>
@@ -9548,7 +11434,7 @@
           <a:bodyPr wrap="square" lIns="0" tIns="0" rIns="0" bIns="0" rtlCol="0" anchor="ctr"/>
           <a:lstStyle/>
           <a:p>
-            <a:pPr indent="0" marL="0">
+            <a:pPr marL="0" indent="0">
               <a:buNone/>
             </a:pPr>
             <a:r>
@@ -9585,6 +11471,13 @@
           </a:solidFill>
           <a:ln/>
         </p:spPr>
+        <p:txBody>
+          <a:bodyPr/>
+          <a:lstStyle/>
+          <a:p>
+            <a:endParaRPr lang="en-DE"/>
+          </a:p>
+        </p:txBody>
       </p:sp>
       <p:sp>
         <p:nvSpPr>
@@ -9607,7 +11500,7 @@
           <a:bodyPr wrap="square" lIns="0" tIns="0" rIns="0" bIns="0" rtlCol="0" anchor="ctr"/>
           <a:lstStyle/>
           <a:p>
-            <a:pPr algn="ctr" indent="0" marL="0">
+            <a:pPr marL="0" indent="0" algn="ctr">
               <a:buNone/>
             </a:pPr>
             <a:r>
@@ -9633,7 +11526,7 @@
         </p:nvSpPr>
         <p:spPr>
           <a:xfrm>
-            <a:off x="1371600" y="1645920"/>
+            <a:off x="1371600" y="1783080"/>
             <a:ext cx="2286000" cy="365760"/>
           </a:xfrm>
           <a:prstGeom prst="rect">
@@ -9646,7 +11539,7 @@
           <a:bodyPr wrap="square" lIns="0" tIns="0" rIns="0" bIns="0" rtlCol="0" anchor="ctr"/>
           <a:lstStyle/>
           <a:p>
-            <a:pPr indent="0" marL="0">
+            <a:pPr marL="0" indent="0">
               <a:buNone/>
             </a:pPr>
             <a:r>
@@ -9685,6 +11578,13 @@
           </a:solidFill>
           <a:ln/>
         </p:spPr>
+        <p:txBody>
+          <a:bodyPr/>
+          <a:lstStyle/>
+          <a:p>
+            <a:endParaRPr lang="en-DE"/>
+          </a:p>
+        </p:txBody>
       </p:sp>
       <p:sp>
         <p:nvSpPr>
@@ -9707,7 +11607,7 @@
           <a:bodyPr wrap="square" lIns="0" tIns="0" rIns="0" bIns="0" rtlCol="0" anchor="ctr"/>
           <a:lstStyle/>
           <a:p>
-            <a:pPr indent="0" marL="0">
+            <a:pPr marL="0" indent="0">
               <a:buNone/>
             </a:pPr>
             <a:r>
@@ -9744,6 +11644,13 @@
           </a:solidFill>
           <a:ln/>
         </p:spPr>
+        <p:txBody>
+          <a:bodyPr/>
+          <a:lstStyle/>
+          <a:p>
+            <a:endParaRPr lang="en-DE"/>
+          </a:p>
+        </p:txBody>
       </p:sp>
       <p:sp>
         <p:nvSpPr>
@@ -9766,7 +11673,7 @@
           <a:bodyPr wrap="square" lIns="0" tIns="0" rIns="0" bIns="0" rtlCol="0" anchor="ctr"/>
           <a:lstStyle/>
           <a:p>
-            <a:pPr algn="ctr" indent="0" marL="0">
+            <a:pPr marL="0" indent="0" algn="ctr">
               <a:buNone/>
             </a:pPr>
             <a:r>
@@ -9792,7 +11699,7 @@
         </p:nvSpPr>
         <p:spPr>
           <a:xfrm>
-            <a:off x="1371600" y="2743200"/>
+            <a:off x="1371600" y="2880360"/>
             <a:ext cx="2286000" cy="365760"/>
           </a:xfrm>
           <a:prstGeom prst="rect">
@@ -9805,7 +11712,7 @@
           <a:bodyPr wrap="square" lIns="0" tIns="0" rIns="0" bIns="0" rtlCol="0" anchor="ctr"/>
           <a:lstStyle/>
           <a:p>
-            <a:pPr indent="0" marL="0">
+            <a:pPr marL="0" indent="0">
               <a:buNone/>
             </a:pPr>
             <a:r>
@@ -9844,6 +11751,13 @@
           </a:solidFill>
           <a:ln/>
         </p:spPr>
+        <p:txBody>
+          <a:bodyPr/>
+          <a:lstStyle/>
+          <a:p>
+            <a:endParaRPr lang="en-DE"/>
+          </a:p>
+        </p:txBody>
       </p:sp>
       <p:sp>
         <p:nvSpPr>
@@ -9866,7 +11780,7 @@
           <a:bodyPr wrap="square" lIns="0" tIns="0" rIns="0" bIns="0" rtlCol="0" anchor="ctr"/>
           <a:lstStyle/>
           <a:p>
-            <a:pPr indent="0" marL="0">
+            <a:pPr marL="0" indent="0">
               <a:buNone/>
             </a:pPr>
             <a:r>
@@ -9883,7 +11797,7 @@
             <a:endParaRPr lang="en-US" sz="1200" dirty="0"/>
           </a:p>
           <a:p>
-            <a:pPr indent="0" marL="0">
+            <a:pPr marL="0" indent="0">
               <a:buNone/>
             </a:pPr>
             <a:r>
@@ -9900,7 +11814,7 @@
             <a:endParaRPr lang="en-US" sz="1200" dirty="0"/>
           </a:p>
           <a:p>
-            <a:pPr indent="0" marL="0">
+            <a:pPr marL="0" indent="0">
               <a:buNone/>
             </a:pPr>
             <a:r>
@@ -9937,6 +11851,13 @@
           </a:solidFill>
           <a:ln/>
         </p:spPr>
+        <p:txBody>
+          <a:bodyPr/>
+          <a:lstStyle/>
+          <a:p>
+            <a:endParaRPr lang="en-DE"/>
+          </a:p>
+        </p:txBody>
       </p:sp>
       <p:sp>
         <p:nvSpPr>
@@ -9959,7 +11880,7 @@
           <a:bodyPr wrap="square" lIns="0" tIns="0" rIns="0" bIns="0" rtlCol="0" anchor="ctr"/>
           <a:lstStyle/>
           <a:p>
-            <a:pPr algn="ctr" indent="0" marL="0">
+            <a:pPr marL="0" indent="0" algn="ctr">
               <a:buNone/>
             </a:pPr>
             <a:r>
@@ -9985,7 +11906,7 @@
         </p:nvSpPr>
         <p:spPr>
           <a:xfrm>
-            <a:off x="1371600" y="3840480"/>
+            <a:off x="1371600" y="3977640"/>
             <a:ext cx="2286000" cy="365760"/>
           </a:xfrm>
           <a:prstGeom prst="rect">
@@ -9998,7 +11919,7 @@
           <a:bodyPr wrap="square" lIns="0" tIns="0" rIns="0" bIns="0" rtlCol="0" anchor="ctr"/>
           <a:lstStyle/>
           <a:p>
-            <a:pPr indent="0" marL="0">
+            <a:pPr marL="0" indent="0">
               <a:buNone/>
             </a:pPr>
             <a:r>
@@ -10037,6 +11958,13 @@
           </a:solidFill>
           <a:ln/>
         </p:spPr>
+        <p:txBody>
+          <a:bodyPr/>
+          <a:lstStyle/>
+          <a:p>
+            <a:endParaRPr lang="en-DE"/>
+          </a:p>
+        </p:txBody>
       </p:sp>
       <p:sp>
         <p:nvSpPr>
@@ -10059,7 +11987,7 @@
           <a:bodyPr wrap="square" lIns="0" tIns="0" rIns="0" bIns="0" rtlCol="0" anchor="ctr"/>
           <a:lstStyle/>
           <a:p>
-            <a:pPr indent="0" marL="0">
+            <a:pPr marL="0" indent="0">
               <a:buNone/>
             </a:pPr>
             <a:r>
@@ -10378,4 +12306,319 @@
     </a:ext>
   </a:extLst>
 </a:theme>
+</file>
+
+<file path=ppt/theme/theme2.xml><?xml version="1.0" encoding="utf-8"?>
+<a:theme xmlns:a="http://schemas.openxmlformats.org/drawingml/2006/main" name="Office Theme">
+  <a:themeElements>
+    <a:clrScheme name="Office">
+      <a:dk1>
+        <a:sysClr val="windowText" lastClr="000000"/>
+      </a:dk1>
+      <a:lt1>
+        <a:sysClr val="window" lastClr="FFFFFF"/>
+      </a:lt1>
+      <a:dk2>
+        <a:srgbClr val="0E2841"/>
+      </a:dk2>
+      <a:lt2>
+        <a:srgbClr val="E8E8E8"/>
+      </a:lt2>
+      <a:accent1>
+        <a:srgbClr val="156082"/>
+      </a:accent1>
+      <a:accent2>
+        <a:srgbClr val="E97132"/>
+      </a:accent2>
+      <a:accent3>
+        <a:srgbClr val="196B24"/>
+      </a:accent3>
+      <a:accent4>
+        <a:srgbClr val="0F9ED5"/>
+      </a:accent4>
+      <a:accent5>
+        <a:srgbClr val="A02B93"/>
+      </a:accent5>
+      <a:accent6>
+        <a:srgbClr val="4EA72E"/>
+      </a:accent6>
+      <a:hlink>
+        <a:srgbClr val="467886"/>
+      </a:hlink>
+      <a:folHlink>
+        <a:srgbClr val="96607D"/>
+      </a:folHlink>
+    </a:clrScheme>
+    <a:fontScheme name="Office">
+      <a:majorFont>
+        <a:latin typeface="Aptos Display" panose="02110004020202020204"/>
+        <a:ea typeface=""/>
+        <a:cs typeface=""/>
+        <a:font script="Jpan" typeface="游ゴシック Light"/>
+        <a:font script="Hang" typeface="맑은 고딕"/>
+        <a:font script="Hans" typeface="等线 Light"/>
+        <a:font script="Hant" typeface="新細明體"/>
+        <a:font script="Arab" typeface="Times New Roman"/>
+        <a:font script="Hebr" typeface="Times New Roman"/>
+        <a:font script="Thai" typeface="Angsana New"/>
+        <a:font script="Ethi" typeface="Nyala"/>
+        <a:font script="Beng" typeface="Vrinda"/>
+        <a:font script="Gujr" typeface="Shruti"/>
+        <a:font script="Khmr" typeface="MoolBoran"/>
+        <a:font script="Knda" typeface="Tunga"/>
+        <a:font script="Guru" typeface="Raavi"/>
+        <a:font script="Cans" typeface="Euphemia"/>
+        <a:font script="Cher" typeface="Plantagenet Cherokee"/>
+        <a:font script="Yiii" typeface="Microsoft Yi Baiti"/>
+        <a:font script="Tibt" typeface="Microsoft Himalaya"/>
+        <a:font script="Thaa" typeface="MV Boli"/>
+        <a:font script="Deva" typeface="Mangal"/>
+        <a:font script="Telu" typeface="Gautami"/>
+        <a:font script="Taml" typeface="Latha"/>
+        <a:font script="Syrc" typeface="Estrangelo Edessa"/>
+        <a:font script="Orya" typeface="Kalinga"/>
+        <a:font script="Mlym" typeface="Kartika"/>
+        <a:font script="Laoo" typeface="DokChampa"/>
+        <a:font script="Sinh" typeface="Iskoola Pota"/>
+        <a:font script="Mong" typeface="Mongolian Baiti"/>
+        <a:font script="Viet" typeface="Times New Roman"/>
+        <a:font script="Uigh" typeface="Microsoft Uighur"/>
+        <a:font script="Geor" typeface="Sylfaen"/>
+        <a:font script="Armn" typeface="Arial"/>
+        <a:font script="Bugi" typeface="Leelawadee UI"/>
+        <a:font script="Bopo" typeface="Microsoft JhengHei"/>
+        <a:font script="Java" typeface="Javanese Text"/>
+        <a:font script="Lisu" typeface="Segoe UI"/>
+        <a:font script="Mymr" typeface="Myanmar Text"/>
+        <a:font script="Nkoo" typeface="Ebrima"/>
+        <a:font script="Olck" typeface="Nirmala UI"/>
+        <a:font script="Osma" typeface="Ebrima"/>
+        <a:font script="Phag" typeface="Phagspa"/>
+        <a:font script="Syrn" typeface="Estrangelo Edessa"/>
+        <a:font script="Syrj" typeface="Estrangelo Edessa"/>
+        <a:font script="Syre" typeface="Estrangelo Edessa"/>
+        <a:font script="Sora" typeface="Nirmala UI"/>
+        <a:font script="Tale" typeface="Microsoft Tai Le"/>
+        <a:font script="Talu" typeface="Microsoft New Tai Lue"/>
+        <a:font script="Tfng" typeface="Ebrima"/>
+      </a:majorFont>
+      <a:minorFont>
+        <a:latin typeface="Aptos" panose="02110004020202020204"/>
+        <a:ea typeface=""/>
+        <a:cs typeface=""/>
+        <a:font script="Jpan" typeface="游ゴシック"/>
+        <a:font script="Hang" typeface="맑은 고딕"/>
+        <a:font script="Hans" typeface="等线"/>
+        <a:font script="Hant" typeface="新細明體"/>
+        <a:font script="Arab" typeface="Arial"/>
+        <a:font script="Hebr" typeface="Arial"/>
+        <a:font script="Thai" typeface="Cordia New"/>
+        <a:font script="Ethi" typeface="Nyala"/>
+        <a:font script="Beng" typeface="Vrinda"/>
+        <a:font script="Gujr" typeface="Shruti"/>
+        <a:font script="Khmr" typeface="DaunPenh"/>
+        <a:font script="Knda" typeface="Tunga"/>
+        <a:font script="Guru" typeface="Raavi"/>
+        <a:font script="Cans" typeface="Euphemia"/>
+        <a:font script="Cher" typeface="Plantagenet Cherokee"/>
+        <a:font script="Yiii" typeface="Microsoft Yi Baiti"/>
+        <a:font script="Tibt" typeface="Microsoft Himalaya"/>
+        <a:font script="Thaa" typeface="MV Boli"/>
+        <a:font script="Deva" typeface="Mangal"/>
+        <a:font script="Telu" typeface="Gautami"/>
+        <a:font script="Taml" typeface="Latha"/>
+        <a:font script="Syrc" typeface="Estrangelo Edessa"/>
+        <a:font script="Orya" typeface="Kalinga"/>
+        <a:font script="Mlym" typeface="Kartika"/>
+        <a:font script="Laoo" typeface="DokChampa"/>
+        <a:font script="Sinh" typeface="Iskoola Pota"/>
+        <a:font script="Mong" typeface="Mongolian Baiti"/>
+        <a:font script="Viet" typeface="Arial"/>
+        <a:font script="Uigh" typeface="Microsoft Uighur"/>
+        <a:font script="Geor" typeface="Sylfaen"/>
+        <a:font script="Armn" typeface="Arial"/>
+        <a:font script="Bugi" typeface="Leelawadee UI"/>
+        <a:font script="Bopo" typeface="Microsoft JhengHei"/>
+        <a:font script="Java" typeface="Javanese Text"/>
+        <a:font script="Lisu" typeface="Segoe UI"/>
+        <a:font script="Mymr" typeface="Myanmar Text"/>
+        <a:font script="Nkoo" typeface="Ebrima"/>
+        <a:font script="Olck" typeface="Nirmala UI"/>
+        <a:font script="Osma" typeface="Ebrima"/>
+        <a:font script="Phag" typeface="Phagspa"/>
+        <a:font script="Syrn" typeface="Estrangelo Edessa"/>
+        <a:font script="Syrj" typeface="Estrangelo Edessa"/>
+        <a:font script="Syre" typeface="Estrangelo Edessa"/>
+        <a:font script="Sora" typeface="Nirmala UI"/>
+        <a:font script="Tale" typeface="Microsoft Tai Le"/>
+        <a:font script="Talu" typeface="Microsoft New Tai Lue"/>
+        <a:font script="Tfng" typeface="Ebrima"/>
+      </a:minorFont>
+    </a:fontScheme>
+    <a:fmtScheme name="Office">
+      <a:fillStyleLst>
+        <a:solidFill>
+          <a:schemeClr val="phClr"/>
+        </a:solidFill>
+        <a:gradFill rotWithShape="1">
+          <a:gsLst>
+            <a:gs pos="0">
+              <a:schemeClr val="phClr">
+                <a:lumMod val="110000"/>
+                <a:satMod val="105000"/>
+                <a:tint val="67000"/>
+              </a:schemeClr>
+            </a:gs>
+            <a:gs pos="50000">
+              <a:schemeClr val="phClr">
+                <a:lumMod val="105000"/>
+                <a:satMod val="103000"/>
+                <a:tint val="73000"/>
+              </a:schemeClr>
+            </a:gs>
+            <a:gs pos="100000">
+              <a:schemeClr val="phClr">
+                <a:lumMod val="105000"/>
+                <a:satMod val="109000"/>
+                <a:tint val="81000"/>
+              </a:schemeClr>
+            </a:gs>
+          </a:gsLst>
+          <a:lin ang="5400000" scaled="0"/>
+        </a:gradFill>
+        <a:gradFill rotWithShape="1">
+          <a:gsLst>
+            <a:gs pos="0">
+              <a:schemeClr val="phClr">
+                <a:satMod val="103000"/>
+                <a:lumMod val="102000"/>
+                <a:tint val="94000"/>
+              </a:schemeClr>
+            </a:gs>
+            <a:gs pos="50000">
+              <a:schemeClr val="phClr">
+                <a:satMod val="110000"/>
+                <a:lumMod val="100000"/>
+                <a:shade val="100000"/>
+              </a:schemeClr>
+            </a:gs>
+            <a:gs pos="100000">
+              <a:schemeClr val="phClr">
+                <a:lumMod val="99000"/>
+                <a:satMod val="120000"/>
+                <a:shade val="78000"/>
+              </a:schemeClr>
+            </a:gs>
+          </a:gsLst>
+          <a:lin ang="5400000" scaled="0"/>
+        </a:gradFill>
+      </a:fillStyleLst>
+      <a:lnStyleLst>
+        <a:ln w="12700" cap="flat" cmpd="sng" algn="ctr">
+          <a:solidFill>
+            <a:schemeClr val="phClr"/>
+          </a:solidFill>
+          <a:prstDash val="solid"/>
+          <a:miter lim="800000"/>
+        </a:ln>
+        <a:ln w="19050" cap="flat" cmpd="sng" algn="ctr">
+          <a:solidFill>
+            <a:schemeClr val="phClr"/>
+          </a:solidFill>
+          <a:prstDash val="solid"/>
+          <a:miter lim="800000"/>
+        </a:ln>
+        <a:ln w="25400" cap="flat" cmpd="sng" algn="ctr">
+          <a:solidFill>
+            <a:schemeClr val="phClr"/>
+          </a:solidFill>
+          <a:prstDash val="solid"/>
+          <a:miter lim="800000"/>
+        </a:ln>
+      </a:lnStyleLst>
+      <a:effectStyleLst>
+        <a:effectStyle>
+          <a:effectLst/>
+        </a:effectStyle>
+        <a:effectStyle>
+          <a:effectLst/>
+        </a:effectStyle>
+        <a:effectStyle>
+          <a:effectLst>
+            <a:outerShdw blurRad="57150" dist="19050" dir="5400000" algn="ctr" rotWithShape="0">
+              <a:srgbClr val="000000">
+                <a:alpha val="63000"/>
+              </a:srgbClr>
+            </a:outerShdw>
+          </a:effectLst>
+        </a:effectStyle>
+      </a:effectStyleLst>
+      <a:bgFillStyleLst>
+        <a:solidFill>
+          <a:schemeClr val="phClr"/>
+        </a:solidFill>
+        <a:solidFill>
+          <a:schemeClr val="phClr">
+            <a:tint val="95000"/>
+            <a:satMod val="170000"/>
+          </a:schemeClr>
+        </a:solidFill>
+        <a:gradFill rotWithShape="1">
+          <a:gsLst>
+            <a:gs pos="0">
+              <a:schemeClr val="phClr">
+                <a:tint val="93000"/>
+                <a:satMod val="150000"/>
+                <a:shade val="98000"/>
+                <a:lumMod val="102000"/>
+              </a:schemeClr>
+            </a:gs>
+            <a:gs pos="50000">
+              <a:schemeClr val="phClr">
+                <a:tint val="98000"/>
+                <a:satMod val="130000"/>
+                <a:shade val="90000"/>
+                <a:lumMod val="103000"/>
+              </a:schemeClr>
+            </a:gs>
+            <a:gs pos="100000">
+              <a:schemeClr val="phClr">
+                <a:shade val="63000"/>
+                <a:satMod val="120000"/>
+              </a:schemeClr>
+            </a:gs>
+          </a:gsLst>
+          <a:lin ang="5400000" scaled="0"/>
+        </a:gradFill>
+      </a:bgFillStyleLst>
+    </a:fmtScheme>
+  </a:themeElements>
+  <a:objectDefaults>
+    <a:lnDef>
+      <a:spPr/>
+      <a:bodyPr/>
+      <a:lstStyle/>
+      <a:style>
+        <a:lnRef idx="2">
+          <a:schemeClr val="accent1"/>
+        </a:lnRef>
+        <a:fillRef idx="0">
+          <a:schemeClr val="accent1"/>
+        </a:fillRef>
+        <a:effectRef idx="1">
+          <a:schemeClr val="accent1"/>
+        </a:effectRef>
+        <a:fontRef idx="minor">
+          <a:schemeClr val="tx1"/>
+        </a:fontRef>
+      </a:style>
+    </a:lnDef>
+  </a:objectDefaults>
+  <a:extraClrSchemeLst/>
+  <a:extLst>
+    <a:ext uri="{05A4C25C-085E-4340-85A3-A5531E510DB2}">
+      <thm15:themeFamily xmlns:thm15="http://schemas.microsoft.com/office/thememl/2012/main" name="Office Theme" id="{2E142A2C-CD16-42D6-873A-C26D2A0506FA}" vid="{1BDDFF52-6CD6-40A5-AB3C-68EB2F1E4D0A}"/>
+    </a:ext>
+  </a:extLst>
+</a:theme>
 </file>